--- a/Entregas PhD/machine-unlearning.pptx
+++ b/Entregas PhD/machine-unlearning.pptx
@@ -11,6 +11,10 @@
     <p:sldId id="263" r:id="rId5"/>
     <p:sldId id="265" r:id="rId6"/>
     <p:sldId id="267" r:id="rId7"/>
+    <p:sldId id="269" r:id="rId8"/>
+    <p:sldId id="273" r:id="rId9"/>
+    <p:sldId id="271" r:id="rId10"/>
+    <p:sldId id="274" r:id="rId11"/>
   </p:sldIdLst>
   <p:sldSz cx="12192000" cy="6858000"/>
   <p:notesSz cx="6858000" cy="9144000"/>
@@ -3678,6 +3682,83 @@
 </p:sld>
 </file>
 
+<file path=ppt/slides/slide10.xml><?xml version="1.0" encoding="utf-8"?>
+<p:sld xmlns:a="http://schemas.openxmlformats.org/drawingml/2006/main" xmlns:r="http://schemas.openxmlformats.org/officeDocument/2006/relationships" xmlns:p="http://schemas.openxmlformats.org/presentationml/2006/main">
+  <p:cSld>
+    <p:spTree>
+      <p:nvGrpSpPr>
+        <p:cNvPr id="1" name=""/>
+        <p:cNvGrpSpPr/>
+        <p:nvPr/>
+      </p:nvGrpSpPr>
+      <p:grpSpPr>
+        <a:xfrm>
+          <a:off x="0" y="0"/>
+          <a:ext cx="0" cy="0"/>
+          <a:chOff x="0" y="0"/>
+          <a:chExt cx="0" cy="0"/>
+        </a:xfrm>
+      </p:grpSpPr>
+      <p:sp>
+        <p:nvSpPr>
+          <p:cNvPr id="2" name="Título 1">
+            <a:extLst>
+              <a:ext uri="{FF2B5EF4-FFF2-40B4-BE49-F238E27FC236}">
+                <a16:creationId xmlns:a16="http://schemas.microsoft.com/office/drawing/2014/main" id="{B20112FC-735B-DE07-E10D-52F9E62047B0}"/>
+              </a:ext>
+            </a:extLst>
+          </p:cNvPr>
+          <p:cNvSpPr>
+            <a:spLocks noGrp="1"/>
+          </p:cNvSpPr>
+          <p:nvPr>
+            <p:ph type="title"/>
+          </p:nvPr>
+        </p:nvSpPr>
+        <p:spPr>
+          <a:xfrm>
+            <a:off x="4760118" y="2766218"/>
+            <a:ext cx="2671763" cy="1325563"/>
+          </a:xfrm>
+        </p:spPr>
+        <p:txBody>
+          <a:bodyPr>
+            <a:normAutofit fontScale="90000"/>
+          </a:bodyPr>
+          <a:lstStyle/>
+          <a:p>
+            <a:pPr algn="ctr"/>
+            <a:r>
+              <a:rPr lang="pt-PT" b="1" dirty="0"/>
+              <a:t>Obrigado</a:t>
+            </a:r>
+            <a:br>
+              <a:rPr lang="pt-PT" b="1" dirty="0"/>
+            </a:br>
+            <a:br>
+              <a:rPr lang="pt-PT" b="1" dirty="0"/>
+            </a:br>
+            <a:r>
+              <a:rPr lang="pt-PT" sz="3600" dirty="0"/>
+              <a:t>Questões?</a:t>
+            </a:r>
+            <a:endParaRPr lang="pt-PT" dirty="0"/>
+          </a:p>
+        </p:txBody>
+      </p:sp>
+    </p:spTree>
+    <p:extLst>
+      <p:ext uri="{BB962C8B-B14F-4D97-AF65-F5344CB8AC3E}">
+        <p14:creationId xmlns:p14="http://schemas.microsoft.com/office/powerpoint/2010/main" val="1888870987"/>
+      </p:ext>
+    </p:extLst>
+  </p:cSld>
+  <p:clrMapOvr>
+    <a:masterClrMapping/>
+  </p:clrMapOvr>
+</p:sld>
+</file>
+
 <file path=ppt/slides/slide2.xml><?xml version="1.0" encoding="utf-8"?>
 <p:sld xmlns:a="http://schemas.openxmlformats.org/drawingml/2006/main" xmlns:r="http://schemas.openxmlformats.org/officeDocument/2006/relationships" xmlns:p="http://schemas.openxmlformats.org/presentationml/2006/main">
   <p:cSld>
@@ -4743,7 +4824,7 @@
             <a:avLst/>
           </a:prstGeom>
           <a:solidFill>
-            <a:srgbClr val="E97132"/>
+            <a:srgbClr val="B5511A"/>
           </a:solidFill>
           <a:ln w="19050" cap="flat" cmpd="sng" algn="ctr">
             <a:noFill/>
@@ -5400,7 +5481,7 @@
             <a:avLst/>
           </a:prstGeom>
           <a:solidFill>
-            <a:srgbClr val="E97132"/>
+            <a:srgbClr val="B5511A"/>
           </a:solidFill>
           <a:ln w="19050" cap="flat" cmpd="sng" algn="ctr">
             <a:noFill/>
@@ -5655,7 +5736,7 @@
           <a:p>
             <a:pPr algn="l"/>
             <a:r>
-              <a:rPr lang="pt-PT" sz="1400" b="1">
+              <a:rPr lang="pt-PT" sz="1400" b="1" dirty="0">
                 <a:solidFill>
                   <a:srgbClr val="196B24"/>
                 </a:solidFill>
@@ -6181,7 +6262,7 @@
             <a:avLst/>
           </a:prstGeom>
           <a:solidFill>
-            <a:srgbClr val="E97132"/>
+            <a:srgbClr val="B5511A"/>
           </a:solidFill>
           <a:ln w="19050" cap="flat" cmpd="sng" algn="ctr">
             <a:noFill/>
@@ -6991,7 +7072,7 @@
             <a:avLst/>
           </a:prstGeom>
           <a:solidFill>
-            <a:srgbClr val="E97132"/>
+            <a:srgbClr val="B5511A"/>
           </a:solidFill>
           <a:ln w="19050" cap="flat" cmpd="sng" algn="ctr">
             <a:noFill/>
@@ -7644,6 +7725,3067 @@
     <p:extLst>
       <p:ext uri="{BB962C8B-B14F-4D97-AF65-F5344CB8AC3E}">
         <p14:creationId xmlns:p14="http://schemas.microsoft.com/office/powerpoint/2010/main" val="2479857546"/>
+      </p:ext>
+    </p:extLst>
+  </p:cSld>
+  <p:clrMapOvr>
+    <a:masterClrMapping/>
+  </p:clrMapOvr>
+</p:sld>
+</file>
+
+<file path=ppt/slides/slide7.xml><?xml version="1.0" encoding="utf-8"?>
+<p:sld xmlns:a="http://schemas.openxmlformats.org/drawingml/2006/main" xmlns:r="http://schemas.openxmlformats.org/officeDocument/2006/relationships" xmlns:p="http://schemas.openxmlformats.org/presentationml/2006/main">
+  <p:cSld>
+    <p:spTree>
+      <p:nvGrpSpPr>
+        <p:cNvPr id="1" name=""/>
+        <p:cNvGrpSpPr/>
+        <p:nvPr/>
+      </p:nvGrpSpPr>
+      <p:grpSpPr>
+        <a:xfrm>
+          <a:off x="0" y="0"/>
+          <a:ext cx="0" cy="0"/>
+          <a:chOff x="0" y="0"/>
+          <a:chExt cx="0" cy="0"/>
+        </a:xfrm>
+      </p:grpSpPr>
+      <p:sp>
+        <p:nvSpPr>
+          <p:cNvPr id="2" name="Título 1">
+            <a:extLst>
+              <a:ext uri="{FF2B5EF4-FFF2-40B4-BE49-F238E27FC236}">
+                <a16:creationId xmlns:a16="http://schemas.microsoft.com/office/drawing/2014/main" id="{41511A50-9B6A-8B3B-CFC3-4B8D702C174E}"/>
+              </a:ext>
+            </a:extLst>
+          </p:cNvPr>
+          <p:cNvSpPr>
+            <a:spLocks noGrp="1"/>
+          </p:cNvSpPr>
+          <p:nvPr>
+            <p:ph type="title"/>
+          </p:nvPr>
+        </p:nvSpPr>
+        <p:spPr/>
+        <p:txBody>
+          <a:bodyPr/>
+          <a:lstStyle/>
+          <a:p>
+            <a:pPr algn="l">
+              <a:buNone/>
+            </a:pPr>
+            <a:r>
+              <a:rPr lang="pt-PT" sz="3200" b="1" dirty="0">
+                <a:solidFill>
+                  <a:srgbClr val="1A2332"/>
+                </a:solidFill>
+                <a:latin typeface="Georgia"/>
+              </a:rPr>
+              <a:t>Lacuna Central</a:t>
+            </a:r>
+          </a:p>
+        </p:txBody>
+      </p:sp>
+      <p:sp>
+        <p:nvSpPr>
+          <p:cNvPr id="4" name="CaixaDeTexto 3">
+            <a:extLst>
+              <a:ext uri="{FF2B5EF4-FFF2-40B4-BE49-F238E27FC236}">
+                <a16:creationId xmlns:a16="http://schemas.microsoft.com/office/drawing/2014/main" id="{73F63C08-D268-7F42-93DA-9815B2560F61}"/>
+              </a:ext>
+            </a:extLst>
+          </p:cNvPr>
+          <p:cNvSpPr txBox="1"/>
+          <p:nvPr/>
+        </p:nvSpPr>
+        <p:spPr>
+          <a:xfrm>
+            <a:off x="711200" y="1981200"/>
+            <a:ext cx="10769600" cy="711200"/>
+          </a:xfrm>
+          <a:prstGeom prst="rect">
+            <a:avLst/>
+          </a:prstGeom>
+          <a:noFill/>
+        </p:spPr>
+        <p:txBody>
+          <a:bodyPr rot="0" spcFirstLastPara="0" vertOverflow="overflow" horzOverflow="overflow" vert="horz" wrap="square" lIns="91440" tIns="45720" rIns="91440" bIns="45720" numCol="1" spcCol="0" rtlCol="0" fromWordArt="0" anchor="t" anchorCtr="0" forceAA="0" compatLnSpc="1">
+            <a:prstTxWarp prst="textNoShape">
+              <a:avLst/>
+            </a:prstTxWarp>
+            <a:spAutoFit/>
+          </a:bodyPr>
+          <a:lstStyle>
+            <a:defPPr>
+              <a:defRPr lang="pt-PT"/>
+            </a:defPPr>
+            <a:lvl1pPr>
+              <a:defRPr sz="1900" b="1">
+                <a:solidFill>
+                  <a:srgbClr val="1A2332"/>
+                </a:solidFill>
+                <a:latin typeface="Georgia"/>
+              </a:defRPr>
+            </a:lvl1pPr>
+          </a:lstStyle>
+          <a:p>
+            <a:r>
+              <a:rPr lang="pt-PT" dirty="0"/>
+              <a:t>Nenhum método atual satisfaz o envelope completo de restrições</a:t>
+            </a:r>
+          </a:p>
+        </p:txBody>
+      </p:sp>
+      <p:sp>
+        <p:nvSpPr>
+          <p:cNvPr id="5" name="Retângulo Arredondado 4">
+            <a:extLst>
+              <a:ext uri="{FF2B5EF4-FFF2-40B4-BE49-F238E27FC236}">
+                <a16:creationId xmlns:a16="http://schemas.microsoft.com/office/drawing/2014/main" id="{813B3A02-336F-E04A-A3F6-FA32BCFFA336}"/>
+              </a:ext>
+            </a:extLst>
+          </p:cNvPr>
+          <p:cNvSpPr/>
+          <p:nvPr/>
+        </p:nvSpPr>
+        <p:spPr>
+          <a:xfrm>
+            <a:off x="457200" y="3098800"/>
+            <a:ext cx="3556000" cy="2159000"/>
+          </a:xfrm>
+          <a:prstGeom prst="roundRect">
+            <a:avLst/>
+          </a:prstGeom>
+          <a:solidFill>
+            <a:srgbClr val="F0EBE3"/>
+          </a:solidFill>
+          <a:ln w="19050" cap="flat" cmpd="sng" algn="ctr">
+            <a:noFill/>
+            <a:prstDash val="solid"/>
+            <a:miter lim="800000"/>
+          </a:ln>
+        </p:spPr>
+        <p:style>
+          <a:lnRef idx="2">
+            <a:schemeClr val="accent1">
+              <a:shade val="15000"/>
+            </a:schemeClr>
+          </a:lnRef>
+          <a:fillRef idx="1">
+            <a:schemeClr val="accent1"/>
+          </a:fillRef>
+          <a:effectRef idx="0">
+            <a:schemeClr val="accent1"/>
+          </a:effectRef>
+          <a:fontRef idx="minor">
+            <a:schemeClr val="lt1"/>
+          </a:fontRef>
+        </p:style>
+        <p:txBody>
+          <a:bodyPr vertOverflow="clip" horzOverflow="clip" rtlCol="0" anchor="t"/>
+          <a:lstStyle/>
+          <a:p>
+            <a:pPr algn="l"/>
+            <a:endParaRPr lang="pt-PT"/>
+          </a:p>
+        </p:txBody>
+      </p:sp>
+      <p:sp>
+        <p:nvSpPr>
+          <p:cNvPr id="6" name="Retângulo 5">
+            <a:extLst>
+              <a:ext uri="{FF2B5EF4-FFF2-40B4-BE49-F238E27FC236}">
+                <a16:creationId xmlns:a16="http://schemas.microsoft.com/office/drawing/2014/main" id="{285AEF21-182B-744C-8AA0-4B2137A9F7B7}"/>
+              </a:ext>
+            </a:extLst>
+          </p:cNvPr>
+          <p:cNvSpPr/>
+          <p:nvPr/>
+        </p:nvSpPr>
+        <p:spPr>
+          <a:xfrm>
+            <a:off x="457200" y="3098800"/>
+            <a:ext cx="3556000" cy="50800"/>
+          </a:xfrm>
+          <a:prstGeom prst="rect">
+            <a:avLst/>
+          </a:prstGeom>
+          <a:solidFill>
+            <a:srgbClr val="156082"/>
+          </a:solidFill>
+          <a:ln w="19050" cap="flat" cmpd="sng" algn="ctr">
+            <a:noFill/>
+            <a:prstDash val="solid"/>
+            <a:miter lim="800000"/>
+          </a:ln>
+        </p:spPr>
+        <p:style>
+          <a:lnRef idx="2">
+            <a:schemeClr val="accent1">
+              <a:shade val="15000"/>
+            </a:schemeClr>
+          </a:lnRef>
+          <a:fillRef idx="1">
+            <a:schemeClr val="accent1"/>
+          </a:fillRef>
+          <a:effectRef idx="0">
+            <a:schemeClr val="accent1"/>
+          </a:effectRef>
+          <a:fontRef idx="minor">
+            <a:schemeClr val="lt1"/>
+          </a:fontRef>
+        </p:style>
+        <p:txBody>
+          <a:bodyPr vertOverflow="clip" horzOverflow="clip" rtlCol="0" anchor="t"/>
+          <a:lstStyle/>
+          <a:p>
+            <a:pPr algn="l"/>
+            <a:endParaRPr lang="pt-PT"/>
+          </a:p>
+        </p:txBody>
+      </p:sp>
+      <p:sp>
+        <p:nvSpPr>
+          <p:cNvPr id="7" name="CaixaDeTexto 6">
+            <a:extLst>
+              <a:ext uri="{FF2B5EF4-FFF2-40B4-BE49-F238E27FC236}">
+                <a16:creationId xmlns:a16="http://schemas.microsoft.com/office/drawing/2014/main" id="{34ED811E-44F9-BB4B-BEC5-3F8A63DE9E54}"/>
+              </a:ext>
+            </a:extLst>
+          </p:cNvPr>
+          <p:cNvSpPr txBox="1"/>
+          <p:nvPr/>
+        </p:nvSpPr>
+        <p:spPr>
+          <a:xfrm>
+            <a:off x="609600" y="3276600"/>
+            <a:ext cx="3251200" cy="279400"/>
+          </a:xfrm>
+          <a:prstGeom prst="rect">
+            <a:avLst/>
+          </a:prstGeom>
+          <a:noFill/>
+        </p:spPr>
+        <p:txBody>
+          <a:bodyPr vertOverflow="overflow" vert="horz" wrap="square" rtlCol="0" anchor="t">
+            <a:spAutoFit/>
+          </a:bodyPr>
+          <a:lstStyle/>
+          <a:p>
+            <a:pPr algn="l"/>
+            <a:r>
+              <a:rPr lang="pt-PT" sz="1300" b="1">
+                <a:solidFill>
+                  <a:srgbClr val="156082"/>
+                </a:solidFill>
+                <a:latin typeface="Calibri"/>
+                <a:cs typeface="Calibri"/>
+              </a:rPr>
+              <a:t>CLOUD-SIDE</a:t>
+            </a:r>
+          </a:p>
+        </p:txBody>
+      </p:sp>
+      <p:sp>
+        <p:nvSpPr>
+          <p:cNvPr id="8" name="CaixaDeTexto 7">
+            <a:extLst>
+              <a:ext uri="{FF2B5EF4-FFF2-40B4-BE49-F238E27FC236}">
+                <a16:creationId xmlns:a16="http://schemas.microsoft.com/office/drawing/2014/main" id="{CDB8897C-17F3-1C4D-8A08-F81EE2D24CD6}"/>
+              </a:ext>
+            </a:extLst>
+          </p:cNvPr>
+          <p:cNvSpPr txBox="1"/>
+          <p:nvPr/>
+        </p:nvSpPr>
+        <p:spPr>
+          <a:xfrm>
+            <a:off x="609600" y="3632200"/>
+            <a:ext cx="3251200" cy="609600"/>
+          </a:xfrm>
+          <a:prstGeom prst="rect">
+            <a:avLst/>
+          </a:prstGeom>
+          <a:noFill/>
+        </p:spPr>
+        <p:txBody>
+          <a:bodyPr vertOverflow="overflow" vert="horz" wrap="square" rtlCol="0" anchor="t">
+            <a:spAutoFit/>
+          </a:bodyPr>
+          <a:lstStyle/>
+          <a:p>
+            <a:pPr algn="l"/>
+            <a:r>
+              <a:rPr lang="pt-PT" sz="1300" dirty="0">
+                <a:solidFill>
+                  <a:srgbClr val="2E3B4E"/>
+                </a:solidFill>
+                <a:latin typeface="Calibri"/>
+                <a:cs typeface="Calibri"/>
+              </a:rPr>
+              <a:t>Aborda: SISA, correções de gradiente, destilação</a:t>
+            </a:r>
+          </a:p>
+        </p:txBody>
+      </p:sp>
+      <p:sp>
+        <p:nvSpPr>
+          <p:cNvPr id="9" name="CaixaDeTexto 8">
+            <a:extLst>
+              <a:ext uri="{FF2B5EF4-FFF2-40B4-BE49-F238E27FC236}">
+                <a16:creationId xmlns:a16="http://schemas.microsoft.com/office/drawing/2014/main" id="{0DFB537D-B5CD-FC46-A115-09FC7C22B619}"/>
+              </a:ext>
+            </a:extLst>
+          </p:cNvPr>
+          <p:cNvSpPr txBox="1"/>
+          <p:nvPr/>
+        </p:nvSpPr>
+        <p:spPr>
+          <a:xfrm>
+            <a:off x="609600" y="4368800"/>
+            <a:ext cx="3251200" cy="711200"/>
+          </a:xfrm>
+          <a:prstGeom prst="rect">
+            <a:avLst/>
+          </a:prstGeom>
+          <a:noFill/>
+        </p:spPr>
+        <p:txBody>
+          <a:bodyPr vertOverflow="overflow" vert="horz" wrap="square" rtlCol="0" anchor="t">
+            <a:spAutoFit/>
+          </a:bodyPr>
+          <a:lstStyle/>
+          <a:p>
+            <a:pPr algn="l"/>
+            <a:r>
+              <a:rPr lang="pt-PT" sz="1300">
+                <a:solidFill>
+                  <a:srgbClr val="8B1A1A"/>
+                </a:solidFill>
+                <a:latin typeface="Calibri"/>
+                <a:cs typeface="Calibri"/>
+              </a:rPr>
+              <a:t>Ignora: Limites de recursos edge, federação, replicação multi-camada</a:t>
+            </a:r>
+          </a:p>
+        </p:txBody>
+      </p:sp>
+      <p:sp>
+        <p:nvSpPr>
+          <p:cNvPr id="10" name="Retângulo Arredondado 9">
+            <a:extLst>
+              <a:ext uri="{FF2B5EF4-FFF2-40B4-BE49-F238E27FC236}">
+                <a16:creationId xmlns:a16="http://schemas.microsoft.com/office/drawing/2014/main" id="{D35E0D7F-D128-F042-BDB4-AF746B64CA1E}"/>
+              </a:ext>
+            </a:extLst>
+          </p:cNvPr>
+          <p:cNvSpPr/>
+          <p:nvPr/>
+        </p:nvSpPr>
+        <p:spPr>
+          <a:xfrm>
+            <a:off x="4318000" y="3098800"/>
+            <a:ext cx="3556000" cy="2159000"/>
+          </a:xfrm>
+          <a:prstGeom prst="roundRect">
+            <a:avLst/>
+          </a:prstGeom>
+          <a:solidFill>
+            <a:srgbClr val="F0EBE3"/>
+          </a:solidFill>
+          <a:ln w="19050" cap="flat" cmpd="sng" algn="ctr">
+            <a:noFill/>
+            <a:prstDash val="solid"/>
+            <a:miter lim="800000"/>
+          </a:ln>
+        </p:spPr>
+        <p:style>
+          <a:lnRef idx="2">
+            <a:schemeClr val="accent1">
+              <a:shade val="15000"/>
+            </a:schemeClr>
+          </a:lnRef>
+          <a:fillRef idx="1">
+            <a:schemeClr val="accent1"/>
+          </a:fillRef>
+          <a:effectRef idx="0">
+            <a:schemeClr val="accent1"/>
+          </a:effectRef>
+          <a:fontRef idx="minor">
+            <a:schemeClr val="lt1"/>
+          </a:fontRef>
+        </p:style>
+        <p:txBody>
+          <a:bodyPr vertOverflow="clip" horzOverflow="clip" rtlCol="0" anchor="t"/>
+          <a:lstStyle/>
+          <a:p>
+            <a:pPr algn="l"/>
+            <a:endParaRPr lang="pt-PT"/>
+          </a:p>
+        </p:txBody>
+      </p:sp>
+      <p:sp>
+        <p:nvSpPr>
+          <p:cNvPr id="11" name="Retângulo 10">
+            <a:extLst>
+              <a:ext uri="{FF2B5EF4-FFF2-40B4-BE49-F238E27FC236}">
+                <a16:creationId xmlns:a16="http://schemas.microsoft.com/office/drawing/2014/main" id="{81CC8072-9731-7A40-B478-17497E9FD07E}"/>
+              </a:ext>
+            </a:extLst>
+          </p:cNvPr>
+          <p:cNvSpPr/>
+          <p:nvPr/>
+        </p:nvSpPr>
+        <p:spPr>
+          <a:xfrm>
+            <a:off x="4318000" y="3098800"/>
+            <a:ext cx="3556000" cy="50800"/>
+          </a:xfrm>
+          <a:prstGeom prst="rect">
+            <a:avLst/>
+          </a:prstGeom>
+          <a:solidFill>
+            <a:srgbClr val="B5511A"/>
+          </a:solidFill>
+          <a:ln w="19050" cap="flat" cmpd="sng" algn="ctr">
+            <a:noFill/>
+            <a:prstDash val="solid"/>
+            <a:miter lim="800000"/>
+          </a:ln>
+        </p:spPr>
+        <p:style>
+          <a:lnRef idx="2">
+            <a:schemeClr val="accent1">
+              <a:shade val="15000"/>
+            </a:schemeClr>
+          </a:lnRef>
+          <a:fillRef idx="1">
+            <a:schemeClr val="accent1"/>
+          </a:fillRef>
+          <a:effectRef idx="0">
+            <a:schemeClr val="accent1"/>
+          </a:effectRef>
+          <a:fontRef idx="minor">
+            <a:schemeClr val="lt1"/>
+          </a:fontRef>
+        </p:style>
+        <p:txBody>
+          <a:bodyPr vertOverflow="clip" horzOverflow="clip" rtlCol="0" anchor="t"/>
+          <a:lstStyle/>
+          <a:p>
+            <a:pPr algn="l"/>
+            <a:endParaRPr lang="pt-PT"/>
+          </a:p>
+        </p:txBody>
+      </p:sp>
+      <p:sp>
+        <p:nvSpPr>
+          <p:cNvPr id="12" name="CaixaDeTexto 11">
+            <a:extLst>
+              <a:ext uri="{FF2B5EF4-FFF2-40B4-BE49-F238E27FC236}">
+                <a16:creationId xmlns:a16="http://schemas.microsoft.com/office/drawing/2014/main" id="{C6DBE496-3740-FB48-8B07-B288BA369590}"/>
+              </a:ext>
+            </a:extLst>
+          </p:cNvPr>
+          <p:cNvSpPr txBox="1"/>
+          <p:nvPr/>
+        </p:nvSpPr>
+        <p:spPr>
+          <a:xfrm>
+            <a:off x="4470400" y="3276600"/>
+            <a:ext cx="3251200" cy="279400"/>
+          </a:xfrm>
+          <a:prstGeom prst="rect">
+            <a:avLst/>
+          </a:prstGeom>
+          <a:noFill/>
+        </p:spPr>
+        <p:txBody>
+          <a:bodyPr vertOverflow="overflow" vert="horz" wrap="square" rtlCol="0" anchor="t">
+            <a:spAutoFit/>
+          </a:bodyPr>
+          <a:lstStyle/>
+          <a:p>
+            <a:pPr algn="l"/>
+            <a:r>
+              <a:rPr lang="pt-PT" sz="1300" b="1">
+                <a:solidFill>
+                  <a:srgbClr val="E97132"/>
+                </a:solidFill>
+                <a:latin typeface="Calibri"/>
+                <a:cs typeface="Calibri"/>
+              </a:rPr>
+              <a:t>EDGE-SIDE</a:t>
+            </a:r>
+          </a:p>
+        </p:txBody>
+      </p:sp>
+      <p:sp>
+        <p:nvSpPr>
+          <p:cNvPr id="13" name="CaixaDeTexto 12">
+            <a:extLst>
+              <a:ext uri="{FF2B5EF4-FFF2-40B4-BE49-F238E27FC236}">
+                <a16:creationId xmlns:a16="http://schemas.microsoft.com/office/drawing/2014/main" id="{88AA3A50-3542-6740-8E62-D628AD9B3E78}"/>
+              </a:ext>
+            </a:extLst>
+          </p:cNvPr>
+          <p:cNvSpPr txBox="1"/>
+          <p:nvPr/>
+        </p:nvSpPr>
+        <p:spPr>
+          <a:xfrm>
+            <a:off x="4470400" y="3632200"/>
+            <a:ext cx="3251200" cy="609600"/>
+          </a:xfrm>
+          <a:prstGeom prst="rect">
+            <a:avLst/>
+          </a:prstGeom>
+          <a:noFill/>
+        </p:spPr>
+        <p:txBody>
+          <a:bodyPr vertOverflow="overflow" vert="horz" wrap="square" rtlCol="0" anchor="t">
+            <a:spAutoFit/>
+          </a:bodyPr>
+          <a:lstStyle/>
+          <a:p>
+            <a:pPr algn="l"/>
+            <a:r>
+              <a:rPr lang="pt-PT" sz="1300">
+                <a:solidFill>
+                  <a:srgbClr val="2E3B4E"/>
+                </a:solidFill>
+                <a:latin typeface="Calibri"/>
+                <a:cs typeface="Calibri"/>
+              </a:rPr>
+              <a:t>Aborda: Gradient ascent, pruning, fine-tuning local</a:t>
+            </a:r>
+          </a:p>
+        </p:txBody>
+      </p:sp>
+      <p:sp>
+        <p:nvSpPr>
+          <p:cNvPr id="14" name="CaixaDeTexto 13">
+            <a:extLst>
+              <a:ext uri="{FF2B5EF4-FFF2-40B4-BE49-F238E27FC236}">
+                <a16:creationId xmlns:a16="http://schemas.microsoft.com/office/drawing/2014/main" id="{AEC05898-F06C-864A-954B-BDDCDABE7CCC}"/>
+              </a:ext>
+            </a:extLst>
+          </p:cNvPr>
+          <p:cNvSpPr txBox="1"/>
+          <p:nvPr/>
+        </p:nvSpPr>
+        <p:spPr>
+          <a:xfrm>
+            <a:off x="4470400" y="4368800"/>
+            <a:ext cx="3251200" cy="711200"/>
+          </a:xfrm>
+          <a:prstGeom prst="rect">
+            <a:avLst/>
+          </a:prstGeom>
+          <a:noFill/>
+        </p:spPr>
+        <p:txBody>
+          <a:bodyPr vertOverflow="overflow" vert="horz" wrap="square" rtlCol="0" anchor="t">
+            <a:spAutoFit/>
+          </a:bodyPr>
+          <a:lstStyle/>
+          <a:p>
+            <a:pPr algn="l"/>
+            <a:r>
+              <a:rPr lang="pt-PT" sz="1300">
+                <a:solidFill>
+                  <a:srgbClr val="8B1A1A"/>
+                </a:solidFill>
+                <a:latin typeface="Calibri"/>
+                <a:cs typeface="Calibri"/>
+              </a:rPr>
+              <a:t>Ignora: Multi-tenancy, coordenação entre camadas, modelos partilhados</a:t>
+            </a:r>
+          </a:p>
+        </p:txBody>
+      </p:sp>
+      <p:sp>
+        <p:nvSpPr>
+          <p:cNvPr id="15" name="Retângulo Arredondado 14">
+            <a:extLst>
+              <a:ext uri="{FF2B5EF4-FFF2-40B4-BE49-F238E27FC236}">
+                <a16:creationId xmlns:a16="http://schemas.microsoft.com/office/drawing/2014/main" id="{1DA7E1C0-BB64-A040-A6AE-A8371F92BA2A}"/>
+              </a:ext>
+            </a:extLst>
+          </p:cNvPr>
+          <p:cNvSpPr/>
+          <p:nvPr/>
+        </p:nvSpPr>
+        <p:spPr>
+          <a:xfrm>
+            <a:off x="8178800" y="3098800"/>
+            <a:ext cx="3556000" cy="2159000"/>
+          </a:xfrm>
+          <a:prstGeom prst="roundRect">
+            <a:avLst/>
+          </a:prstGeom>
+          <a:solidFill>
+            <a:srgbClr val="F0EBE3"/>
+          </a:solidFill>
+          <a:ln w="19050" cap="flat" cmpd="sng" algn="ctr">
+            <a:noFill/>
+            <a:prstDash val="solid"/>
+            <a:miter lim="800000"/>
+          </a:ln>
+        </p:spPr>
+        <p:style>
+          <a:lnRef idx="2">
+            <a:schemeClr val="accent1">
+              <a:shade val="15000"/>
+            </a:schemeClr>
+          </a:lnRef>
+          <a:fillRef idx="1">
+            <a:schemeClr val="accent1"/>
+          </a:fillRef>
+          <a:effectRef idx="0">
+            <a:schemeClr val="accent1"/>
+          </a:effectRef>
+          <a:fontRef idx="minor">
+            <a:schemeClr val="lt1"/>
+          </a:fontRef>
+        </p:style>
+        <p:txBody>
+          <a:bodyPr vertOverflow="clip" horzOverflow="clip" rtlCol="0" anchor="t"/>
+          <a:lstStyle/>
+          <a:p>
+            <a:pPr algn="l"/>
+            <a:endParaRPr lang="pt-PT"/>
+          </a:p>
+        </p:txBody>
+      </p:sp>
+      <p:sp>
+        <p:nvSpPr>
+          <p:cNvPr id="16" name="Retângulo 15">
+            <a:extLst>
+              <a:ext uri="{FF2B5EF4-FFF2-40B4-BE49-F238E27FC236}">
+                <a16:creationId xmlns:a16="http://schemas.microsoft.com/office/drawing/2014/main" id="{EC4D5D16-511B-9C49-995F-64F0E0D37797}"/>
+              </a:ext>
+            </a:extLst>
+          </p:cNvPr>
+          <p:cNvSpPr/>
+          <p:nvPr/>
+        </p:nvSpPr>
+        <p:spPr>
+          <a:xfrm>
+            <a:off x="8178800" y="3098800"/>
+            <a:ext cx="3556000" cy="50800"/>
+          </a:xfrm>
+          <a:prstGeom prst="rect">
+            <a:avLst/>
+          </a:prstGeom>
+          <a:solidFill>
+            <a:srgbClr val="196B24"/>
+          </a:solidFill>
+          <a:ln w="19050" cap="flat" cmpd="sng" algn="ctr">
+            <a:noFill/>
+            <a:prstDash val="solid"/>
+            <a:miter lim="800000"/>
+          </a:ln>
+        </p:spPr>
+        <p:style>
+          <a:lnRef idx="2">
+            <a:schemeClr val="accent1">
+              <a:shade val="15000"/>
+            </a:schemeClr>
+          </a:lnRef>
+          <a:fillRef idx="1">
+            <a:schemeClr val="accent1"/>
+          </a:fillRef>
+          <a:effectRef idx="0">
+            <a:schemeClr val="accent1"/>
+          </a:effectRef>
+          <a:fontRef idx="minor">
+            <a:schemeClr val="lt1"/>
+          </a:fontRef>
+        </p:style>
+        <p:txBody>
+          <a:bodyPr vertOverflow="clip" horzOverflow="clip" rtlCol="0" anchor="t"/>
+          <a:lstStyle/>
+          <a:p>
+            <a:pPr algn="l"/>
+            <a:endParaRPr lang="pt-PT"/>
+          </a:p>
+        </p:txBody>
+      </p:sp>
+      <p:sp>
+        <p:nvSpPr>
+          <p:cNvPr id="17" name="CaixaDeTexto 16">
+            <a:extLst>
+              <a:ext uri="{FF2B5EF4-FFF2-40B4-BE49-F238E27FC236}">
+                <a16:creationId xmlns:a16="http://schemas.microsoft.com/office/drawing/2014/main" id="{6A5C0CE0-B3D4-F944-A628-FE8DF1F21C28}"/>
+              </a:ext>
+            </a:extLst>
+          </p:cNvPr>
+          <p:cNvSpPr txBox="1"/>
+          <p:nvPr/>
+        </p:nvSpPr>
+        <p:spPr>
+          <a:xfrm>
+            <a:off x="8331200" y="3276600"/>
+            <a:ext cx="3251200" cy="279400"/>
+          </a:xfrm>
+          <a:prstGeom prst="rect">
+            <a:avLst/>
+          </a:prstGeom>
+          <a:noFill/>
+        </p:spPr>
+        <p:txBody>
+          <a:bodyPr vertOverflow="overflow" vert="horz" wrap="square" rtlCol="0" anchor="t">
+            <a:spAutoFit/>
+          </a:bodyPr>
+          <a:lstStyle/>
+          <a:p>
+            <a:pPr algn="l"/>
+            <a:r>
+              <a:rPr lang="pt-PT" sz="1300" b="1">
+                <a:solidFill>
+                  <a:srgbClr val="196B24"/>
+                </a:solidFill>
+                <a:latin typeface="Calibri"/>
+                <a:cs typeface="Calibri"/>
+              </a:rPr>
+              <a:t>FEDERADO</a:t>
+            </a:r>
+          </a:p>
+        </p:txBody>
+      </p:sp>
+      <p:sp>
+        <p:nvSpPr>
+          <p:cNvPr id="18" name="CaixaDeTexto 17">
+            <a:extLst>
+              <a:ext uri="{FF2B5EF4-FFF2-40B4-BE49-F238E27FC236}">
+                <a16:creationId xmlns:a16="http://schemas.microsoft.com/office/drawing/2014/main" id="{23314D25-9FEF-4449-9E76-45C173BD16E8}"/>
+              </a:ext>
+            </a:extLst>
+          </p:cNvPr>
+          <p:cNvSpPr txBox="1"/>
+          <p:nvPr/>
+        </p:nvSpPr>
+        <p:spPr>
+          <a:xfrm>
+            <a:off x="8331200" y="3632200"/>
+            <a:ext cx="3251200" cy="609600"/>
+          </a:xfrm>
+          <a:prstGeom prst="rect">
+            <a:avLst/>
+          </a:prstGeom>
+          <a:noFill/>
+        </p:spPr>
+        <p:txBody>
+          <a:bodyPr vertOverflow="overflow" vert="horz" wrap="square" rtlCol="0" anchor="t">
+            <a:spAutoFit/>
+          </a:bodyPr>
+          <a:lstStyle/>
+          <a:p>
+            <a:pPr algn="l"/>
+            <a:r>
+              <a:rPr lang="pt-PT" sz="1300">
+                <a:solidFill>
+                  <a:srgbClr val="2E3B4E"/>
+                </a:solidFill>
+                <a:latin typeface="Calibri"/>
+                <a:cs typeface="Calibri"/>
+              </a:rPr>
+              <a:t>Aborda: FedEraser, rollback de gradientes, SISA federado</a:t>
+            </a:r>
+          </a:p>
+        </p:txBody>
+      </p:sp>
+      <p:sp>
+        <p:nvSpPr>
+          <p:cNvPr id="19" name="CaixaDeTexto 18">
+            <a:extLst>
+              <a:ext uri="{FF2B5EF4-FFF2-40B4-BE49-F238E27FC236}">
+                <a16:creationId xmlns:a16="http://schemas.microsoft.com/office/drawing/2014/main" id="{3EB8A28B-530F-4B4C-A326-8660C6E9052C}"/>
+              </a:ext>
+            </a:extLst>
+          </p:cNvPr>
+          <p:cNvSpPr txBox="1"/>
+          <p:nvPr/>
+        </p:nvSpPr>
+        <p:spPr>
+          <a:xfrm>
+            <a:off x="8331200" y="4368800"/>
+            <a:ext cx="3251200" cy="711200"/>
+          </a:xfrm>
+          <a:prstGeom prst="rect">
+            <a:avLst/>
+          </a:prstGeom>
+          <a:noFill/>
+        </p:spPr>
+        <p:txBody>
+          <a:bodyPr vertOverflow="overflow" vert="horz" wrap="square" rtlCol="0" anchor="t">
+            <a:spAutoFit/>
+          </a:bodyPr>
+          <a:lstStyle/>
+          <a:p>
+            <a:pPr algn="l"/>
+            <a:r>
+              <a:rPr lang="pt-PT" sz="1300">
+                <a:solidFill>
+                  <a:srgbClr val="8B1A1A"/>
+                </a:solidFill>
+                <a:latin typeface="Calibri"/>
+                <a:cs typeface="Calibri"/>
+              </a:rPr>
+              <a:t>Ignora: Garantia de erasure enfraquecida, clientes offline, sem certificação</a:t>
+            </a:r>
+          </a:p>
+        </p:txBody>
+      </p:sp>
+      <p:sp>
+        <p:nvSpPr>
+          <p:cNvPr id="20" name="CaixaDeTexto 19">
+            <a:extLst>
+              <a:ext uri="{FF2B5EF4-FFF2-40B4-BE49-F238E27FC236}">
+                <a16:creationId xmlns:a16="http://schemas.microsoft.com/office/drawing/2014/main" id="{35ADD662-1CC8-7045-8564-D8ACBBBE3DA6}"/>
+              </a:ext>
+            </a:extLst>
+          </p:cNvPr>
+          <p:cNvSpPr txBox="1"/>
+          <p:nvPr/>
+        </p:nvSpPr>
+        <p:spPr>
+          <a:xfrm>
+            <a:off x="711200" y="2365921"/>
+            <a:ext cx="5384800" cy="523220"/>
+          </a:xfrm>
+          <a:prstGeom prst="rect">
+            <a:avLst/>
+          </a:prstGeom>
+          <a:noFill/>
+        </p:spPr>
+        <p:txBody>
+          <a:bodyPr rot="0" spcFirstLastPara="0" vertOverflow="overflow" horzOverflow="overflow" vert="horz" wrap="square" lIns="91440" tIns="45720" rIns="91440" bIns="45720" numCol="1" spcCol="0" rtlCol="0" fromWordArt="0" anchor="t" anchorCtr="0" forceAA="0" compatLnSpc="1">
+            <a:prstTxWarp prst="textNoShape">
+              <a:avLst/>
+            </a:prstTxWarp>
+            <a:spAutoFit/>
+          </a:bodyPr>
+          <a:lstStyle>
+            <a:defPPr>
+              <a:defRPr lang="pt-PT"/>
+            </a:defPPr>
+            <a:lvl1pPr>
+              <a:defRPr sz="1400">
+                <a:solidFill>
+                  <a:srgbClr val="1A2332"/>
+                </a:solidFill>
+                <a:latin typeface="Calibri"/>
+                <a:cs typeface="Calibri"/>
+              </a:defRPr>
+            </a:lvl1pPr>
+          </a:lstStyle>
+          <a:p>
+            <a:r>
+              <a:rPr lang="pt-PT" dirty="0"/>
+              <a:t>não existe </a:t>
+            </a:r>
+            <a:r>
+              <a:rPr lang="pt-PT" dirty="0" err="1"/>
+              <a:t>benchmark</a:t>
+            </a:r>
+            <a:r>
+              <a:rPr lang="pt-PT" dirty="0"/>
+              <a:t> standard — cada estudo usa métricas, </a:t>
+            </a:r>
+            <a:r>
+              <a:rPr lang="pt-PT" dirty="0" err="1"/>
+              <a:t>datasets</a:t>
+            </a:r>
+            <a:r>
+              <a:rPr lang="pt-PT" dirty="0"/>
+              <a:t> e modelos de ameaça distintos.</a:t>
+            </a:r>
+          </a:p>
+        </p:txBody>
+      </p:sp>
+    </p:spTree>
+    <p:extLst>
+      <p:ext uri="{BB962C8B-B14F-4D97-AF65-F5344CB8AC3E}">
+        <p14:creationId xmlns:p14="http://schemas.microsoft.com/office/powerpoint/2010/main" val="2608838854"/>
+      </p:ext>
+    </p:extLst>
+  </p:cSld>
+  <p:clrMapOvr>
+    <a:masterClrMapping/>
+  </p:clrMapOvr>
+</p:sld>
+</file>
+
+<file path=ppt/slides/slide8.xml><?xml version="1.0" encoding="utf-8"?>
+<p:sld xmlns:a="http://schemas.openxmlformats.org/drawingml/2006/main" xmlns:r="http://schemas.openxmlformats.org/officeDocument/2006/relationships" xmlns:p="http://schemas.openxmlformats.org/presentationml/2006/main">
+  <p:cSld>
+    <p:spTree>
+      <p:nvGrpSpPr>
+        <p:cNvPr id="1" name=""/>
+        <p:cNvGrpSpPr/>
+        <p:nvPr/>
+      </p:nvGrpSpPr>
+      <p:grpSpPr>
+        <a:xfrm>
+          <a:off x="0" y="0"/>
+          <a:ext cx="0" cy="0"/>
+          <a:chOff x="0" y="0"/>
+          <a:chExt cx="0" cy="0"/>
+        </a:xfrm>
+      </p:grpSpPr>
+      <p:sp>
+        <p:nvSpPr>
+          <p:cNvPr id="2" name="Título 1">
+            <a:extLst>
+              <a:ext uri="{FF2B5EF4-FFF2-40B4-BE49-F238E27FC236}">
+                <a16:creationId xmlns:a16="http://schemas.microsoft.com/office/drawing/2014/main" id="{92012911-82BC-6872-3E14-EDE88C23BA90}"/>
+              </a:ext>
+            </a:extLst>
+          </p:cNvPr>
+          <p:cNvSpPr>
+            <a:spLocks noGrp="1"/>
+          </p:cNvSpPr>
+          <p:nvPr>
+            <p:ph type="title"/>
+          </p:nvPr>
+        </p:nvSpPr>
+        <p:spPr/>
+        <p:txBody>
+          <a:bodyPr/>
+          <a:lstStyle/>
+          <a:p>
+            <a:pPr algn="l">
+              <a:buNone/>
+            </a:pPr>
+            <a:r>
+              <a:rPr lang="pt-PT" sz="3200" b="1" dirty="0">
+                <a:solidFill>
+                  <a:srgbClr val="1A2332"/>
+                </a:solidFill>
+                <a:latin typeface="Georgia"/>
+              </a:rPr>
+              <a:t>Direções de Investigação</a:t>
+            </a:r>
+          </a:p>
+        </p:txBody>
+      </p:sp>
+      <p:sp>
+        <p:nvSpPr>
+          <p:cNvPr id="3" name="Retângulo Arredondado 2">
+            <a:extLst>
+              <a:ext uri="{FF2B5EF4-FFF2-40B4-BE49-F238E27FC236}">
+                <a16:creationId xmlns:a16="http://schemas.microsoft.com/office/drawing/2014/main" id="{7D1CE6D4-71C4-9C42-BDFC-0EA3A6E33AED}"/>
+              </a:ext>
+            </a:extLst>
+          </p:cNvPr>
+          <p:cNvSpPr/>
+          <p:nvPr/>
+        </p:nvSpPr>
+        <p:spPr>
+          <a:xfrm>
+            <a:off x="457200" y="1905000"/>
+            <a:ext cx="5334000" cy="457200"/>
+          </a:xfrm>
+          <a:prstGeom prst="roundRect">
+            <a:avLst/>
+          </a:prstGeom>
+          <a:solidFill>
+            <a:srgbClr val="156082"/>
+          </a:solidFill>
+          <a:ln w="19050" cap="flat" cmpd="sng" algn="ctr">
+            <a:noFill/>
+            <a:prstDash val="solid"/>
+            <a:miter lim="800000"/>
+          </a:ln>
+        </p:spPr>
+        <p:style>
+          <a:lnRef idx="2">
+            <a:schemeClr val="accent1">
+              <a:shade val="15000"/>
+            </a:schemeClr>
+          </a:lnRef>
+          <a:fillRef idx="1">
+            <a:schemeClr val="accent1"/>
+          </a:fillRef>
+          <a:effectRef idx="0">
+            <a:schemeClr val="accent1"/>
+          </a:effectRef>
+          <a:fontRef idx="minor">
+            <a:schemeClr val="lt1"/>
+          </a:fontRef>
+        </p:style>
+        <p:txBody>
+          <a:bodyPr vertOverflow="clip" horzOverflow="clip" wrap="none" rtlCol="0" anchor="ctr" anchorCtr="0">
+            <a:noAutofit/>
+          </a:bodyPr>
+          <a:lstStyle/>
+          <a:p>
+            <a:pPr algn="l"/>
+            <a:r>
+              <a:rPr lang="pt-PT" sz="1400" b="1">
+                <a:solidFill>
+                  <a:srgbClr val="FFFFFF"/>
+                </a:solidFill>
+                <a:latin typeface="Calibri"/>
+                <a:cs typeface="Calibri"/>
+              </a:rPr>
+              <a:t>ESCALABILIDADE NO EDGE</a:t>
+            </a:r>
+          </a:p>
+        </p:txBody>
+      </p:sp>
+      <p:sp>
+        <p:nvSpPr>
+          <p:cNvPr id="4" name="Oval 3">
+            <a:extLst>
+              <a:ext uri="{FF2B5EF4-FFF2-40B4-BE49-F238E27FC236}">
+                <a16:creationId xmlns:a16="http://schemas.microsoft.com/office/drawing/2014/main" id="{3F90BDEB-842A-7447-9EC7-BD08DF512EBF}"/>
+              </a:ext>
+            </a:extLst>
+          </p:cNvPr>
+          <p:cNvSpPr/>
+          <p:nvPr/>
+        </p:nvSpPr>
+        <p:spPr>
+          <a:xfrm>
+            <a:off x="508000" y="2565400"/>
+            <a:ext cx="101600" cy="101600"/>
+          </a:xfrm>
+          <a:prstGeom prst="ellipse">
+            <a:avLst/>
+          </a:prstGeom>
+          <a:solidFill>
+            <a:srgbClr val="156082"/>
+          </a:solidFill>
+          <a:ln w="19050" cap="flat" cmpd="sng" algn="ctr">
+            <a:noFill/>
+            <a:prstDash val="solid"/>
+            <a:miter lim="800000"/>
+          </a:ln>
+        </p:spPr>
+        <p:style>
+          <a:lnRef idx="2">
+            <a:schemeClr val="accent1">
+              <a:shade val="15000"/>
+            </a:schemeClr>
+          </a:lnRef>
+          <a:fillRef idx="1">
+            <a:schemeClr val="accent1"/>
+          </a:fillRef>
+          <a:effectRef idx="0">
+            <a:schemeClr val="accent1"/>
+          </a:effectRef>
+          <a:fontRef idx="minor">
+            <a:schemeClr val="lt1"/>
+          </a:fontRef>
+        </p:style>
+        <p:txBody>
+          <a:bodyPr vertOverflow="clip" horzOverflow="clip" rtlCol="0" anchor="t"/>
+          <a:lstStyle/>
+          <a:p>
+            <a:pPr algn="l"/>
+            <a:endParaRPr lang="pt-PT"/>
+          </a:p>
+        </p:txBody>
+      </p:sp>
+      <p:sp>
+        <p:nvSpPr>
+          <p:cNvPr id="5" name="CaixaDeTexto 4">
+            <a:extLst>
+              <a:ext uri="{FF2B5EF4-FFF2-40B4-BE49-F238E27FC236}">
+                <a16:creationId xmlns:a16="http://schemas.microsoft.com/office/drawing/2014/main" id="{C5F96323-26F3-154E-8893-F751AAC2F7E1}"/>
+              </a:ext>
+            </a:extLst>
+          </p:cNvPr>
+          <p:cNvSpPr txBox="1"/>
+          <p:nvPr/>
+        </p:nvSpPr>
+        <p:spPr>
+          <a:xfrm>
+            <a:off x="711200" y="2489200"/>
+            <a:ext cx="5029200" cy="254000"/>
+          </a:xfrm>
+          <a:prstGeom prst="rect">
+            <a:avLst/>
+          </a:prstGeom>
+          <a:noFill/>
+        </p:spPr>
+        <p:txBody>
+          <a:bodyPr vertOverflow="overflow" vert="horz" wrap="square" rtlCol="0" anchor="t">
+            <a:spAutoFit/>
+          </a:bodyPr>
+          <a:lstStyle/>
+          <a:p>
+            <a:pPr algn="l"/>
+            <a:r>
+              <a:rPr lang="pt-PT" sz="1400" b="1">
+                <a:solidFill>
+                  <a:srgbClr val="1A2332"/>
+                </a:solidFill>
+                <a:latin typeface="Calibri"/>
+                <a:cs typeface="Calibri"/>
+              </a:rPr>
+              <a:t>Atualizações esparsas</a:t>
+            </a:r>
+          </a:p>
+        </p:txBody>
+      </p:sp>
+      <p:sp>
+        <p:nvSpPr>
+          <p:cNvPr id="6" name="CaixaDeTexto 5">
+            <a:extLst>
+              <a:ext uri="{FF2B5EF4-FFF2-40B4-BE49-F238E27FC236}">
+                <a16:creationId xmlns:a16="http://schemas.microsoft.com/office/drawing/2014/main" id="{28C9D78B-35FC-A74A-B525-F1735188B3EC}"/>
+              </a:ext>
+            </a:extLst>
+          </p:cNvPr>
+          <p:cNvSpPr txBox="1"/>
+          <p:nvPr/>
+        </p:nvSpPr>
+        <p:spPr>
+          <a:xfrm>
+            <a:off x="711200" y="2768600"/>
+            <a:ext cx="5029200" cy="406400"/>
+          </a:xfrm>
+          <a:prstGeom prst="rect">
+            <a:avLst/>
+          </a:prstGeom>
+          <a:noFill/>
+        </p:spPr>
+        <p:txBody>
+          <a:bodyPr vertOverflow="overflow" vert="horz" wrap="square" rtlCol="0" anchor="t">
+            <a:spAutoFit/>
+          </a:bodyPr>
+          <a:lstStyle/>
+          <a:p>
+            <a:pPr algn="l"/>
+            <a:r>
+              <a:rPr lang="pt-PT" sz="1300">
+                <a:solidFill>
+                  <a:srgbClr val="2E3B4E"/>
+                </a:solidFill>
+                <a:latin typeface="Calibri"/>
+                <a:cs typeface="Calibri"/>
+              </a:rPr>
+              <a:t>Primitivas LoRA-style que restringem unlearning a fração mínima de parâmetros</a:t>
+            </a:r>
+          </a:p>
+        </p:txBody>
+      </p:sp>
+      <p:sp>
+        <p:nvSpPr>
+          <p:cNvPr id="7" name="Oval 6">
+            <a:extLst>
+              <a:ext uri="{FF2B5EF4-FFF2-40B4-BE49-F238E27FC236}">
+                <a16:creationId xmlns:a16="http://schemas.microsoft.com/office/drawing/2014/main" id="{F30FC41A-626A-2344-A1C4-68330BFA68CB}"/>
+              </a:ext>
+            </a:extLst>
+          </p:cNvPr>
+          <p:cNvSpPr/>
+          <p:nvPr/>
+        </p:nvSpPr>
+        <p:spPr>
+          <a:xfrm>
+            <a:off x="508000" y="3403600"/>
+            <a:ext cx="101600" cy="101600"/>
+          </a:xfrm>
+          <a:prstGeom prst="ellipse">
+            <a:avLst/>
+          </a:prstGeom>
+          <a:solidFill>
+            <a:srgbClr val="156082"/>
+          </a:solidFill>
+          <a:ln w="19050" cap="flat" cmpd="sng" algn="ctr">
+            <a:noFill/>
+            <a:prstDash val="solid"/>
+            <a:miter lim="800000"/>
+          </a:ln>
+        </p:spPr>
+        <p:style>
+          <a:lnRef idx="2">
+            <a:schemeClr val="accent1">
+              <a:shade val="15000"/>
+            </a:schemeClr>
+          </a:lnRef>
+          <a:fillRef idx="1">
+            <a:schemeClr val="accent1"/>
+          </a:fillRef>
+          <a:effectRef idx="0">
+            <a:schemeClr val="accent1"/>
+          </a:effectRef>
+          <a:fontRef idx="minor">
+            <a:schemeClr val="lt1"/>
+          </a:fontRef>
+        </p:style>
+        <p:txBody>
+          <a:bodyPr vertOverflow="clip" horzOverflow="clip" rtlCol="0" anchor="t"/>
+          <a:lstStyle/>
+          <a:p>
+            <a:pPr algn="l"/>
+            <a:endParaRPr lang="pt-PT"/>
+          </a:p>
+        </p:txBody>
+      </p:sp>
+      <p:sp>
+        <p:nvSpPr>
+          <p:cNvPr id="8" name="CaixaDeTexto 7">
+            <a:extLst>
+              <a:ext uri="{FF2B5EF4-FFF2-40B4-BE49-F238E27FC236}">
+                <a16:creationId xmlns:a16="http://schemas.microsoft.com/office/drawing/2014/main" id="{D69C9886-0420-0C4B-B968-6E06FABAED99}"/>
+              </a:ext>
+            </a:extLst>
+          </p:cNvPr>
+          <p:cNvSpPr txBox="1"/>
+          <p:nvPr/>
+        </p:nvSpPr>
+        <p:spPr>
+          <a:xfrm>
+            <a:off x="711200" y="3327400"/>
+            <a:ext cx="5029200" cy="254000"/>
+          </a:xfrm>
+          <a:prstGeom prst="rect">
+            <a:avLst/>
+          </a:prstGeom>
+          <a:noFill/>
+        </p:spPr>
+        <p:txBody>
+          <a:bodyPr vertOverflow="overflow" vert="horz" wrap="square" rtlCol="0" anchor="t">
+            <a:spAutoFit/>
+          </a:bodyPr>
+          <a:lstStyle/>
+          <a:p>
+            <a:pPr algn="l"/>
+            <a:r>
+              <a:rPr lang="pt-PT" sz="1400" b="1">
+                <a:solidFill>
+                  <a:srgbClr val="1A2332"/>
+                </a:solidFill>
+                <a:latin typeface="Calibri"/>
+                <a:cs typeface="Calibri"/>
+              </a:rPr>
+              <a:t>Kernels TinyML</a:t>
+            </a:r>
+          </a:p>
+        </p:txBody>
+      </p:sp>
+      <p:sp>
+        <p:nvSpPr>
+          <p:cNvPr id="9" name="CaixaDeTexto 8">
+            <a:extLst>
+              <a:ext uri="{FF2B5EF4-FFF2-40B4-BE49-F238E27FC236}">
+                <a16:creationId xmlns:a16="http://schemas.microsoft.com/office/drawing/2014/main" id="{10BEBC2F-0F7B-6D46-A944-63692DB51C7B}"/>
+              </a:ext>
+            </a:extLst>
+          </p:cNvPr>
+          <p:cNvSpPr txBox="1"/>
+          <p:nvPr/>
+        </p:nvSpPr>
+        <p:spPr>
+          <a:xfrm>
+            <a:off x="711200" y="3606800"/>
+            <a:ext cx="5029200" cy="406400"/>
+          </a:xfrm>
+          <a:prstGeom prst="rect">
+            <a:avLst/>
+          </a:prstGeom>
+          <a:noFill/>
+        </p:spPr>
+        <p:txBody>
+          <a:bodyPr vertOverflow="overflow" vert="horz" wrap="square" rtlCol="0" anchor="t">
+            <a:spAutoFit/>
+          </a:bodyPr>
+          <a:lstStyle/>
+          <a:p>
+            <a:pPr algn="l"/>
+            <a:r>
+              <a:rPr lang="pt-PT" sz="1300">
+                <a:solidFill>
+                  <a:srgbClr val="2E3B4E"/>
+                </a:solidFill>
+                <a:latin typeface="Calibri"/>
+                <a:cs typeface="Calibri"/>
+              </a:rPr>
+              <a:t>Compilar operações de erasure para MCU (TF Lite Micro, microTVM)</a:t>
+            </a:r>
+          </a:p>
+        </p:txBody>
+      </p:sp>
+      <p:sp>
+        <p:nvSpPr>
+          <p:cNvPr id="10" name="Oval 9">
+            <a:extLst>
+              <a:ext uri="{FF2B5EF4-FFF2-40B4-BE49-F238E27FC236}">
+                <a16:creationId xmlns:a16="http://schemas.microsoft.com/office/drawing/2014/main" id="{2194CC9C-176A-0F47-ACE1-5066FA21ABD3}"/>
+              </a:ext>
+            </a:extLst>
+          </p:cNvPr>
+          <p:cNvSpPr/>
+          <p:nvPr/>
+        </p:nvSpPr>
+        <p:spPr>
+          <a:xfrm>
+            <a:off x="508000" y="4114800"/>
+            <a:ext cx="101600" cy="101600"/>
+          </a:xfrm>
+          <a:prstGeom prst="ellipse">
+            <a:avLst/>
+          </a:prstGeom>
+          <a:solidFill>
+            <a:srgbClr val="156082"/>
+          </a:solidFill>
+          <a:ln w="19050" cap="flat" cmpd="sng" algn="ctr">
+            <a:noFill/>
+            <a:prstDash val="solid"/>
+            <a:miter lim="800000"/>
+          </a:ln>
+        </p:spPr>
+        <p:style>
+          <a:lnRef idx="2">
+            <a:schemeClr val="accent1">
+              <a:shade val="15000"/>
+            </a:schemeClr>
+          </a:lnRef>
+          <a:fillRef idx="1">
+            <a:schemeClr val="accent1"/>
+          </a:fillRef>
+          <a:effectRef idx="0">
+            <a:schemeClr val="accent1"/>
+          </a:effectRef>
+          <a:fontRef idx="minor">
+            <a:schemeClr val="lt1"/>
+          </a:fontRef>
+        </p:style>
+        <p:txBody>
+          <a:bodyPr vertOverflow="clip" horzOverflow="clip" rtlCol="0" anchor="t"/>
+          <a:lstStyle/>
+          <a:p>
+            <a:pPr algn="l"/>
+            <a:endParaRPr lang="pt-PT"/>
+          </a:p>
+        </p:txBody>
+      </p:sp>
+      <p:sp>
+        <p:nvSpPr>
+          <p:cNvPr id="11" name="CaixaDeTexto 10">
+            <a:extLst>
+              <a:ext uri="{FF2B5EF4-FFF2-40B4-BE49-F238E27FC236}">
+                <a16:creationId xmlns:a16="http://schemas.microsoft.com/office/drawing/2014/main" id="{B1BA7C17-2C74-A14C-8178-C5434B60B050}"/>
+              </a:ext>
+            </a:extLst>
+          </p:cNvPr>
+          <p:cNvSpPr txBox="1"/>
+          <p:nvPr/>
+        </p:nvSpPr>
+        <p:spPr>
+          <a:xfrm>
+            <a:off x="711200" y="4038600"/>
+            <a:ext cx="5029200" cy="254000"/>
+          </a:xfrm>
+          <a:prstGeom prst="rect">
+            <a:avLst/>
+          </a:prstGeom>
+          <a:noFill/>
+        </p:spPr>
+        <p:txBody>
+          <a:bodyPr vertOverflow="overflow" vert="horz" wrap="square" rtlCol="0" anchor="t">
+            <a:spAutoFit/>
+          </a:bodyPr>
+          <a:lstStyle/>
+          <a:p>
+            <a:pPr algn="l"/>
+            <a:r>
+              <a:rPr lang="pt-PT" sz="1400" b="1">
+                <a:solidFill>
+                  <a:srgbClr val="1A2332"/>
+                </a:solidFill>
+                <a:latin typeface="Calibri"/>
+                <a:cs typeface="Calibri"/>
+              </a:rPr>
+              <a:t>Aceleração NPU/DSP</a:t>
+            </a:r>
+          </a:p>
+        </p:txBody>
+      </p:sp>
+      <p:sp>
+        <p:nvSpPr>
+          <p:cNvPr id="12" name="CaixaDeTexto 11">
+            <a:extLst>
+              <a:ext uri="{FF2B5EF4-FFF2-40B4-BE49-F238E27FC236}">
+                <a16:creationId xmlns:a16="http://schemas.microsoft.com/office/drawing/2014/main" id="{1A75184F-0B43-C24F-A1BB-A7F042B0AB41}"/>
+              </a:ext>
+            </a:extLst>
+          </p:cNvPr>
+          <p:cNvSpPr txBox="1"/>
+          <p:nvPr/>
+        </p:nvSpPr>
+        <p:spPr>
+          <a:xfrm>
+            <a:off x="711200" y="4318000"/>
+            <a:ext cx="5029200" cy="406400"/>
+          </a:xfrm>
+          <a:prstGeom prst="rect">
+            <a:avLst/>
+          </a:prstGeom>
+          <a:noFill/>
+        </p:spPr>
+        <p:txBody>
+          <a:bodyPr vertOverflow="overflow" vert="horz" wrap="square" rtlCol="0" anchor="t">
+            <a:spAutoFit/>
+          </a:bodyPr>
+          <a:lstStyle/>
+          <a:p>
+            <a:pPr algn="l"/>
+            <a:r>
+              <a:rPr lang="pt-PT" sz="1300">
+                <a:solidFill>
+                  <a:srgbClr val="2E3B4E"/>
+                </a:solidFill>
+                <a:latin typeface="Calibri"/>
+                <a:cs typeface="Calibri"/>
+              </a:rPr>
+              <a:t>Explorar unidades de processamento neural disponíveis no edge</a:t>
+            </a:r>
+          </a:p>
+        </p:txBody>
+      </p:sp>
+      <p:sp>
+        <p:nvSpPr>
+          <p:cNvPr id="13" name="Oval 12">
+            <a:extLst>
+              <a:ext uri="{FF2B5EF4-FFF2-40B4-BE49-F238E27FC236}">
+                <a16:creationId xmlns:a16="http://schemas.microsoft.com/office/drawing/2014/main" id="{12D3475D-927E-DD49-8C65-A2D20442782D}"/>
+              </a:ext>
+            </a:extLst>
+          </p:cNvPr>
+          <p:cNvSpPr/>
+          <p:nvPr/>
+        </p:nvSpPr>
+        <p:spPr>
+          <a:xfrm>
+            <a:off x="508000" y="4826000"/>
+            <a:ext cx="101600" cy="101600"/>
+          </a:xfrm>
+          <a:prstGeom prst="ellipse">
+            <a:avLst/>
+          </a:prstGeom>
+          <a:solidFill>
+            <a:srgbClr val="156082"/>
+          </a:solidFill>
+          <a:ln w="19050" cap="flat" cmpd="sng" algn="ctr">
+            <a:noFill/>
+            <a:prstDash val="solid"/>
+            <a:miter lim="800000"/>
+          </a:ln>
+        </p:spPr>
+        <p:style>
+          <a:lnRef idx="2">
+            <a:schemeClr val="accent1">
+              <a:shade val="15000"/>
+            </a:schemeClr>
+          </a:lnRef>
+          <a:fillRef idx="1">
+            <a:schemeClr val="accent1"/>
+          </a:fillRef>
+          <a:effectRef idx="0">
+            <a:schemeClr val="accent1"/>
+          </a:effectRef>
+          <a:fontRef idx="minor">
+            <a:schemeClr val="lt1"/>
+          </a:fontRef>
+        </p:style>
+        <p:txBody>
+          <a:bodyPr vertOverflow="clip" horzOverflow="clip" rtlCol="0" anchor="t"/>
+          <a:lstStyle/>
+          <a:p>
+            <a:pPr algn="l"/>
+            <a:endParaRPr lang="pt-PT"/>
+          </a:p>
+        </p:txBody>
+      </p:sp>
+      <p:sp>
+        <p:nvSpPr>
+          <p:cNvPr id="14" name="CaixaDeTexto 13">
+            <a:extLst>
+              <a:ext uri="{FF2B5EF4-FFF2-40B4-BE49-F238E27FC236}">
+                <a16:creationId xmlns:a16="http://schemas.microsoft.com/office/drawing/2014/main" id="{567C310F-F11F-B545-AD9E-9E44A55CA2BE}"/>
+              </a:ext>
+            </a:extLst>
+          </p:cNvPr>
+          <p:cNvSpPr txBox="1"/>
+          <p:nvPr/>
+        </p:nvSpPr>
+        <p:spPr>
+          <a:xfrm>
+            <a:off x="711200" y="4749800"/>
+            <a:ext cx="5029200" cy="254000"/>
+          </a:xfrm>
+          <a:prstGeom prst="rect">
+            <a:avLst/>
+          </a:prstGeom>
+          <a:noFill/>
+        </p:spPr>
+        <p:txBody>
+          <a:bodyPr vertOverflow="overflow" vert="horz" wrap="square" rtlCol="0" anchor="t">
+            <a:spAutoFit/>
+          </a:bodyPr>
+          <a:lstStyle/>
+          <a:p>
+            <a:pPr algn="l"/>
+            <a:r>
+              <a:rPr lang="pt-PT" sz="1400" b="1">
+                <a:solidFill>
+                  <a:srgbClr val="1A2332"/>
+                </a:solidFill>
+                <a:latin typeface="Calibri"/>
+                <a:cs typeface="Calibri"/>
+              </a:rPr>
+              <a:t>Patch cloud→edge</a:t>
+            </a:r>
+          </a:p>
+        </p:txBody>
+      </p:sp>
+      <p:sp>
+        <p:nvSpPr>
+          <p:cNvPr id="15" name="CaixaDeTexto 14">
+            <a:extLst>
+              <a:ext uri="{FF2B5EF4-FFF2-40B4-BE49-F238E27FC236}">
+                <a16:creationId xmlns:a16="http://schemas.microsoft.com/office/drawing/2014/main" id="{DAF1A083-6C0D-3343-A247-98FC91AF480A}"/>
+              </a:ext>
+            </a:extLst>
+          </p:cNvPr>
+          <p:cNvSpPr txBox="1"/>
+          <p:nvPr/>
+        </p:nvSpPr>
+        <p:spPr>
+          <a:xfrm>
+            <a:off x="711200" y="5029200"/>
+            <a:ext cx="5029200" cy="406400"/>
+          </a:xfrm>
+          <a:prstGeom prst="rect">
+            <a:avLst/>
+          </a:prstGeom>
+          <a:noFill/>
+        </p:spPr>
+        <p:txBody>
+          <a:bodyPr vertOverflow="overflow" vert="horz" wrap="square" rtlCol="0" anchor="t">
+            <a:spAutoFit/>
+          </a:bodyPr>
+          <a:lstStyle/>
+          <a:p>
+            <a:pPr algn="l"/>
+            <a:r>
+              <a:rPr lang="pt-PT" sz="1300">
+                <a:solidFill>
+                  <a:srgbClr val="2E3B4E"/>
+                </a:solidFill>
+                <a:latin typeface="Calibri"/>
+                <a:cs typeface="Calibri"/>
+              </a:rPr>
+              <a:t>Cloud faz retrain pesado e envia patch residual leve ao edge</a:t>
+            </a:r>
+          </a:p>
+        </p:txBody>
+      </p:sp>
+      <p:sp>
+        <p:nvSpPr>
+          <p:cNvPr id="16" name="Retângulo Arredondado 15">
+            <a:extLst>
+              <a:ext uri="{FF2B5EF4-FFF2-40B4-BE49-F238E27FC236}">
+                <a16:creationId xmlns:a16="http://schemas.microsoft.com/office/drawing/2014/main" id="{6B874A69-8707-494F-96CD-B4A7BC8D1714}"/>
+              </a:ext>
+            </a:extLst>
+          </p:cNvPr>
+          <p:cNvSpPr/>
+          <p:nvPr/>
+        </p:nvSpPr>
+        <p:spPr>
+          <a:xfrm>
+            <a:off x="6096000" y="1905000"/>
+            <a:ext cx="5334000" cy="457200"/>
+          </a:xfrm>
+          <a:prstGeom prst="roundRect">
+            <a:avLst/>
+          </a:prstGeom>
+          <a:solidFill>
+            <a:srgbClr val="B5511A"/>
+          </a:solidFill>
+          <a:ln w="19050" cap="flat" cmpd="sng" algn="ctr">
+            <a:noFill/>
+            <a:prstDash val="solid"/>
+            <a:miter lim="800000"/>
+          </a:ln>
+        </p:spPr>
+        <p:style>
+          <a:lnRef idx="2">
+            <a:schemeClr val="accent1">
+              <a:shade val="15000"/>
+            </a:schemeClr>
+          </a:lnRef>
+          <a:fillRef idx="1">
+            <a:schemeClr val="accent1"/>
+          </a:fillRef>
+          <a:effectRef idx="0">
+            <a:schemeClr val="accent1"/>
+          </a:effectRef>
+          <a:fontRef idx="minor">
+            <a:schemeClr val="lt1"/>
+          </a:fontRef>
+        </p:style>
+        <p:txBody>
+          <a:bodyPr vertOverflow="clip" horzOverflow="clip" wrap="none" rtlCol="0" anchor="ctr" anchorCtr="0">
+            <a:noAutofit/>
+          </a:bodyPr>
+          <a:lstStyle/>
+          <a:p>
+            <a:pPr algn="l"/>
+            <a:r>
+              <a:rPr lang="pt-PT" sz="1400" b="1">
+                <a:solidFill>
+                  <a:srgbClr val="FFFFFF"/>
+                </a:solidFill>
+                <a:latin typeface="Calibri"/>
+                <a:cs typeface="Calibri"/>
+              </a:rPr>
+              <a:t>VERIFICAÇÃO E GARANTIAS</a:t>
+            </a:r>
+          </a:p>
+        </p:txBody>
+      </p:sp>
+      <p:sp>
+        <p:nvSpPr>
+          <p:cNvPr id="17" name="Oval 16">
+            <a:extLst>
+              <a:ext uri="{FF2B5EF4-FFF2-40B4-BE49-F238E27FC236}">
+                <a16:creationId xmlns:a16="http://schemas.microsoft.com/office/drawing/2014/main" id="{D660A62C-0446-2944-B6BC-2130A92C8C9E}"/>
+              </a:ext>
+            </a:extLst>
+          </p:cNvPr>
+          <p:cNvSpPr/>
+          <p:nvPr/>
+        </p:nvSpPr>
+        <p:spPr>
+          <a:xfrm>
+            <a:off x="6146800" y="2565400"/>
+            <a:ext cx="101600" cy="101600"/>
+          </a:xfrm>
+          <a:prstGeom prst="ellipse">
+            <a:avLst/>
+          </a:prstGeom>
+          <a:solidFill>
+            <a:srgbClr val="B5511A"/>
+          </a:solidFill>
+          <a:ln w="19050" cap="flat" cmpd="sng" algn="ctr">
+            <a:noFill/>
+            <a:prstDash val="solid"/>
+            <a:miter lim="800000"/>
+          </a:ln>
+        </p:spPr>
+        <p:style>
+          <a:lnRef idx="2">
+            <a:schemeClr val="accent1">
+              <a:shade val="15000"/>
+            </a:schemeClr>
+          </a:lnRef>
+          <a:fillRef idx="1">
+            <a:schemeClr val="accent1"/>
+          </a:fillRef>
+          <a:effectRef idx="0">
+            <a:schemeClr val="accent1"/>
+          </a:effectRef>
+          <a:fontRef idx="minor">
+            <a:schemeClr val="lt1"/>
+          </a:fontRef>
+        </p:style>
+        <p:txBody>
+          <a:bodyPr vertOverflow="clip" horzOverflow="clip" rtlCol="0" anchor="t"/>
+          <a:lstStyle/>
+          <a:p>
+            <a:pPr algn="l"/>
+            <a:endParaRPr lang="pt-PT"/>
+          </a:p>
+        </p:txBody>
+      </p:sp>
+      <p:sp>
+        <p:nvSpPr>
+          <p:cNvPr id="18" name="CaixaDeTexto 17">
+            <a:extLst>
+              <a:ext uri="{FF2B5EF4-FFF2-40B4-BE49-F238E27FC236}">
+                <a16:creationId xmlns:a16="http://schemas.microsoft.com/office/drawing/2014/main" id="{4460F763-94A9-C640-AD72-8B7D81739510}"/>
+              </a:ext>
+            </a:extLst>
+          </p:cNvPr>
+          <p:cNvSpPr txBox="1"/>
+          <p:nvPr/>
+        </p:nvSpPr>
+        <p:spPr>
+          <a:xfrm>
+            <a:off x="6350000" y="2489200"/>
+            <a:ext cx="5029200" cy="254000"/>
+          </a:xfrm>
+          <a:prstGeom prst="rect">
+            <a:avLst/>
+          </a:prstGeom>
+          <a:noFill/>
+        </p:spPr>
+        <p:txBody>
+          <a:bodyPr vertOverflow="overflow" vert="horz" wrap="square" rtlCol="0" anchor="t">
+            <a:spAutoFit/>
+          </a:bodyPr>
+          <a:lstStyle/>
+          <a:p>
+            <a:pPr algn="l"/>
+            <a:r>
+              <a:rPr lang="pt-PT" sz="1400" b="1">
+                <a:solidFill>
+                  <a:srgbClr val="1A2332"/>
+                </a:solidFill>
+                <a:latin typeface="Calibri"/>
+                <a:cs typeface="Calibri"/>
+              </a:rPr>
+              <a:t>TEEs (SGX, TrustZone, SEV)</a:t>
+            </a:r>
+          </a:p>
+        </p:txBody>
+      </p:sp>
+      <p:sp>
+        <p:nvSpPr>
+          <p:cNvPr id="19" name="CaixaDeTexto 18">
+            <a:extLst>
+              <a:ext uri="{FF2B5EF4-FFF2-40B4-BE49-F238E27FC236}">
+                <a16:creationId xmlns:a16="http://schemas.microsoft.com/office/drawing/2014/main" id="{7B712AE0-AB66-2F41-9682-D4DA6813FA03}"/>
+              </a:ext>
+            </a:extLst>
+          </p:cNvPr>
+          <p:cNvSpPr txBox="1"/>
+          <p:nvPr/>
+        </p:nvSpPr>
+        <p:spPr>
+          <a:xfrm>
+            <a:off x="6350000" y="2768600"/>
+            <a:ext cx="5029200" cy="406400"/>
+          </a:xfrm>
+          <a:prstGeom prst="rect">
+            <a:avLst/>
+          </a:prstGeom>
+          <a:noFill/>
+        </p:spPr>
+        <p:txBody>
+          <a:bodyPr vertOverflow="overflow" vert="horz" wrap="square" rtlCol="0" anchor="t">
+            <a:spAutoFit/>
+          </a:bodyPr>
+          <a:lstStyle/>
+          <a:p>
+            <a:pPr algn="l"/>
+            <a:r>
+              <a:rPr lang="pt-PT" sz="1300">
+                <a:solidFill>
+                  <a:srgbClr val="2E3B4E"/>
+                </a:solidFill>
+                <a:latin typeface="Calibri"/>
+                <a:cs typeface="Calibri"/>
+              </a:rPr>
+              <a:t>Executar unlearning em enclave → atestação criptográfica</a:t>
+            </a:r>
+          </a:p>
+        </p:txBody>
+      </p:sp>
+      <p:sp>
+        <p:nvSpPr>
+          <p:cNvPr id="20" name="Oval 19">
+            <a:extLst>
+              <a:ext uri="{FF2B5EF4-FFF2-40B4-BE49-F238E27FC236}">
+                <a16:creationId xmlns:a16="http://schemas.microsoft.com/office/drawing/2014/main" id="{89780F56-6DB4-3644-9525-1E80A52B239A}"/>
+              </a:ext>
+            </a:extLst>
+          </p:cNvPr>
+          <p:cNvSpPr/>
+          <p:nvPr/>
+        </p:nvSpPr>
+        <p:spPr>
+          <a:xfrm>
+            <a:off x="6146800" y="3403600"/>
+            <a:ext cx="101600" cy="101600"/>
+          </a:xfrm>
+          <a:prstGeom prst="ellipse">
+            <a:avLst/>
+          </a:prstGeom>
+          <a:solidFill>
+            <a:srgbClr val="B5511A"/>
+          </a:solidFill>
+          <a:ln w="19050" cap="flat" cmpd="sng" algn="ctr">
+            <a:noFill/>
+            <a:prstDash val="solid"/>
+            <a:miter lim="800000"/>
+          </a:ln>
+        </p:spPr>
+        <p:style>
+          <a:lnRef idx="2">
+            <a:schemeClr val="accent1">
+              <a:shade val="15000"/>
+            </a:schemeClr>
+          </a:lnRef>
+          <a:fillRef idx="1">
+            <a:schemeClr val="accent1"/>
+          </a:fillRef>
+          <a:effectRef idx="0">
+            <a:schemeClr val="accent1"/>
+          </a:effectRef>
+          <a:fontRef idx="minor">
+            <a:schemeClr val="lt1"/>
+          </a:fontRef>
+        </p:style>
+        <p:txBody>
+          <a:bodyPr vertOverflow="clip" horzOverflow="clip" rtlCol="0" anchor="t"/>
+          <a:lstStyle/>
+          <a:p>
+            <a:pPr algn="l"/>
+            <a:endParaRPr lang="pt-PT"/>
+          </a:p>
+        </p:txBody>
+      </p:sp>
+      <p:sp>
+        <p:nvSpPr>
+          <p:cNvPr id="21" name="CaixaDeTexto 20">
+            <a:extLst>
+              <a:ext uri="{FF2B5EF4-FFF2-40B4-BE49-F238E27FC236}">
+                <a16:creationId xmlns:a16="http://schemas.microsoft.com/office/drawing/2014/main" id="{89FE33ED-72D8-E64B-825A-C229569C3503}"/>
+              </a:ext>
+            </a:extLst>
+          </p:cNvPr>
+          <p:cNvSpPr txBox="1"/>
+          <p:nvPr/>
+        </p:nvSpPr>
+        <p:spPr>
+          <a:xfrm>
+            <a:off x="6350000" y="3327400"/>
+            <a:ext cx="5029200" cy="254000"/>
+          </a:xfrm>
+          <a:prstGeom prst="rect">
+            <a:avLst/>
+          </a:prstGeom>
+          <a:noFill/>
+        </p:spPr>
+        <p:txBody>
+          <a:bodyPr vertOverflow="overflow" vert="horz" wrap="square" rtlCol="0" anchor="t">
+            <a:spAutoFit/>
+          </a:bodyPr>
+          <a:lstStyle/>
+          <a:p>
+            <a:pPr algn="l"/>
+            <a:r>
+              <a:rPr lang="pt-PT" sz="1400" b="1">
+                <a:solidFill>
+                  <a:srgbClr val="1A2332"/>
+                </a:solidFill>
+                <a:latin typeface="Calibri"/>
+                <a:cs typeface="Calibri"/>
+              </a:rPr>
+              <a:t>Zero-knowledge proofs</a:t>
+            </a:r>
+          </a:p>
+        </p:txBody>
+      </p:sp>
+      <p:sp>
+        <p:nvSpPr>
+          <p:cNvPr id="22" name="CaixaDeTexto 21">
+            <a:extLst>
+              <a:ext uri="{FF2B5EF4-FFF2-40B4-BE49-F238E27FC236}">
+                <a16:creationId xmlns:a16="http://schemas.microsoft.com/office/drawing/2014/main" id="{C2D647A6-EE07-C245-B24D-7DB07C228C1F}"/>
+              </a:ext>
+            </a:extLst>
+          </p:cNvPr>
+          <p:cNvSpPr txBox="1"/>
+          <p:nvPr/>
+        </p:nvSpPr>
+        <p:spPr>
+          <a:xfrm>
+            <a:off x="6350000" y="3606800"/>
+            <a:ext cx="5029200" cy="406400"/>
+          </a:xfrm>
+          <a:prstGeom prst="rect">
+            <a:avLst/>
+          </a:prstGeom>
+          <a:noFill/>
+        </p:spPr>
+        <p:txBody>
+          <a:bodyPr vertOverflow="overflow" vert="horz" wrap="square" rtlCol="0" anchor="t">
+            <a:spAutoFit/>
+          </a:bodyPr>
+          <a:lstStyle/>
+          <a:p>
+            <a:pPr algn="l"/>
+            <a:r>
+              <a:rPr lang="pt-PT" sz="1300">
+                <a:solidFill>
+                  <a:srgbClr val="2E3B4E"/>
+                </a:solidFill>
+                <a:latin typeface="Calibri"/>
+                <a:cs typeface="Calibri"/>
+              </a:rPr>
+              <a:t>Provar que pesos resultam da função declarada, sem revelar modelo</a:t>
+            </a:r>
+          </a:p>
+        </p:txBody>
+      </p:sp>
+      <p:sp>
+        <p:nvSpPr>
+          <p:cNvPr id="23" name="Oval 22">
+            <a:extLst>
+              <a:ext uri="{FF2B5EF4-FFF2-40B4-BE49-F238E27FC236}">
+                <a16:creationId xmlns:a16="http://schemas.microsoft.com/office/drawing/2014/main" id="{BDAF54C8-C787-2340-8D3C-AA6942ECF560}"/>
+              </a:ext>
+            </a:extLst>
+          </p:cNvPr>
+          <p:cNvSpPr/>
+          <p:nvPr/>
+        </p:nvSpPr>
+        <p:spPr>
+          <a:xfrm>
+            <a:off x="6146800" y="4114800"/>
+            <a:ext cx="101600" cy="101600"/>
+          </a:xfrm>
+          <a:prstGeom prst="ellipse">
+            <a:avLst/>
+          </a:prstGeom>
+          <a:solidFill>
+            <a:srgbClr val="B5511A"/>
+          </a:solidFill>
+          <a:ln w="19050" cap="flat" cmpd="sng" algn="ctr">
+            <a:noFill/>
+            <a:prstDash val="solid"/>
+            <a:miter lim="800000"/>
+          </a:ln>
+        </p:spPr>
+        <p:style>
+          <a:lnRef idx="2">
+            <a:schemeClr val="accent1">
+              <a:shade val="15000"/>
+            </a:schemeClr>
+          </a:lnRef>
+          <a:fillRef idx="1">
+            <a:schemeClr val="accent1"/>
+          </a:fillRef>
+          <a:effectRef idx="0">
+            <a:schemeClr val="accent1"/>
+          </a:effectRef>
+          <a:fontRef idx="minor">
+            <a:schemeClr val="lt1"/>
+          </a:fontRef>
+        </p:style>
+        <p:txBody>
+          <a:bodyPr vertOverflow="clip" horzOverflow="clip" rtlCol="0" anchor="t"/>
+          <a:lstStyle/>
+          <a:p>
+            <a:pPr algn="l"/>
+            <a:endParaRPr lang="pt-PT"/>
+          </a:p>
+        </p:txBody>
+      </p:sp>
+      <p:sp>
+        <p:nvSpPr>
+          <p:cNvPr id="24" name="CaixaDeTexto 23">
+            <a:extLst>
+              <a:ext uri="{FF2B5EF4-FFF2-40B4-BE49-F238E27FC236}">
+                <a16:creationId xmlns:a16="http://schemas.microsoft.com/office/drawing/2014/main" id="{242D99DD-F348-D44F-AD3E-4378D0E3F0AF}"/>
+              </a:ext>
+            </a:extLst>
+          </p:cNvPr>
+          <p:cNvSpPr txBox="1"/>
+          <p:nvPr/>
+        </p:nvSpPr>
+        <p:spPr>
+          <a:xfrm>
+            <a:off x="6350000" y="4038600"/>
+            <a:ext cx="5029200" cy="254000"/>
+          </a:xfrm>
+          <a:prstGeom prst="rect">
+            <a:avLst/>
+          </a:prstGeom>
+          <a:noFill/>
+        </p:spPr>
+        <p:txBody>
+          <a:bodyPr vertOverflow="overflow" vert="horz" wrap="square" rtlCol="0" anchor="t">
+            <a:spAutoFit/>
+          </a:bodyPr>
+          <a:lstStyle/>
+          <a:p>
+            <a:pPr algn="l"/>
+            <a:r>
+              <a:rPr lang="pt-PT" sz="1400" b="1">
+                <a:solidFill>
+                  <a:srgbClr val="1A2332"/>
+                </a:solidFill>
+                <a:latin typeface="Calibri"/>
+                <a:cs typeface="Calibri"/>
+              </a:rPr>
+              <a:t>DP budget tracking</a:t>
+            </a:r>
+          </a:p>
+        </p:txBody>
+      </p:sp>
+      <p:sp>
+        <p:nvSpPr>
+          <p:cNvPr id="25" name="CaixaDeTexto 24">
+            <a:extLst>
+              <a:ext uri="{FF2B5EF4-FFF2-40B4-BE49-F238E27FC236}">
+                <a16:creationId xmlns:a16="http://schemas.microsoft.com/office/drawing/2014/main" id="{5564B44C-F642-E549-8EA9-4A4011F88FD3}"/>
+              </a:ext>
+            </a:extLst>
+          </p:cNvPr>
+          <p:cNvSpPr txBox="1"/>
+          <p:nvPr/>
+        </p:nvSpPr>
+        <p:spPr>
+          <a:xfrm>
+            <a:off x="6350000" y="4318000"/>
+            <a:ext cx="5029200" cy="406400"/>
+          </a:xfrm>
+          <a:prstGeom prst="rect">
+            <a:avLst/>
+          </a:prstGeom>
+          <a:noFill/>
+        </p:spPr>
+        <p:txBody>
+          <a:bodyPr vertOverflow="overflow" vert="horz" wrap="square" rtlCol="0" anchor="t">
+            <a:spAutoFit/>
+          </a:bodyPr>
+          <a:lstStyle/>
+          <a:p>
+            <a:pPr algn="l"/>
+            <a:r>
+              <a:rPr lang="pt-PT" sz="1300">
+                <a:solidFill>
+                  <a:srgbClr val="2E3B4E"/>
+                </a:solidFill>
+                <a:latin typeface="Calibri"/>
+                <a:cs typeface="Calibri"/>
+              </a:rPr>
+              <a:t>Cada evento de erasure consome orçamento de privacidade auditável</a:t>
+            </a:r>
+          </a:p>
+        </p:txBody>
+      </p:sp>
+      <p:sp>
+        <p:nvSpPr>
+          <p:cNvPr id="26" name="Oval 25">
+            <a:extLst>
+              <a:ext uri="{FF2B5EF4-FFF2-40B4-BE49-F238E27FC236}">
+                <a16:creationId xmlns:a16="http://schemas.microsoft.com/office/drawing/2014/main" id="{C45A6D58-6CE1-1146-806B-6E8C3878CF7A}"/>
+              </a:ext>
+            </a:extLst>
+          </p:cNvPr>
+          <p:cNvSpPr/>
+          <p:nvPr/>
+        </p:nvSpPr>
+        <p:spPr>
+          <a:xfrm>
+            <a:off x="6146800" y="4826000"/>
+            <a:ext cx="101600" cy="101600"/>
+          </a:xfrm>
+          <a:prstGeom prst="ellipse">
+            <a:avLst/>
+          </a:prstGeom>
+          <a:solidFill>
+            <a:srgbClr val="B5511A"/>
+          </a:solidFill>
+          <a:ln w="19050" cap="flat" cmpd="sng" algn="ctr">
+            <a:noFill/>
+            <a:prstDash val="solid"/>
+            <a:miter lim="800000"/>
+          </a:ln>
+        </p:spPr>
+        <p:style>
+          <a:lnRef idx="2">
+            <a:schemeClr val="accent1">
+              <a:shade val="15000"/>
+            </a:schemeClr>
+          </a:lnRef>
+          <a:fillRef idx="1">
+            <a:schemeClr val="accent1"/>
+          </a:fillRef>
+          <a:effectRef idx="0">
+            <a:schemeClr val="accent1"/>
+          </a:effectRef>
+          <a:fontRef idx="minor">
+            <a:schemeClr val="lt1"/>
+          </a:fontRef>
+        </p:style>
+        <p:txBody>
+          <a:bodyPr vertOverflow="clip" horzOverflow="clip" rtlCol="0" anchor="t"/>
+          <a:lstStyle/>
+          <a:p>
+            <a:pPr algn="l"/>
+            <a:endParaRPr lang="pt-PT"/>
+          </a:p>
+        </p:txBody>
+      </p:sp>
+      <p:sp>
+        <p:nvSpPr>
+          <p:cNvPr id="27" name="CaixaDeTexto 26">
+            <a:extLst>
+              <a:ext uri="{FF2B5EF4-FFF2-40B4-BE49-F238E27FC236}">
+                <a16:creationId xmlns:a16="http://schemas.microsoft.com/office/drawing/2014/main" id="{29165D0D-A27D-FD47-8D9E-EF7D09BEB984}"/>
+              </a:ext>
+            </a:extLst>
+          </p:cNvPr>
+          <p:cNvSpPr txBox="1"/>
+          <p:nvPr/>
+        </p:nvSpPr>
+        <p:spPr>
+          <a:xfrm>
+            <a:off x="6350000" y="4749800"/>
+            <a:ext cx="5029200" cy="254000"/>
+          </a:xfrm>
+          <a:prstGeom prst="rect">
+            <a:avLst/>
+          </a:prstGeom>
+          <a:noFill/>
+        </p:spPr>
+        <p:txBody>
+          <a:bodyPr vertOverflow="overflow" vert="horz" wrap="square" rtlCol="0" anchor="t">
+            <a:spAutoFit/>
+          </a:bodyPr>
+          <a:lstStyle/>
+          <a:p>
+            <a:pPr algn="l"/>
+            <a:r>
+              <a:rPr lang="pt-PT" sz="1400" b="1">
+                <a:solidFill>
+                  <a:srgbClr val="1A2332"/>
+                </a:solidFill>
+                <a:latin typeface="Calibri"/>
+                <a:cs typeface="Calibri"/>
+              </a:rPr>
+              <a:t>Abordagem híbrida</a:t>
+            </a:r>
+          </a:p>
+        </p:txBody>
+      </p:sp>
+      <p:sp>
+        <p:nvSpPr>
+          <p:cNvPr id="28" name="CaixaDeTexto 27">
+            <a:extLst>
+              <a:ext uri="{FF2B5EF4-FFF2-40B4-BE49-F238E27FC236}">
+                <a16:creationId xmlns:a16="http://schemas.microsoft.com/office/drawing/2014/main" id="{A5963ADC-BD6D-5C47-8417-9D5C7B143767}"/>
+              </a:ext>
+            </a:extLst>
+          </p:cNvPr>
+          <p:cNvSpPr txBox="1"/>
+          <p:nvPr/>
+        </p:nvSpPr>
+        <p:spPr>
+          <a:xfrm>
+            <a:off x="6350000" y="5029200"/>
+            <a:ext cx="5029200" cy="406400"/>
+          </a:xfrm>
+          <a:prstGeom prst="rect">
+            <a:avLst/>
+          </a:prstGeom>
+          <a:noFill/>
+        </p:spPr>
+        <p:txBody>
+          <a:bodyPr vertOverflow="overflow" vert="horz" wrap="square" rtlCol="0" anchor="t">
+            <a:spAutoFit/>
+          </a:bodyPr>
+          <a:lstStyle/>
+          <a:p>
+            <a:pPr algn="l"/>
+            <a:r>
+              <a:rPr lang="pt-PT" sz="1300">
+                <a:solidFill>
+                  <a:srgbClr val="2E3B4E"/>
+                </a:solidFill>
+                <a:latin typeface="Calibri"/>
+                <a:cs typeface="Calibri"/>
+              </a:rPr>
+              <a:t>TEE (runtime) + ZKP (pós-hoc) + DP (cumulativo) em camadas</a:t>
+            </a:r>
+          </a:p>
+        </p:txBody>
+      </p:sp>
+      <p:sp>
+        <p:nvSpPr>
+          <p:cNvPr id="29" name="Retângulo 28">
+            <a:extLst>
+              <a:ext uri="{FF2B5EF4-FFF2-40B4-BE49-F238E27FC236}">
+                <a16:creationId xmlns:a16="http://schemas.microsoft.com/office/drawing/2014/main" id="{3AF5AE9F-4083-AA47-83D7-316C7DC19454}"/>
+              </a:ext>
+            </a:extLst>
+          </p:cNvPr>
+          <p:cNvSpPr/>
+          <p:nvPr/>
+        </p:nvSpPr>
+        <p:spPr>
+          <a:xfrm>
+            <a:off x="457200" y="5562600"/>
+            <a:ext cx="11277600" cy="711200"/>
+          </a:xfrm>
+          <a:prstGeom prst="rect">
+            <a:avLst/>
+          </a:prstGeom>
+          <a:solidFill>
+            <a:srgbClr val="F0EBE3"/>
+          </a:solidFill>
+          <a:ln w="19050" cap="flat" cmpd="sng" algn="ctr">
+            <a:noFill/>
+            <a:prstDash val="solid"/>
+            <a:miter lim="800000"/>
+          </a:ln>
+        </p:spPr>
+        <p:style>
+          <a:lnRef idx="2">
+            <a:schemeClr val="accent1">
+              <a:shade val="15000"/>
+            </a:schemeClr>
+          </a:lnRef>
+          <a:fillRef idx="1">
+            <a:schemeClr val="accent1"/>
+          </a:fillRef>
+          <a:effectRef idx="0">
+            <a:schemeClr val="accent1"/>
+          </a:effectRef>
+          <a:fontRef idx="minor">
+            <a:schemeClr val="lt1"/>
+          </a:fontRef>
+        </p:style>
+        <p:txBody>
+          <a:bodyPr vertOverflow="clip" horzOverflow="clip" rtlCol="0" anchor="t"/>
+          <a:lstStyle/>
+          <a:p>
+            <a:pPr algn="l"/>
+            <a:endParaRPr lang="pt-PT"/>
+          </a:p>
+        </p:txBody>
+      </p:sp>
+      <p:sp>
+        <p:nvSpPr>
+          <p:cNvPr id="30" name="CaixaDeTexto 29">
+            <a:extLst>
+              <a:ext uri="{FF2B5EF4-FFF2-40B4-BE49-F238E27FC236}">
+                <a16:creationId xmlns:a16="http://schemas.microsoft.com/office/drawing/2014/main" id="{427BEB23-DF31-AD44-8C62-B93FBA6D43C8}"/>
+              </a:ext>
+            </a:extLst>
+          </p:cNvPr>
+          <p:cNvSpPr txBox="1"/>
+          <p:nvPr/>
+        </p:nvSpPr>
+        <p:spPr>
+          <a:xfrm>
+            <a:off x="711200" y="5689600"/>
+            <a:ext cx="10769600" cy="457200"/>
+          </a:xfrm>
+          <a:prstGeom prst="rect">
+            <a:avLst/>
+          </a:prstGeom>
+          <a:noFill/>
+        </p:spPr>
+        <p:txBody>
+          <a:bodyPr vertOverflow="overflow" vert="horz" wrap="square" rtlCol="0" anchor="ctr" anchorCtr="0">
+            <a:noAutofit/>
+          </a:bodyPr>
+          <a:lstStyle/>
+          <a:p>
+            <a:pPr algn="l"/>
+            <a:r>
+              <a:rPr lang="pt-PT" sz="1400" i="1">
+                <a:solidFill>
+                  <a:srgbClr val="8B1A1A"/>
+                </a:solidFill>
+                <a:latin typeface="Calibri"/>
+                <a:cs typeface="Calibri"/>
+              </a:rPr>
+              <a:t>⚠  Sem benchmarks para MCU, sem limites formais de erro residual, sem mapeamento jurídico TEE/ZKP → RGPD Art. 17</a:t>
+            </a:r>
+          </a:p>
+        </p:txBody>
+      </p:sp>
+    </p:spTree>
+    <p:extLst>
+      <p:ext uri="{BB962C8B-B14F-4D97-AF65-F5344CB8AC3E}">
+        <p14:creationId xmlns:p14="http://schemas.microsoft.com/office/powerpoint/2010/main" val="1814811947"/>
+      </p:ext>
+    </p:extLst>
+  </p:cSld>
+  <p:clrMapOvr>
+    <a:masterClrMapping/>
+  </p:clrMapOvr>
+</p:sld>
+</file>
+
+<file path=ppt/slides/slide9.xml><?xml version="1.0" encoding="utf-8"?>
+<p:sld xmlns:a="http://schemas.openxmlformats.org/drawingml/2006/main" xmlns:r="http://schemas.openxmlformats.org/officeDocument/2006/relationships" xmlns:p="http://schemas.openxmlformats.org/presentationml/2006/main">
+  <p:cSld>
+    <p:spTree>
+      <p:nvGrpSpPr>
+        <p:cNvPr id="1" name=""/>
+        <p:cNvGrpSpPr/>
+        <p:nvPr/>
+      </p:nvGrpSpPr>
+      <p:grpSpPr>
+        <a:xfrm>
+          <a:off x="0" y="0"/>
+          <a:ext cx="0" cy="0"/>
+          <a:chOff x="0" y="0"/>
+          <a:chExt cx="0" cy="0"/>
+        </a:xfrm>
+      </p:grpSpPr>
+      <p:sp>
+        <p:nvSpPr>
+          <p:cNvPr id="2" name="Título 1">
+            <a:extLst>
+              <a:ext uri="{FF2B5EF4-FFF2-40B4-BE49-F238E27FC236}">
+                <a16:creationId xmlns:a16="http://schemas.microsoft.com/office/drawing/2014/main" id="{EBD52685-EEDA-3D69-3E46-D4D43E2FE8DF}"/>
+              </a:ext>
+            </a:extLst>
+          </p:cNvPr>
+          <p:cNvSpPr>
+            <a:spLocks noGrp="1"/>
+          </p:cNvSpPr>
+          <p:nvPr>
+            <p:ph type="title"/>
+          </p:nvPr>
+        </p:nvSpPr>
+        <p:spPr/>
+        <p:txBody>
+          <a:bodyPr/>
+          <a:lstStyle/>
+          <a:p>
+            <a:pPr algn="l">
+              <a:buNone/>
+            </a:pPr>
+            <a:r>
+              <a:rPr lang="pt-PT" sz="3200" b="1" dirty="0">
+                <a:solidFill>
+                  <a:srgbClr val="1A2332"/>
+                </a:solidFill>
+                <a:latin typeface="Georgia"/>
+              </a:rPr>
+              <a:t>Conclusão</a:t>
+            </a:r>
+          </a:p>
+        </p:txBody>
+      </p:sp>
+      <p:sp>
+        <p:nvSpPr>
+          <p:cNvPr id="3" name="Retângulo Arredondado 2">
+            <a:extLst>
+              <a:ext uri="{FF2B5EF4-FFF2-40B4-BE49-F238E27FC236}">
+                <a16:creationId xmlns:a16="http://schemas.microsoft.com/office/drawing/2014/main" id="{B81E05F5-3FF2-CC4A-8BA5-2622CA841F19}"/>
+              </a:ext>
+            </a:extLst>
+          </p:cNvPr>
+          <p:cNvSpPr/>
+          <p:nvPr/>
+        </p:nvSpPr>
+        <p:spPr>
+          <a:xfrm>
+            <a:off x="457200" y="1905000"/>
+            <a:ext cx="11277600" cy="889000"/>
+          </a:xfrm>
+          <a:prstGeom prst="roundRect">
+            <a:avLst/>
+          </a:prstGeom>
+          <a:solidFill>
+            <a:srgbClr val="156082"/>
+          </a:solidFill>
+          <a:ln w="19050" cap="flat" cmpd="sng" algn="ctr">
+            <a:noFill/>
+            <a:prstDash val="solid"/>
+            <a:miter lim="800000"/>
+          </a:ln>
+        </p:spPr>
+        <p:style>
+          <a:lnRef idx="2">
+            <a:schemeClr val="accent1">
+              <a:shade val="15000"/>
+            </a:schemeClr>
+          </a:lnRef>
+          <a:fillRef idx="1">
+            <a:schemeClr val="accent1"/>
+          </a:fillRef>
+          <a:effectRef idx="0">
+            <a:schemeClr val="accent1"/>
+          </a:effectRef>
+          <a:fontRef idx="minor">
+            <a:schemeClr val="lt1"/>
+          </a:fontRef>
+        </p:style>
+        <p:txBody>
+          <a:bodyPr vertOverflow="clip" horzOverflow="clip" wrap="square" rtlCol="0" anchor="ctr" anchorCtr="0">
+            <a:noAutofit/>
+          </a:bodyPr>
+          <a:lstStyle/>
+          <a:p>
+            <a:pPr algn="l"/>
+            <a:r>
+              <a:rPr lang="pt-PT" dirty="0">
+                <a:solidFill>
+                  <a:srgbClr val="FFFFFF"/>
+                </a:solidFill>
+                <a:latin typeface="Georgia"/>
+              </a:rPr>
+              <a:t>Três eixos interdependentes devem avançar em conjunto para alcançar </a:t>
+            </a:r>
+            <a:r>
+              <a:rPr lang="pt-PT" dirty="0" err="1">
+                <a:solidFill>
+                  <a:srgbClr val="FFFFFF"/>
+                </a:solidFill>
+                <a:latin typeface="Georgia"/>
+              </a:rPr>
+              <a:t>unlearning</a:t>
+            </a:r>
+            <a:r>
+              <a:rPr lang="pt-PT" dirty="0">
+                <a:solidFill>
+                  <a:srgbClr val="FFFFFF"/>
+                </a:solidFill>
+                <a:latin typeface="Georgia"/>
+              </a:rPr>
+              <a:t> responsável em edifícios inteligentes.</a:t>
+            </a:r>
+          </a:p>
+        </p:txBody>
+      </p:sp>
+      <p:sp>
+        <p:nvSpPr>
+          <p:cNvPr id="4" name="Oval 3">
+            <a:extLst>
+              <a:ext uri="{FF2B5EF4-FFF2-40B4-BE49-F238E27FC236}">
+                <a16:creationId xmlns:a16="http://schemas.microsoft.com/office/drawing/2014/main" id="{9E9680A7-A798-EB4F-9A16-720894964DB0}"/>
+              </a:ext>
+            </a:extLst>
+          </p:cNvPr>
+          <p:cNvSpPr/>
+          <p:nvPr/>
+        </p:nvSpPr>
+        <p:spPr>
+          <a:xfrm>
+            <a:off x="1905000" y="3149600"/>
+            <a:ext cx="660400" cy="660400"/>
+          </a:xfrm>
+          <a:prstGeom prst="ellipse">
+            <a:avLst/>
+          </a:prstGeom>
+          <a:solidFill>
+            <a:srgbClr val="156082"/>
+          </a:solidFill>
+          <a:ln w="19050" cap="flat" cmpd="sng" algn="ctr">
+            <a:noFill/>
+            <a:prstDash val="solid"/>
+            <a:miter lim="800000"/>
+          </a:ln>
+        </p:spPr>
+        <p:style>
+          <a:lnRef idx="2">
+            <a:schemeClr val="accent1">
+              <a:shade val="15000"/>
+            </a:schemeClr>
+          </a:lnRef>
+          <a:fillRef idx="1">
+            <a:schemeClr val="accent1"/>
+          </a:fillRef>
+          <a:effectRef idx="0">
+            <a:schemeClr val="accent1"/>
+          </a:effectRef>
+          <a:fontRef idx="minor">
+            <a:schemeClr val="lt1"/>
+          </a:fontRef>
+        </p:style>
+        <p:txBody>
+          <a:bodyPr vertOverflow="clip" horzOverflow="clip" wrap="none" rtlCol="0" anchor="ctr" anchorCtr="0">
+            <a:noAutofit/>
+          </a:bodyPr>
+          <a:lstStyle/>
+          <a:p>
+            <a:pPr algn="l"/>
+            <a:r>
+              <a:rPr lang="pt-PT" sz="2400" b="1">
+                <a:solidFill>
+                  <a:srgbClr val="FFFFFF"/>
+                </a:solidFill>
+                <a:latin typeface="Georgia"/>
+              </a:rPr>
+              <a:t>1</a:t>
+            </a:r>
+          </a:p>
+        </p:txBody>
+      </p:sp>
+      <p:sp>
+        <p:nvSpPr>
+          <p:cNvPr id="5" name="CaixaDeTexto 4">
+            <a:extLst>
+              <a:ext uri="{FF2B5EF4-FFF2-40B4-BE49-F238E27FC236}">
+                <a16:creationId xmlns:a16="http://schemas.microsoft.com/office/drawing/2014/main" id="{3ACB55E4-8882-B34D-AA4C-D5C13B32944F}"/>
+              </a:ext>
+            </a:extLst>
+          </p:cNvPr>
+          <p:cNvSpPr txBox="1"/>
+          <p:nvPr/>
+        </p:nvSpPr>
+        <p:spPr>
+          <a:xfrm>
+            <a:off x="457200" y="3911600"/>
+            <a:ext cx="3556000" cy="355600"/>
+          </a:xfrm>
+          <a:prstGeom prst="rect">
+            <a:avLst/>
+          </a:prstGeom>
+          <a:noFill/>
+        </p:spPr>
+        <p:txBody>
+          <a:bodyPr vertOverflow="overflow" vert="horz" wrap="square" rtlCol="0" anchor="t">
+            <a:spAutoFit/>
+          </a:bodyPr>
+          <a:lstStyle/>
+          <a:p>
+            <a:pPr algn="l"/>
+            <a:r>
+              <a:rPr lang="pt-PT" b="1">
+                <a:solidFill>
+                  <a:srgbClr val="156082"/>
+                </a:solidFill>
+                <a:latin typeface="Georgia"/>
+              </a:rPr>
+              <a:t>Escalabilidade</a:t>
+            </a:r>
+          </a:p>
+        </p:txBody>
+      </p:sp>
+      <p:sp>
+        <p:nvSpPr>
+          <p:cNvPr id="6" name="CaixaDeTexto 5">
+            <a:extLst>
+              <a:ext uri="{FF2B5EF4-FFF2-40B4-BE49-F238E27FC236}">
+                <a16:creationId xmlns:a16="http://schemas.microsoft.com/office/drawing/2014/main" id="{F1B271A0-DCA7-144A-B43F-8F2AFE211EEE}"/>
+              </a:ext>
+            </a:extLst>
+          </p:cNvPr>
+          <p:cNvSpPr txBox="1"/>
+          <p:nvPr/>
+        </p:nvSpPr>
+        <p:spPr>
+          <a:xfrm>
+            <a:off x="457200" y="4318000"/>
+            <a:ext cx="3556000" cy="889000"/>
+          </a:xfrm>
+          <a:prstGeom prst="rect">
+            <a:avLst/>
+          </a:prstGeom>
+          <a:noFill/>
+        </p:spPr>
+        <p:txBody>
+          <a:bodyPr vertOverflow="overflow" vert="horz" wrap="square" rtlCol="0" anchor="t">
+            <a:spAutoFit/>
+          </a:bodyPr>
+          <a:lstStyle/>
+          <a:p>
+            <a:pPr algn="l"/>
+            <a:r>
+              <a:rPr lang="pt-PT" sz="1400" dirty="0">
+                <a:solidFill>
+                  <a:srgbClr val="1A2332"/>
+                </a:solidFill>
+                <a:latin typeface="Calibri"/>
+                <a:cs typeface="Calibri"/>
+              </a:rPr>
+              <a:t>Primitivas de </a:t>
+            </a:r>
+            <a:r>
+              <a:rPr lang="pt-PT" sz="1400" dirty="0" err="1">
+                <a:solidFill>
+                  <a:srgbClr val="1A2332"/>
+                </a:solidFill>
+                <a:latin typeface="Calibri"/>
+                <a:cs typeface="Calibri"/>
+              </a:rPr>
+              <a:t>erasure</a:t>
+            </a:r>
+            <a:r>
+              <a:rPr lang="pt-PT" sz="1400" dirty="0">
+                <a:solidFill>
+                  <a:srgbClr val="1A2332"/>
+                </a:solidFill>
+                <a:latin typeface="Calibri"/>
+                <a:cs typeface="Calibri"/>
+              </a:rPr>
+              <a:t> </a:t>
+            </a:r>
+            <a:r>
+              <a:rPr lang="pt-PT" sz="1400" dirty="0" err="1">
+                <a:solidFill>
+                  <a:srgbClr val="1A2332"/>
+                </a:solidFill>
+                <a:latin typeface="Calibri"/>
+                <a:cs typeface="Calibri"/>
+              </a:rPr>
+              <a:t>on-device</a:t>
+            </a:r>
+            <a:r>
+              <a:rPr lang="pt-PT" sz="1400" dirty="0">
+                <a:solidFill>
+                  <a:srgbClr val="1A2332"/>
+                </a:solidFill>
+                <a:latin typeface="Calibri"/>
+                <a:cs typeface="Calibri"/>
+              </a:rPr>
+              <a:t> (</a:t>
+            </a:r>
+            <a:r>
+              <a:rPr lang="pt-PT" sz="1400" dirty="0" err="1">
+                <a:solidFill>
+                  <a:srgbClr val="1A2332"/>
+                </a:solidFill>
+                <a:latin typeface="Calibri"/>
+                <a:cs typeface="Calibri"/>
+              </a:rPr>
+              <a:t>TinyML</a:t>
+            </a:r>
+            <a:r>
+              <a:rPr lang="pt-PT" sz="1400" dirty="0">
+                <a:solidFill>
+                  <a:srgbClr val="1A2332"/>
+                </a:solidFill>
+                <a:latin typeface="Calibri"/>
+                <a:cs typeface="Calibri"/>
+              </a:rPr>
+              <a:t>, </a:t>
+            </a:r>
+            <a:r>
+              <a:rPr lang="pt-PT" sz="1400" dirty="0" err="1">
+                <a:solidFill>
+                  <a:srgbClr val="1A2332"/>
+                </a:solidFill>
+                <a:latin typeface="Calibri"/>
+                <a:cs typeface="Calibri"/>
+              </a:rPr>
+              <a:t>sparse</a:t>
+            </a:r>
+            <a:r>
+              <a:rPr lang="pt-PT" sz="1400" dirty="0">
+                <a:solidFill>
+                  <a:srgbClr val="1A2332"/>
+                </a:solidFill>
+                <a:latin typeface="Calibri"/>
+                <a:cs typeface="Calibri"/>
+              </a:rPr>
+              <a:t> </a:t>
+            </a:r>
+            <a:r>
+              <a:rPr lang="pt-PT" sz="1400" dirty="0" err="1">
+                <a:solidFill>
+                  <a:srgbClr val="1A2332"/>
+                </a:solidFill>
+                <a:latin typeface="Calibri"/>
+                <a:cs typeface="Calibri"/>
+              </a:rPr>
+              <a:t>updates</a:t>
+            </a:r>
+            <a:r>
+              <a:rPr lang="pt-PT" sz="1400" dirty="0">
+                <a:solidFill>
+                  <a:srgbClr val="1A2332"/>
+                </a:solidFill>
+                <a:latin typeface="Calibri"/>
+                <a:cs typeface="Calibri"/>
+              </a:rPr>
+              <a:t>) que caibam em </a:t>
+            </a:r>
+            <a:r>
+              <a:rPr lang="pt-PT" sz="1400" dirty="0" err="1">
+                <a:solidFill>
+                  <a:srgbClr val="1A2332"/>
+                </a:solidFill>
+                <a:latin typeface="Calibri"/>
+                <a:cs typeface="Calibri"/>
+              </a:rPr>
+              <a:t>MCUs</a:t>
+            </a:r>
+            <a:endParaRPr lang="pt-PT" sz="1400" dirty="0">
+              <a:solidFill>
+                <a:srgbClr val="1A2332"/>
+              </a:solidFill>
+              <a:latin typeface="Calibri"/>
+              <a:cs typeface="Calibri"/>
+            </a:endParaRPr>
+          </a:p>
+        </p:txBody>
+      </p:sp>
+      <p:sp>
+        <p:nvSpPr>
+          <p:cNvPr id="7" name="Oval 6">
+            <a:extLst>
+              <a:ext uri="{FF2B5EF4-FFF2-40B4-BE49-F238E27FC236}">
+                <a16:creationId xmlns:a16="http://schemas.microsoft.com/office/drawing/2014/main" id="{E515DE8B-DDC7-1C45-BB89-29C411889968}"/>
+              </a:ext>
+            </a:extLst>
+          </p:cNvPr>
+          <p:cNvSpPr/>
+          <p:nvPr/>
+        </p:nvSpPr>
+        <p:spPr>
+          <a:xfrm>
+            <a:off x="5765800" y="3149600"/>
+            <a:ext cx="660400" cy="660400"/>
+          </a:xfrm>
+          <a:prstGeom prst="ellipse">
+            <a:avLst/>
+          </a:prstGeom>
+          <a:solidFill>
+            <a:srgbClr val="B5511A"/>
+          </a:solidFill>
+          <a:ln w="19050" cap="flat" cmpd="sng" algn="ctr">
+            <a:noFill/>
+            <a:prstDash val="solid"/>
+            <a:miter lim="800000"/>
+          </a:ln>
+        </p:spPr>
+        <p:style>
+          <a:lnRef idx="2">
+            <a:schemeClr val="accent1">
+              <a:shade val="15000"/>
+            </a:schemeClr>
+          </a:lnRef>
+          <a:fillRef idx="1">
+            <a:schemeClr val="accent1"/>
+          </a:fillRef>
+          <a:effectRef idx="0">
+            <a:schemeClr val="accent1"/>
+          </a:effectRef>
+          <a:fontRef idx="minor">
+            <a:schemeClr val="lt1"/>
+          </a:fontRef>
+        </p:style>
+        <p:txBody>
+          <a:bodyPr vertOverflow="clip" horzOverflow="clip" wrap="none" rtlCol="0" anchor="ctr" anchorCtr="0">
+            <a:noAutofit/>
+          </a:bodyPr>
+          <a:lstStyle/>
+          <a:p>
+            <a:pPr algn="l"/>
+            <a:r>
+              <a:rPr lang="pt-PT" sz="2400" b="1">
+                <a:solidFill>
+                  <a:srgbClr val="FFFFFF"/>
+                </a:solidFill>
+                <a:latin typeface="Georgia"/>
+              </a:rPr>
+              <a:t>2</a:t>
+            </a:r>
+          </a:p>
+        </p:txBody>
+      </p:sp>
+      <p:sp>
+        <p:nvSpPr>
+          <p:cNvPr id="8" name="CaixaDeTexto 7">
+            <a:extLst>
+              <a:ext uri="{FF2B5EF4-FFF2-40B4-BE49-F238E27FC236}">
+                <a16:creationId xmlns:a16="http://schemas.microsoft.com/office/drawing/2014/main" id="{F5D6C62E-2312-B342-A6C3-075830E885C8}"/>
+              </a:ext>
+            </a:extLst>
+          </p:cNvPr>
+          <p:cNvSpPr txBox="1"/>
+          <p:nvPr/>
+        </p:nvSpPr>
+        <p:spPr>
+          <a:xfrm>
+            <a:off x="4318000" y="3911600"/>
+            <a:ext cx="3556000" cy="355600"/>
+          </a:xfrm>
+          <a:prstGeom prst="rect">
+            <a:avLst/>
+          </a:prstGeom>
+          <a:noFill/>
+        </p:spPr>
+        <p:txBody>
+          <a:bodyPr vertOverflow="overflow" vert="horz" wrap="square" rtlCol="0" anchor="t">
+            <a:spAutoFit/>
+          </a:bodyPr>
+          <a:lstStyle/>
+          <a:p>
+            <a:pPr algn="l"/>
+            <a:r>
+              <a:rPr lang="pt-PT" b="1">
+                <a:solidFill>
+                  <a:srgbClr val="E97132"/>
+                </a:solidFill>
+                <a:latin typeface="Georgia"/>
+              </a:rPr>
+              <a:t>Verificação</a:t>
+            </a:r>
+          </a:p>
+        </p:txBody>
+      </p:sp>
+      <p:sp>
+        <p:nvSpPr>
+          <p:cNvPr id="9" name="CaixaDeTexto 8">
+            <a:extLst>
+              <a:ext uri="{FF2B5EF4-FFF2-40B4-BE49-F238E27FC236}">
+                <a16:creationId xmlns:a16="http://schemas.microsoft.com/office/drawing/2014/main" id="{F6523AA0-022C-154C-8804-9E925EF75963}"/>
+              </a:ext>
+            </a:extLst>
+          </p:cNvPr>
+          <p:cNvSpPr txBox="1"/>
+          <p:nvPr/>
+        </p:nvSpPr>
+        <p:spPr>
+          <a:xfrm>
+            <a:off x="4318000" y="4318000"/>
+            <a:ext cx="3556000" cy="889000"/>
+          </a:xfrm>
+          <a:prstGeom prst="rect">
+            <a:avLst/>
+          </a:prstGeom>
+          <a:noFill/>
+        </p:spPr>
+        <p:txBody>
+          <a:bodyPr vertOverflow="overflow" vert="horz" wrap="square" rtlCol="0" anchor="t">
+            <a:spAutoFit/>
+          </a:bodyPr>
+          <a:lstStyle/>
+          <a:p>
+            <a:pPr algn="l"/>
+            <a:r>
+              <a:rPr lang="pt-PT" sz="1400" dirty="0">
+                <a:solidFill>
+                  <a:srgbClr val="1A2332"/>
+                </a:solidFill>
+                <a:latin typeface="Calibri"/>
+                <a:cs typeface="Calibri"/>
+              </a:rPr>
+              <a:t>Provas auditáveis via TEE + ZKP + contabilização de privacidade diferencial</a:t>
+            </a:r>
+          </a:p>
+        </p:txBody>
+      </p:sp>
+      <p:sp>
+        <p:nvSpPr>
+          <p:cNvPr id="10" name="Oval 9">
+            <a:extLst>
+              <a:ext uri="{FF2B5EF4-FFF2-40B4-BE49-F238E27FC236}">
+                <a16:creationId xmlns:a16="http://schemas.microsoft.com/office/drawing/2014/main" id="{AA8477AF-7D99-C44C-B184-6DE4F3C85E0B}"/>
+              </a:ext>
+            </a:extLst>
+          </p:cNvPr>
+          <p:cNvSpPr/>
+          <p:nvPr/>
+        </p:nvSpPr>
+        <p:spPr>
+          <a:xfrm>
+            <a:off x="9626600" y="3149600"/>
+            <a:ext cx="660400" cy="660400"/>
+          </a:xfrm>
+          <a:prstGeom prst="ellipse">
+            <a:avLst/>
+          </a:prstGeom>
+          <a:solidFill>
+            <a:srgbClr val="196B24"/>
+          </a:solidFill>
+          <a:ln w="19050" cap="flat" cmpd="sng" algn="ctr">
+            <a:noFill/>
+            <a:prstDash val="solid"/>
+            <a:miter lim="800000"/>
+          </a:ln>
+        </p:spPr>
+        <p:style>
+          <a:lnRef idx="2">
+            <a:schemeClr val="accent1">
+              <a:shade val="15000"/>
+            </a:schemeClr>
+          </a:lnRef>
+          <a:fillRef idx="1">
+            <a:schemeClr val="accent1"/>
+          </a:fillRef>
+          <a:effectRef idx="0">
+            <a:schemeClr val="accent1"/>
+          </a:effectRef>
+          <a:fontRef idx="minor">
+            <a:schemeClr val="lt1"/>
+          </a:fontRef>
+        </p:style>
+        <p:txBody>
+          <a:bodyPr vertOverflow="clip" horzOverflow="clip" wrap="none" rtlCol="0" anchor="ctr" anchorCtr="0">
+            <a:noAutofit/>
+          </a:bodyPr>
+          <a:lstStyle/>
+          <a:p>
+            <a:pPr algn="l"/>
+            <a:r>
+              <a:rPr lang="pt-PT" sz="2400" b="1">
+                <a:solidFill>
+                  <a:srgbClr val="FFFFFF"/>
+                </a:solidFill>
+                <a:latin typeface="Georgia"/>
+              </a:rPr>
+              <a:t>3</a:t>
+            </a:r>
+          </a:p>
+        </p:txBody>
+      </p:sp>
+      <p:sp>
+        <p:nvSpPr>
+          <p:cNvPr id="11" name="CaixaDeTexto 10">
+            <a:extLst>
+              <a:ext uri="{FF2B5EF4-FFF2-40B4-BE49-F238E27FC236}">
+                <a16:creationId xmlns:a16="http://schemas.microsoft.com/office/drawing/2014/main" id="{D2B5A08D-2BC6-294D-8D85-7A577EFF5507}"/>
+              </a:ext>
+            </a:extLst>
+          </p:cNvPr>
+          <p:cNvSpPr txBox="1"/>
+          <p:nvPr/>
+        </p:nvSpPr>
+        <p:spPr>
+          <a:xfrm>
+            <a:off x="8178800" y="3911600"/>
+            <a:ext cx="3556000" cy="355600"/>
+          </a:xfrm>
+          <a:prstGeom prst="rect">
+            <a:avLst/>
+          </a:prstGeom>
+          <a:noFill/>
+        </p:spPr>
+        <p:txBody>
+          <a:bodyPr vertOverflow="overflow" vert="horz" wrap="square" rtlCol="0" anchor="t">
+            <a:spAutoFit/>
+          </a:bodyPr>
+          <a:lstStyle/>
+          <a:p>
+            <a:pPr algn="l"/>
+            <a:r>
+              <a:rPr lang="pt-PT" b="1">
+                <a:solidFill>
+                  <a:srgbClr val="196B24"/>
+                </a:solidFill>
+                <a:latin typeface="Georgia"/>
+              </a:rPr>
+              <a:t>Regulação</a:t>
+            </a:r>
+          </a:p>
+        </p:txBody>
+      </p:sp>
+      <p:sp>
+        <p:nvSpPr>
+          <p:cNvPr id="12" name="CaixaDeTexto 11">
+            <a:extLst>
+              <a:ext uri="{FF2B5EF4-FFF2-40B4-BE49-F238E27FC236}">
+                <a16:creationId xmlns:a16="http://schemas.microsoft.com/office/drawing/2014/main" id="{5934ED8C-06A1-2348-B7E1-FE5CFEE7AEA2}"/>
+              </a:ext>
+            </a:extLst>
+          </p:cNvPr>
+          <p:cNvSpPr txBox="1"/>
+          <p:nvPr/>
+        </p:nvSpPr>
+        <p:spPr>
+          <a:xfrm>
+            <a:off x="8178800" y="4318000"/>
+            <a:ext cx="3556000" cy="889000"/>
+          </a:xfrm>
+          <a:prstGeom prst="rect">
+            <a:avLst/>
+          </a:prstGeom>
+          <a:noFill/>
+        </p:spPr>
+        <p:txBody>
+          <a:bodyPr vertOverflow="overflow" vert="horz" wrap="square" rtlCol="0" anchor="t">
+            <a:spAutoFit/>
+          </a:bodyPr>
+          <a:lstStyle/>
+          <a:p>
+            <a:pPr algn="l"/>
+            <a:r>
+              <a:rPr lang="pt-PT" sz="1400" dirty="0">
+                <a:solidFill>
+                  <a:srgbClr val="1A2332"/>
+                </a:solidFill>
+                <a:latin typeface="Calibri"/>
+                <a:cs typeface="Calibri"/>
+              </a:rPr>
+              <a:t>Alinhamento entre mecanismos técnicos e requisitos legais (RGPD </a:t>
+            </a:r>
+            <a:r>
+              <a:rPr lang="pt-PT" sz="1400" dirty="0" err="1">
+                <a:solidFill>
+                  <a:srgbClr val="1A2332"/>
+                </a:solidFill>
+                <a:latin typeface="Calibri"/>
+                <a:cs typeface="Calibri"/>
+              </a:rPr>
+              <a:t>Art</a:t>
+            </a:r>
+            <a:r>
+              <a:rPr lang="pt-PT" sz="1400" dirty="0">
+                <a:solidFill>
+                  <a:srgbClr val="1A2332"/>
+                </a:solidFill>
+                <a:latin typeface="Calibri"/>
+                <a:cs typeface="Calibri"/>
+              </a:rPr>
+              <a:t>. 17)</a:t>
+            </a:r>
+          </a:p>
+        </p:txBody>
+      </p:sp>
+      <p:sp>
+        <p:nvSpPr>
+          <p:cNvPr id="13" name="Retângulo 12">
+            <a:extLst>
+              <a:ext uri="{FF2B5EF4-FFF2-40B4-BE49-F238E27FC236}">
+                <a16:creationId xmlns:a16="http://schemas.microsoft.com/office/drawing/2014/main" id="{C4774E2B-6863-4649-94A2-F0F2BB120D50}"/>
+              </a:ext>
+            </a:extLst>
+          </p:cNvPr>
+          <p:cNvSpPr/>
+          <p:nvPr/>
+        </p:nvSpPr>
+        <p:spPr>
+          <a:xfrm>
+            <a:off x="4064000" y="5334000"/>
+            <a:ext cx="4064000" cy="25400"/>
+          </a:xfrm>
+          <a:prstGeom prst="rect">
+            <a:avLst/>
+          </a:prstGeom>
+          <a:solidFill>
+            <a:srgbClr val="D0C9C0"/>
+          </a:solidFill>
+          <a:ln w="19050" cap="flat" cmpd="sng" algn="ctr">
+            <a:noFill/>
+            <a:prstDash val="solid"/>
+            <a:miter lim="800000"/>
+          </a:ln>
+        </p:spPr>
+        <p:style>
+          <a:lnRef idx="2">
+            <a:schemeClr val="accent1">
+              <a:shade val="15000"/>
+            </a:schemeClr>
+          </a:lnRef>
+          <a:fillRef idx="1">
+            <a:schemeClr val="accent1"/>
+          </a:fillRef>
+          <a:effectRef idx="0">
+            <a:schemeClr val="accent1"/>
+          </a:effectRef>
+          <a:fontRef idx="minor">
+            <a:schemeClr val="lt1"/>
+          </a:fontRef>
+        </p:style>
+        <p:txBody>
+          <a:bodyPr vertOverflow="clip" horzOverflow="clip" rtlCol="0" anchor="t"/>
+          <a:lstStyle/>
+          <a:p>
+            <a:pPr algn="l"/>
+            <a:endParaRPr lang="pt-PT"/>
+          </a:p>
+        </p:txBody>
+      </p:sp>
+    </p:spTree>
+    <p:extLst>
+      <p:ext uri="{BB962C8B-B14F-4D97-AF65-F5344CB8AC3E}">
+        <p14:creationId xmlns:p14="http://schemas.microsoft.com/office/powerpoint/2010/main" val="3757545887"/>
       </p:ext>
     </p:extLst>
   </p:cSld>

--- a/Entregas PhD/machine-unlearning.pptx
+++ b/Entregas PhD/machine-unlearning.pptx
@@ -5,7 +5,7 @@
     <p:sldMasterId id="2147483660" r:id="rId1"/>
   </p:sldMasterIdLst>
   <p:notesMasterIdLst>
-    <p:notesMasterId r:id="rId13"/>
+    <p:notesMasterId r:id="rId14"/>
   </p:notesMasterIdLst>
   <p:sldIdLst>
     <p:sldId id="257" r:id="rId2"/>
@@ -16,9 +16,10 @@
     <p:sldId id="281" r:id="rId7"/>
     <p:sldId id="282" r:id="rId8"/>
     <p:sldId id="283" r:id="rId9"/>
-    <p:sldId id="279" r:id="rId10"/>
-    <p:sldId id="271" r:id="rId11"/>
-    <p:sldId id="274" r:id="rId12"/>
+    <p:sldId id="284" r:id="rId10"/>
+    <p:sldId id="285" r:id="rId11"/>
+    <p:sldId id="271" r:id="rId12"/>
+    <p:sldId id="274" r:id="rId13"/>
   </p:sldIdLst>
   <p:sldSz cx="12192000" cy="6858000"/>
   <p:notesSz cx="6858000" cy="9144000"/>
@@ -2074,6 +2075,360 @@
     <p:extLst>
       <p:ext uri="{BB962C8B-B14F-4D97-AF65-F5344CB8AC3E}">
         <p14:creationId xmlns:p14="http://schemas.microsoft.com/office/powerpoint/2010/main" val="3765232671"/>
+      </p:ext>
+    </p:extLst>
+  </p:cSld>
+  <p:clrMapOvr>
+    <a:masterClrMapping/>
+  </p:clrMapOvr>
+</p:notes>
+</file>
+
+<file path=ppt/notesSlides/notesSlide8.xml><?xml version="1.0" encoding="utf-8"?>
+<p:notes xmlns:a="http://schemas.openxmlformats.org/drawingml/2006/main" xmlns:r="http://schemas.openxmlformats.org/officeDocument/2006/relationships" xmlns:p="http://schemas.openxmlformats.org/presentationml/2006/main">
+  <p:cSld>
+    <p:spTree>
+      <p:nvGrpSpPr>
+        <p:cNvPr id="1" name="">
+          <a:extLst>
+            <a:ext uri="{FF2B5EF4-FFF2-40B4-BE49-F238E27FC236}">
+              <a16:creationId xmlns:a16="http://schemas.microsoft.com/office/drawing/2014/main" id="{63CE8FE1-0FFE-8781-9AD1-FFD3FAF9C379}"/>
+            </a:ext>
+          </a:extLst>
+        </p:cNvPr>
+        <p:cNvGrpSpPr/>
+        <p:nvPr/>
+      </p:nvGrpSpPr>
+      <p:grpSpPr>
+        <a:xfrm>
+          <a:off x="0" y="0"/>
+          <a:ext cx="0" cy="0"/>
+          <a:chOff x="0" y="0"/>
+          <a:chExt cx="0" cy="0"/>
+        </a:xfrm>
+      </p:grpSpPr>
+      <p:sp>
+        <p:nvSpPr>
+          <p:cNvPr id="2" name="Marcador de Posição da Imagem do Diapositivo 1">
+            <a:extLst>
+              <a:ext uri="{FF2B5EF4-FFF2-40B4-BE49-F238E27FC236}">
+                <a16:creationId xmlns:a16="http://schemas.microsoft.com/office/drawing/2014/main" id="{E3680D96-26BA-2085-4609-8EC97081A674}"/>
+              </a:ext>
+            </a:extLst>
+          </p:cNvPr>
+          <p:cNvSpPr>
+            <a:spLocks noGrp="1" noRot="1" noChangeAspect="1"/>
+          </p:cNvSpPr>
+          <p:nvPr>
+            <p:ph type="sldImg"/>
+          </p:nvPr>
+        </p:nvSpPr>
+        <p:spPr/>
+      </p:sp>
+      <p:sp>
+        <p:nvSpPr>
+          <p:cNvPr id="3" name="Marcador de Posição de Notas 2">
+            <a:extLst>
+              <a:ext uri="{FF2B5EF4-FFF2-40B4-BE49-F238E27FC236}">
+                <a16:creationId xmlns:a16="http://schemas.microsoft.com/office/drawing/2014/main" id="{ACE278FB-44F2-A842-85E0-BFB88ED4BAA1}"/>
+              </a:ext>
+            </a:extLst>
+          </p:cNvPr>
+          <p:cNvSpPr>
+            <a:spLocks noGrp="1"/>
+          </p:cNvSpPr>
+          <p:nvPr>
+            <p:ph type="body" idx="1"/>
+          </p:nvPr>
+        </p:nvSpPr>
+        <p:spPr/>
+        <p:txBody>
+          <a:bodyPr/>
+          <a:lstStyle/>
+          <a:p>
+            <a:pPr marL="0" marR="0" lvl="0" indent="0" algn="l" defTabSz="914400" rtl="0" eaLnBrk="1" fontAlgn="auto" latinLnBrk="0" hangingPunct="1">
+              <a:lnSpc>
+                <a:spcPct val="100000"/>
+              </a:lnSpc>
+              <a:spcBef>
+                <a:spcPts val="0"/>
+              </a:spcBef>
+              <a:spcAft>
+                <a:spcPts val="0"/>
+              </a:spcAft>
+              <a:buClrTx/>
+              <a:buSzTx/>
+              <a:buFontTx/>
+              <a:buNone/>
+              <a:tabLst/>
+              <a:defRPr/>
+            </a:pPr>
+            <a:r>
+              <a:rPr lang="pt-PT" sz="1200" i="1" dirty="0">
+                <a:solidFill>
+                  <a:srgbClr val="1A2332"/>
+                </a:solidFill>
+                <a:latin typeface="Calibri"/>
+                <a:cs typeface="Calibri"/>
+              </a:rPr>
+              <a:t>Sem </a:t>
+            </a:r>
+            <a:r>
+              <a:rPr lang="pt-PT" sz="1200" i="1" dirty="0" err="1">
+                <a:solidFill>
+                  <a:srgbClr val="1A2332"/>
+                </a:solidFill>
+                <a:latin typeface="Calibri"/>
+                <a:cs typeface="Calibri"/>
+              </a:rPr>
+              <a:t>benchmark</a:t>
+            </a:r>
+            <a:r>
+              <a:rPr lang="pt-PT" sz="1200" i="1" dirty="0">
+                <a:solidFill>
+                  <a:srgbClr val="1A2332"/>
+                </a:solidFill>
+                <a:latin typeface="Calibri"/>
+                <a:cs typeface="Calibri"/>
+              </a:rPr>
+              <a:t> partilhado: cada estudo usa as suas próprias métricas, </a:t>
+            </a:r>
+            <a:r>
+              <a:rPr lang="pt-PT" sz="1200" i="1" dirty="0" err="1">
+                <a:solidFill>
+                  <a:srgbClr val="1A2332"/>
+                </a:solidFill>
+                <a:latin typeface="Calibri"/>
+                <a:cs typeface="Calibri"/>
+              </a:rPr>
+              <a:t>datasets</a:t>
+            </a:r>
+            <a:r>
+              <a:rPr lang="pt-PT" sz="1200" i="1" dirty="0">
+                <a:solidFill>
+                  <a:srgbClr val="1A2332"/>
+                </a:solidFill>
+                <a:latin typeface="Calibri"/>
+                <a:cs typeface="Calibri"/>
+              </a:rPr>
+              <a:t> e modelos de ameaça — impossível comparar soluções parciais.</a:t>
+            </a:r>
+          </a:p>
+          <a:p>
+            <a:endParaRPr lang="pt-PT" dirty="0"/>
+          </a:p>
+        </p:txBody>
+      </p:sp>
+      <p:sp>
+        <p:nvSpPr>
+          <p:cNvPr id="4" name="Marcador de Posição do Número do Diapositivo 3">
+            <a:extLst>
+              <a:ext uri="{FF2B5EF4-FFF2-40B4-BE49-F238E27FC236}">
+                <a16:creationId xmlns:a16="http://schemas.microsoft.com/office/drawing/2014/main" id="{68CD6910-FC17-5FCD-3A29-54D5911C2C5F}"/>
+              </a:ext>
+            </a:extLst>
+          </p:cNvPr>
+          <p:cNvSpPr>
+            <a:spLocks noGrp="1"/>
+          </p:cNvSpPr>
+          <p:nvPr>
+            <p:ph type="sldNum" sz="quarter" idx="5"/>
+          </p:nvPr>
+        </p:nvSpPr>
+        <p:spPr/>
+        <p:txBody>
+          <a:bodyPr/>
+          <a:lstStyle/>
+          <a:p>
+            <a:fld id="{4BEEEA3F-08CE-6043-AB76-D392B1207876}" type="slidenum">
+              <a:rPr lang="pt-PT" smtClean="0"/>
+              <a:t>9</a:t>
+            </a:fld>
+            <a:endParaRPr lang="pt-PT"/>
+          </a:p>
+        </p:txBody>
+      </p:sp>
+    </p:spTree>
+    <p:extLst>
+      <p:ext uri="{BB962C8B-B14F-4D97-AF65-F5344CB8AC3E}">
+        <p14:creationId xmlns:p14="http://schemas.microsoft.com/office/powerpoint/2010/main" val="3891899684"/>
+      </p:ext>
+    </p:extLst>
+  </p:cSld>
+  <p:clrMapOvr>
+    <a:masterClrMapping/>
+  </p:clrMapOvr>
+</p:notes>
+</file>
+
+<file path=ppt/notesSlides/notesSlide9.xml><?xml version="1.0" encoding="utf-8"?>
+<p:notes xmlns:a="http://schemas.openxmlformats.org/drawingml/2006/main" xmlns:r="http://schemas.openxmlformats.org/officeDocument/2006/relationships" xmlns:p="http://schemas.openxmlformats.org/presentationml/2006/main">
+  <p:cSld>
+    <p:spTree>
+      <p:nvGrpSpPr>
+        <p:cNvPr id="1" name="">
+          <a:extLst>
+            <a:ext uri="{FF2B5EF4-FFF2-40B4-BE49-F238E27FC236}">
+              <a16:creationId xmlns:a16="http://schemas.microsoft.com/office/drawing/2014/main" id="{1F8B1AD9-2478-B77F-D2D6-4338A5314A25}"/>
+            </a:ext>
+          </a:extLst>
+        </p:cNvPr>
+        <p:cNvGrpSpPr/>
+        <p:nvPr/>
+      </p:nvGrpSpPr>
+      <p:grpSpPr>
+        <a:xfrm>
+          <a:off x="0" y="0"/>
+          <a:ext cx="0" cy="0"/>
+          <a:chOff x="0" y="0"/>
+          <a:chExt cx="0" cy="0"/>
+        </a:xfrm>
+      </p:grpSpPr>
+      <p:sp>
+        <p:nvSpPr>
+          <p:cNvPr id="2" name="Marcador de Posição da Imagem do Diapositivo 1">
+            <a:extLst>
+              <a:ext uri="{FF2B5EF4-FFF2-40B4-BE49-F238E27FC236}">
+                <a16:creationId xmlns:a16="http://schemas.microsoft.com/office/drawing/2014/main" id="{16F87413-56CC-DEE7-3553-988D37435D19}"/>
+              </a:ext>
+            </a:extLst>
+          </p:cNvPr>
+          <p:cNvSpPr>
+            <a:spLocks noGrp="1" noRot="1" noChangeAspect="1"/>
+          </p:cNvSpPr>
+          <p:nvPr>
+            <p:ph type="sldImg"/>
+          </p:nvPr>
+        </p:nvSpPr>
+        <p:spPr/>
+      </p:sp>
+      <p:sp>
+        <p:nvSpPr>
+          <p:cNvPr id="3" name="Marcador de Posição de Notas 2">
+            <a:extLst>
+              <a:ext uri="{FF2B5EF4-FFF2-40B4-BE49-F238E27FC236}">
+                <a16:creationId xmlns:a16="http://schemas.microsoft.com/office/drawing/2014/main" id="{F8B268EE-26D4-B3A7-8374-D6C283F192F2}"/>
+              </a:ext>
+            </a:extLst>
+          </p:cNvPr>
+          <p:cNvSpPr>
+            <a:spLocks noGrp="1"/>
+          </p:cNvSpPr>
+          <p:nvPr>
+            <p:ph type="body" idx="1"/>
+          </p:nvPr>
+        </p:nvSpPr>
+        <p:spPr/>
+        <p:txBody>
+          <a:bodyPr/>
+          <a:lstStyle/>
+          <a:p>
+            <a:pPr marL="0" marR="0" lvl="0" indent="0" algn="l" defTabSz="914400" rtl="0" eaLnBrk="1" fontAlgn="auto" latinLnBrk="0" hangingPunct="1">
+              <a:lnSpc>
+                <a:spcPct val="100000"/>
+              </a:lnSpc>
+              <a:spcBef>
+                <a:spcPts val="0"/>
+              </a:spcBef>
+              <a:spcAft>
+                <a:spcPts val="0"/>
+              </a:spcAft>
+              <a:buClrTx/>
+              <a:buSzTx/>
+              <a:buFontTx/>
+              <a:buNone/>
+              <a:tabLst/>
+              <a:defRPr/>
+            </a:pPr>
+            <a:r>
+              <a:rPr lang="pt-PT" sz="1200" i="1" dirty="0">
+                <a:solidFill>
+                  <a:srgbClr val="1A2332"/>
+                </a:solidFill>
+                <a:latin typeface="Calibri"/>
+                <a:cs typeface="Calibri"/>
+              </a:rPr>
+              <a:t>Sem </a:t>
+            </a:r>
+            <a:r>
+              <a:rPr lang="pt-PT" sz="1200" i="1" dirty="0" err="1">
+                <a:solidFill>
+                  <a:srgbClr val="1A2332"/>
+                </a:solidFill>
+                <a:latin typeface="Calibri"/>
+                <a:cs typeface="Calibri"/>
+              </a:rPr>
+              <a:t>benchmark</a:t>
+            </a:r>
+            <a:r>
+              <a:rPr lang="pt-PT" sz="1200" i="1" dirty="0">
+                <a:solidFill>
+                  <a:srgbClr val="1A2332"/>
+                </a:solidFill>
+                <a:latin typeface="Calibri"/>
+                <a:cs typeface="Calibri"/>
+              </a:rPr>
+              <a:t> partilhado: cada estudo usa as suas próprias métricas, </a:t>
+            </a:r>
+            <a:r>
+              <a:rPr lang="pt-PT" sz="1200" i="1" dirty="0" err="1">
+                <a:solidFill>
+                  <a:srgbClr val="1A2332"/>
+                </a:solidFill>
+                <a:latin typeface="Calibri"/>
+                <a:cs typeface="Calibri"/>
+              </a:rPr>
+              <a:t>datasets</a:t>
+            </a:r>
+            <a:r>
+              <a:rPr lang="pt-PT" sz="1200" i="1" dirty="0">
+                <a:solidFill>
+                  <a:srgbClr val="1A2332"/>
+                </a:solidFill>
+                <a:latin typeface="Calibri"/>
+                <a:cs typeface="Calibri"/>
+              </a:rPr>
+              <a:t> e modelos de ameaça — impossível comparar soluções parciais.</a:t>
+            </a:r>
+          </a:p>
+          <a:p>
+            <a:endParaRPr lang="pt-PT" dirty="0"/>
+          </a:p>
+        </p:txBody>
+      </p:sp>
+      <p:sp>
+        <p:nvSpPr>
+          <p:cNvPr id="4" name="Marcador de Posição do Número do Diapositivo 3">
+            <a:extLst>
+              <a:ext uri="{FF2B5EF4-FFF2-40B4-BE49-F238E27FC236}">
+                <a16:creationId xmlns:a16="http://schemas.microsoft.com/office/drawing/2014/main" id="{1F1BE4FF-EEA4-2EC9-BDAC-87370AA99461}"/>
+              </a:ext>
+            </a:extLst>
+          </p:cNvPr>
+          <p:cNvSpPr>
+            <a:spLocks noGrp="1"/>
+          </p:cNvSpPr>
+          <p:nvPr>
+            <p:ph type="sldNum" sz="quarter" idx="5"/>
+          </p:nvPr>
+        </p:nvSpPr>
+        <p:spPr/>
+        <p:txBody>
+          <a:bodyPr/>
+          <a:lstStyle/>
+          <a:p>
+            <a:fld id="{4BEEEA3F-08CE-6043-AB76-D392B1207876}" type="slidenum">
+              <a:rPr lang="pt-PT" smtClean="0"/>
+              <a:t>10</a:t>
+            </a:fld>
+            <a:endParaRPr lang="pt-PT"/>
+          </a:p>
+        </p:txBody>
+      </p:sp>
+    </p:spTree>
+    <p:extLst>
+      <p:ext uri="{BB962C8B-B14F-4D97-AF65-F5344CB8AC3E}">
+        <p14:creationId xmlns:p14="http://schemas.microsoft.com/office/powerpoint/2010/main" val="3361521210"/>
       </p:ext>
     </p:extLst>
   </p:cSld>
@@ -5654,7 +6009,13 @@
   <p:cSld>
     <p:spTree>
       <p:nvGrpSpPr>
-        <p:cNvPr id="1" name=""/>
+        <p:cNvPr id="1" name="">
+          <a:extLst>
+            <a:ext uri="{FF2B5EF4-FFF2-40B4-BE49-F238E27FC236}">
+              <a16:creationId xmlns:a16="http://schemas.microsoft.com/office/drawing/2014/main" id="{FF2EF306-CE9A-537F-83E2-81BE360244C4}"/>
+            </a:ext>
+          </a:extLst>
+        </p:cNvPr>
         <p:cNvGrpSpPr/>
         <p:nvPr/>
       </p:nvGrpSpPr>
@@ -5671,7 +6032,7 @@
           <p:cNvPr id="2" name="Título 1">
             <a:extLst>
               <a:ext uri="{FF2B5EF4-FFF2-40B4-BE49-F238E27FC236}">
-                <a16:creationId xmlns:a16="http://schemas.microsoft.com/office/drawing/2014/main" id="{EBD52685-EEDA-3D69-3E46-D4D43E2FE8DF}"/>
+                <a16:creationId xmlns:a16="http://schemas.microsoft.com/office/drawing/2014/main" id="{F4955031-FE77-EE7D-79FE-7846014D1AA9}"/>
               </a:ext>
             </a:extLst>
           </p:cNvPr>
@@ -5687,27 +6048,25 @@
           <a:bodyPr/>
           <a:lstStyle/>
           <a:p>
-            <a:pPr algn="l">
-              <a:buNone/>
-            </a:pPr>
-            <a:r>
-              <a:rPr lang="pt-PT" sz="3200" b="1" dirty="0">
-                <a:solidFill>
-                  <a:srgbClr val="1A2332"/>
-                </a:solidFill>
-                <a:latin typeface="Georgia"/>
-              </a:rPr>
-              <a:t>Conclusão</a:t>
-            </a:r>
-          </a:p>
-        </p:txBody>
-      </p:sp>
-      <p:sp>
-        <p:nvSpPr>
-          <p:cNvPr id="3" name="Retângulo Arredondado 2">
-            <a:extLst>
-              <a:ext uri="{FF2B5EF4-FFF2-40B4-BE49-F238E27FC236}">
-                <a16:creationId xmlns:a16="http://schemas.microsoft.com/office/drawing/2014/main" id="{B81E05F5-3FF2-CC4A-8BA5-2622CA841F19}"/>
+            <a:r>
+              <a:rPr lang="pt-PT" sz="3200" b="1" dirty="0"/>
+              <a:t>Problema existente</a:t>
+            </a:r>
+            <a:endParaRPr lang="pt-PT" sz="3200" b="1" dirty="0">
+              <a:solidFill>
+                <a:srgbClr val="1A2332"/>
+              </a:solidFill>
+              <a:latin typeface="Georgia"/>
+            </a:endParaRPr>
+          </a:p>
+        </p:txBody>
+      </p:sp>
+      <p:sp>
+        <p:nvSpPr>
+          <p:cNvPr id="3" name="Retângulo 2">
+            <a:extLst>
+              <a:ext uri="{FF2B5EF4-FFF2-40B4-BE49-F238E27FC236}">
+                <a16:creationId xmlns:a16="http://schemas.microsoft.com/office/drawing/2014/main" id="{A94C7125-86A0-0E4D-DA1B-7C7537F10B2F}"/>
               </a:ext>
             </a:extLst>
           </p:cNvPr>
@@ -5717,9 +6076,9 @@
         <p:spPr>
           <a:xfrm>
             <a:off x="457200" y="1905000"/>
-            <a:ext cx="11277600" cy="889000"/>
-          </a:xfrm>
-          <a:prstGeom prst="roundRect">
+            <a:ext cx="3556000" cy="406400"/>
+          </a:xfrm>
+          <a:prstGeom prst="rect">
             <a:avLst/>
           </a:prstGeom>
           <a:solidFill>
@@ -5748,48 +6107,143 @@
           </a:fontRef>
         </p:style>
         <p:txBody>
-          <a:bodyPr vertOverflow="clip" horzOverflow="clip" wrap="square" rtlCol="0" anchor="ctr" anchorCtr="0">
+          <a:bodyPr vertOverflow="clip" horzOverflow="clip" wrap="none" rtlCol="0" anchor="ctr" anchorCtr="0">
             <a:noAutofit/>
           </a:bodyPr>
           <a:lstStyle/>
           <a:p>
             <a:pPr algn="l"/>
             <a:r>
-              <a:rPr lang="pt-PT" dirty="0">
+              <a:rPr lang="pt-PT" sz="1400" b="1">
                 <a:solidFill>
                   <a:srgbClr val="FFFFFF"/>
                 </a:solidFill>
-                <a:latin typeface="Georgia"/>
-              </a:rPr>
-              <a:t>Três eixos interdependentes devem avançar em conjunto para alcançar </a:t>
-            </a:r>
-            <a:r>
-              <a:rPr lang="pt-PT" dirty="0" err="1">
-                <a:solidFill>
-                  <a:srgbClr val="FFFFFF"/>
-                </a:solidFill>
-                <a:latin typeface="Georgia"/>
-              </a:rPr>
-              <a:t>unlearning</a:t>
-            </a:r>
-            <a:r>
-              <a:rPr lang="pt-PT" dirty="0">
-                <a:solidFill>
-                  <a:srgbClr val="FFFFFF"/>
-                </a:solidFill>
-                <a:latin typeface="Georgia"/>
-              </a:rPr>
-              <a:t> responsável em edifícios inteligentes.</a:t>
-            </a:r>
-          </a:p>
-        </p:txBody>
-      </p:sp>
-      <p:sp>
-        <p:nvSpPr>
-          <p:cNvPr id="4" name="Oval 3">
-            <a:extLst>
-              <a:ext uri="{FF2B5EF4-FFF2-40B4-BE49-F238E27FC236}">
-                <a16:creationId xmlns:a16="http://schemas.microsoft.com/office/drawing/2014/main" id="{9E9680A7-A798-EB4F-9A16-720894964DB0}"/>
+                <a:latin typeface="Calibri"/>
+                <a:cs typeface="Calibri"/>
+              </a:rPr>
+              <a:t>NA CLOUD</a:t>
+            </a:r>
+          </a:p>
+        </p:txBody>
+      </p:sp>
+      <p:sp>
+        <p:nvSpPr>
+          <p:cNvPr id="4" name="CaixaDeTexto 3">
+            <a:extLst>
+              <a:ext uri="{FF2B5EF4-FFF2-40B4-BE49-F238E27FC236}">
+                <a16:creationId xmlns:a16="http://schemas.microsoft.com/office/drawing/2014/main" id="{8B513B7E-594B-80CF-9ACE-366BD50C8208}"/>
+              </a:ext>
+            </a:extLst>
+          </p:cNvPr>
+          <p:cNvSpPr txBox="1"/>
+          <p:nvPr/>
+        </p:nvSpPr>
+        <p:spPr>
+          <a:xfrm>
+            <a:off x="457200" y="2514600"/>
+            <a:ext cx="3556000" cy="276999"/>
+          </a:xfrm>
+          <a:prstGeom prst="rect">
+            <a:avLst/>
+          </a:prstGeom>
+          <a:noFill/>
+        </p:spPr>
+        <p:txBody>
+          <a:bodyPr vertOverflow="overflow" vert="horz" wrap="square" rtlCol="0" anchor="t">
+            <a:spAutoFit/>
+          </a:bodyPr>
+          <a:lstStyle/>
+          <a:p>
+            <a:pPr algn="l"/>
+            <a:r>
+              <a:rPr lang="pt-PT" sz="1200" b="1">
+                <a:solidFill>
+                  <a:srgbClr val="6E7787"/>
+                </a:solidFill>
+                <a:latin typeface="Calibri"/>
+                <a:cs typeface="Calibri"/>
+              </a:rPr>
+              <a:t>MÉTODOS TÍPICOS</a:t>
+            </a:r>
+          </a:p>
+        </p:txBody>
+      </p:sp>
+      <p:sp>
+        <p:nvSpPr>
+          <p:cNvPr id="5" name="CaixaDeTexto 4">
+            <a:extLst>
+              <a:ext uri="{FF2B5EF4-FFF2-40B4-BE49-F238E27FC236}">
+                <a16:creationId xmlns:a16="http://schemas.microsoft.com/office/drawing/2014/main" id="{C043C43F-D14F-680C-E120-14396849CFFA}"/>
+              </a:ext>
+            </a:extLst>
+          </p:cNvPr>
+          <p:cNvSpPr txBox="1"/>
+          <p:nvPr/>
+        </p:nvSpPr>
+        <p:spPr>
+          <a:xfrm>
+            <a:off x="457200" y="2794000"/>
+            <a:ext cx="3556000" cy="584775"/>
+          </a:xfrm>
+          <a:prstGeom prst="rect">
+            <a:avLst/>
+          </a:prstGeom>
+          <a:noFill/>
+        </p:spPr>
+        <p:txBody>
+          <a:bodyPr vertOverflow="overflow" vert="horz" wrap="square" rtlCol="0" anchor="t">
+            <a:spAutoFit/>
+          </a:bodyPr>
+          <a:lstStyle/>
+          <a:p>
+            <a:r>
+              <a:rPr lang="pt-PT" sz="1600" dirty="0">
+                <a:solidFill>
+                  <a:srgbClr val="1A2332"/>
+                </a:solidFill>
+                <a:latin typeface="Calibri"/>
+                <a:cs typeface="Calibri"/>
+              </a:rPr>
+              <a:t>SISA, </a:t>
+            </a:r>
+            <a:r>
+              <a:rPr lang="pt-PT" sz="1600" dirty="0" err="1"/>
+              <a:t>gradient-based</a:t>
+            </a:r>
+            <a:r>
+              <a:rPr lang="pt-PT" sz="1600" dirty="0"/>
+              <a:t> </a:t>
+            </a:r>
+            <a:r>
+              <a:rPr lang="pt-PT" sz="1600" dirty="0" err="1"/>
+              <a:t>corrections</a:t>
+            </a:r>
+            <a:r>
+              <a:rPr lang="pt-PT" sz="1600" dirty="0"/>
+              <a:t>, </a:t>
+            </a:r>
+            <a:r>
+              <a:rPr lang="pt-PT" sz="1600" dirty="0" err="1"/>
+              <a:t>knowledge</a:t>
+            </a:r>
+            <a:r>
+              <a:rPr lang="pt-PT" sz="1600" dirty="0"/>
+              <a:t> </a:t>
+            </a:r>
+            <a:r>
+              <a:rPr lang="pt-PT" sz="1600" dirty="0" err="1"/>
+              <a:t>distillation</a:t>
+            </a:r>
+            <a:endParaRPr lang="pt-PT" sz="1600" dirty="0"/>
+          </a:p>
+        </p:txBody>
+      </p:sp>
+      <p:sp>
+        <p:nvSpPr>
+          <p:cNvPr id="6" name="Retângulo 5">
+            <a:extLst>
+              <a:ext uri="{FF2B5EF4-FFF2-40B4-BE49-F238E27FC236}">
+                <a16:creationId xmlns:a16="http://schemas.microsoft.com/office/drawing/2014/main" id="{C5632E25-6FAB-D7E5-912A-DC332049078F}"/>
               </a:ext>
             </a:extLst>
           </p:cNvPr>
@@ -5798,14 +6252,14 @@
         </p:nvSpPr>
         <p:spPr>
           <a:xfrm>
-            <a:off x="1905000" y="3149600"/>
-            <a:ext cx="660400" cy="660400"/>
-          </a:xfrm>
-          <a:prstGeom prst="ellipse">
+            <a:off x="457200" y="3911600"/>
+            <a:ext cx="3556000" cy="12700"/>
+          </a:xfrm>
+          <a:prstGeom prst="rect">
             <a:avLst/>
           </a:prstGeom>
           <a:solidFill>
-            <a:srgbClr val="156082"/>
+            <a:srgbClr val="D6D2CB"/>
           </a:solidFill>
           <a:ln w="19050" cap="flat" cmpd="sng" algn="ctr">
             <a:noFill/>
@@ -5830,30 +6284,20 @@
           </a:fontRef>
         </p:style>
         <p:txBody>
-          <a:bodyPr vertOverflow="clip" horzOverflow="clip" wrap="none" rtlCol="0" anchor="ctr" anchorCtr="0">
-            <a:noAutofit/>
-          </a:bodyPr>
+          <a:bodyPr vertOverflow="clip" horzOverflow="clip" rtlCol="0" anchor="t"/>
           <a:lstStyle/>
           <a:p>
             <a:pPr algn="l"/>
-            <a:r>
-              <a:rPr lang="pt-PT" sz="2400" b="1">
-                <a:solidFill>
-                  <a:srgbClr val="FFFFFF"/>
-                </a:solidFill>
-                <a:latin typeface="Georgia"/>
-              </a:rPr>
-              <a:t>1</a:t>
-            </a:r>
-          </a:p>
-        </p:txBody>
-      </p:sp>
-      <p:sp>
-        <p:nvSpPr>
-          <p:cNvPr id="5" name="CaixaDeTexto 4">
-            <a:extLst>
-              <a:ext uri="{FF2B5EF4-FFF2-40B4-BE49-F238E27FC236}">
-                <a16:creationId xmlns:a16="http://schemas.microsoft.com/office/drawing/2014/main" id="{3ACB55E4-8882-B34D-AA4C-D5C13B32944F}"/>
+            <a:endParaRPr lang="pt-PT" sz="2000"/>
+          </a:p>
+        </p:txBody>
+      </p:sp>
+      <p:sp>
+        <p:nvSpPr>
+          <p:cNvPr id="7" name="CaixaDeTexto 6">
+            <a:extLst>
+              <a:ext uri="{FF2B5EF4-FFF2-40B4-BE49-F238E27FC236}">
+                <a16:creationId xmlns:a16="http://schemas.microsoft.com/office/drawing/2014/main" id="{37A12741-A297-17A0-3104-10449B550A20}"/>
               </a:ext>
             </a:extLst>
           </p:cNvPr>
@@ -5862,8 +6306,8 @@
         </p:nvSpPr>
         <p:spPr>
           <a:xfrm>
-            <a:off x="457200" y="3911600"/>
-            <a:ext cx="3556000" cy="355600"/>
+            <a:off x="457200" y="4064000"/>
+            <a:ext cx="3556000" cy="276999"/>
           </a:xfrm>
           <a:prstGeom prst="rect">
             <a:avLst/>
@@ -5878,23 +6322,24 @@
           <a:p>
             <a:pPr algn="l"/>
             <a:r>
-              <a:rPr lang="pt-PT" b="1">
+              <a:rPr lang="pt-PT" sz="1200" b="1">
                 <a:solidFill>
                   <a:srgbClr val="156082"/>
                 </a:solidFill>
-                <a:latin typeface="Georgia"/>
-              </a:rPr>
-              <a:t>Escalabilidade</a:t>
-            </a:r>
-          </a:p>
-        </p:txBody>
-      </p:sp>
-      <p:sp>
-        <p:nvSpPr>
-          <p:cNvPr id="6" name="CaixaDeTexto 5">
-            <a:extLst>
-              <a:ext uri="{FF2B5EF4-FFF2-40B4-BE49-F238E27FC236}">
-                <a16:creationId xmlns:a16="http://schemas.microsoft.com/office/drawing/2014/main" id="{F1B271A0-DCA7-144A-B43F-8F2AFE211EEE}"/>
+                <a:latin typeface="Calibri"/>
+                <a:cs typeface="Calibri"/>
+              </a:rPr>
+              <a:t>LACUNA CENTRAL</a:t>
+            </a:r>
+          </a:p>
+        </p:txBody>
+      </p:sp>
+      <p:sp>
+        <p:nvSpPr>
+          <p:cNvPr id="8" name="CaixaDeTexto 7">
+            <a:extLst>
+              <a:ext uri="{FF2B5EF4-FFF2-40B4-BE49-F238E27FC236}">
+                <a16:creationId xmlns:a16="http://schemas.microsoft.com/office/drawing/2014/main" id="{EE08DC9E-46AB-5BEF-0323-CF876898CB5C}"/>
               </a:ext>
             </a:extLst>
           </p:cNvPr>
@@ -5903,8 +6348,8 @@
         </p:nvSpPr>
         <p:spPr>
           <a:xfrm>
-            <a:off x="457200" y="4318000"/>
-            <a:ext cx="3556000" cy="889000"/>
+            <a:off x="457200" y="4343400"/>
+            <a:ext cx="3556000" cy="830997"/>
           </a:xfrm>
           <a:prstGeom prst="rect">
             <a:avLst/>
@@ -5919,141 +6364,97 @@
           <a:p>
             <a:pPr algn="l"/>
             <a:r>
-              <a:rPr lang="pt-PT" sz="1400" dirty="0">
-                <a:solidFill>
-                  <a:srgbClr val="1A2332"/>
-                </a:solidFill>
-                <a:latin typeface="Calibri"/>
-                <a:cs typeface="Calibri"/>
-              </a:rPr>
-              <a:t>Primitivas de </a:t>
-            </a:r>
-            <a:r>
-              <a:rPr lang="pt-PT" sz="1400" dirty="0" err="1">
-                <a:solidFill>
-                  <a:srgbClr val="1A2332"/>
-                </a:solidFill>
-                <a:latin typeface="Calibri"/>
-                <a:cs typeface="Calibri"/>
-              </a:rPr>
-              <a:t>erasure</a:t>
-            </a:r>
-            <a:r>
-              <a:rPr lang="pt-PT" sz="1400" dirty="0">
-                <a:solidFill>
-                  <a:srgbClr val="1A2332"/>
-                </a:solidFill>
-                <a:latin typeface="Calibri"/>
-                <a:cs typeface="Calibri"/>
-              </a:rPr>
-              <a:t> </a:t>
-            </a:r>
-            <a:r>
-              <a:rPr lang="pt-PT" sz="1400" dirty="0" err="1">
-                <a:solidFill>
-                  <a:srgbClr val="1A2332"/>
-                </a:solidFill>
-                <a:latin typeface="Calibri"/>
-                <a:cs typeface="Calibri"/>
-              </a:rPr>
-              <a:t>on-device</a:t>
-            </a:r>
-            <a:r>
-              <a:rPr lang="pt-PT" sz="1400" dirty="0">
-                <a:solidFill>
-                  <a:srgbClr val="1A2332"/>
-                </a:solidFill>
-                <a:latin typeface="Calibri"/>
-                <a:cs typeface="Calibri"/>
-              </a:rPr>
-              <a:t> (</a:t>
-            </a:r>
-            <a:r>
-              <a:rPr lang="pt-PT" sz="1400" dirty="0" err="1">
-                <a:solidFill>
-                  <a:srgbClr val="1A2332"/>
-                </a:solidFill>
-                <a:latin typeface="Calibri"/>
-                <a:cs typeface="Calibri"/>
-              </a:rPr>
-              <a:t>TinyML</a:t>
-            </a:r>
-            <a:r>
-              <a:rPr lang="pt-PT" sz="1400" dirty="0">
-                <a:solidFill>
-                  <a:srgbClr val="1A2332"/>
-                </a:solidFill>
-                <a:latin typeface="Calibri"/>
-                <a:cs typeface="Calibri"/>
-              </a:rPr>
-              <a:t>, </a:t>
-            </a:r>
-            <a:r>
-              <a:rPr lang="pt-PT" sz="1400" dirty="0" err="1">
-                <a:solidFill>
-                  <a:srgbClr val="1A2332"/>
-                </a:solidFill>
-                <a:latin typeface="Calibri"/>
-                <a:cs typeface="Calibri"/>
-              </a:rPr>
-              <a:t>sparse</a:t>
-            </a:r>
-            <a:r>
-              <a:rPr lang="pt-PT" sz="1400" dirty="0">
-                <a:solidFill>
-                  <a:srgbClr val="1A2332"/>
-                </a:solidFill>
-                <a:latin typeface="Calibri"/>
-                <a:cs typeface="Calibri"/>
-              </a:rPr>
-              <a:t> </a:t>
-            </a:r>
-            <a:r>
-              <a:rPr lang="pt-PT" sz="1400" dirty="0" err="1">
-                <a:solidFill>
-                  <a:srgbClr val="1A2332"/>
-                </a:solidFill>
-                <a:latin typeface="Calibri"/>
-                <a:cs typeface="Calibri"/>
-              </a:rPr>
-              <a:t>updates</a:t>
-            </a:r>
-            <a:r>
-              <a:rPr lang="pt-PT" sz="1400" dirty="0">
-                <a:solidFill>
-                  <a:srgbClr val="1A2332"/>
-                </a:solidFill>
-                <a:latin typeface="Calibri"/>
-                <a:cs typeface="Calibri"/>
-              </a:rPr>
-              <a:t>) que caibam em </a:t>
-            </a:r>
-            <a:r>
-              <a:rPr lang="pt-PT" sz="1400" dirty="0" err="1">
-                <a:solidFill>
-                  <a:srgbClr val="1A2332"/>
-                </a:solidFill>
-                <a:latin typeface="Calibri"/>
-                <a:cs typeface="Calibri"/>
-              </a:rPr>
-              <a:t>MCUs</a:t>
-            </a:r>
-            <a:endParaRPr lang="pt-PT" sz="1400" dirty="0">
-              <a:solidFill>
-                <a:srgbClr val="1A2332"/>
-              </a:solidFill>
-              <a:latin typeface="Calibri"/>
-              <a:cs typeface="Calibri"/>
-            </a:endParaRPr>
-          </a:p>
-        </p:txBody>
-      </p:sp>
-      <p:sp>
-        <p:nvSpPr>
-          <p:cNvPr id="7" name="Oval 6">
-            <a:extLst>
-              <a:ext uri="{FF2B5EF4-FFF2-40B4-BE49-F238E27FC236}">
-                <a16:creationId xmlns:a16="http://schemas.microsoft.com/office/drawing/2014/main" id="{E515DE8B-DDC7-1C45-BB89-29C411889968}"/>
+              <a:rPr lang="pt-PT" sz="1600" i="1" dirty="0">
+                <a:solidFill>
+                  <a:srgbClr val="1A2332"/>
+                </a:solidFill>
+                <a:latin typeface="Calibri"/>
+                <a:cs typeface="Calibri"/>
+              </a:rPr>
+              <a:t>Ignora limites do </a:t>
+            </a:r>
+            <a:r>
+              <a:rPr lang="pt-PT" sz="1600" i="1" dirty="0" err="1">
+                <a:solidFill>
+                  <a:srgbClr val="1A2332"/>
+                </a:solidFill>
+                <a:latin typeface="Calibri"/>
+                <a:cs typeface="Calibri"/>
+              </a:rPr>
+              <a:t>edge</a:t>
+            </a:r>
+            <a:r>
+              <a:rPr lang="pt-PT" sz="1600" i="1" dirty="0">
+                <a:solidFill>
+                  <a:srgbClr val="1A2332"/>
+                </a:solidFill>
+                <a:latin typeface="Calibri"/>
+                <a:cs typeface="Calibri"/>
+              </a:rPr>
+              <a:t>; </a:t>
+            </a:r>
+          </a:p>
+          <a:p>
+            <a:pPr algn="l"/>
+            <a:r>
+              <a:rPr lang="pt-PT" sz="1600" i="1" dirty="0">
+                <a:solidFill>
+                  <a:srgbClr val="1A2332"/>
+                </a:solidFill>
+                <a:latin typeface="Calibri"/>
+                <a:cs typeface="Calibri"/>
+              </a:rPr>
+              <a:t>Assume </a:t>
+            </a:r>
+            <a:r>
+              <a:rPr lang="pt-PT" sz="1600" i="1" dirty="0" err="1">
+                <a:solidFill>
+                  <a:srgbClr val="1A2332"/>
+                </a:solidFill>
+                <a:latin typeface="Calibri"/>
+                <a:cs typeface="Calibri"/>
+              </a:rPr>
+              <a:t>dataset</a:t>
+            </a:r>
+            <a:r>
+              <a:rPr lang="pt-PT" sz="1600" i="1" dirty="0">
+                <a:solidFill>
+                  <a:srgbClr val="1A2332"/>
+                </a:solidFill>
+                <a:latin typeface="Calibri"/>
+                <a:cs typeface="Calibri"/>
+              </a:rPr>
+              <a:t> centralizado raramente Disponível em </a:t>
+            </a:r>
+            <a:r>
+              <a:rPr lang="pt-PT" sz="1600" i="1" dirty="0" err="1">
+                <a:solidFill>
+                  <a:srgbClr val="1A2332"/>
+                </a:solidFill>
+                <a:latin typeface="Calibri"/>
+                <a:cs typeface="Calibri"/>
+              </a:rPr>
+              <a:t>deployments</a:t>
+            </a:r>
+            <a:r>
+              <a:rPr lang="pt-PT" sz="1600" i="1" dirty="0">
+                <a:solidFill>
+                  <a:srgbClr val="1A2332"/>
+                </a:solidFill>
+                <a:latin typeface="Calibri"/>
+                <a:cs typeface="Calibri"/>
+              </a:rPr>
+              <a:t> federados.</a:t>
+            </a:r>
+          </a:p>
+        </p:txBody>
+      </p:sp>
+      <p:sp>
+        <p:nvSpPr>
+          <p:cNvPr id="9" name="Retângulo 8">
+            <a:extLst>
+              <a:ext uri="{FF2B5EF4-FFF2-40B4-BE49-F238E27FC236}">
+                <a16:creationId xmlns:a16="http://schemas.microsoft.com/office/drawing/2014/main" id="{2AF837EA-FA93-2173-8C67-D7178557683D}"/>
               </a:ext>
             </a:extLst>
           </p:cNvPr>
@@ -6062,10 +6463,10 @@
         </p:nvSpPr>
         <p:spPr>
           <a:xfrm>
-            <a:off x="5765800" y="3149600"/>
-            <a:ext cx="660400" cy="660400"/>
-          </a:xfrm>
-          <a:prstGeom prst="ellipse">
+            <a:off x="4318000" y="1905000"/>
+            <a:ext cx="3556000" cy="406400"/>
+          </a:xfrm>
+          <a:prstGeom prst="rect">
             <a:avLst/>
           </a:prstGeom>
           <a:solidFill>
@@ -6101,23 +6502,24 @@
           <a:p>
             <a:pPr algn="l"/>
             <a:r>
-              <a:rPr lang="pt-PT" sz="2400" b="1">
+              <a:rPr lang="pt-PT" sz="1400" b="1" dirty="0">
                 <a:solidFill>
                   <a:srgbClr val="FFFFFF"/>
                 </a:solidFill>
-                <a:latin typeface="Georgia"/>
-              </a:rPr>
-              <a:t>2</a:t>
-            </a:r>
-          </a:p>
-        </p:txBody>
-      </p:sp>
-      <p:sp>
-        <p:nvSpPr>
-          <p:cNvPr id="8" name="CaixaDeTexto 7">
-            <a:extLst>
-              <a:ext uri="{FF2B5EF4-FFF2-40B4-BE49-F238E27FC236}">
-                <a16:creationId xmlns:a16="http://schemas.microsoft.com/office/drawing/2014/main" id="{F5D6C62E-2312-B342-A6C3-075830E885C8}"/>
+                <a:latin typeface="Calibri"/>
+                <a:cs typeface="Calibri"/>
+              </a:rPr>
+              <a:t>NO EDGE</a:t>
+            </a:r>
+          </a:p>
+        </p:txBody>
+      </p:sp>
+      <p:sp>
+        <p:nvSpPr>
+          <p:cNvPr id="10" name="CaixaDeTexto 9">
+            <a:extLst>
+              <a:ext uri="{FF2B5EF4-FFF2-40B4-BE49-F238E27FC236}">
+                <a16:creationId xmlns:a16="http://schemas.microsoft.com/office/drawing/2014/main" id="{70A1F4F8-A128-4933-08B0-A13C898D3F90}"/>
               </a:ext>
             </a:extLst>
           </p:cNvPr>
@@ -6126,8 +6528,8 @@
         </p:nvSpPr>
         <p:spPr>
           <a:xfrm>
-            <a:off x="4318000" y="3911600"/>
-            <a:ext cx="3556000" cy="355600"/>
+            <a:off x="4318000" y="2514600"/>
+            <a:ext cx="3556000" cy="276999"/>
           </a:xfrm>
           <a:prstGeom prst="rect">
             <a:avLst/>
@@ -6142,23 +6544,24 @@
           <a:p>
             <a:pPr algn="l"/>
             <a:r>
-              <a:rPr lang="pt-PT" b="1">
-                <a:solidFill>
-                  <a:srgbClr val="E97132"/>
-                </a:solidFill>
-                <a:latin typeface="Georgia"/>
-              </a:rPr>
-              <a:t>Verificação</a:t>
-            </a:r>
-          </a:p>
-        </p:txBody>
-      </p:sp>
-      <p:sp>
-        <p:nvSpPr>
-          <p:cNvPr id="9" name="CaixaDeTexto 8">
-            <a:extLst>
-              <a:ext uri="{FF2B5EF4-FFF2-40B4-BE49-F238E27FC236}">
-                <a16:creationId xmlns:a16="http://schemas.microsoft.com/office/drawing/2014/main" id="{F6523AA0-022C-154C-8804-9E925EF75963}"/>
+              <a:rPr lang="pt-PT" sz="1200" b="1">
+                <a:solidFill>
+                  <a:srgbClr val="6E7787"/>
+                </a:solidFill>
+                <a:latin typeface="Calibri"/>
+                <a:cs typeface="Calibri"/>
+              </a:rPr>
+              <a:t>MÉTODOS TÍPICOS</a:t>
+            </a:r>
+          </a:p>
+        </p:txBody>
+      </p:sp>
+      <p:sp>
+        <p:nvSpPr>
+          <p:cNvPr id="11" name="CaixaDeTexto 10">
+            <a:extLst>
+              <a:ext uri="{FF2B5EF4-FFF2-40B4-BE49-F238E27FC236}">
+                <a16:creationId xmlns:a16="http://schemas.microsoft.com/office/drawing/2014/main" id="{915B07E4-95D3-2236-42C6-5B84208A5E79}"/>
               </a:ext>
             </a:extLst>
           </p:cNvPr>
@@ -6167,8 +6570,8 @@
         </p:nvSpPr>
         <p:spPr>
           <a:xfrm>
-            <a:off x="4318000" y="4318000"/>
-            <a:ext cx="3556000" cy="889000"/>
+            <a:off x="4318000" y="2794000"/>
+            <a:ext cx="3556000" cy="584775"/>
           </a:xfrm>
           <a:prstGeom prst="rect">
             <a:avLst/>
@@ -6181,26 +6584,52 @@
           </a:bodyPr>
           <a:lstStyle/>
           <a:p>
-            <a:pPr algn="l"/>
-            <a:r>
-              <a:rPr lang="pt-PT" sz="1400" dirty="0">
-                <a:solidFill>
-                  <a:srgbClr val="1A2332"/>
-                </a:solidFill>
-                <a:latin typeface="Calibri"/>
-                <a:cs typeface="Calibri"/>
-              </a:rPr>
-              <a:t>Provas auditáveis via TEE + ZKP + contabilização de privacidade diferencial</a:t>
-            </a:r>
-          </a:p>
-        </p:txBody>
-      </p:sp>
-      <p:sp>
-        <p:nvSpPr>
-          <p:cNvPr id="10" name="Oval 9">
-            <a:extLst>
-              <a:ext uri="{FF2B5EF4-FFF2-40B4-BE49-F238E27FC236}">
-                <a16:creationId xmlns:a16="http://schemas.microsoft.com/office/drawing/2014/main" id="{AA8477AF-7D99-C44C-B184-6DE4F3C85E0B}"/>
+            <a:r>
+              <a:rPr lang="pt-PT" sz="1600" dirty="0" err="1"/>
+              <a:t>gradient</a:t>
+            </a:r>
+            <a:r>
+              <a:rPr lang="pt-PT" sz="1600" dirty="0"/>
+              <a:t> </a:t>
+            </a:r>
+            <a:r>
+              <a:rPr lang="pt-PT" sz="1600" dirty="0" err="1"/>
+              <a:t>ascent</a:t>
+            </a:r>
+            <a:r>
+              <a:rPr lang="pt-PT" sz="1600" dirty="0"/>
+              <a:t>, </a:t>
+            </a:r>
+            <a:r>
+              <a:rPr lang="pt-PT" sz="1600" dirty="0" err="1"/>
+              <a:t>neuron</a:t>
+            </a:r>
+            <a:r>
+              <a:rPr lang="pt-PT" sz="1600" dirty="0"/>
+              <a:t> </a:t>
+            </a:r>
+            <a:r>
+              <a:rPr lang="pt-PT" sz="1600" dirty="0" err="1"/>
+              <a:t>pruning</a:t>
+            </a:r>
+            <a:r>
+              <a:rPr lang="pt-PT" sz="1600" dirty="0"/>
+              <a:t>, local fine-</a:t>
+            </a:r>
+            <a:r>
+              <a:rPr lang="pt-PT" sz="1600" dirty="0" err="1"/>
+              <a:t>tuning</a:t>
+            </a:r>
+            <a:endParaRPr lang="pt-PT" sz="1600" dirty="0"/>
+          </a:p>
+        </p:txBody>
+      </p:sp>
+      <p:sp>
+        <p:nvSpPr>
+          <p:cNvPr id="12" name="Retângulo 11">
+            <a:extLst>
+              <a:ext uri="{FF2B5EF4-FFF2-40B4-BE49-F238E27FC236}">
+                <a16:creationId xmlns:a16="http://schemas.microsoft.com/office/drawing/2014/main" id="{5B549D2A-8773-FB55-C4C1-87AD3F808B25}"/>
               </a:ext>
             </a:extLst>
           </p:cNvPr>
@@ -6209,14 +6638,14 @@
         </p:nvSpPr>
         <p:spPr>
           <a:xfrm>
-            <a:off x="9626600" y="3149600"/>
-            <a:ext cx="660400" cy="660400"/>
-          </a:xfrm>
-          <a:prstGeom prst="ellipse">
+            <a:off x="4318000" y="3911600"/>
+            <a:ext cx="3556000" cy="12700"/>
+          </a:xfrm>
+          <a:prstGeom prst="rect">
             <a:avLst/>
           </a:prstGeom>
           <a:solidFill>
-            <a:srgbClr val="196B24"/>
+            <a:srgbClr val="D6D2CB"/>
           </a:solidFill>
           <a:ln w="19050" cap="flat" cmpd="sng" algn="ctr">
             <a:noFill/>
@@ -6241,30 +6670,20 @@
           </a:fontRef>
         </p:style>
         <p:txBody>
-          <a:bodyPr vertOverflow="clip" horzOverflow="clip" wrap="none" rtlCol="0" anchor="ctr" anchorCtr="0">
-            <a:noAutofit/>
-          </a:bodyPr>
+          <a:bodyPr vertOverflow="clip" horzOverflow="clip" rtlCol="0" anchor="t"/>
           <a:lstStyle/>
           <a:p>
             <a:pPr algn="l"/>
-            <a:r>
-              <a:rPr lang="pt-PT" sz="2400" b="1">
-                <a:solidFill>
-                  <a:srgbClr val="FFFFFF"/>
-                </a:solidFill>
-                <a:latin typeface="Georgia"/>
-              </a:rPr>
-              <a:t>3</a:t>
-            </a:r>
-          </a:p>
-        </p:txBody>
-      </p:sp>
-      <p:sp>
-        <p:nvSpPr>
-          <p:cNvPr id="11" name="CaixaDeTexto 10">
-            <a:extLst>
-              <a:ext uri="{FF2B5EF4-FFF2-40B4-BE49-F238E27FC236}">
-                <a16:creationId xmlns:a16="http://schemas.microsoft.com/office/drawing/2014/main" id="{D2B5A08D-2BC6-294D-8D85-7A577EFF5507}"/>
+            <a:endParaRPr lang="pt-PT" sz="2000"/>
+          </a:p>
+        </p:txBody>
+      </p:sp>
+      <p:sp>
+        <p:nvSpPr>
+          <p:cNvPr id="13" name="CaixaDeTexto 12">
+            <a:extLst>
+              <a:ext uri="{FF2B5EF4-FFF2-40B4-BE49-F238E27FC236}">
+                <a16:creationId xmlns:a16="http://schemas.microsoft.com/office/drawing/2014/main" id="{4F4FCDE7-3F16-B0AD-E6F4-382AC2413E9F}"/>
               </a:ext>
             </a:extLst>
           </p:cNvPr>
@@ -6273,8 +6692,8 @@
         </p:nvSpPr>
         <p:spPr>
           <a:xfrm>
-            <a:off x="8178800" y="3911600"/>
-            <a:ext cx="3556000" cy="355600"/>
+            <a:off x="4318000" y="4064000"/>
+            <a:ext cx="3556000" cy="276999"/>
           </a:xfrm>
           <a:prstGeom prst="rect">
             <a:avLst/>
@@ -6289,23 +6708,24 @@
           <a:p>
             <a:pPr algn="l"/>
             <a:r>
-              <a:rPr lang="pt-PT" b="1">
-                <a:solidFill>
-                  <a:srgbClr val="196B24"/>
-                </a:solidFill>
-                <a:latin typeface="Georgia"/>
-              </a:rPr>
-              <a:t>Regulação</a:t>
-            </a:r>
-          </a:p>
-        </p:txBody>
-      </p:sp>
-      <p:sp>
-        <p:nvSpPr>
-          <p:cNvPr id="12" name="CaixaDeTexto 11">
-            <a:extLst>
-              <a:ext uri="{FF2B5EF4-FFF2-40B4-BE49-F238E27FC236}">
-                <a16:creationId xmlns:a16="http://schemas.microsoft.com/office/drawing/2014/main" id="{5934ED8C-06A1-2348-B7E1-FE5CFEE7AEA2}"/>
+              <a:rPr lang="pt-PT" sz="1200" b="1" dirty="0">
+                <a:solidFill>
+                  <a:srgbClr val="E97132"/>
+                </a:solidFill>
+                <a:latin typeface="Calibri"/>
+                <a:cs typeface="Calibri"/>
+              </a:rPr>
+              <a:t>LACUNA CENTRAL</a:t>
+            </a:r>
+          </a:p>
+        </p:txBody>
+      </p:sp>
+      <p:sp>
+        <p:nvSpPr>
+          <p:cNvPr id="14" name="CaixaDeTexto 13">
+            <a:extLst>
+              <a:ext uri="{FF2B5EF4-FFF2-40B4-BE49-F238E27FC236}">
+                <a16:creationId xmlns:a16="http://schemas.microsoft.com/office/drawing/2014/main" id="{3DC9890E-8171-F65D-6FA6-157AA9EFC67C}"/>
               </a:ext>
             </a:extLst>
           </p:cNvPr>
@@ -6314,8 +6734,8 @@
         </p:nvSpPr>
         <p:spPr>
           <a:xfrm>
-            <a:off x="8178800" y="4318000"/>
-            <a:ext cx="3556000" cy="889000"/>
+            <a:off x="4318000" y="4343400"/>
+            <a:ext cx="3556000" cy="830997"/>
           </a:xfrm>
           <a:prstGeom prst="rect">
             <a:avLst/>
@@ -6330,44 +6750,70 @@
           <a:p>
             <a:pPr algn="l"/>
             <a:r>
-              <a:rPr lang="pt-PT" sz="1400" dirty="0">
-                <a:solidFill>
-                  <a:srgbClr val="1A2332"/>
-                </a:solidFill>
-                <a:latin typeface="Calibri"/>
-                <a:cs typeface="Calibri"/>
-              </a:rPr>
-              <a:t>Alinhamento entre mecanismos técnicos e requisitos legais (RGPD </a:t>
-            </a:r>
-            <a:r>
-              <a:rPr lang="pt-PT" sz="1400" dirty="0" err="1">
-                <a:solidFill>
-                  <a:srgbClr val="1A2332"/>
-                </a:solidFill>
-                <a:latin typeface="Calibri"/>
-                <a:cs typeface="Calibri"/>
-              </a:rPr>
-              <a:t>Art</a:t>
-            </a:r>
-            <a:r>
-              <a:rPr lang="pt-PT" sz="1400" dirty="0">
-                <a:solidFill>
-                  <a:srgbClr val="1A2332"/>
-                </a:solidFill>
-                <a:latin typeface="Calibri"/>
-                <a:cs typeface="Calibri"/>
-              </a:rPr>
-              <a:t>. 17)</a:t>
-            </a:r>
-          </a:p>
-        </p:txBody>
-      </p:sp>
-      <p:sp>
-        <p:nvSpPr>
-          <p:cNvPr id="13" name="Retângulo 12">
-            <a:extLst>
-              <a:ext uri="{FF2B5EF4-FFF2-40B4-BE49-F238E27FC236}">
-                <a16:creationId xmlns:a16="http://schemas.microsoft.com/office/drawing/2014/main" id="{C4774E2B-6863-4649-94A2-F0F2BB120D50}"/>
+              <a:rPr lang="pt-PT" sz="1600" i="1" dirty="0">
+                <a:solidFill>
+                  <a:srgbClr val="1A2332"/>
+                </a:solidFill>
+                <a:latin typeface="Calibri"/>
+                <a:cs typeface="Calibri"/>
+              </a:rPr>
+              <a:t>Opera de forma isolada; </a:t>
+            </a:r>
+          </a:p>
+          <a:p>
+            <a:pPr algn="l"/>
+            <a:r>
+              <a:rPr lang="pt-PT" sz="1600" i="1" dirty="0">
+                <a:solidFill>
+                  <a:srgbClr val="1A2332"/>
+                </a:solidFill>
+                <a:latin typeface="Calibri"/>
+                <a:cs typeface="Calibri"/>
+              </a:rPr>
+              <a:t>Sem coordenação entre camadas; </a:t>
+            </a:r>
+          </a:p>
+          <a:p>
+            <a:pPr algn="l"/>
+            <a:r>
+              <a:rPr lang="pt-PT" sz="1600" i="1" dirty="0">
+                <a:solidFill>
+                  <a:srgbClr val="1A2332"/>
+                </a:solidFill>
+                <a:latin typeface="Calibri"/>
+                <a:cs typeface="Calibri"/>
+              </a:rPr>
+              <a:t>Não respeita fronteiras </a:t>
+            </a:r>
+            <a:r>
+              <a:rPr lang="pt-PT" sz="1600" i="1" dirty="0" err="1">
+                <a:solidFill>
+                  <a:srgbClr val="1A2332"/>
+                </a:solidFill>
+                <a:latin typeface="Calibri"/>
+                <a:cs typeface="Calibri"/>
+              </a:rPr>
+              <a:t>multi-tenant</a:t>
+            </a:r>
+            <a:r>
+              <a:rPr lang="pt-PT" sz="1600" i="1" dirty="0">
+                <a:solidFill>
+                  <a:srgbClr val="1A2332"/>
+                </a:solidFill>
+                <a:latin typeface="Calibri"/>
+                <a:cs typeface="Calibri"/>
+              </a:rPr>
+              <a:t>.</a:t>
+            </a:r>
+          </a:p>
+        </p:txBody>
+      </p:sp>
+      <p:sp>
+        <p:nvSpPr>
+          <p:cNvPr id="15" name="Retângulo 14">
+            <a:extLst>
+              <a:ext uri="{FF2B5EF4-FFF2-40B4-BE49-F238E27FC236}">
+                <a16:creationId xmlns:a16="http://schemas.microsoft.com/office/drawing/2014/main" id="{BC6904A3-BCD7-E000-663E-0494E8627882}"/>
               </a:ext>
             </a:extLst>
           </p:cNvPr>
@@ -6376,14 +6822,14 @@
         </p:nvSpPr>
         <p:spPr>
           <a:xfrm>
-            <a:off x="4064000" y="5334000"/>
-            <a:ext cx="4064000" cy="25400"/>
+            <a:off x="8178800" y="1905000"/>
+            <a:ext cx="3556000" cy="406400"/>
           </a:xfrm>
           <a:prstGeom prst="rect">
             <a:avLst/>
           </a:prstGeom>
           <a:solidFill>
-            <a:srgbClr val="D0C9C0"/>
+            <a:srgbClr val="196B24"/>
           </a:solidFill>
           <a:ln w="19050" cap="flat" cmpd="sng" algn="ctr">
             <a:noFill/>
@@ -6408,11 +6854,1470 @@
           </a:fontRef>
         </p:style>
         <p:txBody>
+          <a:bodyPr vertOverflow="clip" horzOverflow="clip" wrap="none" rtlCol="0" anchor="ctr" anchorCtr="0">
+            <a:noAutofit/>
+          </a:bodyPr>
+          <a:lstStyle/>
+          <a:p>
+            <a:pPr algn="l"/>
+            <a:r>
+              <a:rPr lang="pt-PT" sz="1400" b="1" dirty="0">
+                <a:solidFill>
+                  <a:srgbClr val="FFFFFF"/>
+                </a:solidFill>
+                <a:latin typeface="Calibri"/>
+                <a:cs typeface="Calibri"/>
+              </a:rPr>
+              <a:t>FEDERATED</a:t>
+            </a:r>
+          </a:p>
+        </p:txBody>
+      </p:sp>
+      <p:sp>
+        <p:nvSpPr>
+          <p:cNvPr id="16" name="CaixaDeTexto 15">
+            <a:extLst>
+              <a:ext uri="{FF2B5EF4-FFF2-40B4-BE49-F238E27FC236}">
+                <a16:creationId xmlns:a16="http://schemas.microsoft.com/office/drawing/2014/main" id="{C656EC7E-BD9E-75F2-1BE7-A92D13ADD306}"/>
+              </a:ext>
+            </a:extLst>
+          </p:cNvPr>
+          <p:cNvSpPr txBox="1"/>
+          <p:nvPr/>
+        </p:nvSpPr>
+        <p:spPr>
+          <a:xfrm>
+            <a:off x="8178800" y="2514600"/>
+            <a:ext cx="3556000" cy="276999"/>
+          </a:xfrm>
+          <a:prstGeom prst="rect">
+            <a:avLst/>
+          </a:prstGeom>
+          <a:noFill/>
+        </p:spPr>
+        <p:txBody>
+          <a:bodyPr vertOverflow="overflow" vert="horz" wrap="square" rtlCol="0" anchor="t">
+            <a:spAutoFit/>
+          </a:bodyPr>
+          <a:lstStyle/>
+          <a:p>
+            <a:pPr algn="l"/>
+            <a:r>
+              <a:rPr lang="pt-PT" sz="1200" b="1">
+                <a:solidFill>
+                  <a:srgbClr val="6E7787"/>
+                </a:solidFill>
+                <a:latin typeface="Calibri"/>
+                <a:cs typeface="Calibri"/>
+              </a:rPr>
+              <a:t>MÉTODOS TÍPICOS</a:t>
+            </a:r>
+          </a:p>
+        </p:txBody>
+      </p:sp>
+      <p:sp>
+        <p:nvSpPr>
+          <p:cNvPr id="17" name="CaixaDeTexto 16">
+            <a:extLst>
+              <a:ext uri="{FF2B5EF4-FFF2-40B4-BE49-F238E27FC236}">
+                <a16:creationId xmlns:a16="http://schemas.microsoft.com/office/drawing/2014/main" id="{24E9E209-405D-4ECA-29BC-22B4F800A808}"/>
+              </a:ext>
+            </a:extLst>
+          </p:cNvPr>
+          <p:cNvSpPr txBox="1"/>
+          <p:nvPr/>
+        </p:nvSpPr>
+        <p:spPr>
+          <a:xfrm>
+            <a:off x="8178800" y="2794000"/>
+            <a:ext cx="3556000" cy="584775"/>
+          </a:xfrm>
+          <a:prstGeom prst="rect">
+            <a:avLst/>
+          </a:prstGeom>
+          <a:noFill/>
+        </p:spPr>
+        <p:txBody>
+          <a:bodyPr vertOverflow="overflow" vert="horz" wrap="square" rtlCol="0" anchor="t">
+            <a:spAutoFit/>
+          </a:bodyPr>
+          <a:lstStyle/>
+          <a:p>
+            <a:pPr algn="l"/>
+            <a:r>
+              <a:rPr lang="pt-PT" sz="1600" dirty="0" err="1">
+                <a:solidFill>
+                  <a:srgbClr val="1A2332"/>
+                </a:solidFill>
+                <a:latin typeface="Calibri"/>
+                <a:cs typeface="Calibri"/>
+              </a:rPr>
+              <a:t>FedEraser</a:t>
+            </a:r>
+            <a:r>
+              <a:rPr lang="pt-PT" sz="1600" dirty="0">
+                <a:solidFill>
+                  <a:srgbClr val="1A2332"/>
+                </a:solidFill>
+                <a:latin typeface="Calibri"/>
+                <a:cs typeface="Calibri"/>
+              </a:rPr>
+              <a:t>, </a:t>
+            </a:r>
+            <a:r>
+              <a:rPr lang="pt-PT" sz="1600" dirty="0" err="1">
+                <a:solidFill>
+                  <a:srgbClr val="1A2332"/>
+                </a:solidFill>
+                <a:latin typeface="Calibri"/>
+                <a:cs typeface="Calibri"/>
+              </a:rPr>
+              <a:t>gradient-rollback</a:t>
+            </a:r>
+            <a:r>
+              <a:rPr lang="pt-PT" sz="1600" dirty="0">
+                <a:solidFill>
+                  <a:srgbClr val="1A2332"/>
+                </a:solidFill>
+                <a:latin typeface="Calibri"/>
+                <a:cs typeface="Calibri"/>
+              </a:rPr>
+              <a:t>, </a:t>
+            </a:r>
+            <a:r>
+              <a:rPr lang="pt-PT" sz="1600" dirty="0" err="1">
+                <a:solidFill>
+                  <a:srgbClr val="1A2332"/>
+                </a:solidFill>
+                <a:latin typeface="Calibri"/>
+                <a:cs typeface="Calibri"/>
+              </a:rPr>
+              <a:t>federated</a:t>
+            </a:r>
+            <a:r>
+              <a:rPr lang="pt-PT" sz="1600" dirty="0">
+                <a:solidFill>
+                  <a:srgbClr val="1A2332"/>
+                </a:solidFill>
+                <a:latin typeface="Calibri"/>
+                <a:cs typeface="Calibri"/>
+              </a:rPr>
+              <a:t> SISA </a:t>
+            </a:r>
+            <a:r>
+              <a:rPr lang="pt-PT" sz="1600" dirty="0" err="1">
+                <a:solidFill>
+                  <a:srgbClr val="1A2332"/>
+                </a:solidFill>
+                <a:latin typeface="Calibri"/>
+                <a:cs typeface="Calibri"/>
+              </a:rPr>
+              <a:t>variant</a:t>
+            </a:r>
+            <a:endParaRPr lang="pt-PT" sz="1600" dirty="0">
+              <a:solidFill>
+                <a:srgbClr val="1A2332"/>
+              </a:solidFill>
+              <a:latin typeface="Calibri"/>
+              <a:cs typeface="Calibri"/>
+            </a:endParaRPr>
+          </a:p>
+        </p:txBody>
+      </p:sp>
+      <p:sp>
+        <p:nvSpPr>
+          <p:cNvPr id="18" name="Retângulo 17">
+            <a:extLst>
+              <a:ext uri="{FF2B5EF4-FFF2-40B4-BE49-F238E27FC236}">
+                <a16:creationId xmlns:a16="http://schemas.microsoft.com/office/drawing/2014/main" id="{EFD7E1FC-1344-D610-3498-7D69E86658A3}"/>
+              </a:ext>
+            </a:extLst>
+          </p:cNvPr>
+          <p:cNvSpPr/>
+          <p:nvPr/>
+        </p:nvSpPr>
+        <p:spPr>
+          <a:xfrm>
+            <a:off x="8178800" y="3911600"/>
+            <a:ext cx="3556000" cy="12700"/>
+          </a:xfrm>
+          <a:prstGeom prst="rect">
+            <a:avLst/>
+          </a:prstGeom>
+          <a:solidFill>
+            <a:srgbClr val="D6D2CB"/>
+          </a:solidFill>
+          <a:ln w="19050" cap="flat" cmpd="sng" algn="ctr">
+            <a:noFill/>
+            <a:prstDash val="solid"/>
+            <a:miter lim="800000"/>
+          </a:ln>
+        </p:spPr>
+        <p:style>
+          <a:lnRef idx="2">
+            <a:schemeClr val="accent1">
+              <a:shade val="15000"/>
+            </a:schemeClr>
+          </a:lnRef>
+          <a:fillRef idx="1">
+            <a:schemeClr val="accent1"/>
+          </a:fillRef>
+          <a:effectRef idx="0">
+            <a:schemeClr val="accent1"/>
+          </a:effectRef>
+          <a:fontRef idx="minor">
+            <a:schemeClr val="lt1"/>
+          </a:fontRef>
+        </p:style>
+        <p:txBody>
+          <a:bodyPr vertOverflow="clip" horzOverflow="clip" rtlCol="0" anchor="t"/>
+          <a:lstStyle/>
+          <a:p>
+            <a:pPr algn="l"/>
+            <a:endParaRPr lang="pt-PT" sz="2000"/>
+          </a:p>
+        </p:txBody>
+      </p:sp>
+      <p:sp>
+        <p:nvSpPr>
+          <p:cNvPr id="19" name="CaixaDeTexto 18">
+            <a:extLst>
+              <a:ext uri="{FF2B5EF4-FFF2-40B4-BE49-F238E27FC236}">
+                <a16:creationId xmlns:a16="http://schemas.microsoft.com/office/drawing/2014/main" id="{13DAA24B-8D0C-96C6-B1C7-79D49E4362EA}"/>
+              </a:ext>
+            </a:extLst>
+          </p:cNvPr>
+          <p:cNvSpPr txBox="1"/>
+          <p:nvPr/>
+        </p:nvSpPr>
+        <p:spPr>
+          <a:xfrm>
+            <a:off x="8178800" y="4064000"/>
+            <a:ext cx="3556000" cy="276999"/>
+          </a:xfrm>
+          <a:prstGeom prst="rect">
+            <a:avLst/>
+          </a:prstGeom>
+          <a:noFill/>
+        </p:spPr>
+        <p:txBody>
+          <a:bodyPr vertOverflow="overflow" vert="horz" wrap="square" rtlCol="0" anchor="t">
+            <a:spAutoFit/>
+          </a:bodyPr>
+          <a:lstStyle/>
+          <a:p>
+            <a:pPr algn="l"/>
+            <a:r>
+              <a:rPr lang="pt-PT" sz="1200" b="1">
+                <a:solidFill>
+                  <a:srgbClr val="196B24"/>
+                </a:solidFill>
+                <a:latin typeface="Calibri"/>
+                <a:cs typeface="Calibri"/>
+              </a:rPr>
+              <a:t>LACUNA CENTRAL</a:t>
+            </a:r>
+          </a:p>
+        </p:txBody>
+      </p:sp>
+      <p:sp>
+        <p:nvSpPr>
+          <p:cNvPr id="20" name="CaixaDeTexto 19">
+            <a:extLst>
+              <a:ext uri="{FF2B5EF4-FFF2-40B4-BE49-F238E27FC236}">
+                <a16:creationId xmlns:a16="http://schemas.microsoft.com/office/drawing/2014/main" id="{CB5BBA76-D5E0-7A7C-9EF9-F16DB9066E52}"/>
+              </a:ext>
+            </a:extLst>
+          </p:cNvPr>
+          <p:cNvSpPr txBox="1"/>
+          <p:nvPr/>
+        </p:nvSpPr>
+        <p:spPr>
+          <a:xfrm>
+            <a:off x="8178800" y="4343400"/>
+            <a:ext cx="3556000" cy="830997"/>
+          </a:xfrm>
+          <a:prstGeom prst="rect">
+            <a:avLst/>
+          </a:prstGeom>
+          <a:noFill/>
+        </p:spPr>
+        <p:txBody>
+          <a:bodyPr vertOverflow="overflow" vert="horz" wrap="square" rtlCol="0" anchor="t">
+            <a:spAutoFit/>
+          </a:bodyPr>
+          <a:lstStyle/>
+          <a:p>
+            <a:pPr algn="l"/>
+            <a:r>
+              <a:rPr lang="pt-PT" sz="1600" i="1" dirty="0">
+                <a:solidFill>
+                  <a:srgbClr val="1A2332"/>
+                </a:solidFill>
+                <a:latin typeface="Calibri"/>
+                <a:cs typeface="Calibri"/>
+              </a:rPr>
+              <a:t>Garantia apenas estatística, não certificada;</a:t>
+            </a:r>
+          </a:p>
+          <a:p>
+            <a:pPr algn="l"/>
+            <a:r>
+              <a:rPr lang="pt-PT" sz="1600" i="1" dirty="0">
+                <a:solidFill>
+                  <a:srgbClr val="1A2332"/>
+                </a:solidFill>
+                <a:latin typeface="Calibri"/>
+                <a:cs typeface="Calibri"/>
+              </a:rPr>
+              <a:t>Clientes offline mantêm pesos obsoletos.</a:t>
+            </a:r>
+          </a:p>
+        </p:txBody>
+      </p:sp>
+      <p:sp>
+        <p:nvSpPr>
+          <p:cNvPr id="22" name="Retângulo Arredondado 21">
+            <a:extLst>
+              <a:ext uri="{FF2B5EF4-FFF2-40B4-BE49-F238E27FC236}">
+                <a16:creationId xmlns:a16="http://schemas.microsoft.com/office/drawing/2014/main" id="{25681A46-B198-0BD4-F674-1DAAAF5F5565}"/>
+              </a:ext>
+            </a:extLst>
+          </p:cNvPr>
+          <p:cNvSpPr/>
+          <p:nvPr/>
+        </p:nvSpPr>
+        <p:spPr>
+          <a:xfrm>
+            <a:off x="457200" y="5318704"/>
+            <a:ext cx="3556000" cy="830997"/>
+          </a:xfrm>
+          <a:prstGeom prst="roundRect">
+            <a:avLst/>
+          </a:prstGeom>
+          <a:solidFill>
+            <a:srgbClr val="F0EBE3"/>
+          </a:solidFill>
+          <a:ln w="19050" cap="flat" cmpd="sng" algn="ctr">
+            <a:noFill/>
+            <a:prstDash val="solid"/>
+            <a:miter lim="800000"/>
+          </a:ln>
+        </p:spPr>
+        <p:style>
+          <a:lnRef idx="2">
+            <a:schemeClr val="accent1">
+              <a:shade val="15000"/>
+            </a:schemeClr>
+          </a:lnRef>
+          <a:fillRef idx="1">
+            <a:schemeClr val="accent1"/>
+          </a:fillRef>
+          <a:effectRef idx="0">
+            <a:schemeClr val="accent1"/>
+          </a:effectRef>
+          <a:fontRef idx="minor">
+            <a:schemeClr val="lt1"/>
+          </a:fontRef>
+        </p:style>
+        <p:txBody>
           <a:bodyPr vertOverflow="clip" horzOverflow="clip" rtlCol="0" anchor="t"/>
           <a:lstStyle/>
           <a:p>
             <a:pPr algn="l"/>
             <a:endParaRPr lang="pt-PT"/>
+          </a:p>
+        </p:txBody>
+      </p:sp>
+      <p:sp>
+        <p:nvSpPr>
+          <p:cNvPr id="23" name="CaixaDeTexto 22">
+            <a:extLst>
+              <a:ext uri="{FF2B5EF4-FFF2-40B4-BE49-F238E27FC236}">
+                <a16:creationId xmlns:a16="http://schemas.microsoft.com/office/drawing/2014/main" id="{0B598C76-8C26-9EB3-8EB9-C7AC505F345E}"/>
+              </a:ext>
+            </a:extLst>
+          </p:cNvPr>
+          <p:cNvSpPr txBox="1"/>
+          <p:nvPr/>
+        </p:nvSpPr>
+        <p:spPr>
+          <a:xfrm>
+            <a:off x="609600" y="5435024"/>
+            <a:ext cx="3251200" cy="711200"/>
+          </a:xfrm>
+          <a:prstGeom prst="rect">
+            <a:avLst/>
+          </a:prstGeom>
+          <a:noFill/>
+        </p:spPr>
+        <p:txBody>
+          <a:bodyPr vertOverflow="overflow" vert="horz" wrap="square" rtlCol="0" anchor="t">
+            <a:spAutoFit/>
+          </a:bodyPr>
+          <a:lstStyle/>
+          <a:p>
+            <a:pPr algn="l"/>
+            <a:r>
+              <a:rPr lang="pt-PT" sz="1300" dirty="0">
+                <a:solidFill>
+                  <a:srgbClr val="8B1A1A"/>
+                </a:solidFill>
+                <a:latin typeface="Calibri"/>
+                <a:cs typeface="Calibri"/>
+              </a:rPr>
+              <a:t>Ignora: Limites de recursos </a:t>
+            </a:r>
+            <a:r>
+              <a:rPr lang="pt-PT" sz="1300" dirty="0" err="1">
+                <a:solidFill>
+                  <a:srgbClr val="8B1A1A"/>
+                </a:solidFill>
+                <a:latin typeface="Calibri"/>
+                <a:cs typeface="Calibri"/>
+              </a:rPr>
+              <a:t>edge</a:t>
+            </a:r>
+            <a:r>
+              <a:rPr lang="pt-PT" sz="1300" dirty="0">
+                <a:solidFill>
+                  <a:srgbClr val="8B1A1A"/>
+                </a:solidFill>
+                <a:latin typeface="Calibri"/>
+                <a:cs typeface="Calibri"/>
+              </a:rPr>
+              <a:t>, federação, replicação </a:t>
+            </a:r>
+            <a:r>
+              <a:rPr lang="pt-PT" sz="1300" dirty="0" err="1">
+                <a:solidFill>
+                  <a:srgbClr val="8B1A1A"/>
+                </a:solidFill>
+                <a:latin typeface="Calibri"/>
+                <a:cs typeface="Calibri"/>
+              </a:rPr>
+              <a:t>multi-camada</a:t>
+            </a:r>
+            <a:endParaRPr lang="pt-PT" sz="1300" dirty="0">
+              <a:solidFill>
+                <a:srgbClr val="8B1A1A"/>
+              </a:solidFill>
+              <a:latin typeface="Calibri"/>
+              <a:cs typeface="Calibri"/>
+            </a:endParaRPr>
+          </a:p>
+        </p:txBody>
+      </p:sp>
+      <p:sp>
+        <p:nvSpPr>
+          <p:cNvPr id="24" name="Retângulo Arredondado 23">
+            <a:extLst>
+              <a:ext uri="{FF2B5EF4-FFF2-40B4-BE49-F238E27FC236}">
+                <a16:creationId xmlns:a16="http://schemas.microsoft.com/office/drawing/2014/main" id="{C110B207-4ECF-B9F3-7BD4-A6E46BF6F700}"/>
+              </a:ext>
+            </a:extLst>
+          </p:cNvPr>
+          <p:cNvSpPr/>
+          <p:nvPr/>
+        </p:nvSpPr>
+        <p:spPr>
+          <a:xfrm>
+            <a:off x="4318000" y="5315227"/>
+            <a:ext cx="3556000" cy="830997"/>
+          </a:xfrm>
+          <a:prstGeom prst="roundRect">
+            <a:avLst/>
+          </a:prstGeom>
+          <a:solidFill>
+            <a:srgbClr val="F0EBE3"/>
+          </a:solidFill>
+          <a:ln w="19050" cap="flat" cmpd="sng" algn="ctr">
+            <a:noFill/>
+            <a:prstDash val="solid"/>
+            <a:miter lim="800000"/>
+          </a:ln>
+        </p:spPr>
+        <p:style>
+          <a:lnRef idx="2">
+            <a:schemeClr val="accent1">
+              <a:shade val="15000"/>
+            </a:schemeClr>
+          </a:lnRef>
+          <a:fillRef idx="1">
+            <a:schemeClr val="accent1"/>
+          </a:fillRef>
+          <a:effectRef idx="0">
+            <a:schemeClr val="accent1"/>
+          </a:effectRef>
+          <a:fontRef idx="minor">
+            <a:schemeClr val="lt1"/>
+          </a:fontRef>
+        </p:style>
+        <p:txBody>
+          <a:bodyPr vertOverflow="clip" horzOverflow="clip" rtlCol="0" anchor="t"/>
+          <a:lstStyle/>
+          <a:p>
+            <a:pPr algn="l"/>
+            <a:endParaRPr lang="pt-PT"/>
+          </a:p>
+        </p:txBody>
+      </p:sp>
+      <p:sp>
+        <p:nvSpPr>
+          <p:cNvPr id="25" name="CaixaDeTexto 24">
+            <a:extLst>
+              <a:ext uri="{FF2B5EF4-FFF2-40B4-BE49-F238E27FC236}">
+                <a16:creationId xmlns:a16="http://schemas.microsoft.com/office/drawing/2014/main" id="{8BBCC2C8-4EFA-8154-6C7F-53A3BB61DA07}"/>
+              </a:ext>
+            </a:extLst>
+          </p:cNvPr>
+          <p:cNvSpPr txBox="1"/>
+          <p:nvPr/>
+        </p:nvSpPr>
+        <p:spPr>
+          <a:xfrm>
+            <a:off x="4407971" y="5435025"/>
+            <a:ext cx="3251200" cy="711200"/>
+          </a:xfrm>
+          <a:prstGeom prst="rect">
+            <a:avLst/>
+          </a:prstGeom>
+          <a:noFill/>
+        </p:spPr>
+        <p:txBody>
+          <a:bodyPr vertOverflow="overflow" vert="horz" wrap="square" rtlCol="0" anchor="t">
+            <a:spAutoFit/>
+          </a:bodyPr>
+          <a:lstStyle/>
+          <a:p>
+            <a:pPr algn="l"/>
+            <a:r>
+              <a:rPr lang="pt-PT" sz="1300" dirty="0">
+                <a:solidFill>
+                  <a:srgbClr val="8B1A1A"/>
+                </a:solidFill>
+                <a:latin typeface="Calibri"/>
+                <a:cs typeface="Calibri"/>
+              </a:rPr>
+              <a:t>Ignora: </a:t>
+            </a:r>
+            <a:r>
+              <a:rPr lang="pt-PT" sz="1300" dirty="0" err="1">
+                <a:solidFill>
+                  <a:srgbClr val="8B1A1A"/>
+                </a:solidFill>
+                <a:latin typeface="Calibri"/>
+                <a:cs typeface="Calibri"/>
+              </a:rPr>
+              <a:t>Multi-tenancy</a:t>
+            </a:r>
+            <a:r>
+              <a:rPr lang="pt-PT" sz="1300" dirty="0">
+                <a:solidFill>
+                  <a:srgbClr val="8B1A1A"/>
+                </a:solidFill>
+                <a:latin typeface="Calibri"/>
+                <a:cs typeface="Calibri"/>
+              </a:rPr>
+              <a:t>, coordenação entre camadas, modelos partilhados</a:t>
+            </a:r>
+          </a:p>
+        </p:txBody>
+      </p:sp>
+      <p:sp>
+        <p:nvSpPr>
+          <p:cNvPr id="26" name="Retângulo Arredondado 25">
+            <a:extLst>
+              <a:ext uri="{FF2B5EF4-FFF2-40B4-BE49-F238E27FC236}">
+                <a16:creationId xmlns:a16="http://schemas.microsoft.com/office/drawing/2014/main" id="{035CAC03-57E7-D73A-969F-82783F58B3DE}"/>
+              </a:ext>
+            </a:extLst>
+          </p:cNvPr>
+          <p:cNvSpPr/>
+          <p:nvPr/>
+        </p:nvSpPr>
+        <p:spPr>
+          <a:xfrm>
+            <a:off x="8178800" y="5318704"/>
+            <a:ext cx="3556000" cy="830997"/>
+          </a:xfrm>
+          <a:prstGeom prst="roundRect">
+            <a:avLst/>
+          </a:prstGeom>
+          <a:solidFill>
+            <a:srgbClr val="F0EBE3"/>
+          </a:solidFill>
+          <a:ln w="19050" cap="flat" cmpd="sng" algn="ctr">
+            <a:noFill/>
+            <a:prstDash val="solid"/>
+            <a:miter lim="800000"/>
+          </a:ln>
+        </p:spPr>
+        <p:style>
+          <a:lnRef idx="2">
+            <a:schemeClr val="accent1">
+              <a:shade val="15000"/>
+            </a:schemeClr>
+          </a:lnRef>
+          <a:fillRef idx="1">
+            <a:schemeClr val="accent1"/>
+          </a:fillRef>
+          <a:effectRef idx="0">
+            <a:schemeClr val="accent1"/>
+          </a:effectRef>
+          <a:fontRef idx="minor">
+            <a:schemeClr val="lt1"/>
+          </a:fontRef>
+        </p:style>
+        <p:txBody>
+          <a:bodyPr vertOverflow="clip" horzOverflow="clip" rtlCol="0" anchor="t"/>
+          <a:lstStyle/>
+          <a:p>
+            <a:pPr algn="l"/>
+            <a:endParaRPr lang="pt-PT"/>
+          </a:p>
+        </p:txBody>
+      </p:sp>
+      <p:sp>
+        <p:nvSpPr>
+          <p:cNvPr id="27" name="CaixaDeTexto 26">
+            <a:extLst>
+              <a:ext uri="{FF2B5EF4-FFF2-40B4-BE49-F238E27FC236}">
+                <a16:creationId xmlns:a16="http://schemas.microsoft.com/office/drawing/2014/main" id="{8B073975-976E-518C-D78F-6C085A011E78}"/>
+              </a:ext>
+            </a:extLst>
+          </p:cNvPr>
+          <p:cNvSpPr txBox="1"/>
+          <p:nvPr/>
+        </p:nvSpPr>
+        <p:spPr>
+          <a:xfrm>
+            <a:off x="8331200" y="5416699"/>
+            <a:ext cx="3251200" cy="711200"/>
+          </a:xfrm>
+          <a:prstGeom prst="rect">
+            <a:avLst/>
+          </a:prstGeom>
+          <a:noFill/>
+        </p:spPr>
+        <p:txBody>
+          <a:bodyPr vertOverflow="overflow" vert="horz" wrap="square" rtlCol="0" anchor="t">
+            <a:spAutoFit/>
+          </a:bodyPr>
+          <a:lstStyle/>
+          <a:p>
+            <a:pPr algn="l"/>
+            <a:r>
+              <a:rPr lang="pt-PT" sz="1300" dirty="0">
+                <a:solidFill>
+                  <a:srgbClr val="8B1A1A"/>
+                </a:solidFill>
+                <a:latin typeface="Calibri"/>
+                <a:cs typeface="Calibri"/>
+              </a:rPr>
+              <a:t>Ignora: Garantia de </a:t>
+            </a:r>
+            <a:r>
+              <a:rPr lang="pt-PT" sz="1300" dirty="0" err="1">
+                <a:solidFill>
+                  <a:srgbClr val="8B1A1A"/>
+                </a:solidFill>
+                <a:latin typeface="Calibri"/>
+                <a:cs typeface="Calibri"/>
+              </a:rPr>
+              <a:t>erasure</a:t>
+            </a:r>
+            <a:r>
+              <a:rPr lang="pt-PT" sz="1300" dirty="0">
+                <a:solidFill>
+                  <a:srgbClr val="8B1A1A"/>
+                </a:solidFill>
+                <a:latin typeface="Calibri"/>
+                <a:cs typeface="Calibri"/>
+              </a:rPr>
+              <a:t> enfraquecida, clientes offline, sem certificação</a:t>
+            </a:r>
+          </a:p>
+        </p:txBody>
+      </p:sp>
+      <p:sp>
+        <p:nvSpPr>
+          <p:cNvPr id="21" name="CaixaDeTexto 20">
+            <a:extLst>
+              <a:ext uri="{FF2B5EF4-FFF2-40B4-BE49-F238E27FC236}">
+                <a16:creationId xmlns:a16="http://schemas.microsoft.com/office/drawing/2014/main" id="{0EAFE58D-8B8E-7124-DC92-F191116CC34E}"/>
+              </a:ext>
+            </a:extLst>
+          </p:cNvPr>
+          <p:cNvSpPr txBox="1"/>
+          <p:nvPr/>
+        </p:nvSpPr>
+        <p:spPr>
+          <a:xfrm>
+            <a:off x="3123894" y="1449269"/>
+            <a:ext cx="8331200" cy="338554"/>
+          </a:xfrm>
+          <a:prstGeom prst="rect">
+            <a:avLst/>
+          </a:prstGeom>
+          <a:noFill/>
+        </p:spPr>
+        <p:txBody>
+          <a:bodyPr rot="0" spcFirstLastPara="0" vertOverflow="overflow" horzOverflow="overflow" vert="horz" wrap="square" lIns="91440" tIns="45720" rIns="91440" bIns="45720" numCol="1" spcCol="0" rtlCol="0" fromWordArt="0" anchor="t" anchorCtr="0" forceAA="0" compatLnSpc="1">
+            <a:prstTxWarp prst="textNoShape">
+              <a:avLst/>
+            </a:prstTxWarp>
+            <a:spAutoFit/>
+          </a:bodyPr>
+          <a:lstStyle>
+            <a:defPPr>
+              <a:defRPr lang="pt-PT"/>
+            </a:defPPr>
+            <a:lvl1pPr>
+              <a:defRPr sz="1900" b="1">
+                <a:solidFill>
+                  <a:srgbClr val="1A2332"/>
+                </a:solidFill>
+                <a:latin typeface="Georgia"/>
+              </a:defRPr>
+            </a:lvl1pPr>
+          </a:lstStyle>
+          <a:p>
+            <a:r>
+              <a:rPr lang="pt-PT" sz="1600" b="0" dirty="0">
+                <a:latin typeface="+mn-lt"/>
+              </a:rPr>
+              <a:t>Nenhum método atual satisfaz o envelope completo de restrições</a:t>
+            </a:r>
+          </a:p>
+        </p:txBody>
+      </p:sp>
+    </p:spTree>
+    <p:extLst>
+      <p:ext uri="{BB962C8B-B14F-4D97-AF65-F5344CB8AC3E}">
+        <p14:creationId xmlns:p14="http://schemas.microsoft.com/office/powerpoint/2010/main" val="2385294659"/>
+      </p:ext>
+    </p:extLst>
+  </p:cSld>
+  <p:clrMapOvr>
+    <a:masterClrMapping/>
+  </p:clrMapOvr>
+</p:sld>
+</file>
+
+<file path=ppt/slides/slide11.xml><?xml version="1.0" encoding="utf-8"?>
+<p:sld xmlns:a="http://schemas.openxmlformats.org/drawingml/2006/main" xmlns:r="http://schemas.openxmlformats.org/officeDocument/2006/relationships" xmlns:p="http://schemas.openxmlformats.org/presentationml/2006/main">
+  <p:cSld>
+    <p:spTree>
+      <p:nvGrpSpPr>
+        <p:cNvPr id="1" name=""/>
+        <p:cNvGrpSpPr/>
+        <p:nvPr/>
+      </p:nvGrpSpPr>
+      <p:grpSpPr>
+        <a:xfrm>
+          <a:off x="0" y="0"/>
+          <a:ext cx="0" cy="0"/>
+          <a:chOff x="0" y="0"/>
+          <a:chExt cx="0" cy="0"/>
+        </a:xfrm>
+      </p:grpSpPr>
+      <p:sp>
+        <p:nvSpPr>
+          <p:cNvPr id="2" name="Título 1">
+            <a:extLst>
+              <a:ext uri="{FF2B5EF4-FFF2-40B4-BE49-F238E27FC236}">
+                <a16:creationId xmlns:a16="http://schemas.microsoft.com/office/drawing/2014/main" id="{EBD52685-EEDA-3D69-3E46-D4D43E2FE8DF}"/>
+              </a:ext>
+            </a:extLst>
+          </p:cNvPr>
+          <p:cNvSpPr>
+            <a:spLocks noGrp="1"/>
+          </p:cNvSpPr>
+          <p:nvPr>
+            <p:ph type="title"/>
+          </p:nvPr>
+        </p:nvSpPr>
+        <p:spPr/>
+        <p:txBody>
+          <a:bodyPr/>
+          <a:lstStyle/>
+          <a:p>
+            <a:pPr algn="l">
+              <a:buNone/>
+            </a:pPr>
+            <a:r>
+              <a:rPr lang="pt-PT" sz="3200" b="1" dirty="0">
+                <a:solidFill>
+                  <a:srgbClr val="1A2332"/>
+                </a:solidFill>
+                <a:latin typeface="Georgia"/>
+              </a:rPr>
+              <a:t>Conclusão</a:t>
+            </a:r>
+          </a:p>
+        </p:txBody>
+      </p:sp>
+      <p:sp>
+        <p:nvSpPr>
+          <p:cNvPr id="4" name="Oval 3">
+            <a:extLst>
+              <a:ext uri="{FF2B5EF4-FFF2-40B4-BE49-F238E27FC236}">
+                <a16:creationId xmlns:a16="http://schemas.microsoft.com/office/drawing/2014/main" id="{9E9680A7-A798-EB4F-9A16-720894964DB0}"/>
+              </a:ext>
+            </a:extLst>
+          </p:cNvPr>
+          <p:cNvSpPr/>
+          <p:nvPr/>
+        </p:nvSpPr>
+        <p:spPr>
+          <a:xfrm>
+            <a:off x="1905000" y="3149600"/>
+            <a:ext cx="660400" cy="660400"/>
+          </a:xfrm>
+          <a:prstGeom prst="ellipse">
+            <a:avLst/>
+          </a:prstGeom>
+          <a:solidFill>
+            <a:srgbClr val="156082"/>
+          </a:solidFill>
+          <a:ln w="19050" cap="flat" cmpd="sng" algn="ctr">
+            <a:noFill/>
+            <a:prstDash val="solid"/>
+            <a:miter lim="800000"/>
+          </a:ln>
+        </p:spPr>
+        <p:style>
+          <a:lnRef idx="2">
+            <a:schemeClr val="accent1">
+              <a:shade val="15000"/>
+            </a:schemeClr>
+          </a:lnRef>
+          <a:fillRef idx="1">
+            <a:schemeClr val="accent1"/>
+          </a:fillRef>
+          <a:effectRef idx="0">
+            <a:schemeClr val="accent1"/>
+          </a:effectRef>
+          <a:fontRef idx="minor">
+            <a:schemeClr val="lt1"/>
+          </a:fontRef>
+        </p:style>
+        <p:txBody>
+          <a:bodyPr vertOverflow="clip" horzOverflow="clip" wrap="none" rtlCol="0" anchor="ctr" anchorCtr="0">
+            <a:noAutofit/>
+          </a:bodyPr>
+          <a:lstStyle/>
+          <a:p>
+            <a:pPr algn="l"/>
+            <a:r>
+              <a:rPr lang="pt-PT" sz="2400" b="1">
+                <a:solidFill>
+                  <a:srgbClr val="FFFFFF"/>
+                </a:solidFill>
+                <a:latin typeface="Georgia"/>
+              </a:rPr>
+              <a:t>1</a:t>
+            </a:r>
+          </a:p>
+        </p:txBody>
+      </p:sp>
+      <p:sp>
+        <p:nvSpPr>
+          <p:cNvPr id="5" name="CaixaDeTexto 4">
+            <a:extLst>
+              <a:ext uri="{FF2B5EF4-FFF2-40B4-BE49-F238E27FC236}">
+                <a16:creationId xmlns:a16="http://schemas.microsoft.com/office/drawing/2014/main" id="{3ACB55E4-8882-B34D-AA4C-D5C13B32944F}"/>
+              </a:ext>
+            </a:extLst>
+          </p:cNvPr>
+          <p:cNvSpPr txBox="1"/>
+          <p:nvPr/>
+        </p:nvSpPr>
+        <p:spPr>
+          <a:xfrm>
+            <a:off x="457200" y="3911600"/>
+            <a:ext cx="3556000" cy="355600"/>
+          </a:xfrm>
+          <a:prstGeom prst="rect">
+            <a:avLst/>
+          </a:prstGeom>
+          <a:noFill/>
+        </p:spPr>
+        <p:txBody>
+          <a:bodyPr vertOverflow="overflow" vert="horz" wrap="square" rtlCol="0" anchor="t">
+            <a:spAutoFit/>
+          </a:bodyPr>
+          <a:lstStyle/>
+          <a:p>
+            <a:pPr algn="l"/>
+            <a:r>
+              <a:rPr lang="pt-PT" b="1">
+                <a:solidFill>
+                  <a:srgbClr val="156082"/>
+                </a:solidFill>
+                <a:latin typeface="Georgia"/>
+              </a:rPr>
+              <a:t>Escalabilidade</a:t>
+            </a:r>
+          </a:p>
+        </p:txBody>
+      </p:sp>
+      <p:sp>
+        <p:nvSpPr>
+          <p:cNvPr id="6" name="CaixaDeTexto 5">
+            <a:extLst>
+              <a:ext uri="{FF2B5EF4-FFF2-40B4-BE49-F238E27FC236}">
+                <a16:creationId xmlns:a16="http://schemas.microsoft.com/office/drawing/2014/main" id="{F1B271A0-DCA7-144A-B43F-8F2AFE211EEE}"/>
+              </a:ext>
+            </a:extLst>
+          </p:cNvPr>
+          <p:cNvSpPr txBox="1"/>
+          <p:nvPr/>
+        </p:nvSpPr>
+        <p:spPr>
+          <a:xfrm>
+            <a:off x="457200" y="4318000"/>
+            <a:ext cx="3556000" cy="738664"/>
+          </a:xfrm>
+          <a:prstGeom prst="rect">
+            <a:avLst/>
+          </a:prstGeom>
+          <a:noFill/>
+        </p:spPr>
+        <p:txBody>
+          <a:bodyPr vertOverflow="overflow" vert="horz" wrap="square" rtlCol="0" anchor="t">
+            <a:spAutoFit/>
+          </a:bodyPr>
+          <a:lstStyle/>
+          <a:p>
+            <a:pPr algn="l"/>
+            <a:r>
+              <a:rPr lang="pt-PT" sz="1400" dirty="0">
+                <a:solidFill>
+                  <a:srgbClr val="1A2332"/>
+                </a:solidFill>
+                <a:latin typeface="Calibri"/>
+                <a:cs typeface="Calibri"/>
+              </a:rPr>
+              <a:t>Mecanismos de remoção que funcionem nas capacidades computacionais de dispositivos </a:t>
+            </a:r>
+            <a:r>
+              <a:rPr lang="pt-PT" sz="1400" dirty="0" err="1">
+                <a:solidFill>
+                  <a:srgbClr val="1A2332"/>
+                </a:solidFill>
+                <a:latin typeface="Calibri"/>
+                <a:cs typeface="Calibri"/>
+              </a:rPr>
+              <a:t>edge</a:t>
+            </a:r>
+            <a:endParaRPr lang="pt-PT" sz="1400" dirty="0">
+              <a:solidFill>
+                <a:srgbClr val="1A2332"/>
+              </a:solidFill>
+              <a:latin typeface="Calibri"/>
+              <a:cs typeface="Calibri"/>
+            </a:endParaRPr>
+          </a:p>
+        </p:txBody>
+      </p:sp>
+      <p:sp>
+        <p:nvSpPr>
+          <p:cNvPr id="7" name="Oval 6">
+            <a:extLst>
+              <a:ext uri="{FF2B5EF4-FFF2-40B4-BE49-F238E27FC236}">
+                <a16:creationId xmlns:a16="http://schemas.microsoft.com/office/drawing/2014/main" id="{E515DE8B-DDC7-1C45-BB89-29C411889968}"/>
+              </a:ext>
+            </a:extLst>
+          </p:cNvPr>
+          <p:cNvSpPr/>
+          <p:nvPr/>
+        </p:nvSpPr>
+        <p:spPr>
+          <a:xfrm>
+            <a:off x="5765800" y="3149600"/>
+            <a:ext cx="660400" cy="660400"/>
+          </a:xfrm>
+          <a:prstGeom prst="ellipse">
+            <a:avLst/>
+          </a:prstGeom>
+          <a:solidFill>
+            <a:srgbClr val="B5511A"/>
+          </a:solidFill>
+          <a:ln w="19050" cap="flat" cmpd="sng" algn="ctr">
+            <a:noFill/>
+            <a:prstDash val="solid"/>
+            <a:miter lim="800000"/>
+          </a:ln>
+        </p:spPr>
+        <p:style>
+          <a:lnRef idx="2">
+            <a:schemeClr val="accent1">
+              <a:shade val="15000"/>
+            </a:schemeClr>
+          </a:lnRef>
+          <a:fillRef idx="1">
+            <a:schemeClr val="accent1"/>
+          </a:fillRef>
+          <a:effectRef idx="0">
+            <a:schemeClr val="accent1"/>
+          </a:effectRef>
+          <a:fontRef idx="minor">
+            <a:schemeClr val="lt1"/>
+          </a:fontRef>
+        </p:style>
+        <p:txBody>
+          <a:bodyPr vertOverflow="clip" horzOverflow="clip" wrap="none" rtlCol="0" anchor="ctr" anchorCtr="0">
+            <a:noAutofit/>
+          </a:bodyPr>
+          <a:lstStyle/>
+          <a:p>
+            <a:pPr algn="l"/>
+            <a:r>
+              <a:rPr lang="pt-PT" sz="2400" b="1">
+                <a:solidFill>
+                  <a:srgbClr val="FFFFFF"/>
+                </a:solidFill>
+                <a:latin typeface="Georgia"/>
+              </a:rPr>
+              <a:t>2</a:t>
+            </a:r>
+          </a:p>
+        </p:txBody>
+      </p:sp>
+      <p:sp>
+        <p:nvSpPr>
+          <p:cNvPr id="8" name="CaixaDeTexto 7">
+            <a:extLst>
+              <a:ext uri="{FF2B5EF4-FFF2-40B4-BE49-F238E27FC236}">
+                <a16:creationId xmlns:a16="http://schemas.microsoft.com/office/drawing/2014/main" id="{F5D6C62E-2312-B342-A6C3-075830E885C8}"/>
+              </a:ext>
+            </a:extLst>
+          </p:cNvPr>
+          <p:cNvSpPr txBox="1"/>
+          <p:nvPr/>
+        </p:nvSpPr>
+        <p:spPr>
+          <a:xfrm>
+            <a:off x="4318000" y="3911600"/>
+            <a:ext cx="3556000" cy="355600"/>
+          </a:xfrm>
+          <a:prstGeom prst="rect">
+            <a:avLst/>
+          </a:prstGeom>
+          <a:noFill/>
+        </p:spPr>
+        <p:txBody>
+          <a:bodyPr vertOverflow="overflow" vert="horz" wrap="square" rtlCol="0" anchor="t">
+            <a:spAutoFit/>
+          </a:bodyPr>
+          <a:lstStyle/>
+          <a:p>
+            <a:pPr algn="l"/>
+            <a:r>
+              <a:rPr lang="pt-PT" b="1">
+                <a:solidFill>
+                  <a:srgbClr val="E97132"/>
+                </a:solidFill>
+                <a:latin typeface="Georgia"/>
+              </a:rPr>
+              <a:t>Verificação</a:t>
+            </a:r>
+          </a:p>
+        </p:txBody>
+      </p:sp>
+      <p:sp>
+        <p:nvSpPr>
+          <p:cNvPr id="9" name="CaixaDeTexto 8">
+            <a:extLst>
+              <a:ext uri="{FF2B5EF4-FFF2-40B4-BE49-F238E27FC236}">
+                <a16:creationId xmlns:a16="http://schemas.microsoft.com/office/drawing/2014/main" id="{F6523AA0-022C-154C-8804-9E925EF75963}"/>
+              </a:ext>
+            </a:extLst>
+          </p:cNvPr>
+          <p:cNvSpPr txBox="1"/>
+          <p:nvPr/>
+        </p:nvSpPr>
+        <p:spPr>
+          <a:xfrm>
+            <a:off x="4318000" y="4318000"/>
+            <a:ext cx="3556000" cy="523220"/>
+          </a:xfrm>
+          <a:prstGeom prst="rect">
+            <a:avLst/>
+          </a:prstGeom>
+          <a:noFill/>
+        </p:spPr>
+        <p:txBody>
+          <a:bodyPr vertOverflow="overflow" vert="horz" wrap="square" rtlCol="0" anchor="t">
+            <a:spAutoFit/>
+          </a:bodyPr>
+          <a:lstStyle/>
+          <a:p>
+            <a:pPr algn="l"/>
+            <a:r>
+              <a:rPr lang="pt-PT" sz="1400" dirty="0">
+                <a:solidFill>
+                  <a:srgbClr val="1A2332"/>
+                </a:solidFill>
+                <a:latin typeface="Calibri"/>
+                <a:cs typeface="Calibri"/>
+              </a:rPr>
+              <a:t>Framework standard que torne os métodos comparáveis</a:t>
+            </a:r>
+          </a:p>
+        </p:txBody>
+      </p:sp>
+      <p:sp>
+        <p:nvSpPr>
+          <p:cNvPr id="10" name="Oval 9">
+            <a:extLst>
+              <a:ext uri="{FF2B5EF4-FFF2-40B4-BE49-F238E27FC236}">
+                <a16:creationId xmlns:a16="http://schemas.microsoft.com/office/drawing/2014/main" id="{AA8477AF-7D99-C44C-B184-6DE4F3C85E0B}"/>
+              </a:ext>
+            </a:extLst>
+          </p:cNvPr>
+          <p:cNvSpPr/>
+          <p:nvPr/>
+        </p:nvSpPr>
+        <p:spPr>
+          <a:xfrm>
+            <a:off x="9626600" y="3149600"/>
+            <a:ext cx="660400" cy="660400"/>
+          </a:xfrm>
+          <a:prstGeom prst="ellipse">
+            <a:avLst/>
+          </a:prstGeom>
+          <a:solidFill>
+            <a:srgbClr val="196B24"/>
+          </a:solidFill>
+          <a:ln w="19050" cap="flat" cmpd="sng" algn="ctr">
+            <a:noFill/>
+            <a:prstDash val="solid"/>
+            <a:miter lim="800000"/>
+          </a:ln>
+        </p:spPr>
+        <p:style>
+          <a:lnRef idx="2">
+            <a:schemeClr val="accent1">
+              <a:shade val="15000"/>
+            </a:schemeClr>
+          </a:lnRef>
+          <a:fillRef idx="1">
+            <a:schemeClr val="accent1"/>
+          </a:fillRef>
+          <a:effectRef idx="0">
+            <a:schemeClr val="accent1"/>
+          </a:effectRef>
+          <a:fontRef idx="minor">
+            <a:schemeClr val="lt1"/>
+          </a:fontRef>
+        </p:style>
+        <p:txBody>
+          <a:bodyPr vertOverflow="clip" horzOverflow="clip" wrap="none" rtlCol="0" anchor="ctr" anchorCtr="0">
+            <a:noAutofit/>
+          </a:bodyPr>
+          <a:lstStyle/>
+          <a:p>
+            <a:pPr algn="l"/>
+            <a:r>
+              <a:rPr lang="pt-PT" sz="2400" b="1">
+                <a:solidFill>
+                  <a:srgbClr val="FFFFFF"/>
+                </a:solidFill>
+                <a:latin typeface="Georgia"/>
+              </a:rPr>
+              <a:t>3</a:t>
+            </a:r>
+          </a:p>
+        </p:txBody>
+      </p:sp>
+      <p:sp>
+        <p:nvSpPr>
+          <p:cNvPr id="11" name="CaixaDeTexto 10">
+            <a:extLst>
+              <a:ext uri="{FF2B5EF4-FFF2-40B4-BE49-F238E27FC236}">
+                <a16:creationId xmlns:a16="http://schemas.microsoft.com/office/drawing/2014/main" id="{D2B5A08D-2BC6-294D-8D85-7A577EFF5507}"/>
+              </a:ext>
+            </a:extLst>
+          </p:cNvPr>
+          <p:cNvSpPr txBox="1"/>
+          <p:nvPr/>
+        </p:nvSpPr>
+        <p:spPr>
+          <a:xfrm>
+            <a:off x="8178800" y="3911600"/>
+            <a:ext cx="3556000" cy="355600"/>
+          </a:xfrm>
+          <a:prstGeom prst="rect">
+            <a:avLst/>
+          </a:prstGeom>
+          <a:noFill/>
+        </p:spPr>
+        <p:txBody>
+          <a:bodyPr vertOverflow="overflow" vert="horz" wrap="square" rtlCol="0" anchor="t">
+            <a:spAutoFit/>
+          </a:bodyPr>
+          <a:lstStyle/>
+          <a:p>
+            <a:pPr algn="l"/>
+            <a:r>
+              <a:rPr lang="pt-PT" b="1">
+                <a:solidFill>
+                  <a:srgbClr val="196B24"/>
+                </a:solidFill>
+                <a:latin typeface="Georgia"/>
+              </a:rPr>
+              <a:t>Regulação</a:t>
+            </a:r>
+          </a:p>
+        </p:txBody>
+      </p:sp>
+      <p:sp>
+        <p:nvSpPr>
+          <p:cNvPr id="12" name="CaixaDeTexto 11">
+            <a:extLst>
+              <a:ext uri="{FF2B5EF4-FFF2-40B4-BE49-F238E27FC236}">
+                <a16:creationId xmlns:a16="http://schemas.microsoft.com/office/drawing/2014/main" id="{5934ED8C-06A1-2348-B7E1-FE5CFEE7AEA2}"/>
+              </a:ext>
+            </a:extLst>
+          </p:cNvPr>
+          <p:cNvSpPr txBox="1"/>
+          <p:nvPr/>
+        </p:nvSpPr>
+        <p:spPr>
+          <a:xfrm>
+            <a:off x="8178800" y="4318000"/>
+            <a:ext cx="3556000" cy="523220"/>
+          </a:xfrm>
+          <a:prstGeom prst="rect">
+            <a:avLst/>
+          </a:prstGeom>
+          <a:noFill/>
+        </p:spPr>
+        <p:txBody>
+          <a:bodyPr vertOverflow="overflow" vert="horz" wrap="square" rtlCol="0" anchor="t">
+            <a:spAutoFit/>
+          </a:bodyPr>
+          <a:lstStyle/>
+          <a:p>
+            <a:pPr algn="l"/>
+            <a:r>
+              <a:rPr lang="pt-PT" sz="1400" dirty="0">
+                <a:solidFill>
+                  <a:srgbClr val="1A2332"/>
+                </a:solidFill>
+                <a:latin typeface="Calibri"/>
+                <a:cs typeface="Calibri"/>
+              </a:rPr>
+              <a:t>Alinhamento entre mecanismos técnicos e requisitos legais</a:t>
+            </a:r>
+          </a:p>
+        </p:txBody>
+      </p:sp>
+      <p:sp>
+        <p:nvSpPr>
+          <p:cNvPr id="13" name="Retângulo 12">
+            <a:extLst>
+              <a:ext uri="{FF2B5EF4-FFF2-40B4-BE49-F238E27FC236}">
+                <a16:creationId xmlns:a16="http://schemas.microsoft.com/office/drawing/2014/main" id="{C4774E2B-6863-4649-94A2-F0F2BB120D50}"/>
+              </a:ext>
+            </a:extLst>
+          </p:cNvPr>
+          <p:cNvSpPr/>
+          <p:nvPr/>
+        </p:nvSpPr>
+        <p:spPr>
+          <a:xfrm>
+            <a:off x="4064000" y="5878512"/>
+            <a:ext cx="4064000" cy="25400"/>
+          </a:xfrm>
+          <a:prstGeom prst="rect">
+            <a:avLst/>
+          </a:prstGeom>
+          <a:solidFill>
+            <a:srgbClr val="D0C9C0"/>
+          </a:solidFill>
+          <a:ln w="19050" cap="flat" cmpd="sng" algn="ctr">
+            <a:noFill/>
+            <a:prstDash val="solid"/>
+            <a:miter lim="800000"/>
+          </a:ln>
+        </p:spPr>
+        <p:style>
+          <a:lnRef idx="2">
+            <a:schemeClr val="accent1">
+              <a:shade val="15000"/>
+            </a:schemeClr>
+          </a:lnRef>
+          <a:fillRef idx="1">
+            <a:schemeClr val="accent1"/>
+          </a:fillRef>
+          <a:effectRef idx="0">
+            <a:schemeClr val="accent1"/>
+          </a:effectRef>
+          <a:fontRef idx="minor">
+            <a:schemeClr val="lt1"/>
+          </a:fontRef>
+        </p:style>
+        <p:txBody>
+          <a:bodyPr vertOverflow="clip" horzOverflow="clip" rtlCol="0" anchor="t"/>
+          <a:lstStyle/>
+          <a:p>
+            <a:pPr algn="l"/>
+            <a:endParaRPr lang="pt-PT"/>
+          </a:p>
+        </p:txBody>
+      </p:sp>
+      <p:sp>
+        <p:nvSpPr>
+          <p:cNvPr id="16" name="Retângulo 15">
+            <a:extLst>
+              <a:ext uri="{FF2B5EF4-FFF2-40B4-BE49-F238E27FC236}">
+                <a16:creationId xmlns:a16="http://schemas.microsoft.com/office/drawing/2014/main" id="{9D2352EC-8CD9-0DE7-90DF-B661417FBB4D}"/>
+              </a:ext>
+            </a:extLst>
+          </p:cNvPr>
+          <p:cNvSpPr/>
+          <p:nvPr/>
+        </p:nvSpPr>
+        <p:spPr>
+          <a:xfrm>
+            <a:off x="457200" y="1385888"/>
+            <a:ext cx="11277600" cy="889000"/>
+          </a:xfrm>
+          <a:prstGeom prst="rect">
+            <a:avLst/>
+          </a:prstGeom>
+          <a:solidFill>
+            <a:srgbClr val="E8E4DC"/>
+          </a:solidFill>
+          <a:ln w="19050" cap="flat" cmpd="sng" algn="ctr">
+            <a:noFill/>
+            <a:prstDash val="solid"/>
+            <a:miter lim="800000"/>
+          </a:ln>
+        </p:spPr>
+        <p:style>
+          <a:lnRef idx="2">
+            <a:schemeClr val="accent1">
+              <a:shade val="15000"/>
+            </a:schemeClr>
+          </a:lnRef>
+          <a:fillRef idx="1">
+            <a:schemeClr val="accent1"/>
+          </a:fillRef>
+          <a:effectRef idx="0">
+            <a:schemeClr val="accent1"/>
+          </a:effectRef>
+          <a:fontRef idx="minor">
+            <a:schemeClr val="lt1"/>
+          </a:fontRef>
+        </p:style>
+        <p:txBody>
+          <a:bodyPr vertOverflow="clip" horzOverflow="clip" rtlCol="0" anchor="t"/>
+          <a:lstStyle/>
+          <a:p>
+            <a:pPr algn="l"/>
+            <a:endParaRPr lang="pt-PT"/>
+          </a:p>
+        </p:txBody>
+      </p:sp>
+      <p:sp>
+        <p:nvSpPr>
+          <p:cNvPr id="17" name="CaixaDeTexto 16">
+            <a:extLst>
+              <a:ext uri="{FF2B5EF4-FFF2-40B4-BE49-F238E27FC236}">
+                <a16:creationId xmlns:a16="http://schemas.microsoft.com/office/drawing/2014/main" id="{1FE91FF3-3291-FF88-30F6-3DA83485F2F0}"/>
+              </a:ext>
+            </a:extLst>
+          </p:cNvPr>
+          <p:cNvSpPr txBox="1"/>
+          <p:nvPr/>
+        </p:nvSpPr>
+        <p:spPr>
+          <a:xfrm>
+            <a:off x="660400" y="1538288"/>
+            <a:ext cx="406400" cy="406400"/>
+          </a:xfrm>
+          <a:prstGeom prst="rect">
+            <a:avLst/>
+          </a:prstGeom>
+          <a:noFill/>
+        </p:spPr>
+        <p:txBody>
+          <a:bodyPr vertOverflow="overflow" vert="horz" wrap="square" rtlCol="0" anchor="t">
+            <a:noAutofit/>
+          </a:bodyPr>
+          <a:lstStyle/>
+          <a:p>
+            <a:pPr algn="l"/>
+            <a:r>
+              <a:rPr lang="pt-PT" sz="2000" b="1">
+                <a:solidFill>
+                  <a:srgbClr val="E97132"/>
+                </a:solidFill>
+                <a:latin typeface="Calibri"/>
+              </a:rPr>
+              <a:t>→</a:t>
+            </a:r>
+          </a:p>
+        </p:txBody>
+      </p:sp>
+      <p:sp>
+        <p:nvSpPr>
+          <p:cNvPr id="18" name="CaixaDeTexto 17">
+            <a:extLst>
+              <a:ext uri="{FF2B5EF4-FFF2-40B4-BE49-F238E27FC236}">
+                <a16:creationId xmlns:a16="http://schemas.microsoft.com/office/drawing/2014/main" id="{69DC93BC-68B9-CBC3-EC9B-37366C2C40D9}"/>
+              </a:ext>
+            </a:extLst>
+          </p:cNvPr>
+          <p:cNvSpPr txBox="1"/>
+          <p:nvPr/>
+        </p:nvSpPr>
+        <p:spPr>
+          <a:xfrm>
+            <a:off x="1066800" y="1575636"/>
+            <a:ext cx="10185400" cy="482600"/>
+          </a:xfrm>
+          <a:prstGeom prst="rect">
+            <a:avLst/>
+          </a:prstGeom>
+          <a:noFill/>
+        </p:spPr>
+        <p:txBody>
+          <a:bodyPr vertOverflow="overflow" vert="horz" wrap="square" rtlCol="0" anchor="ctr" anchorCtr="0">
+            <a:noAutofit/>
+          </a:bodyPr>
+          <a:lstStyle>
+            <a:defPPr>
+              <a:defRPr lang="pt-PT"/>
+            </a:defPPr>
+            <a:lvl1pPr>
+              <a:defRPr i="1">
+                <a:solidFill>
+                  <a:srgbClr val="1A2332"/>
+                </a:solidFill>
+                <a:latin typeface="Calibri"/>
+                <a:cs typeface="Calibri"/>
+              </a:defRPr>
+            </a:lvl1pPr>
+          </a:lstStyle>
+          <a:p>
+            <a:r>
+              <a:rPr lang="pt-PT" dirty="0"/>
+              <a:t>Três eixos devem avançar em conjunto para alcançar </a:t>
+            </a:r>
+            <a:r>
+              <a:rPr lang="pt-PT" dirty="0" err="1"/>
+              <a:t>unlearning</a:t>
+            </a:r>
+            <a:r>
+              <a:rPr lang="pt-PT" dirty="0"/>
+              <a:t> responsável em edifícios inteligentes.</a:t>
+            </a:r>
           </a:p>
         </p:txBody>
       </p:sp>
@@ -6429,7 +8334,7 @@
 </p:sld>
 </file>
 
-<file path=ppt/slides/slide11.xml><?xml version="1.0" encoding="utf-8"?>
+<file path=ppt/slides/slide12.xml><?xml version="1.0" encoding="utf-8"?>
 <p:sld xmlns:a="http://schemas.openxmlformats.org/drawingml/2006/main" xmlns:r="http://schemas.openxmlformats.org/officeDocument/2006/relationships" xmlns:p="http://schemas.openxmlformats.org/presentationml/2006/main">
   <p:cSld>
     <p:spTree>
@@ -12463,18 +14368,16 @@
           <a:bodyPr/>
           <a:lstStyle/>
           <a:p>
-            <a:pPr algn="l">
-              <a:buNone/>
-            </a:pPr>
-            <a:r>
-              <a:rPr lang="pt-PT" sz="3200" b="1" dirty="0">
-                <a:solidFill>
-                  <a:srgbClr val="1A2332"/>
-                </a:solidFill>
-                <a:latin typeface="Georgia"/>
-              </a:rPr>
-              <a:t>Soluções existentes</a:t>
-            </a:r>
+            <a:r>
+              <a:rPr lang="pt-PT" sz="3200" b="1" dirty="0"/>
+              <a:t>Problema existente</a:t>
+            </a:r>
+            <a:endParaRPr lang="pt-PT" sz="3200" b="1" dirty="0">
+              <a:solidFill>
+                <a:srgbClr val="1A2332"/>
+              </a:solidFill>
+              <a:latin typeface="Georgia"/>
+            </a:endParaRPr>
           </a:p>
         </p:txBody>
       </p:sp>
@@ -13727,64 +15630,10 @@
       </p:sp>
       <p:sp>
         <p:nvSpPr>
-          <p:cNvPr id="24" name="Retângulo Arredondado 23">
-            <a:extLst>
-              <a:ext uri="{FF2B5EF4-FFF2-40B4-BE49-F238E27FC236}">
-                <a16:creationId xmlns:a16="http://schemas.microsoft.com/office/drawing/2014/main" id="{CB77ECA3-AEC1-B419-4031-F675E2BE669B}"/>
-              </a:ext>
-            </a:extLst>
-          </p:cNvPr>
-          <p:cNvSpPr/>
-          <p:nvPr/>
-        </p:nvSpPr>
-        <p:spPr>
-          <a:xfrm>
-            <a:off x="4318000" y="5315227"/>
-            <a:ext cx="3556000" cy="830997"/>
-          </a:xfrm>
-          <a:prstGeom prst="roundRect">
-            <a:avLst/>
-          </a:prstGeom>
-          <a:solidFill>
-            <a:srgbClr val="F0EBE3"/>
-          </a:solidFill>
-          <a:ln w="19050" cap="flat" cmpd="sng" algn="ctr">
-            <a:noFill/>
-            <a:prstDash val="solid"/>
-            <a:miter lim="800000"/>
-          </a:ln>
-        </p:spPr>
-        <p:style>
-          <a:lnRef idx="2">
-            <a:schemeClr val="accent1">
-              <a:shade val="15000"/>
-            </a:schemeClr>
-          </a:lnRef>
-          <a:fillRef idx="1">
-            <a:schemeClr val="accent1"/>
-          </a:fillRef>
-          <a:effectRef idx="0">
-            <a:schemeClr val="accent1"/>
-          </a:effectRef>
-          <a:fontRef idx="minor">
-            <a:schemeClr val="lt1"/>
-          </a:fontRef>
-        </p:style>
-        <p:txBody>
-          <a:bodyPr vertOverflow="clip" horzOverflow="clip" rtlCol="0" anchor="t"/>
-          <a:lstStyle/>
-          <a:p>
-            <a:pPr algn="l"/>
-            <a:endParaRPr lang="pt-PT"/>
-          </a:p>
-        </p:txBody>
-      </p:sp>
-      <p:sp>
-        <p:nvSpPr>
-          <p:cNvPr id="25" name="CaixaDeTexto 24">
-            <a:extLst>
-              <a:ext uri="{FF2B5EF4-FFF2-40B4-BE49-F238E27FC236}">
-                <a16:creationId xmlns:a16="http://schemas.microsoft.com/office/drawing/2014/main" id="{A8340FE7-47ED-4419-59E0-5D35191F7841}"/>
+          <p:cNvPr id="21" name="CaixaDeTexto 20">
+            <a:extLst>
+              <a:ext uri="{FF2B5EF4-FFF2-40B4-BE49-F238E27FC236}">
+                <a16:creationId xmlns:a16="http://schemas.microsoft.com/office/drawing/2014/main" id="{7C4C37E9-C1FB-482D-D497-AC22F49566DA}"/>
               </a:ext>
             </a:extLst>
           </p:cNvPr>
@@ -13793,186 +15642,8 @@
         </p:nvSpPr>
         <p:spPr>
           <a:xfrm>
-            <a:off x="4407971" y="5435025"/>
-            <a:ext cx="3251200" cy="711200"/>
-          </a:xfrm>
-          <a:prstGeom prst="rect">
-            <a:avLst/>
-          </a:prstGeom>
-          <a:noFill/>
-        </p:spPr>
-        <p:txBody>
-          <a:bodyPr vertOverflow="overflow" vert="horz" wrap="square" rtlCol="0" anchor="t">
-            <a:spAutoFit/>
-          </a:bodyPr>
-          <a:lstStyle/>
-          <a:p>
-            <a:pPr algn="l"/>
-            <a:r>
-              <a:rPr lang="pt-PT" sz="1300" dirty="0">
-                <a:solidFill>
-                  <a:srgbClr val="8B1A1A"/>
-                </a:solidFill>
-                <a:latin typeface="Calibri"/>
-                <a:cs typeface="Calibri"/>
-              </a:rPr>
-              <a:t>Ignora: </a:t>
-            </a:r>
-            <a:r>
-              <a:rPr lang="pt-PT" sz="1300" dirty="0" err="1">
-                <a:solidFill>
-                  <a:srgbClr val="8B1A1A"/>
-                </a:solidFill>
-                <a:latin typeface="Calibri"/>
-                <a:cs typeface="Calibri"/>
-              </a:rPr>
-              <a:t>Multi-tenancy</a:t>
-            </a:r>
-            <a:r>
-              <a:rPr lang="pt-PT" sz="1300" dirty="0">
-                <a:solidFill>
-                  <a:srgbClr val="8B1A1A"/>
-                </a:solidFill>
-                <a:latin typeface="Calibri"/>
-                <a:cs typeface="Calibri"/>
-              </a:rPr>
-              <a:t>, coordenação entre camadas, modelos partilhados</a:t>
-            </a:r>
-          </a:p>
-        </p:txBody>
-      </p:sp>
-      <p:sp>
-        <p:nvSpPr>
-          <p:cNvPr id="26" name="Retângulo Arredondado 25">
-            <a:extLst>
-              <a:ext uri="{FF2B5EF4-FFF2-40B4-BE49-F238E27FC236}">
-                <a16:creationId xmlns:a16="http://schemas.microsoft.com/office/drawing/2014/main" id="{F01F6660-9CF3-E87F-E92C-1B1034ECC300}"/>
-              </a:ext>
-            </a:extLst>
-          </p:cNvPr>
-          <p:cNvSpPr/>
-          <p:nvPr/>
-        </p:nvSpPr>
-        <p:spPr>
-          <a:xfrm>
-            <a:off x="8178800" y="5318704"/>
-            <a:ext cx="3556000" cy="830997"/>
-          </a:xfrm>
-          <a:prstGeom prst="roundRect">
-            <a:avLst/>
-          </a:prstGeom>
-          <a:solidFill>
-            <a:srgbClr val="F0EBE3"/>
-          </a:solidFill>
-          <a:ln w="19050" cap="flat" cmpd="sng" algn="ctr">
-            <a:noFill/>
-            <a:prstDash val="solid"/>
-            <a:miter lim="800000"/>
-          </a:ln>
-        </p:spPr>
-        <p:style>
-          <a:lnRef idx="2">
-            <a:schemeClr val="accent1">
-              <a:shade val="15000"/>
-            </a:schemeClr>
-          </a:lnRef>
-          <a:fillRef idx="1">
-            <a:schemeClr val="accent1"/>
-          </a:fillRef>
-          <a:effectRef idx="0">
-            <a:schemeClr val="accent1"/>
-          </a:effectRef>
-          <a:fontRef idx="minor">
-            <a:schemeClr val="lt1"/>
-          </a:fontRef>
-        </p:style>
-        <p:txBody>
-          <a:bodyPr vertOverflow="clip" horzOverflow="clip" rtlCol="0" anchor="t"/>
-          <a:lstStyle/>
-          <a:p>
-            <a:pPr algn="l"/>
-            <a:endParaRPr lang="pt-PT"/>
-          </a:p>
-        </p:txBody>
-      </p:sp>
-      <p:sp>
-        <p:nvSpPr>
-          <p:cNvPr id="27" name="CaixaDeTexto 26">
-            <a:extLst>
-              <a:ext uri="{FF2B5EF4-FFF2-40B4-BE49-F238E27FC236}">
-                <a16:creationId xmlns:a16="http://schemas.microsoft.com/office/drawing/2014/main" id="{354F4A8A-241B-E1F9-B460-A8A238E0F36F}"/>
-              </a:ext>
-            </a:extLst>
-          </p:cNvPr>
-          <p:cNvSpPr txBox="1"/>
-          <p:nvPr/>
-        </p:nvSpPr>
-        <p:spPr>
-          <a:xfrm>
-            <a:off x="8331200" y="5416699"/>
-            <a:ext cx="3251200" cy="711200"/>
-          </a:xfrm>
-          <a:prstGeom prst="rect">
-            <a:avLst/>
-          </a:prstGeom>
-          <a:noFill/>
-        </p:spPr>
-        <p:txBody>
-          <a:bodyPr vertOverflow="overflow" vert="horz" wrap="square" rtlCol="0" anchor="t">
-            <a:spAutoFit/>
-          </a:bodyPr>
-          <a:lstStyle/>
-          <a:p>
-            <a:pPr algn="l"/>
-            <a:r>
-              <a:rPr lang="pt-PT" sz="1300" dirty="0">
-                <a:solidFill>
-                  <a:srgbClr val="8B1A1A"/>
-                </a:solidFill>
-                <a:latin typeface="Calibri"/>
-                <a:cs typeface="Calibri"/>
-              </a:rPr>
-              <a:t>Ignora: Garantia de </a:t>
-            </a:r>
-            <a:r>
-              <a:rPr lang="pt-PT" sz="1300" dirty="0" err="1">
-                <a:solidFill>
-                  <a:srgbClr val="8B1A1A"/>
-                </a:solidFill>
-                <a:latin typeface="Calibri"/>
-                <a:cs typeface="Calibri"/>
-              </a:rPr>
-              <a:t>erasure</a:t>
-            </a:r>
-            <a:r>
-              <a:rPr lang="pt-PT" sz="1300" dirty="0">
-                <a:solidFill>
-                  <a:srgbClr val="8B1A1A"/>
-                </a:solidFill>
-                <a:latin typeface="Calibri"/>
-                <a:cs typeface="Calibri"/>
-              </a:rPr>
-              <a:t> enfraquecida, clientes offline, sem certificação</a:t>
-            </a:r>
-          </a:p>
-        </p:txBody>
-      </p:sp>
-      <p:sp>
-        <p:nvSpPr>
-          <p:cNvPr id="28" name="CaixaDeTexto 27">
-            <a:extLst>
-              <a:ext uri="{FF2B5EF4-FFF2-40B4-BE49-F238E27FC236}">
-                <a16:creationId xmlns:a16="http://schemas.microsoft.com/office/drawing/2014/main" id="{7611D3C2-38A0-026A-B4A1-5741595A8E1C}"/>
-              </a:ext>
-            </a:extLst>
-          </p:cNvPr>
-          <p:cNvSpPr txBox="1"/>
-          <p:nvPr/>
-        </p:nvSpPr>
-        <p:spPr>
-          <a:xfrm>
-            <a:off x="1867971" y="1445667"/>
-            <a:ext cx="8331200" cy="384721"/>
+            <a:off x="3123894" y="1449269"/>
+            <a:ext cx="8331200" cy="338554"/>
           </a:xfrm>
           <a:prstGeom prst="rect">
             <a:avLst/>
@@ -14001,7 +15672,9 @@
           </a:lstStyle>
           <a:p>
             <a:r>
-              <a:rPr lang="pt-PT" dirty="0"/>
+              <a:rPr lang="pt-PT" sz="1600" b="0" dirty="0">
+                <a:latin typeface="+mn-lt"/>
+              </a:rPr>
               <a:t>Nenhum método atual satisfaz o envelope completo de restrições</a:t>
             </a:r>
           </a:p>
@@ -14025,7 +15698,13 @@
   <p:cSld>
     <p:spTree>
       <p:nvGrpSpPr>
-        <p:cNvPr id="1" name=""/>
+        <p:cNvPr id="1" name="">
+          <a:extLst>
+            <a:ext uri="{FF2B5EF4-FFF2-40B4-BE49-F238E27FC236}">
+              <a16:creationId xmlns:a16="http://schemas.microsoft.com/office/drawing/2014/main" id="{16EDD221-B55E-8589-FB8D-30A91F41B419}"/>
+            </a:ext>
+          </a:extLst>
+        </p:cNvPr>
         <p:cNvGrpSpPr/>
         <p:nvPr/>
       </p:nvGrpSpPr>
@@ -14042,7 +15721,7 @@
           <p:cNvPr id="2" name="Título 1">
             <a:extLst>
               <a:ext uri="{FF2B5EF4-FFF2-40B4-BE49-F238E27FC236}">
-                <a16:creationId xmlns:a16="http://schemas.microsoft.com/office/drawing/2014/main" id="{92012911-82BC-6872-3E14-EDE88C23BA90}"/>
+                <a16:creationId xmlns:a16="http://schemas.microsoft.com/office/drawing/2014/main" id="{B46E6D7F-B8BE-51B8-CB21-52070436528B}"/>
               </a:ext>
             </a:extLst>
           </p:cNvPr>
@@ -14058,27 +15737,25 @@
           <a:bodyPr/>
           <a:lstStyle/>
           <a:p>
-            <a:pPr algn="l">
-              <a:buNone/>
-            </a:pPr>
-            <a:r>
-              <a:rPr lang="pt-PT" sz="3200" b="1" dirty="0">
-                <a:solidFill>
-                  <a:srgbClr val="1A2332"/>
-                </a:solidFill>
-                <a:latin typeface="Georgia"/>
-              </a:rPr>
-              <a:t>Direções de Investigação</a:t>
-            </a:r>
-          </a:p>
-        </p:txBody>
-      </p:sp>
-      <p:sp>
-        <p:nvSpPr>
-          <p:cNvPr id="3" name="Retângulo Arredondado 2">
-            <a:extLst>
-              <a:ext uri="{FF2B5EF4-FFF2-40B4-BE49-F238E27FC236}">
-                <a16:creationId xmlns:a16="http://schemas.microsoft.com/office/drawing/2014/main" id="{7D1CE6D4-71C4-9C42-BDFC-0EA3A6E33AED}"/>
+            <a:r>
+              <a:rPr lang="pt-PT" sz="3200" b="1" dirty="0"/>
+              <a:t>Problema existente</a:t>
+            </a:r>
+            <a:endParaRPr lang="pt-PT" sz="3200" b="1" dirty="0">
+              <a:solidFill>
+                <a:srgbClr val="1A2332"/>
+              </a:solidFill>
+              <a:latin typeface="Georgia"/>
+            </a:endParaRPr>
+          </a:p>
+        </p:txBody>
+      </p:sp>
+      <p:sp>
+        <p:nvSpPr>
+          <p:cNvPr id="3" name="Retângulo 2">
+            <a:extLst>
+              <a:ext uri="{FF2B5EF4-FFF2-40B4-BE49-F238E27FC236}">
+                <a16:creationId xmlns:a16="http://schemas.microsoft.com/office/drawing/2014/main" id="{738972A7-8D02-6B75-3FB9-74F21D66FB01}"/>
               </a:ext>
             </a:extLst>
           </p:cNvPr>
@@ -14088,9 +15765,9 @@
         <p:spPr>
           <a:xfrm>
             <a:off x="457200" y="1905000"/>
-            <a:ext cx="5334000" cy="457200"/>
-          </a:xfrm>
-          <a:prstGeom prst="roundRect">
+            <a:ext cx="3556000" cy="406400"/>
+          </a:xfrm>
+          <a:prstGeom prst="rect">
             <a:avLst/>
           </a:prstGeom>
           <a:solidFill>
@@ -14133,17 +15810,129 @@
                 <a:latin typeface="Calibri"/>
                 <a:cs typeface="Calibri"/>
               </a:rPr>
-              <a:t>ESCALABILIDADE NO EDGE</a:t>
-            </a:r>
-          </a:p>
-        </p:txBody>
-      </p:sp>
-      <p:sp>
-        <p:nvSpPr>
-          <p:cNvPr id="4" name="Oval 3">
-            <a:extLst>
-              <a:ext uri="{FF2B5EF4-FFF2-40B4-BE49-F238E27FC236}">
-                <a16:creationId xmlns:a16="http://schemas.microsoft.com/office/drawing/2014/main" id="{3F90BDEB-842A-7447-9EC7-BD08DF512EBF}"/>
+              <a:t>NA CLOUD</a:t>
+            </a:r>
+          </a:p>
+        </p:txBody>
+      </p:sp>
+      <p:sp>
+        <p:nvSpPr>
+          <p:cNvPr id="4" name="CaixaDeTexto 3">
+            <a:extLst>
+              <a:ext uri="{FF2B5EF4-FFF2-40B4-BE49-F238E27FC236}">
+                <a16:creationId xmlns:a16="http://schemas.microsoft.com/office/drawing/2014/main" id="{9F4EB14B-AFE9-FDE1-2C03-893A0C0FD170}"/>
+              </a:ext>
+            </a:extLst>
+          </p:cNvPr>
+          <p:cNvSpPr txBox="1"/>
+          <p:nvPr/>
+        </p:nvSpPr>
+        <p:spPr>
+          <a:xfrm>
+            <a:off x="457200" y="2514600"/>
+            <a:ext cx="3556000" cy="276999"/>
+          </a:xfrm>
+          <a:prstGeom prst="rect">
+            <a:avLst/>
+          </a:prstGeom>
+          <a:noFill/>
+        </p:spPr>
+        <p:txBody>
+          <a:bodyPr vertOverflow="overflow" vert="horz" wrap="square" rtlCol="0" anchor="t">
+            <a:spAutoFit/>
+          </a:bodyPr>
+          <a:lstStyle/>
+          <a:p>
+            <a:pPr algn="l"/>
+            <a:r>
+              <a:rPr lang="pt-PT" sz="1200" b="1">
+                <a:solidFill>
+                  <a:srgbClr val="6E7787"/>
+                </a:solidFill>
+                <a:latin typeface="Calibri"/>
+                <a:cs typeface="Calibri"/>
+              </a:rPr>
+              <a:t>MÉTODOS TÍPICOS</a:t>
+            </a:r>
+          </a:p>
+        </p:txBody>
+      </p:sp>
+      <p:sp>
+        <p:nvSpPr>
+          <p:cNvPr id="5" name="CaixaDeTexto 4">
+            <a:extLst>
+              <a:ext uri="{FF2B5EF4-FFF2-40B4-BE49-F238E27FC236}">
+                <a16:creationId xmlns:a16="http://schemas.microsoft.com/office/drawing/2014/main" id="{C142D295-5514-1365-E8DF-225881E61C43}"/>
+              </a:ext>
+            </a:extLst>
+          </p:cNvPr>
+          <p:cNvSpPr txBox="1"/>
+          <p:nvPr/>
+        </p:nvSpPr>
+        <p:spPr>
+          <a:xfrm>
+            <a:off x="457200" y="2794000"/>
+            <a:ext cx="3556000" cy="584775"/>
+          </a:xfrm>
+          <a:prstGeom prst="rect">
+            <a:avLst/>
+          </a:prstGeom>
+          <a:noFill/>
+        </p:spPr>
+        <p:txBody>
+          <a:bodyPr vertOverflow="overflow" vert="horz" wrap="square" rtlCol="0" anchor="t">
+            <a:spAutoFit/>
+          </a:bodyPr>
+          <a:lstStyle/>
+          <a:p>
+            <a:r>
+              <a:rPr lang="pt-PT" sz="1600" dirty="0">
+                <a:solidFill>
+                  <a:srgbClr val="1A2332"/>
+                </a:solidFill>
+                <a:latin typeface="Calibri"/>
+                <a:cs typeface="Calibri"/>
+              </a:rPr>
+              <a:t>SISA, </a:t>
+            </a:r>
+            <a:r>
+              <a:rPr lang="pt-PT" sz="1600" dirty="0" err="1"/>
+              <a:t>gradient-based</a:t>
+            </a:r>
+            <a:r>
+              <a:rPr lang="pt-PT" sz="1600" dirty="0"/>
+              <a:t> </a:t>
+            </a:r>
+            <a:r>
+              <a:rPr lang="pt-PT" sz="1600" dirty="0" err="1"/>
+              <a:t>corrections</a:t>
+            </a:r>
+            <a:r>
+              <a:rPr lang="pt-PT" sz="1600" dirty="0"/>
+              <a:t>, </a:t>
+            </a:r>
+            <a:r>
+              <a:rPr lang="pt-PT" sz="1600" dirty="0" err="1"/>
+              <a:t>knowledge</a:t>
+            </a:r>
+            <a:r>
+              <a:rPr lang="pt-PT" sz="1600" dirty="0"/>
+              <a:t> </a:t>
+            </a:r>
+            <a:r>
+              <a:rPr lang="pt-PT" sz="1600" dirty="0" err="1"/>
+              <a:t>distillation</a:t>
+            </a:r>
+            <a:endParaRPr lang="pt-PT" sz="1600" dirty="0"/>
+          </a:p>
+        </p:txBody>
+      </p:sp>
+      <p:sp>
+        <p:nvSpPr>
+          <p:cNvPr id="6" name="Retângulo 5">
+            <a:extLst>
+              <a:ext uri="{FF2B5EF4-FFF2-40B4-BE49-F238E27FC236}">
+                <a16:creationId xmlns:a16="http://schemas.microsoft.com/office/drawing/2014/main" id="{05C1026A-1E91-4628-0BF3-928C1E114158}"/>
               </a:ext>
             </a:extLst>
           </p:cNvPr>
@@ -14152,14 +15941,14 @@
         </p:nvSpPr>
         <p:spPr>
           <a:xfrm>
-            <a:off x="508000" y="2565400"/>
-            <a:ext cx="101600" cy="101600"/>
-          </a:xfrm>
-          <a:prstGeom prst="ellipse">
+            <a:off x="457200" y="3911600"/>
+            <a:ext cx="3556000" cy="12700"/>
+          </a:xfrm>
+          <a:prstGeom prst="rect">
             <a:avLst/>
           </a:prstGeom>
           <a:solidFill>
-            <a:srgbClr val="156082"/>
+            <a:srgbClr val="D6D2CB"/>
           </a:solidFill>
           <a:ln w="19050" cap="flat" cmpd="sng" algn="ctr">
             <a:noFill/>
@@ -14188,16 +15977,16 @@
           <a:lstStyle/>
           <a:p>
             <a:pPr algn="l"/>
-            <a:endParaRPr lang="pt-PT"/>
-          </a:p>
-        </p:txBody>
-      </p:sp>
-      <p:sp>
-        <p:nvSpPr>
-          <p:cNvPr id="5" name="CaixaDeTexto 4">
-            <a:extLst>
-              <a:ext uri="{FF2B5EF4-FFF2-40B4-BE49-F238E27FC236}">
-                <a16:creationId xmlns:a16="http://schemas.microsoft.com/office/drawing/2014/main" id="{C5F96323-26F3-154E-8893-F751AAC2F7E1}"/>
+            <a:endParaRPr lang="pt-PT" sz="2000"/>
+          </a:p>
+        </p:txBody>
+      </p:sp>
+      <p:sp>
+        <p:nvSpPr>
+          <p:cNvPr id="7" name="CaixaDeTexto 6">
+            <a:extLst>
+              <a:ext uri="{FF2B5EF4-FFF2-40B4-BE49-F238E27FC236}">
+                <a16:creationId xmlns:a16="http://schemas.microsoft.com/office/drawing/2014/main" id="{D9E757F2-BD04-9040-8E7A-1A8594D47668}"/>
               </a:ext>
             </a:extLst>
           </p:cNvPr>
@@ -14206,8 +15995,8 @@
         </p:nvSpPr>
         <p:spPr>
           <a:xfrm>
-            <a:off x="711200" y="2489200"/>
-            <a:ext cx="5029200" cy="307777"/>
+            <a:off x="457200" y="4064000"/>
+            <a:ext cx="3556000" cy="276999"/>
           </a:xfrm>
           <a:prstGeom prst="rect">
             <a:avLst/>
@@ -14222,23 +16011,24 @@
           <a:p>
             <a:pPr algn="l"/>
             <a:r>
-              <a:rPr lang="pt-PT" sz="1400" b="1">
-                <a:solidFill>
-                  <a:srgbClr val="1A2332"/>
-                </a:solidFill>
-                <a:latin typeface="Calibri"/>
-              </a:rPr>
-              <a:t>Atualizações incrementais e esparsas</a:t>
-            </a:r>
-          </a:p>
-        </p:txBody>
-      </p:sp>
-      <p:sp>
-        <p:nvSpPr>
-          <p:cNvPr id="6" name="CaixaDeTexto 5">
-            <a:extLst>
-              <a:ext uri="{FF2B5EF4-FFF2-40B4-BE49-F238E27FC236}">
-                <a16:creationId xmlns:a16="http://schemas.microsoft.com/office/drawing/2014/main" id="{28C9D78B-35FC-A74A-B525-F1735188B3EC}"/>
+              <a:rPr lang="pt-PT" sz="1200" b="1">
+                <a:solidFill>
+                  <a:srgbClr val="156082"/>
+                </a:solidFill>
+                <a:latin typeface="Calibri"/>
+                <a:cs typeface="Calibri"/>
+              </a:rPr>
+              <a:t>LACUNA CENTRAL</a:t>
+            </a:r>
+          </a:p>
+        </p:txBody>
+      </p:sp>
+      <p:sp>
+        <p:nvSpPr>
+          <p:cNvPr id="8" name="CaixaDeTexto 7">
+            <a:extLst>
+              <a:ext uri="{FF2B5EF4-FFF2-40B4-BE49-F238E27FC236}">
+                <a16:creationId xmlns:a16="http://schemas.microsoft.com/office/drawing/2014/main" id="{B787E8D6-9AB8-55E8-3D47-8B3F06A1A2F0}"/>
               </a:ext>
             </a:extLst>
           </p:cNvPr>
@@ -14247,8 +16037,8 @@
         </p:nvSpPr>
         <p:spPr>
           <a:xfrm>
-            <a:off x="711200" y="2768600"/>
-            <a:ext cx="5029200" cy="276999"/>
+            <a:off x="457200" y="4343400"/>
+            <a:ext cx="3556000" cy="830997"/>
           </a:xfrm>
           <a:prstGeom prst="rect">
             <a:avLst/>
@@ -14263,23 +16053,97 @@
           <a:p>
             <a:pPr algn="l"/>
             <a:r>
-              <a:rPr lang="pt-PT" sz="1200">
-                <a:solidFill>
-                  <a:srgbClr val="2E3B4E"/>
-                </a:solidFill>
-                <a:latin typeface="Calibri"/>
-              </a:rPr>
-              <a:t>Evitar re-treino completo do modelo a cada pedido de eliminação.</a:t>
-            </a:r>
-          </a:p>
-        </p:txBody>
-      </p:sp>
-      <p:sp>
-        <p:nvSpPr>
-          <p:cNvPr id="7" name="Oval 6">
-            <a:extLst>
-              <a:ext uri="{FF2B5EF4-FFF2-40B4-BE49-F238E27FC236}">
-                <a16:creationId xmlns:a16="http://schemas.microsoft.com/office/drawing/2014/main" id="{F30FC41A-626A-2344-A1C4-68330BFA68CB}"/>
+              <a:rPr lang="pt-PT" sz="1600" i="1" dirty="0">
+                <a:solidFill>
+                  <a:srgbClr val="1A2332"/>
+                </a:solidFill>
+                <a:latin typeface="Calibri"/>
+                <a:cs typeface="Calibri"/>
+              </a:rPr>
+              <a:t>Ignora limites do </a:t>
+            </a:r>
+            <a:r>
+              <a:rPr lang="pt-PT" sz="1600" i="1" dirty="0" err="1">
+                <a:solidFill>
+                  <a:srgbClr val="1A2332"/>
+                </a:solidFill>
+                <a:latin typeface="Calibri"/>
+                <a:cs typeface="Calibri"/>
+              </a:rPr>
+              <a:t>edge</a:t>
+            </a:r>
+            <a:r>
+              <a:rPr lang="pt-PT" sz="1600" i="1" dirty="0">
+                <a:solidFill>
+                  <a:srgbClr val="1A2332"/>
+                </a:solidFill>
+                <a:latin typeface="Calibri"/>
+                <a:cs typeface="Calibri"/>
+              </a:rPr>
+              <a:t>; </a:t>
+            </a:r>
+          </a:p>
+          <a:p>
+            <a:pPr algn="l"/>
+            <a:r>
+              <a:rPr lang="pt-PT" sz="1600" i="1" dirty="0">
+                <a:solidFill>
+                  <a:srgbClr val="1A2332"/>
+                </a:solidFill>
+                <a:latin typeface="Calibri"/>
+                <a:cs typeface="Calibri"/>
+              </a:rPr>
+              <a:t>Assume </a:t>
+            </a:r>
+            <a:r>
+              <a:rPr lang="pt-PT" sz="1600" i="1" dirty="0" err="1">
+                <a:solidFill>
+                  <a:srgbClr val="1A2332"/>
+                </a:solidFill>
+                <a:latin typeface="Calibri"/>
+                <a:cs typeface="Calibri"/>
+              </a:rPr>
+              <a:t>dataset</a:t>
+            </a:r>
+            <a:r>
+              <a:rPr lang="pt-PT" sz="1600" i="1" dirty="0">
+                <a:solidFill>
+                  <a:srgbClr val="1A2332"/>
+                </a:solidFill>
+                <a:latin typeface="Calibri"/>
+                <a:cs typeface="Calibri"/>
+              </a:rPr>
+              <a:t> centralizado raramente Disponível em </a:t>
+            </a:r>
+            <a:r>
+              <a:rPr lang="pt-PT" sz="1600" i="1" dirty="0" err="1">
+                <a:solidFill>
+                  <a:srgbClr val="1A2332"/>
+                </a:solidFill>
+                <a:latin typeface="Calibri"/>
+                <a:cs typeface="Calibri"/>
+              </a:rPr>
+              <a:t>deployments</a:t>
+            </a:r>
+            <a:r>
+              <a:rPr lang="pt-PT" sz="1600" i="1" dirty="0">
+                <a:solidFill>
+                  <a:srgbClr val="1A2332"/>
+                </a:solidFill>
+                <a:latin typeface="Calibri"/>
+                <a:cs typeface="Calibri"/>
+              </a:rPr>
+              <a:t> federados.</a:t>
+            </a:r>
+          </a:p>
+        </p:txBody>
+      </p:sp>
+      <p:sp>
+        <p:nvSpPr>
+          <p:cNvPr id="9" name="Retângulo 8">
+            <a:extLst>
+              <a:ext uri="{FF2B5EF4-FFF2-40B4-BE49-F238E27FC236}">
+                <a16:creationId xmlns:a16="http://schemas.microsoft.com/office/drawing/2014/main" id="{F84D60E2-2102-0C46-ED2B-77C55335C18B}"/>
               </a:ext>
             </a:extLst>
           </p:cNvPr>
@@ -14288,14 +16152,14 @@
         </p:nvSpPr>
         <p:spPr>
           <a:xfrm>
-            <a:off x="508000" y="3403600"/>
-            <a:ext cx="101600" cy="101600"/>
-          </a:xfrm>
-          <a:prstGeom prst="ellipse">
+            <a:off x="4318000" y="1905000"/>
+            <a:ext cx="3556000" cy="406400"/>
+          </a:xfrm>
+          <a:prstGeom prst="rect">
             <a:avLst/>
           </a:prstGeom>
           <a:solidFill>
-            <a:srgbClr val="156082"/>
+            <a:srgbClr val="B5511A"/>
           </a:solidFill>
           <a:ln w="19050" cap="flat" cmpd="sng" algn="ctr">
             <a:noFill/>
@@ -14320,20 +16184,31 @@
           </a:fontRef>
         </p:style>
         <p:txBody>
-          <a:bodyPr vertOverflow="clip" horzOverflow="clip" rtlCol="0" anchor="t"/>
+          <a:bodyPr vertOverflow="clip" horzOverflow="clip" wrap="none" rtlCol="0" anchor="ctr" anchorCtr="0">
+            <a:noAutofit/>
+          </a:bodyPr>
           <a:lstStyle/>
           <a:p>
             <a:pPr algn="l"/>
-            <a:endParaRPr lang="pt-PT"/>
-          </a:p>
-        </p:txBody>
-      </p:sp>
-      <p:sp>
-        <p:nvSpPr>
-          <p:cNvPr id="8" name="CaixaDeTexto 7">
-            <a:extLst>
-              <a:ext uri="{FF2B5EF4-FFF2-40B4-BE49-F238E27FC236}">
-                <a16:creationId xmlns:a16="http://schemas.microsoft.com/office/drawing/2014/main" id="{D69C9886-0420-0C4B-B968-6E06FABAED99}"/>
+            <a:r>
+              <a:rPr lang="pt-PT" sz="1400" b="1" dirty="0">
+                <a:solidFill>
+                  <a:srgbClr val="FFFFFF"/>
+                </a:solidFill>
+                <a:latin typeface="Calibri"/>
+                <a:cs typeface="Calibri"/>
+              </a:rPr>
+              <a:t>NO EDGE</a:t>
+            </a:r>
+          </a:p>
+        </p:txBody>
+      </p:sp>
+      <p:sp>
+        <p:nvSpPr>
+          <p:cNvPr id="10" name="CaixaDeTexto 9">
+            <a:extLst>
+              <a:ext uri="{FF2B5EF4-FFF2-40B4-BE49-F238E27FC236}">
+                <a16:creationId xmlns:a16="http://schemas.microsoft.com/office/drawing/2014/main" id="{3AB9B6D6-257F-5E5B-DF1B-5925C213958A}"/>
               </a:ext>
             </a:extLst>
           </p:cNvPr>
@@ -14342,8 +16217,8 @@
         </p:nvSpPr>
         <p:spPr>
           <a:xfrm>
-            <a:off x="711200" y="3327400"/>
-            <a:ext cx="5029200" cy="307777"/>
+            <a:off x="4318000" y="2514600"/>
+            <a:ext cx="3556000" cy="276999"/>
           </a:xfrm>
           <a:prstGeom prst="rect">
             <a:avLst/>
@@ -14358,32 +16233,24 @@
           <a:p>
             <a:pPr algn="l"/>
             <a:r>
-              <a:rPr lang="pt-PT" sz="1400" b="1">
-                <a:solidFill>
-                  <a:srgbClr val="1A2332"/>
-                </a:solidFill>
-                <a:latin typeface="Calibri"/>
-              </a:rPr>
-              <a:t>Adaptadores tipo LoRA  </a:t>
-            </a:r>
-            <a:r>
-              <a:rPr lang="pt-PT" sz="1000" b="1">
-                <a:solidFill>
-                  <a:srgbClr val="E97132"/>
-                </a:solidFill>
-                <a:latin typeface="Calibri"/>
-              </a:rPr>
-              <a:t>[EXTERNO]</a:t>
-            </a:r>
-          </a:p>
-        </p:txBody>
-      </p:sp>
-      <p:sp>
-        <p:nvSpPr>
-          <p:cNvPr id="9" name="CaixaDeTexto 8">
-            <a:extLst>
-              <a:ext uri="{FF2B5EF4-FFF2-40B4-BE49-F238E27FC236}">
-                <a16:creationId xmlns:a16="http://schemas.microsoft.com/office/drawing/2014/main" id="{10BEBC2F-0F7B-6D46-A944-63692DB51C7B}"/>
+              <a:rPr lang="pt-PT" sz="1200" b="1">
+                <a:solidFill>
+                  <a:srgbClr val="6E7787"/>
+                </a:solidFill>
+                <a:latin typeface="Calibri"/>
+                <a:cs typeface="Calibri"/>
+              </a:rPr>
+              <a:t>MÉTODOS TÍPICOS</a:t>
+            </a:r>
+          </a:p>
+        </p:txBody>
+      </p:sp>
+      <p:sp>
+        <p:nvSpPr>
+          <p:cNvPr id="11" name="CaixaDeTexto 10">
+            <a:extLst>
+              <a:ext uri="{FF2B5EF4-FFF2-40B4-BE49-F238E27FC236}">
+                <a16:creationId xmlns:a16="http://schemas.microsoft.com/office/drawing/2014/main" id="{4B150B0C-6332-EBA7-5CBE-35C2E522363C}"/>
               </a:ext>
             </a:extLst>
           </p:cNvPr>
@@ -14392,8 +16259,8 @@
         </p:nvSpPr>
         <p:spPr>
           <a:xfrm>
-            <a:off x="711200" y="3606800"/>
-            <a:ext cx="5029200" cy="461665"/>
+            <a:off x="4318000" y="2794000"/>
+            <a:ext cx="3556000" cy="584775"/>
           </a:xfrm>
           <a:prstGeom prst="rect">
             <a:avLst/>
@@ -14406,25 +16273,52 @@
           </a:bodyPr>
           <a:lstStyle/>
           <a:p>
-            <a:pPr algn="l"/>
-            <a:r>
-              <a:rPr lang="pt-PT" sz="1200">
-                <a:solidFill>
-                  <a:srgbClr val="2E3B4E"/>
-                </a:solidFill>
-                <a:latin typeface="Calibri"/>
-              </a:rPr>
-              <a:t>Primitivas leves não referidas no artigo; sugestão para tornar o esquecimento praticável no edge.</a:t>
-            </a:r>
-          </a:p>
-        </p:txBody>
-      </p:sp>
-      <p:sp>
-        <p:nvSpPr>
-          <p:cNvPr id="10" name="Oval 9">
-            <a:extLst>
-              <a:ext uri="{FF2B5EF4-FFF2-40B4-BE49-F238E27FC236}">
-                <a16:creationId xmlns:a16="http://schemas.microsoft.com/office/drawing/2014/main" id="{2194CC9C-176A-0F47-ACE1-5066FA21ABD3}"/>
+            <a:r>
+              <a:rPr lang="pt-PT" sz="1600" dirty="0" err="1"/>
+              <a:t>gradient</a:t>
+            </a:r>
+            <a:r>
+              <a:rPr lang="pt-PT" sz="1600" dirty="0"/>
+              <a:t> </a:t>
+            </a:r>
+            <a:r>
+              <a:rPr lang="pt-PT" sz="1600" dirty="0" err="1"/>
+              <a:t>ascent</a:t>
+            </a:r>
+            <a:r>
+              <a:rPr lang="pt-PT" sz="1600" dirty="0"/>
+              <a:t>, </a:t>
+            </a:r>
+            <a:r>
+              <a:rPr lang="pt-PT" sz="1600" dirty="0" err="1"/>
+              <a:t>neuron</a:t>
+            </a:r>
+            <a:r>
+              <a:rPr lang="pt-PT" sz="1600" dirty="0"/>
+              <a:t> </a:t>
+            </a:r>
+            <a:r>
+              <a:rPr lang="pt-PT" sz="1600" dirty="0" err="1"/>
+              <a:t>pruning</a:t>
+            </a:r>
+            <a:r>
+              <a:rPr lang="pt-PT" sz="1600" dirty="0"/>
+              <a:t>, local fine-</a:t>
+            </a:r>
+            <a:r>
+              <a:rPr lang="pt-PT" sz="1600" dirty="0" err="1"/>
+              <a:t>tuning</a:t>
+            </a:r>
+            <a:endParaRPr lang="pt-PT" sz="1600" dirty="0"/>
+          </a:p>
+        </p:txBody>
+      </p:sp>
+      <p:sp>
+        <p:nvSpPr>
+          <p:cNvPr id="12" name="Retângulo 11">
+            <a:extLst>
+              <a:ext uri="{FF2B5EF4-FFF2-40B4-BE49-F238E27FC236}">
+                <a16:creationId xmlns:a16="http://schemas.microsoft.com/office/drawing/2014/main" id="{23E848BA-4E44-0365-2DD9-EFDCC4314C70}"/>
               </a:ext>
             </a:extLst>
           </p:cNvPr>
@@ -14433,14 +16327,14 @@
         </p:nvSpPr>
         <p:spPr>
           <a:xfrm>
-            <a:off x="508000" y="4114800"/>
-            <a:ext cx="101600" cy="101600"/>
-          </a:xfrm>
-          <a:prstGeom prst="ellipse">
+            <a:off x="4318000" y="3911600"/>
+            <a:ext cx="3556000" cy="12700"/>
+          </a:xfrm>
+          <a:prstGeom prst="rect">
             <a:avLst/>
           </a:prstGeom>
           <a:solidFill>
-            <a:srgbClr val="156082"/>
+            <a:srgbClr val="D6D2CB"/>
           </a:solidFill>
           <a:ln w="19050" cap="flat" cmpd="sng" algn="ctr">
             <a:noFill/>
@@ -14469,16 +16363,16 @@
           <a:lstStyle/>
           <a:p>
             <a:pPr algn="l"/>
-            <a:endParaRPr lang="pt-PT"/>
-          </a:p>
-        </p:txBody>
-      </p:sp>
-      <p:sp>
-        <p:nvSpPr>
-          <p:cNvPr id="11" name="CaixaDeTexto 10">
-            <a:extLst>
-              <a:ext uri="{FF2B5EF4-FFF2-40B4-BE49-F238E27FC236}">
-                <a16:creationId xmlns:a16="http://schemas.microsoft.com/office/drawing/2014/main" id="{B1BA7C17-2C74-A14C-8178-C5434B60B050}"/>
+            <a:endParaRPr lang="pt-PT" sz="2000"/>
+          </a:p>
+        </p:txBody>
+      </p:sp>
+      <p:sp>
+        <p:nvSpPr>
+          <p:cNvPr id="13" name="CaixaDeTexto 12">
+            <a:extLst>
+              <a:ext uri="{FF2B5EF4-FFF2-40B4-BE49-F238E27FC236}">
+                <a16:creationId xmlns:a16="http://schemas.microsoft.com/office/drawing/2014/main" id="{E1CC718A-F5FE-06C5-3D54-E202D599779E}"/>
               </a:ext>
             </a:extLst>
           </p:cNvPr>
@@ -14487,8 +16381,8 @@
         </p:nvSpPr>
         <p:spPr>
           <a:xfrm>
-            <a:off x="711200" y="4038600"/>
-            <a:ext cx="5029200" cy="307777"/>
+            <a:off x="4318000" y="4064000"/>
+            <a:ext cx="3556000" cy="276999"/>
           </a:xfrm>
           <a:prstGeom prst="rect">
             <a:avLst/>
@@ -14503,32 +16397,24 @@
           <a:p>
             <a:pPr algn="l"/>
             <a:r>
-              <a:rPr lang="pt-PT" sz="1400" b="1">
-                <a:solidFill>
-                  <a:srgbClr val="1A2332"/>
-                </a:solidFill>
-                <a:latin typeface="Calibri"/>
-              </a:rPr>
-              <a:t>Runtimes para microcontroladores  </a:t>
-            </a:r>
-            <a:r>
-              <a:rPr lang="pt-PT" sz="1000" b="1">
+              <a:rPr lang="pt-PT" sz="1200" b="1" dirty="0">
                 <a:solidFill>
                   <a:srgbClr val="E97132"/>
                 </a:solidFill>
                 <a:latin typeface="Calibri"/>
-              </a:rPr>
-              <a:t>[EXTERNO]</a:t>
-            </a:r>
-          </a:p>
-        </p:txBody>
-      </p:sp>
-      <p:sp>
-        <p:nvSpPr>
-          <p:cNvPr id="12" name="CaixaDeTexto 11">
-            <a:extLst>
-              <a:ext uri="{FF2B5EF4-FFF2-40B4-BE49-F238E27FC236}">
-                <a16:creationId xmlns:a16="http://schemas.microsoft.com/office/drawing/2014/main" id="{1A75184F-0B43-C24F-A1BB-A7F042B0AB41}"/>
+                <a:cs typeface="Calibri"/>
+              </a:rPr>
+              <a:t>LACUNA CENTRAL</a:t>
+            </a:r>
+          </a:p>
+        </p:txBody>
+      </p:sp>
+      <p:sp>
+        <p:nvSpPr>
+          <p:cNvPr id="14" name="CaixaDeTexto 13">
+            <a:extLst>
+              <a:ext uri="{FF2B5EF4-FFF2-40B4-BE49-F238E27FC236}">
+                <a16:creationId xmlns:a16="http://schemas.microsoft.com/office/drawing/2014/main" id="{4FB6B181-E29A-D321-565B-6E1A13B1144D}"/>
               </a:ext>
             </a:extLst>
           </p:cNvPr>
@@ -14537,8 +16423,8 @@
         </p:nvSpPr>
         <p:spPr>
           <a:xfrm>
-            <a:off x="711200" y="4318000"/>
-            <a:ext cx="5029200" cy="276999"/>
+            <a:off x="4318000" y="4343400"/>
+            <a:ext cx="3556000" cy="830997"/>
           </a:xfrm>
           <a:prstGeom prst="rect">
             <a:avLst/>
@@ -14553,23 +16439,70 @@
           <a:p>
             <a:pPr algn="l"/>
             <a:r>
-              <a:rPr lang="pt-PT" sz="1200">
-                <a:solidFill>
-                  <a:srgbClr val="2E3B4E"/>
-                </a:solidFill>
-                <a:latin typeface="Calibri"/>
-              </a:rPr>
-              <a:t>TF Lite Micro, microTVM — tecnologias não citadas no artigo.</a:t>
-            </a:r>
-          </a:p>
-        </p:txBody>
-      </p:sp>
-      <p:sp>
-        <p:nvSpPr>
-          <p:cNvPr id="13" name="Oval 12">
-            <a:extLst>
-              <a:ext uri="{FF2B5EF4-FFF2-40B4-BE49-F238E27FC236}">
-                <a16:creationId xmlns:a16="http://schemas.microsoft.com/office/drawing/2014/main" id="{12D3475D-927E-DD49-8C65-A2D20442782D}"/>
+              <a:rPr lang="pt-PT" sz="1600" i="1" dirty="0">
+                <a:solidFill>
+                  <a:srgbClr val="1A2332"/>
+                </a:solidFill>
+                <a:latin typeface="Calibri"/>
+                <a:cs typeface="Calibri"/>
+              </a:rPr>
+              <a:t>Opera de forma isolada; </a:t>
+            </a:r>
+          </a:p>
+          <a:p>
+            <a:pPr algn="l"/>
+            <a:r>
+              <a:rPr lang="pt-PT" sz="1600" i="1" dirty="0">
+                <a:solidFill>
+                  <a:srgbClr val="1A2332"/>
+                </a:solidFill>
+                <a:latin typeface="Calibri"/>
+                <a:cs typeface="Calibri"/>
+              </a:rPr>
+              <a:t>Sem coordenação entre camadas; </a:t>
+            </a:r>
+          </a:p>
+          <a:p>
+            <a:pPr algn="l"/>
+            <a:r>
+              <a:rPr lang="pt-PT" sz="1600" i="1" dirty="0">
+                <a:solidFill>
+                  <a:srgbClr val="1A2332"/>
+                </a:solidFill>
+                <a:latin typeface="Calibri"/>
+                <a:cs typeface="Calibri"/>
+              </a:rPr>
+              <a:t>Não respeita fronteiras </a:t>
+            </a:r>
+            <a:r>
+              <a:rPr lang="pt-PT" sz="1600" i="1" dirty="0" err="1">
+                <a:solidFill>
+                  <a:srgbClr val="1A2332"/>
+                </a:solidFill>
+                <a:latin typeface="Calibri"/>
+                <a:cs typeface="Calibri"/>
+              </a:rPr>
+              <a:t>multi-tenant</a:t>
+            </a:r>
+            <a:r>
+              <a:rPr lang="pt-PT" sz="1600" i="1" dirty="0">
+                <a:solidFill>
+                  <a:srgbClr val="1A2332"/>
+                </a:solidFill>
+                <a:latin typeface="Calibri"/>
+                <a:cs typeface="Calibri"/>
+              </a:rPr>
+              <a:t>.</a:t>
+            </a:r>
+          </a:p>
+        </p:txBody>
+      </p:sp>
+      <p:sp>
+        <p:nvSpPr>
+          <p:cNvPr id="15" name="Retângulo 14">
+            <a:extLst>
+              <a:ext uri="{FF2B5EF4-FFF2-40B4-BE49-F238E27FC236}">
+                <a16:creationId xmlns:a16="http://schemas.microsoft.com/office/drawing/2014/main" id="{C75F07B4-4A9F-0FBF-4E96-5F861B4A59C2}"/>
               </a:ext>
             </a:extLst>
           </p:cNvPr>
@@ -14578,14 +16511,14 @@
         </p:nvSpPr>
         <p:spPr>
           <a:xfrm>
-            <a:off x="508000" y="4826000"/>
-            <a:ext cx="101600" cy="101600"/>
-          </a:xfrm>
-          <a:prstGeom prst="ellipse">
+            <a:off x="8178800" y="1905000"/>
+            <a:ext cx="3556000" cy="406400"/>
+          </a:xfrm>
+          <a:prstGeom prst="rect">
             <a:avLst/>
           </a:prstGeom>
           <a:solidFill>
-            <a:srgbClr val="156082"/>
+            <a:srgbClr val="196B24"/>
           </a:solidFill>
           <a:ln w="19050" cap="flat" cmpd="sng" algn="ctr">
             <a:noFill/>
@@ -14610,20 +16543,31 @@
           </a:fontRef>
         </p:style>
         <p:txBody>
-          <a:bodyPr vertOverflow="clip" horzOverflow="clip" rtlCol="0" anchor="t"/>
+          <a:bodyPr vertOverflow="clip" horzOverflow="clip" wrap="none" rtlCol="0" anchor="ctr" anchorCtr="0">
+            <a:noAutofit/>
+          </a:bodyPr>
           <a:lstStyle/>
           <a:p>
             <a:pPr algn="l"/>
-            <a:endParaRPr lang="pt-PT"/>
-          </a:p>
-        </p:txBody>
-      </p:sp>
-      <p:sp>
-        <p:nvSpPr>
-          <p:cNvPr id="14" name="CaixaDeTexto 13">
-            <a:extLst>
-              <a:ext uri="{FF2B5EF4-FFF2-40B4-BE49-F238E27FC236}">
-                <a16:creationId xmlns:a16="http://schemas.microsoft.com/office/drawing/2014/main" id="{567C310F-F11F-B545-AD9E-9E44A55CA2BE}"/>
+            <a:r>
+              <a:rPr lang="pt-PT" sz="1400" b="1" dirty="0">
+                <a:solidFill>
+                  <a:srgbClr val="FFFFFF"/>
+                </a:solidFill>
+                <a:latin typeface="Calibri"/>
+                <a:cs typeface="Calibri"/>
+              </a:rPr>
+              <a:t>FEDERATED</a:t>
+            </a:r>
+          </a:p>
+        </p:txBody>
+      </p:sp>
+      <p:sp>
+        <p:nvSpPr>
+          <p:cNvPr id="16" name="CaixaDeTexto 15">
+            <a:extLst>
+              <a:ext uri="{FF2B5EF4-FFF2-40B4-BE49-F238E27FC236}">
+                <a16:creationId xmlns:a16="http://schemas.microsoft.com/office/drawing/2014/main" id="{B6810AA6-105F-E19D-AACE-2E65AB41A604}"/>
               </a:ext>
             </a:extLst>
           </p:cNvPr>
@@ -14632,8 +16576,8 @@
         </p:nvSpPr>
         <p:spPr>
           <a:xfrm>
-            <a:off x="711200" y="4749800"/>
-            <a:ext cx="5029200" cy="307777"/>
+            <a:off x="8178800" y="2514600"/>
+            <a:ext cx="3556000" cy="276999"/>
           </a:xfrm>
           <a:prstGeom prst="rect">
             <a:avLst/>
@@ -14648,32 +16592,24 @@
           <a:p>
             <a:pPr algn="l"/>
             <a:r>
-              <a:rPr lang="pt-PT" sz="1400" b="1">
-                <a:solidFill>
-                  <a:srgbClr val="1A2332"/>
-                </a:solidFill>
-                <a:latin typeface="Calibri"/>
-              </a:rPr>
-              <a:t>Aceleradores NPU / DSP  </a:t>
-            </a:r>
-            <a:r>
-              <a:rPr lang="pt-PT" sz="1000" b="1">
-                <a:solidFill>
-                  <a:srgbClr val="E97132"/>
-                </a:solidFill>
-                <a:latin typeface="Calibri"/>
-              </a:rPr>
-              <a:t>[EXTERNO]</a:t>
-            </a:r>
-          </a:p>
-        </p:txBody>
-      </p:sp>
-      <p:sp>
-        <p:nvSpPr>
-          <p:cNvPr id="15" name="CaixaDeTexto 14">
-            <a:extLst>
-              <a:ext uri="{FF2B5EF4-FFF2-40B4-BE49-F238E27FC236}">
-                <a16:creationId xmlns:a16="http://schemas.microsoft.com/office/drawing/2014/main" id="{DAF1A083-6C0D-3343-A247-98FC91AF480A}"/>
+              <a:rPr lang="pt-PT" sz="1200" b="1">
+                <a:solidFill>
+                  <a:srgbClr val="6E7787"/>
+                </a:solidFill>
+                <a:latin typeface="Calibri"/>
+                <a:cs typeface="Calibri"/>
+              </a:rPr>
+              <a:t>MÉTODOS TÍPICOS</a:t>
+            </a:r>
+          </a:p>
+        </p:txBody>
+      </p:sp>
+      <p:sp>
+        <p:nvSpPr>
+          <p:cNvPr id="17" name="CaixaDeTexto 16">
+            <a:extLst>
+              <a:ext uri="{FF2B5EF4-FFF2-40B4-BE49-F238E27FC236}">
+                <a16:creationId xmlns:a16="http://schemas.microsoft.com/office/drawing/2014/main" id="{45038688-E652-75B6-B0A0-483AC4BCC788}"/>
               </a:ext>
             </a:extLst>
           </p:cNvPr>
@@ -14682,8 +16618,8 @@
         </p:nvSpPr>
         <p:spPr>
           <a:xfrm>
-            <a:off x="711200" y="5029200"/>
-            <a:ext cx="5029200" cy="276999"/>
+            <a:off x="8178800" y="2794000"/>
+            <a:ext cx="3556000" cy="584775"/>
           </a:xfrm>
           <a:prstGeom prst="rect">
             <a:avLst/>
@@ -14698,23 +16634,91 @@
           <a:p>
             <a:pPr algn="l"/>
             <a:r>
-              <a:rPr lang="pt-PT" sz="1200">
-                <a:solidFill>
-                  <a:srgbClr val="2E3B4E"/>
-                </a:solidFill>
-                <a:latin typeface="Calibri"/>
-              </a:rPr>
-              <a:t>Hardware específico para inferência no terreno; fora do âmbito do artigo.</a:t>
-            </a:r>
-          </a:p>
-        </p:txBody>
-      </p:sp>
-      <p:sp>
-        <p:nvSpPr>
-          <p:cNvPr id="16" name="Retângulo Arredondado 15">
-            <a:extLst>
-              <a:ext uri="{FF2B5EF4-FFF2-40B4-BE49-F238E27FC236}">
-                <a16:creationId xmlns:a16="http://schemas.microsoft.com/office/drawing/2014/main" id="{6B874A69-8707-494F-96CD-B4A7BC8D1714}"/>
+              <a:rPr lang="pt-PT" sz="1600" dirty="0" err="1">
+                <a:solidFill>
+                  <a:srgbClr val="1A2332"/>
+                </a:solidFill>
+                <a:latin typeface="Calibri"/>
+                <a:cs typeface="Calibri"/>
+              </a:rPr>
+              <a:t>FedEraser</a:t>
+            </a:r>
+            <a:r>
+              <a:rPr lang="pt-PT" sz="1600" dirty="0">
+                <a:solidFill>
+                  <a:srgbClr val="1A2332"/>
+                </a:solidFill>
+                <a:latin typeface="Calibri"/>
+                <a:cs typeface="Calibri"/>
+              </a:rPr>
+              <a:t>, </a:t>
+            </a:r>
+            <a:r>
+              <a:rPr lang="pt-PT" sz="1600" dirty="0" err="1">
+                <a:solidFill>
+                  <a:srgbClr val="1A2332"/>
+                </a:solidFill>
+                <a:latin typeface="Calibri"/>
+                <a:cs typeface="Calibri"/>
+              </a:rPr>
+              <a:t>gradient-rollback</a:t>
+            </a:r>
+            <a:r>
+              <a:rPr lang="pt-PT" sz="1600" dirty="0">
+                <a:solidFill>
+                  <a:srgbClr val="1A2332"/>
+                </a:solidFill>
+                <a:latin typeface="Calibri"/>
+                <a:cs typeface="Calibri"/>
+              </a:rPr>
+              <a:t>, </a:t>
+            </a:r>
+            <a:r>
+              <a:rPr lang="pt-PT" sz="1600" dirty="0" err="1">
+                <a:solidFill>
+                  <a:srgbClr val="1A2332"/>
+                </a:solidFill>
+                <a:latin typeface="Calibri"/>
+                <a:cs typeface="Calibri"/>
+              </a:rPr>
+              <a:t>federated</a:t>
+            </a:r>
+            <a:r>
+              <a:rPr lang="pt-PT" sz="1600" dirty="0">
+                <a:solidFill>
+                  <a:srgbClr val="1A2332"/>
+                </a:solidFill>
+                <a:latin typeface="Calibri"/>
+                <a:cs typeface="Calibri"/>
+              </a:rPr>
+              <a:t> SISA </a:t>
+            </a:r>
+            <a:r>
+              <a:rPr lang="pt-PT" sz="1600" dirty="0" err="1">
+                <a:solidFill>
+                  <a:srgbClr val="1A2332"/>
+                </a:solidFill>
+                <a:latin typeface="Calibri"/>
+                <a:cs typeface="Calibri"/>
+              </a:rPr>
+              <a:t>variant</a:t>
+            </a:r>
+            <a:endParaRPr lang="pt-PT" sz="1600" dirty="0">
+              <a:solidFill>
+                <a:srgbClr val="1A2332"/>
+              </a:solidFill>
+              <a:latin typeface="Calibri"/>
+              <a:cs typeface="Calibri"/>
+            </a:endParaRPr>
+          </a:p>
+        </p:txBody>
+      </p:sp>
+      <p:sp>
+        <p:nvSpPr>
+          <p:cNvPr id="18" name="Retângulo 17">
+            <a:extLst>
+              <a:ext uri="{FF2B5EF4-FFF2-40B4-BE49-F238E27FC236}">
+                <a16:creationId xmlns:a16="http://schemas.microsoft.com/office/drawing/2014/main" id="{D731850D-9665-E046-0999-05659C3E7F5D}"/>
               </a:ext>
             </a:extLst>
           </p:cNvPr>
@@ -14723,14 +16727,14 @@
         </p:nvSpPr>
         <p:spPr>
           <a:xfrm>
-            <a:off x="6096000" y="1905000"/>
-            <a:ext cx="5334000" cy="457200"/>
-          </a:xfrm>
-          <a:prstGeom prst="roundRect">
+            <a:off x="8178800" y="3911600"/>
+            <a:ext cx="3556000" cy="12700"/>
+          </a:xfrm>
+          <a:prstGeom prst="rect">
             <a:avLst/>
           </a:prstGeom>
           <a:solidFill>
-            <a:srgbClr val="B5511A"/>
+            <a:srgbClr val="D6D2CB"/>
           </a:solidFill>
           <a:ln w="19050" cap="flat" cmpd="sng" algn="ctr">
             <a:noFill/>
@@ -14755,31 +16759,117 @@
           </a:fontRef>
         </p:style>
         <p:txBody>
-          <a:bodyPr vertOverflow="clip" horzOverflow="clip" wrap="none" rtlCol="0" anchor="ctr" anchorCtr="0">
-            <a:noAutofit/>
+          <a:bodyPr vertOverflow="clip" horzOverflow="clip" rtlCol="0" anchor="t"/>
+          <a:lstStyle/>
+          <a:p>
+            <a:pPr algn="l"/>
+            <a:endParaRPr lang="pt-PT" sz="2000"/>
+          </a:p>
+        </p:txBody>
+      </p:sp>
+      <p:sp>
+        <p:nvSpPr>
+          <p:cNvPr id="19" name="CaixaDeTexto 18">
+            <a:extLst>
+              <a:ext uri="{FF2B5EF4-FFF2-40B4-BE49-F238E27FC236}">
+                <a16:creationId xmlns:a16="http://schemas.microsoft.com/office/drawing/2014/main" id="{407773E8-16BE-C0B5-A186-247A43A03309}"/>
+              </a:ext>
+            </a:extLst>
+          </p:cNvPr>
+          <p:cNvSpPr txBox="1"/>
+          <p:nvPr/>
+        </p:nvSpPr>
+        <p:spPr>
+          <a:xfrm>
+            <a:off x="8178800" y="4064000"/>
+            <a:ext cx="3556000" cy="276999"/>
+          </a:xfrm>
+          <a:prstGeom prst="rect">
+            <a:avLst/>
+          </a:prstGeom>
+          <a:noFill/>
+        </p:spPr>
+        <p:txBody>
+          <a:bodyPr vertOverflow="overflow" vert="horz" wrap="square" rtlCol="0" anchor="t">
+            <a:spAutoFit/>
           </a:bodyPr>
           <a:lstStyle/>
           <a:p>
             <a:pPr algn="l"/>
             <a:r>
-              <a:rPr lang="pt-PT" sz="1400" b="1">
-                <a:solidFill>
-                  <a:srgbClr val="FFFFFF"/>
-                </a:solidFill>
-                <a:latin typeface="Calibri"/>
-                <a:cs typeface="Calibri"/>
-              </a:rPr>
-              <a:t>VERIFICAÇÃO E GARANTIAS</a:t>
-            </a:r>
-          </a:p>
-        </p:txBody>
-      </p:sp>
-      <p:sp>
-        <p:nvSpPr>
-          <p:cNvPr id="17" name="Oval 16">
-            <a:extLst>
-              <a:ext uri="{FF2B5EF4-FFF2-40B4-BE49-F238E27FC236}">
-                <a16:creationId xmlns:a16="http://schemas.microsoft.com/office/drawing/2014/main" id="{D660A62C-0446-2944-B6BC-2130A92C8C9E}"/>
+              <a:rPr lang="pt-PT" sz="1200" b="1">
+                <a:solidFill>
+                  <a:srgbClr val="196B24"/>
+                </a:solidFill>
+                <a:latin typeface="Calibri"/>
+                <a:cs typeface="Calibri"/>
+              </a:rPr>
+              <a:t>LACUNA CENTRAL</a:t>
+            </a:r>
+          </a:p>
+        </p:txBody>
+      </p:sp>
+      <p:sp>
+        <p:nvSpPr>
+          <p:cNvPr id="20" name="CaixaDeTexto 19">
+            <a:extLst>
+              <a:ext uri="{FF2B5EF4-FFF2-40B4-BE49-F238E27FC236}">
+                <a16:creationId xmlns:a16="http://schemas.microsoft.com/office/drawing/2014/main" id="{C53B9C94-7F26-B294-A87A-525EA96FBC95}"/>
+              </a:ext>
+            </a:extLst>
+          </p:cNvPr>
+          <p:cNvSpPr txBox="1"/>
+          <p:nvPr/>
+        </p:nvSpPr>
+        <p:spPr>
+          <a:xfrm>
+            <a:off x="8178800" y="4343400"/>
+            <a:ext cx="3556000" cy="830997"/>
+          </a:xfrm>
+          <a:prstGeom prst="rect">
+            <a:avLst/>
+          </a:prstGeom>
+          <a:noFill/>
+        </p:spPr>
+        <p:txBody>
+          <a:bodyPr vertOverflow="overflow" vert="horz" wrap="square" rtlCol="0" anchor="t">
+            <a:spAutoFit/>
+          </a:bodyPr>
+          <a:lstStyle/>
+          <a:p>
+            <a:pPr algn="l"/>
+            <a:r>
+              <a:rPr lang="pt-PT" sz="1600" i="1" dirty="0">
+                <a:solidFill>
+                  <a:srgbClr val="1A2332"/>
+                </a:solidFill>
+                <a:latin typeface="Calibri"/>
+                <a:cs typeface="Calibri"/>
+              </a:rPr>
+              <a:t>Garantia apenas estatística, não certificada;</a:t>
+            </a:r>
+          </a:p>
+          <a:p>
+            <a:pPr algn="l"/>
+            <a:r>
+              <a:rPr lang="pt-PT" sz="1600" i="1" dirty="0">
+                <a:solidFill>
+                  <a:srgbClr val="1A2332"/>
+                </a:solidFill>
+                <a:latin typeface="Calibri"/>
+                <a:cs typeface="Calibri"/>
+              </a:rPr>
+              <a:t>Clientes offline mantêm pesos obsoletos.</a:t>
+            </a:r>
+          </a:p>
+        </p:txBody>
+      </p:sp>
+      <p:sp>
+        <p:nvSpPr>
+          <p:cNvPr id="22" name="Retângulo Arredondado 21">
+            <a:extLst>
+              <a:ext uri="{FF2B5EF4-FFF2-40B4-BE49-F238E27FC236}">
+                <a16:creationId xmlns:a16="http://schemas.microsoft.com/office/drawing/2014/main" id="{DD034408-B558-255B-767D-E9F22AA98E0E}"/>
               </a:ext>
             </a:extLst>
           </p:cNvPr>
@@ -14788,14 +16878,14 @@
         </p:nvSpPr>
         <p:spPr>
           <a:xfrm>
-            <a:off x="6146800" y="2565400"/>
-            <a:ext cx="101600" cy="101600"/>
-          </a:xfrm>
-          <a:prstGeom prst="ellipse">
+            <a:off x="457200" y="5318704"/>
+            <a:ext cx="3556000" cy="830997"/>
+          </a:xfrm>
+          <a:prstGeom prst="roundRect">
             <a:avLst/>
           </a:prstGeom>
           <a:solidFill>
-            <a:srgbClr val="B5511A"/>
+            <a:srgbClr val="F0EBE3"/>
           </a:solidFill>
           <a:ln w="19050" cap="flat" cmpd="sng" algn="ctr">
             <a:noFill/>
@@ -14830,10 +16920,10 @@
       </p:sp>
       <p:sp>
         <p:nvSpPr>
-          <p:cNvPr id="18" name="CaixaDeTexto 17">
-            <a:extLst>
-              <a:ext uri="{FF2B5EF4-FFF2-40B4-BE49-F238E27FC236}">
-                <a16:creationId xmlns:a16="http://schemas.microsoft.com/office/drawing/2014/main" id="{4460F763-94A9-C640-AD72-8B7D81739510}"/>
+          <p:cNvPr id="23" name="CaixaDeTexto 22">
+            <a:extLst>
+              <a:ext uri="{FF2B5EF4-FFF2-40B4-BE49-F238E27FC236}">
+                <a16:creationId xmlns:a16="http://schemas.microsoft.com/office/drawing/2014/main" id="{A86A64DC-C62A-7023-220F-4254070D11D8}"/>
               </a:ext>
             </a:extLst>
           </p:cNvPr>
@@ -14842,8 +16932,8 @@
         </p:nvSpPr>
         <p:spPr>
           <a:xfrm>
-            <a:off x="6350000" y="2489200"/>
-            <a:ext cx="5029200" cy="307777"/>
+            <a:off x="609600" y="5435024"/>
+            <a:ext cx="3251200" cy="711200"/>
           </a:xfrm>
           <a:prstGeom prst="rect">
             <a:avLst/>
@@ -14858,64 +16948,61 @@
           <a:p>
             <a:pPr algn="l"/>
             <a:r>
-              <a:rPr lang="pt-PT" sz="1400" b="1">
-                <a:solidFill>
-                  <a:srgbClr val="1A2332"/>
-                </a:solidFill>
-                <a:latin typeface="Calibri"/>
-              </a:rPr>
-              <a:t>Verificabilidade da eliminação</a:t>
-            </a:r>
-          </a:p>
-        </p:txBody>
-      </p:sp>
-      <p:sp>
-        <p:nvSpPr>
-          <p:cNvPr id="19" name="CaixaDeTexto 18">
-            <a:extLst>
-              <a:ext uri="{FF2B5EF4-FFF2-40B4-BE49-F238E27FC236}">
-                <a16:creationId xmlns:a16="http://schemas.microsoft.com/office/drawing/2014/main" id="{7B712AE0-AB66-2F41-9682-D4DA6813FA03}"/>
-              </a:ext>
-            </a:extLst>
-          </p:cNvPr>
-          <p:cNvSpPr txBox="1"/>
-          <p:nvPr/>
-        </p:nvSpPr>
-        <p:spPr>
-          <a:xfrm>
-            <a:off x="6350000" y="2768600"/>
-            <a:ext cx="5029200" cy="461665"/>
-          </a:xfrm>
-          <a:prstGeom prst="rect">
-            <a:avLst/>
-          </a:prstGeom>
-          <a:noFill/>
-        </p:spPr>
-        <p:txBody>
-          <a:bodyPr vertOverflow="overflow" vert="horz" wrap="square" rtlCol="0" anchor="t">
-            <a:spAutoFit/>
-          </a:bodyPr>
-          <a:lstStyle/>
-          <a:p>
-            <a:pPr algn="l"/>
-            <a:r>
-              <a:rPr lang="pt-PT" sz="1200">
-                <a:solidFill>
-                  <a:srgbClr val="2E3B4E"/>
-                </a:solidFill>
-                <a:latin typeface="Calibri"/>
-              </a:rPr>
-              <a:t>O artigo identifica a falta de provas formais de esquecimento como lacuna central.</a:t>
-            </a:r>
-          </a:p>
-        </p:txBody>
-      </p:sp>
-      <p:sp>
-        <p:nvSpPr>
-          <p:cNvPr id="20" name="Oval 19">
-            <a:extLst>
-              <a:ext uri="{FF2B5EF4-FFF2-40B4-BE49-F238E27FC236}">
-                <a16:creationId xmlns:a16="http://schemas.microsoft.com/office/drawing/2014/main" id="{89780F56-6DB4-3644-9525-1E80A52B239A}"/>
+              <a:rPr lang="pt-PT" sz="1300" dirty="0">
+                <a:solidFill>
+                  <a:srgbClr val="8B1A1A"/>
+                </a:solidFill>
+                <a:latin typeface="Calibri"/>
+                <a:cs typeface="Calibri"/>
+              </a:rPr>
+              <a:t>Ignora: Limites de recursos </a:t>
+            </a:r>
+            <a:r>
+              <a:rPr lang="pt-PT" sz="1300" dirty="0" err="1">
+                <a:solidFill>
+                  <a:srgbClr val="8B1A1A"/>
+                </a:solidFill>
+                <a:latin typeface="Calibri"/>
+                <a:cs typeface="Calibri"/>
+              </a:rPr>
+              <a:t>edge</a:t>
+            </a:r>
+            <a:r>
+              <a:rPr lang="pt-PT" sz="1300" dirty="0">
+                <a:solidFill>
+                  <a:srgbClr val="8B1A1A"/>
+                </a:solidFill>
+                <a:latin typeface="Calibri"/>
+                <a:cs typeface="Calibri"/>
+              </a:rPr>
+              <a:t>, federação, replicação </a:t>
+            </a:r>
+            <a:r>
+              <a:rPr lang="pt-PT" sz="1300" dirty="0" err="1">
+                <a:solidFill>
+                  <a:srgbClr val="8B1A1A"/>
+                </a:solidFill>
+                <a:latin typeface="Calibri"/>
+                <a:cs typeface="Calibri"/>
+              </a:rPr>
+              <a:t>multi-camada</a:t>
+            </a:r>
+            <a:endParaRPr lang="pt-PT" sz="1300" dirty="0">
+              <a:solidFill>
+                <a:srgbClr val="8B1A1A"/>
+              </a:solidFill>
+              <a:latin typeface="Calibri"/>
+              <a:cs typeface="Calibri"/>
+            </a:endParaRPr>
+          </a:p>
+        </p:txBody>
+      </p:sp>
+      <p:sp>
+        <p:nvSpPr>
+          <p:cNvPr id="24" name="Retângulo Arredondado 23">
+            <a:extLst>
+              <a:ext uri="{FF2B5EF4-FFF2-40B4-BE49-F238E27FC236}">
+                <a16:creationId xmlns:a16="http://schemas.microsoft.com/office/drawing/2014/main" id="{5C60DEC6-C05B-EBC7-C1BA-1CF385DED753}"/>
               </a:ext>
             </a:extLst>
           </p:cNvPr>
@@ -14924,14 +17011,14 @@
         </p:nvSpPr>
         <p:spPr>
           <a:xfrm>
-            <a:off x="6146800" y="3403600"/>
-            <a:ext cx="101600" cy="101600"/>
-          </a:xfrm>
-          <a:prstGeom prst="ellipse">
+            <a:off x="4318000" y="5315227"/>
+            <a:ext cx="3556000" cy="830997"/>
+          </a:xfrm>
+          <a:prstGeom prst="roundRect">
             <a:avLst/>
           </a:prstGeom>
           <a:solidFill>
-            <a:srgbClr val="B5511A"/>
+            <a:srgbClr val="F0EBE3"/>
           </a:solidFill>
           <a:ln w="19050" cap="flat" cmpd="sng" algn="ctr">
             <a:noFill/>
@@ -14966,10 +17053,10 @@
       </p:sp>
       <p:sp>
         <p:nvSpPr>
-          <p:cNvPr id="21" name="CaixaDeTexto 20">
-            <a:extLst>
-              <a:ext uri="{FF2B5EF4-FFF2-40B4-BE49-F238E27FC236}">
-                <a16:creationId xmlns:a16="http://schemas.microsoft.com/office/drawing/2014/main" id="{89FE33ED-72D8-E64B-825A-C229569C3503}"/>
+          <p:cNvPr id="25" name="CaixaDeTexto 24">
+            <a:extLst>
+              <a:ext uri="{FF2B5EF4-FFF2-40B4-BE49-F238E27FC236}">
+                <a16:creationId xmlns:a16="http://schemas.microsoft.com/office/drawing/2014/main" id="{D070B7BF-31F7-E320-00D0-FA5094648E74}"/>
               </a:ext>
             </a:extLst>
           </p:cNvPr>
@@ -14978,8 +17065,8 @@
         </p:nvSpPr>
         <p:spPr>
           <a:xfrm>
-            <a:off x="6350000" y="3327400"/>
-            <a:ext cx="5029200" cy="307777"/>
+            <a:off x="4407971" y="5435025"/>
+            <a:ext cx="3251200" cy="711200"/>
           </a:xfrm>
           <a:prstGeom prst="rect">
             <a:avLst/>
@@ -14994,32 +17081,44 @@
           <a:p>
             <a:pPr algn="l"/>
             <a:r>
-              <a:rPr lang="pt-PT" sz="1400" b="1">
-                <a:solidFill>
-                  <a:srgbClr val="1A2332"/>
-                </a:solidFill>
-                <a:latin typeface="Calibri"/>
-              </a:rPr>
-              <a:t>Ambientes de execução confiáveis (TEE)  </a:t>
-            </a:r>
-            <a:r>
-              <a:rPr lang="pt-PT" sz="1000" b="1">
-                <a:solidFill>
-                  <a:srgbClr val="E97132"/>
-                </a:solidFill>
-                <a:latin typeface="Calibri"/>
-              </a:rPr>
-              <a:t>[EXTERNO]</a:t>
-            </a:r>
-          </a:p>
-        </p:txBody>
-      </p:sp>
-      <p:sp>
-        <p:nvSpPr>
-          <p:cNvPr id="22" name="CaixaDeTexto 21">
-            <a:extLst>
-              <a:ext uri="{FF2B5EF4-FFF2-40B4-BE49-F238E27FC236}">
-                <a16:creationId xmlns:a16="http://schemas.microsoft.com/office/drawing/2014/main" id="{C2D647A6-EE07-C245-B24D-7DB07C228C1F}"/>
+              <a:rPr lang="pt-PT" sz="1300" dirty="0">
+                <a:solidFill>
+                  <a:srgbClr val="8B1A1A"/>
+                </a:solidFill>
+                <a:latin typeface="Calibri"/>
+                <a:cs typeface="Calibri"/>
+              </a:rPr>
+              <a:t>Ignora: </a:t>
+            </a:r>
+            <a:r>
+              <a:rPr lang="pt-PT" sz="1300" dirty="0" err="1">
+                <a:solidFill>
+                  <a:srgbClr val="8B1A1A"/>
+                </a:solidFill>
+                <a:latin typeface="Calibri"/>
+                <a:cs typeface="Calibri"/>
+              </a:rPr>
+              <a:t>Multi-tenancy</a:t>
+            </a:r>
+            <a:r>
+              <a:rPr lang="pt-PT" sz="1300" dirty="0">
+                <a:solidFill>
+                  <a:srgbClr val="8B1A1A"/>
+                </a:solidFill>
+                <a:latin typeface="Calibri"/>
+                <a:cs typeface="Calibri"/>
+              </a:rPr>
+              <a:t>, coordenação entre camadas, modelos partilhados</a:t>
+            </a:r>
+          </a:p>
+        </p:txBody>
+      </p:sp>
+      <p:sp>
+        <p:nvSpPr>
+          <p:cNvPr id="21" name="CaixaDeTexto 20">
+            <a:extLst>
+              <a:ext uri="{FF2B5EF4-FFF2-40B4-BE49-F238E27FC236}">
+                <a16:creationId xmlns:a16="http://schemas.microsoft.com/office/drawing/2014/main" id="{0C11F41D-890D-6441-FA54-B3AD1FD4F334}"/>
               </a:ext>
             </a:extLst>
           </p:cNvPr>
@@ -15028,8 +17127,8 @@
         </p:nvSpPr>
         <p:spPr>
           <a:xfrm>
-            <a:off x="6350000" y="3606800"/>
-            <a:ext cx="5029200" cy="461665"/>
+            <a:off x="3123894" y="1449269"/>
+            <a:ext cx="8331200" cy="338554"/>
           </a:xfrm>
           <a:prstGeom prst="rect">
             <a:avLst/>
@@ -15037,423 +17136,31 @@
           <a:noFill/>
         </p:spPr>
         <p:txBody>
-          <a:bodyPr vertOverflow="overflow" vert="horz" wrap="square" rtlCol="0" anchor="t">
+          <a:bodyPr rot="0" spcFirstLastPara="0" vertOverflow="overflow" horzOverflow="overflow" vert="horz" wrap="square" lIns="91440" tIns="45720" rIns="91440" bIns="45720" numCol="1" spcCol="0" rtlCol="0" fromWordArt="0" anchor="t" anchorCtr="0" forceAA="0" compatLnSpc="1">
+            <a:prstTxWarp prst="textNoShape">
+              <a:avLst/>
+            </a:prstTxWarp>
             <a:spAutoFit/>
           </a:bodyPr>
-          <a:lstStyle/>
-          <a:p>
-            <a:pPr algn="l"/>
-            <a:r>
-              <a:rPr lang="pt-PT" sz="1200">
-                <a:solidFill>
-                  <a:srgbClr val="2E3B4E"/>
-                </a:solidFill>
-                <a:latin typeface="Calibri"/>
-              </a:rPr>
-              <a:t>SGX, TrustZone, SEV — primitivas de hardware sugeridas, não discutidas no artigo.</a:t>
-            </a:r>
-          </a:p>
-        </p:txBody>
-      </p:sp>
-      <p:sp>
-        <p:nvSpPr>
-          <p:cNvPr id="23" name="Oval 22">
-            <a:extLst>
-              <a:ext uri="{FF2B5EF4-FFF2-40B4-BE49-F238E27FC236}">
-                <a16:creationId xmlns:a16="http://schemas.microsoft.com/office/drawing/2014/main" id="{BDAF54C8-C787-2340-8D3C-AA6942ECF560}"/>
-              </a:ext>
-            </a:extLst>
-          </p:cNvPr>
-          <p:cNvSpPr/>
-          <p:nvPr/>
-        </p:nvSpPr>
-        <p:spPr>
-          <a:xfrm>
-            <a:off x="6146800" y="4114800"/>
-            <a:ext cx="101600" cy="101600"/>
-          </a:xfrm>
-          <a:prstGeom prst="ellipse">
-            <a:avLst/>
-          </a:prstGeom>
-          <a:solidFill>
-            <a:srgbClr val="B5511A"/>
-          </a:solidFill>
-          <a:ln w="19050" cap="flat" cmpd="sng" algn="ctr">
-            <a:noFill/>
-            <a:prstDash val="solid"/>
-            <a:miter lim="800000"/>
-          </a:ln>
-        </p:spPr>
-        <p:style>
-          <a:lnRef idx="2">
-            <a:schemeClr val="accent1">
-              <a:shade val="15000"/>
-            </a:schemeClr>
-          </a:lnRef>
-          <a:fillRef idx="1">
-            <a:schemeClr val="accent1"/>
-          </a:fillRef>
-          <a:effectRef idx="0">
-            <a:schemeClr val="accent1"/>
-          </a:effectRef>
-          <a:fontRef idx="minor">
-            <a:schemeClr val="lt1"/>
-          </a:fontRef>
-        </p:style>
-        <p:txBody>
-          <a:bodyPr vertOverflow="clip" horzOverflow="clip" rtlCol="0" anchor="t"/>
-          <a:lstStyle/>
-          <a:p>
-            <a:pPr algn="l"/>
-            <a:endParaRPr lang="pt-PT"/>
-          </a:p>
-        </p:txBody>
-      </p:sp>
-      <p:sp>
-        <p:nvSpPr>
-          <p:cNvPr id="24" name="CaixaDeTexto 23">
-            <a:extLst>
-              <a:ext uri="{FF2B5EF4-FFF2-40B4-BE49-F238E27FC236}">
-                <a16:creationId xmlns:a16="http://schemas.microsoft.com/office/drawing/2014/main" id="{242D99DD-F348-D44F-AD3E-4378D0E3F0AF}"/>
-              </a:ext>
-            </a:extLst>
-          </p:cNvPr>
-          <p:cNvSpPr txBox="1"/>
-          <p:nvPr/>
-        </p:nvSpPr>
-        <p:spPr>
-          <a:xfrm>
-            <a:off x="6350000" y="4038600"/>
-            <a:ext cx="5029200" cy="307777"/>
-          </a:xfrm>
-          <a:prstGeom prst="rect">
-            <a:avLst/>
-          </a:prstGeom>
-          <a:noFill/>
-        </p:spPr>
-        <p:txBody>
-          <a:bodyPr vertOverflow="overflow" vert="horz" wrap="square" rtlCol="0" anchor="t">
-            <a:spAutoFit/>
-          </a:bodyPr>
-          <a:lstStyle/>
-          <a:p>
-            <a:pPr algn="l"/>
-            <a:r>
-              <a:rPr lang="pt-PT" sz="1400" b="1">
-                <a:solidFill>
-                  <a:srgbClr val="1A2332"/>
-                </a:solidFill>
-                <a:latin typeface="Calibri"/>
-              </a:rPr>
-              <a:t>Provas de conhecimento-zero (ZKP)  </a:t>
-            </a:r>
-            <a:r>
-              <a:rPr lang="pt-PT" sz="1000" b="1">
-                <a:solidFill>
-                  <a:srgbClr val="E97132"/>
-                </a:solidFill>
-                <a:latin typeface="Calibri"/>
-              </a:rPr>
-              <a:t>[EXTERNO]</a:t>
-            </a:r>
-          </a:p>
-        </p:txBody>
-      </p:sp>
-      <p:sp>
-        <p:nvSpPr>
-          <p:cNvPr id="25" name="CaixaDeTexto 24">
-            <a:extLst>
-              <a:ext uri="{FF2B5EF4-FFF2-40B4-BE49-F238E27FC236}">
-                <a16:creationId xmlns:a16="http://schemas.microsoft.com/office/drawing/2014/main" id="{5564B44C-F642-E549-8EA9-4A4011F88FD3}"/>
-              </a:ext>
-            </a:extLst>
-          </p:cNvPr>
-          <p:cNvSpPr txBox="1"/>
-          <p:nvPr/>
-        </p:nvSpPr>
-        <p:spPr>
-          <a:xfrm>
-            <a:off x="6350000" y="4318000"/>
-            <a:ext cx="5029200" cy="276999"/>
-          </a:xfrm>
-          <a:prstGeom prst="rect">
-            <a:avLst/>
-          </a:prstGeom>
-          <a:noFill/>
-        </p:spPr>
-        <p:txBody>
-          <a:bodyPr vertOverflow="overflow" vert="horz" wrap="square" rtlCol="0" anchor="t">
-            <a:spAutoFit/>
-          </a:bodyPr>
-          <a:lstStyle/>
-          <a:p>
-            <a:pPr algn="l"/>
-            <a:r>
-              <a:rPr lang="pt-PT" sz="1200">
-                <a:solidFill>
-                  <a:srgbClr val="2E3B4E"/>
-                </a:solidFill>
-                <a:latin typeface="Calibri"/>
-              </a:rPr>
-              <a:t>Atestação criptográfica da eliminação; ideia exógena ao texto.</a:t>
-            </a:r>
-          </a:p>
-        </p:txBody>
-      </p:sp>
-      <p:sp>
-        <p:nvSpPr>
-          <p:cNvPr id="26" name="Oval 25">
-            <a:extLst>
-              <a:ext uri="{FF2B5EF4-FFF2-40B4-BE49-F238E27FC236}">
-                <a16:creationId xmlns:a16="http://schemas.microsoft.com/office/drawing/2014/main" id="{C45A6D58-6CE1-1146-806B-6E8C3878CF7A}"/>
-              </a:ext>
-            </a:extLst>
-          </p:cNvPr>
-          <p:cNvSpPr/>
-          <p:nvPr/>
-        </p:nvSpPr>
-        <p:spPr>
-          <a:xfrm>
-            <a:off x="6146800" y="4826000"/>
-            <a:ext cx="101600" cy="101600"/>
-          </a:xfrm>
-          <a:prstGeom prst="ellipse">
-            <a:avLst/>
-          </a:prstGeom>
-          <a:solidFill>
-            <a:srgbClr val="B5511A"/>
-          </a:solidFill>
-          <a:ln w="19050" cap="flat" cmpd="sng" algn="ctr">
-            <a:noFill/>
-            <a:prstDash val="solid"/>
-            <a:miter lim="800000"/>
-          </a:ln>
-        </p:spPr>
-        <p:style>
-          <a:lnRef idx="2">
-            <a:schemeClr val="accent1">
-              <a:shade val="15000"/>
-            </a:schemeClr>
-          </a:lnRef>
-          <a:fillRef idx="1">
-            <a:schemeClr val="accent1"/>
-          </a:fillRef>
-          <a:effectRef idx="0">
-            <a:schemeClr val="accent1"/>
-          </a:effectRef>
-          <a:fontRef idx="minor">
-            <a:schemeClr val="lt1"/>
-          </a:fontRef>
-        </p:style>
-        <p:txBody>
-          <a:bodyPr vertOverflow="clip" horzOverflow="clip" rtlCol="0" anchor="t"/>
-          <a:lstStyle/>
-          <a:p>
-            <a:pPr algn="l"/>
-            <a:endParaRPr lang="pt-PT"/>
-          </a:p>
-        </p:txBody>
-      </p:sp>
-      <p:sp>
-        <p:nvSpPr>
-          <p:cNvPr id="27" name="CaixaDeTexto 26">
-            <a:extLst>
-              <a:ext uri="{FF2B5EF4-FFF2-40B4-BE49-F238E27FC236}">
-                <a16:creationId xmlns:a16="http://schemas.microsoft.com/office/drawing/2014/main" id="{29165D0D-A27D-FD47-8D9E-EF7D09BEB984}"/>
-              </a:ext>
-            </a:extLst>
-          </p:cNvPr>
-          <p:cNvSpPr txBox="1"/>
-          <p:nvPr/>
-        </p:nvSpPr>
-        <p:spPr>
-          <a:xfrm>
-            <a:off x="6350000" y="4749800"/>
-            <a:ext cx="5029200" cy="307777"/>
-          </a:xfrm>
-          <a:prstGeom prst="rect">
-            <a:avLst/>
-          </a:prstGeom>
-          <a:noFill/>
-        </p:spPr>
-        <p:txBody>
-          <a:bodyPr vertOverflow="overflow" vert="horz" wrap="square" rtlCol="0" anchor="t">
-            <a:spAutoFit/>
-          </a:bodyPr>
-          <a:lstStyle/>
-          <a:p>
-            <a:pPr algn="l"/>
-            <a:r>
-              <a:rPr lang="pt-PT" sz="1400" b="1">
-                <a:solidFill>
-                  <a:srgbClr val="1A2332"/>
-                </a:solidFill>
-                <a:latin typeface="Calibri"/>
-              </a:rPr>
-              <a:t>Contabilidade de orçamento de DP  </a:t>
-            </a:r>
-            <a:r>
-              <a:rPr lang="pt-PT" sz="1000" b="1">
-                <a:solidFill>
-                  <a:srgbClr val="E97132"/>
-                </a:solidFill>
-                <a:latin typeface="Calibri"/>
-              </a:rPr>
-              <a:t>[EXTERNO]</a:t>
-            </a:r>
-          </a:p>
-        </p:txBody>
-      </p:sp>
-      <p:sp>
-        <p:nvSpPr>
-          <p:cNvPr id="28" name="CaixaDeTexto 27">
-            <a:extLst>
-              <a:ext uri="{FF2B5EF4-FFF2-40B4-BE49-F238E27FC236}">
-                <a16:creationId xmlns:a16="http://schemas.microsoft.com/office/drawing/2014/main" id="{A5963ADC-BD6D-5C47-8417-9D5C7B143767}"/>
-              </a:ext>
-            </a:extLst>
-          </p:cNvPr>
-          <p:cNvSpPr txBox="1"/>
-          <p:nvPr/>
-        </p:nvSpPr>
-        <p:spPr>
-          <a:xfrm>
-            <a:off x="6350000" y="5029200"/>
-            <a:ext cx="5029200" cy="276999"/>
-          </a:xfrm>
-          <a:prstGeom prst="rect">
-            <a:avLst/>
-          </a:prstGeom>
-          <a:noFill/>
-        </p:spPr>
-        <p:txBody>
-          <a:bodyPr vertOverflow="overflow" vert="horz" wrap="square" rtlCol="0" anchor="t">
-            <a:spAutoFit/>
-          </a:bodyPr>
-          <a:lstStyle/>
-          <a:p>
-            <a:pPr algn="l"/>
-            <a:r>
-              <a:rPr lang="pt-PT" sz="1200">
-                <a:solidFill>
-                  <a:srgbClr val="2E3B4E"/>
-                </a:solidFill>
-                <a:latin typeface="Calibri"/>
-              </a:rPr>
-              <a:t>Privacidade diferencial composta ao longo do tempo; não tratado pelo artigo.</a:t>
-            </a:r>
-          </a:p>
-        </p:txBody>
-      </p:sp>
-      <p:sp>
-        <p:nvSpPr>
-          <p:cNvPr id="29" name="Retângulo 28">
-            <a:extLst>
-              <a:ext uri="{FF2B5EF4-FFF2-40B4-BE49-F238E27FC236}">
-                <a16:creationId xmlns:a16="http://schemas.microsoft.com/office/drawing/2014/main" id="{3AF5AE9F-4083-AA47-83D7-316C7DC19454}"/>
-              </a:ext>
-            </a:extLst>
-          </p:cNvPr>
-          <p:cNvSpPr/>
-          <p:nvPr/>
-        </p:nvSpPr>
-        <p:spPr>
-          <a:xfrm>
-            <a:off x="457200" y="5562600"/>
-            <a:ext cx="11277600" cy="711200"/>
-          </a:xfrm>
-          <a:prstGeom prst="rect">
-            <a:avLst/>
-          </a:prstGeom>
-          <a:solidFill>
-            <a:srgbClr val="F0EBE3"/>
-          </a:solidFill>
-          <a:ln w="19050" cap="flat" cmpd="sng" algn="ctr">
-            <a:noFill/>
-            <a:prstDash val="solid"/>
-            <a:miter lim="800000"/>
-          </a:ln>
-        </p:spPr>
-        <p:style>
-          <a:lnRef idx="2">
-            <a:schemeClr val="accent1">
-              <a:shade val="15000"/>
-            </a:schemeClr>
-          </a:lnRef>
-          <a:fillRef idx="1">
-            <a:schemeClr val="accent1"/>
-          </a:fillRef>
-          <a:effectRef idx="0">
-            <a:schemeClr val="accent1"/>
-          </a:effectRef>
-          <a:fontRef idx="minor">
-            <a:schemeClr val="lt1"/>
-          </a:fontRef>
-        </p:style>
-        <p:txBody>
-          <a:bodyPr vertOverflow="clip" horzOverflow="clip" rtlCol="0" anchor="t"/>
-          <a:lstStyle/>
-          <a:p>
-            <a:pPr algn="l"/>
-            <a:endParaRPr lang="pt-PT"/>
-          </a:p>
-        </p:txBody>
-      </p:sp>
-      <p:sp>
-        <p:nvSpPr>
-          <p:cNvPr id="30" name="CaixaDeTexto 29">
-            <a:extLst>
-              <a:ext uri="{FF2B5EF4-FFF2-40B4-BE49-F238E27FC236}">
-                <a16:creationId xmlns:a16="http://schemas.microsoft.com/office/drawing/2014/main" id="{427BEB23-DF31-AD44-8C62-B93FBA6D43C8}"/>
-              </a:ext>
-            </a:extLst>
-          </p:cNvPr>
-          <p:cNvSpPr txBox="1"/>
-          <p:nvPr/>
-        </p:nvSpPr>
-        <p:spPr>
-          <a:xfrm>
-            <a:off x="711200" y="5689600"/>
-            <a:ext cx="10769600" cy="457200"/>
-          </a:xfrm>
-          <a:prstGeom prst="rect">
-            <a:avLst/>
-          </a:prstGeom>
-          <a:noFill/>
-        </p:spPr>
-        <p:txBody>
-          <a:bodyPr vertOverflow="overflow" vert="horz" wrap="square" rtlCol="0" anchor="ctr" anchorCtr="0">
-            <a:noAutofit/>
-          </a:bodyPr>
-          <a:lstStyle/>
-          <a:p>
-            <a:pPr algn="ctr"/>
-            <a:r>
-              <a:rPr lang="pt-PT" sz="1300" i="1">
-                <a:solidFill>
-                  <a:srgbClr val="1A2332"/>
-                </a:solidFill>
-                <a:latin typeface="Calibri"/>
-              </a:rPr>
-              <a:t>Itens marcados </a:t>
-            </a:r>
-            <a:r>
-              <a:rPr lang="pt-PT" sz="1300" b="1">
-                <a:solidFill>
-                  <a:srgbClr val="E97132"/>
-                </a:solidFill>
-                <a:latin typeface="Calibri"/>
-              </a:rPr>
-              <a:t>[EXTERNO]</a:t>
-            </a:r>
-            <a:r>
-              <a:rPr lang="pt-PT" sz="1300" i="1">
-                <a:solidFill>
-                  <a:srgbClr val="1A2332"/>
-                </a:solidFill>
-                <a:latin typeface="Calibri"/>
-              </a:rPr>
-              <a:t> são tecnologias sugeridas pelo apresentador, não afirmações do artigo.</a:t>
+          <a:lstStyle>
+            <a:defPPr>
+              <a:defRPr lang="pt-PT"/>
+            </a:defPPr>
+            <a:lvl1pPr>
+              <a:defRPr sz="1900" b="1">
+                <a:solidFill>
+                  <a:srgbClr val="1A2332"/>
+                </a:solidFill>
+                <a:latin typeface="Georgia"/>
+              </a:defRPr>
+            </a:lvl1pPr>
+          </a:lstStyle>
+          <a:p>
+            <a:r>
+              <a:rPr lang="pt-PT" sz="1600" b="0" dirty="0">
+                <a:latin typeface="+mn-lt"/>
+              </a:rPr>
+              <a:t>Nenhum método atual satisfaz o envelope completo de restrições</a:t>
             </a:r>
           </a:p>
         </p:txBody>
@@ -15461,7 +17168,7 @@
     </p:spTree>
     <p:extLst>
       <p:ext uri="{BB962C8B-B14F-4D97-AF65-F5344CB8AC3E}">
-        <p14:creationId xmlns:p14="http://schemas.microsoft.com/office/powerpoint/2010/main" val="2132655809"/>
+        <p14:creationId xmlns:p14="http://schemas.microsoft.com/office/powerpoint/2010/main" val="820668724"/>
       </p:ext>
     </p:extLst>
   </p:cSld>

--- a/Entregas PhD/machine-unlearning.pptx
+++ b/Entregas PhD/machine-unlearning.pptx
@@ -208,7 +208,7 @@
           <a:p>
             <a:fld id="{0D531979-3C4C-B04F-AD49-A1AD3E566F89}" type="datetimeFigureOut">
               <a:rPr lang="pt-PT" smtClean="0"/>
-              <a:t>25/05/26</a:t>
+              <a:t>29/05/26</a:t>
             </a:fld>
             <a:endParaRPr lang="pt-PT"/>
           </a:p>
@@ -519,6 +519,135 @@
           <a:bodyPr/>
           <a:lstStyle/>
           <a:p>
+            <a:r>
+              <a:rPr lang="pt-PT" dirty="0"/>
+              <a:t>Boa tarde a todos. Vou apresentar o meu trabalho sobre "</a:t>
+            </a:r>
+            <a:r>
+              <a:rPr lang="pt-PT" i="1" dirty="0" err="1"/>
+              <a:t>Machine</a:t>
+            </a:r>
+            <a:r>
+              <a:rPr lang="pt-PT" i="1" dirty="0"/>
+              <a:t> </a:t>
+            </a:r>
+            <a:r>
+              <a:rPr lang="pt-PT" i="1" dirty="0" err="1"/>
+              <a:t>Unlearning</a:t>
+            </a:r>
+            <a:r>
+              <a:rPr lang="pt-PT" dirty="0"/>
+              <a:t> para </a:t>
+            </a:r>
+            <a:r>
+              <a:rPr lang="pt-PT" dirty="0" err="1"/>
+              <a:t>IoT</a:t>
+            </a:r>
+            <a:r>
+              <a:rPr lang="pt-PT" dirty="0"/>
+              <a:t> em Edifícios Inteligentes em Comunidades". À medida que integramos a IA mais profundamente nos nossos espaços, enfrentamos um desafio crítico: como garantir a privacidade quando os modelos se recusam a esquecer?</a:t>
+            </a:r>
+          </a:p>
+        </p:txBody>
+      </p:sp>
+      <p:sp>
+        <p:nvSpPr>
+          <p:cNvPr id="4" name="Marcador de Posição do Número do Diapositivo 3"/>
+          <p:cNvSpPr>
+            <a:spLocks noGrp="1"/>
+          </p:cNvSpPr>
+          <p:nvPr>
+            <p:ph type="sldNum" sz="quarter" idx="5"/>
+          </p:nvPr>
+        </p:nvSpPr>
+        <p:spPr/>
+        <p:txBody>
+          <a:bodyPr/>
+          <a:lstStyle/>
+          <a:p>
+            <a:fld id="{4BEEEA3F-08CE-6043-AB76-D392B1207876}" type="slidenum">
+              <a:rPr lang="pt-PT" smtClean="0"/>
+              <a:t>1</a:t>
+            </a:fld>
+            <a:endParaRPr lang="pt-PT"/>
+          </a:p>
+        </p:txBody>
+      </p:sp>
+    </p:spTree>
+    <p:extLst>
+      <p:ext uri="{BB962C8B-B14F-4D97-AF65-F5344CB8AC3E}">
+        <p14:creationId xmlns:p14="http://schemas.microsoft.com/office/powerpoint/2010/main" val="2582094984"/>
+      </p:ext>
+    </p:extLst>
+  </p:cSld>
+  <p:clrMapOvr>
+    <a:masterClrMapping/>
+  </p:clrMapOvr>
+</p:notes>
+</file>
+
+<file path=ppt/notesSlides/notesSlide10.xml><?xml version="1.0" encoding="utf-8"?>
+<p:notes xmlns:a="http://schemas.openxmlformats.org/drawingml/2006/main" xmlns:r="http://schemas.openxmlformats.org/officeDocument/2006/relationships" xmlns:p="http://schemas.openxmlformats.org/presentationml/2006/main">
+  <p:cSld>
+    <p:spTree>
+      <p:nvGrpSpPr>
+        <p:cNvPr id="1" name="">
+          <a:extLst>
+            <a:ext uri="{FF2B5EF4-FFF2-40B4-BE49-F238E27FC236}">
+              <a16:creationId xmlns:a16="http://schemas.microsoft.com/office/drawing/2014/main" id="{1F8B1AD9-2478-B77F-D2D6-4338A5314A25}"/>
+            </a:ext>
+          </a:extLst>
+        </p:cNvPr>
+        <p:cNvGrpSpPr/>
+        <p:nvPr/>
+      </p:nvGrpSpPr>
+      <p:grpSpPr>
+        <a:xfrm>
+          <a:off x="0" y="0"/>
+          <a:ext cx="0" cy="0"/>
+          <a:chOff x="0" y="0"/>
+          <a:chExt cx="0" cy="0"/>
+        </a:xfrm>
+      </p:grpSpPr>
+      <p:sp>
+        <p:nvSpPr>
+          <p:cNvPr id="2" name="Marcador de Posição da Imagem do Diapositivo 1">
+            <a:extLst>
+              <a:ext uri="{FF2B5EF4-FFF2-40B4-BE49-F238E27FC236}">
+                <a16:creationId xmlns:a16="http://schemas.microsoft.com/office/drawing/2014/main" id="{16F87413-56CC-DEE7-3553-988D37435D19}"/>
+              </a:ext>
+            </a:extLst>
+          </p:cNvPr>
+          <p:cNvSpPr>
+            <a:spLocks noGrp="1" noRot="1" noChangeAspect="1"/>
+          </p:cNvSpPr>
+          <p:nvPr>
+            <p:ph type="sldImg"/>
+          </p:nvPr>
+        </p:nvSpPr>
+        <p:spPr/>
+      </p:sp>
+      <p:sp>
+        <p:nvSpPr>
+          <p:cNvPr id="3" name="Marcador de Posição de Notas 2">
+            <a:extLst>
+              <a:ext uri="{FF2B5EF4-FFF2-40B4-BE49-F238E27FC236}">
+                <a16:creationId xmlns:a16="http://schemas.microsoft.com/office/drawing/2014/main" id="{F8B268EE-26D4-B3A7-8374-D6C283F192F2}"/>
+              </a:ext>
+            </a:extLst>
+          </p:cNvPr>
+          <p:cNvSpPr>
+            <a:spLocks noGrp="1"/>
+          </p:cNvSpPr>
+          <p:nvPr>
+            <p:ph type="body" idx="1"/>
+          </p:nvPr>
+        </p:nvSpPr>
+        <p:spPr/>
+        <p:txBody>
+          <a:bodyPr/>
+          <a:lstStyle/>
+          <a:p>
             <a:pPr marL="0" marR="0" lvl="0" indent="0" algn="l" defTabSz="914400" rtl="0" eaLnBrk="1" fontAlgn="auto" latinLnBrk="0" hangingPunct="1">
               <a:lnSpc>
                 <a:spcPct val="100000"/>
@@ -537,38 +666,25 @@
               <a:defRPr/>
             </a:pPr>
             <a:r>
-              <a:rPr lang="pt-PT" sz="1200" dirty="0">
-                <a:solidFill>
-                  <a:srgbClr val="1A2332"/>
-                </a:solidFill>
-                <a:latin typeface="Calibri"/>
-                <a:cs typeface="Calibri"/>
-              </a:rPr>
-              <a:t>Dispositivos </a:t>
-            </a:r>
-            <a:r>
-              <a:rPr lang="pt-PT" sz="1200" dirty="0" err="1">
-                <a:solidFill>
-                  <a:srgbClr val="1A2332"/>
-                </a:solidFill>
-                <a:latin typeface="Calibri"/>
-                <a:cs typeface="Calibri"/>
-              </a:rPr>
-              <a:t>IoT</a:t>
-            </a:r>
-            <a:r>
-              <a:rPr lang="pt-PT" sz="1200" dirty="0">
-                <a:solidFill>
-                  <a:srgbClr val="1A2332"/>
-                </a:solidFill>
-                <a:latin typeface="Calibri"/>
-                <a:cs typeface="Calibri"/>
-              </a:rPr>
-              <a:t> recolhem padrões de ocupação, consumo energético, sinais biométricos e movimento, criando um histórico longitudinal detalhado dos ocupantes.</a:t>
-            </a:r>
-          </a:p>
-          <a:p>
-            <a:endParaRPr lang="pt-PT" dirty="0"/>
+              <a:rPr lang="pt-PT" dirty="0"/>
+              <a:t>A lacuna é significativa. A maior parte da investigação sobre </a:t>
+            </a:r>
+            <a:r>
+              <a:rPr lang="pt-PT" i="1" dirty="0" err="1"/>
+              <a:t>unlearning</a:t>
+            </a:r>
+            <a:r>
+              <a:rPr lang="pt-PT" dirty="0"/>
+              <a:t> é desenvolvida em silos. Descobrimos que apenas uma pequena fração dos métodos considera os limites de recursos da </a:t>
+            </a:r>
+            <a:r>
+              <a:rPr lang="pt-PT" i="1" dirty="0" err="1"/>
+              <a:t>edge</a:t>
+            </a:r>
+            <a:r>
+              <a:rPr lang="pt-PT" dirty="0"/>
+              <a:t>, e ainda menos fornecem o tipo de verificação que um regulador aceitaria como um verdadeiro esquecimento.</a:t>
+            </a:r>
           </a:p>
           <a:p>
             <a:pPr marL="0" marR="0" lvl="0" indent="0" algn="l" defTabSz="914400" rtl="0" eaLnBrk="1" fontAlgn="auto" latinLnBrk="0" hangingPunct="1">
@@ -588,16 +704,13 @@
               <a:tabLst/>
               <a:defRPr/>
             </a:pPr>
-            <a:r>
-              <a:rPr lang="pt-PT" sz="1200" dirty="0">
-                <a:solidFill>
-                  <a:srgbClr val="1A2332"/>
-                </a:solidFill>
-                <a:latin typeface="Calibri"/>
-                <a:cs typeface="Calibri"/>
-              </a:rPr>
-              <a:t>Modelos treinados retêm traços estatísticos exploráveis por ataques de inferência de pertença e inversão de modelo, mesmo após eliminar os dados originais.</a:t>
-            </a:r>
+            <a:endParaRPr lang="pt-PT" sz="1200" i="1" dirty="0">
+              <a:solidFill>
+                <a:srgbClr val="1A2332"/>
+              </a:solidFill>
+              <a:latin typeface="Calibri"/>
+              <a:cs typeface="Calibri"/>
+            </a:endParaRPr>
           </a:p>
           <a:p>
             <a:pPr marL="0" marR="0" lvl="0" indent="0" algn="l" defTabSz="914400" rtl="0" eaLnBrk="1" fontAlgn="auto" latinLnBrk="0" hangingPunct="1">
@@ -617,7 +730,7 @@
               <a:tabLst/>
               <a:defRPr/>
             </a:pPr>
-            <a:endParaRPr lang="pt-PT" sz="1200" dirty="0">
+            <a:endParaRPr lang="pt-PT" sz="1200" i="1" dirty="0">
               <a:solidFill>
                 <a:srgbClr val="1A2332"/>
               </a:solidFill>
@@ -644,100 +757,279 @@
               <a:defRPr/>
             </a:pPr>
             <a:r>
-              <a:rPr lang="pt-PT" sz="1200" dirty="0">
-                <a:solidFill>
-                  <a:srgbClr val="1A2332"/>
-                </a:solidFill>
-                <a:latin typeface="Calibri"/>
-                <a:cs typeface="Calibri"/>
-              </a:rPr>
-              <a:t>RGPD </a:t>
-            </a:r>
-            <a:r>
-              <a:rPr lang="pt-PT" sz="1200" dirty="0" err="1">
-                <a:solidFill>
-                  <a:srgbClr val="1A2332"/>
-                </a:solidFill>
-                <a:latin typeface="Calibri"/>
-                <a:cs typeface="Calibri"/>
-              </a:rPr>
-              <a:t>Art</a:t>
-            </a:r>
-            <a:r>
-              <a:rPr lang="pt-PT" sz="1200" dirty="0">
-                <a:solidFill>
-                  <a:srgbClr val="1A2332"/>
-                </a:solidFill>
-                <a:latin typeface="Calibri"/>
-                <a:cs typeface="Calibri"/>
-              </a:rPr>
-              <a:t>. 17 (direito ao esquecimento) exige eliminar não só os dados, mas a sua influência nos modelos derivados — não basta apagar a fonte.</a:t>
+              <a:rPr lang="pt-PT" sz="1200" i="1" dirty="0">
+                <a:solidFill>
+                  <a:srgbClr val="1A2332"/>
+                </a:solidFill>
+                <a:latin typeface="Calibri"/>
+                <a:cs typeface="Calibri"/>
+              </a:rPr>
+              <a:t>Sem </a:t>
+            </a:r>
+            <a:r>
+              <a:rPr lang="pt-PT" sz="1200" i="1" dirty="0" err="1">
+                <a:solidFill>
+                  <a:srgbClr val="1A2332"/>
+                </a:solidFill>
+                <a:latin typeface="Calibri"/>
+                <a:cs typeface="Calibri"/>
+              </a:rPr>
+              <a:t>benchmark</a:t>
+            </a:r>
+            <a:r>
+              <a:rPr lang="pt-PT" sz="1200" i="1" dirty="0">
+                <a:solidFill>
+                  <a:srgbClr val="1A2332"/>
+                </a:solidFill>
+                <a:latin typeface="Calibri"/>
+                <a:cs typeface="Calibri"/>
+              </a:rPr>
+              <a:t> partilhado: cada estudo usa as suas próprias métricas, </a:t>
+            </a:r>
+            <a:r>
+              <a:rPr lang="pt-PT" sz="1200" i="1" dirty="0" err="1">
+                <a:solidFill>
+                  <a:srgbClr val="1A2332"/>
+                </a:solidFill>
+                <a:latin typeface="Calibri"/>
+                <a:cs typeface="Calibri"/>
+              </a:rPr>
+              <a:t>datasets</a:t>
+            </a:r>
+            <a:r>
+              <a:rPr lang="pt-PT" sz="1200" i="1" dirty="0">
+                <a:solidFill>
+                  <a:srgbClr val="1A2332"/>
+                </a:solidFill>
+                <a:latin typeface="Calibri"/>
+                <a:cs typeface="Calibri"/>
+              </a:rPr>
+              <a:t> e modelos de ameaça — impossível comparar soluções parciais.</a:t>
             </a:r>
           </a:p>
           <a:p>
             <a:endParaRPr lang="pt-PT" dirty="0"/>
           </a:p>
-          <a:p>
-            <a:pPr marL="0" marR="0" lvl="0" indent="0" algn="l" defTabSz="914400" rtl="0" eaLnBrk="1" fontAlgn="auto" latinLnBrk="0" hangingPunct="1">
-              <a:lnSpc>
-                <a:spcPct val="100000"/>
-              </a:lnSpc>
-              <a:spcBef>
-                <a:spcPts val="0"/>
-              </a:spcBef>
-              <a:spcAft>
-                <a:spcPts val="0"/>
-              </a:spcAft>
-              <a:buClrTx/>
-              <a:buSzTx/>
-              <a:buFontTx/>
-              <a:buNone/>
-              <a:tabLst/>
-              <a:defRPr/>
-            </a:pPr>
-            <a:r>
-              <a:rPr lang="pt-PT" i="1" dirty="0" err="1">
-                <a:solidFill>
-                  <a:srgbClr val="1A2332"/>
-                </a:solidFill>
-                <a:latin typeface="Calibri"/>
-                <a:cs typeface="Calibri"/>
-              </a:rPr>
-              <a:t>Machine</a:t>
-            </a:r>
-            <a:r>
-              <a:rPr lang="pt-PT" i="1" dirty="0">
-                <a:solidFill>
-                  <a:srgbClr val="1A2332"/>
-                </a:solidFill>
-                <a:latin typeface="Calibri"/>
-                <a:cs typeface="Calibri"/>
-              </a:rPr>
+        </p:txBody>
+      </p:sp>
+      <p:sp>
+        <p:nvSpPr>
+          <p:cNvPr id="4" name="Marcador de Posição do Número do Diapositivo 3">
+            <a:extLst>
+              <a:ext uri="{FF2B5EF4-FFF2-40B4-BE49-F238E27FC236}">
+                <a16:creationId xmlns:a16="http://schemas.microsoft.com/office/drawing/2014/main" id="{1F1BE4FF-EEA4-2EC9-BDAC-87370AA99461}"/>
+              </a:ext>
+            </a:extLst>
+          </p:cNvPr>
+          <p:cNvSpPr>
+            <a:spLocks noGrp="1"/>
+          </p:cNvSpPr>
+          <p:nvPr>
+            <p:ph type="sldNum" sz="quarter" idx="5"/>
+          </p:nvPr>
+        </p:nvSpPr>
+        <p:spPr/>
+        <p:txBody>
+          <a:bodyPr/>
+          <a:lstStyle/>
+          <a:p>
+            <a:fld id="{4BEEEA3F-08CE-6043-AB76-D392B1207876}" type="slidenum">
+              <a:rPr lang="pt-PT" smtClean="0"/>
+              <a:t>10</a:t>
+            </a:fld>
+            <a:endParaRPr lang="pt-PT"/>
+          </a:p>
+        </p:txBody>
+      </p:sp>
+    </p:spTree>
+    <p:extLst>
+      <p:ext uri="{BB962C8B-B14F-4D97-AF65-F5344CB8AC3E}">
+        <p14:creationId xmlns:p14="http://schemas.microsoft.com/office/powerpoint/2010/main" val="3361521210"/>
+      </p:ext>
+    </p:extLst>
+  </p:cSld>
+  <p:clrMapOvr>
+    <a:masterClrMapping/>
+  </p:clrMapOvr>
+</p:notes>
+</file>
+
+<file path=ppt/notesSlides/notesSlide11.xml><?xml version="1.0" encoding="utf-8"?>
+<p:notes xmlns:a="http://schemas.openxmlformats.org/drawingml/2006/main" xmlns:r="http://schemas.openxmlformats.org/officeDocument/2006/relationships" xmlns:p="http://schemas.openxmlformats.org/presentationml/2006/main">
+  <p:cSld>
+    <p:spTree>
+      <p:nvGrpSpPr>
+        <p:cNvPr id="1" name=""/>
+        <p:cNvGrpSpPr/>
+        <p:nvPr/>
+      </p:nvGrpSpPr>
+      <p:grpSpPr>
+        <a:xfrm>
+          <a:off x="0" y="0"/>
+          <a:ext cx="0" cy="0"/>
+          <a:chOff x="0" y="0"/>
+          <a:chExt cx="0" cy="0"/>
+        </a:xfrm>
+      </p:grpSpPr>
+      <p:sp>
+        <p:nvSpPr>
+          <p:cNvPr id="2" name="Marcador de Posição da Imagem do Diapositivo 1"/>
+          <p:cNvSpPr>
+            <a:spLocks noGrp="1" noRot="1" noChangeAspect="1"/>
+          </p:cNvSpPr>
+          <p:nvPr>
+            <p:ph type="sldImg"/>
+          </p:nvPr>
+        </p:nvSpPr>
+        <p:spPr/>
+      </p:sp>
+      <p:sp>
+        <p:nvSpPr>
+          <p:cNvPr id="3" name="Marcador de Posição de Notas 2"/>
+          <p:cNvSpPr>
+            <a:spLocks noGrp="1"/>
+          </p:cNvSpPr>
+          <p:nvPr>
+            <p:ph type="body" idx="1"/>
+          </p:nvPr>
+        </p:nvSpPr>
+        <p:spPr/>
+        <p:txBody>
+          <a:bodyPr/>
+          <a:lstStyle/>
+          <a:p>
+            <a:r>
+              <a:rPr lang="pt-PT" dirty="0"/>
+              <a:t>Como é que resolvemos isto?</a:t>
+            </a:r>
+          </a:p>
+          <a:p>
+            <a:r>
+              <a:rPr lang="pt-PT" b="1" dirty="0"/>
+              <a:t>Primeiro: Escalabilidade.</a:t>
+            </a:r>
+            <a:r>
+              <a:rPr lang="pt-PT" dirty="0"/>
+              <a:t> Precisamos de "</a:t>
+            </a:r>
+            <a:r>
+              <a:rPr lang="pt-PT" i="1" dirty="0" err="1"/>
+              <a:t>Tiny</a:t>
+            </a:r>
+            <a:r>
+              <a:rPr lang="pt-PT" i="1" dirty="0"/>
               <a:t> </a:t>
             </a:r>
             <a:r>
-              <a:rPr lang="pt-PT" i="1" dirty="0" err="1">
-                <a:solidFill>
-                  <a:srgbClr val="1A2332"/>
-                </a:solidFill>
-                <a:latin typeface="Calibri"/>
-                <a:cs typeface="Calibri"/>
-              </a:rPr>
+              <a:rPr lang="pt-PT" i="1" dirty="0" err="1"/>
+              <a:t>Unlearning</a:t>
+            </a:r>
+            <a:r>
+              <a:rPr lang="pt-PT" dirty="0"/>
+              <a:t>". Em vez de um </a:t>
+            </a:r>
+            <a:r>
+              <a:rPr lang="pt-PT" dirty="0" err="1"/>
+              <a:t>retreino</a:t>
+            </a:r>
+            <a:r>
+              <a:rPr lang="pt-PT" dirty="0"/>
+              <a:t> completo, utilizamos atualizações e aceleração por </a:t>
+            </a:r>
+            <a:r>
+              <a:rPr lang="pt-PT" i="1" dirty="0"/>
+              <a:t>hardware</a:t>
+            </a:r>
+            <a:r>
+              <a:rPr lang="pt-PT" dirty="0"/>
+              <a:t> para realizar o apagamento diretamente no </a:t>
+            </a:r>
+            <a:r>
+              <a:rPr lang="pt-PT" i="1" dirty="0"/>
+              <a:t>hardware</a:t>
+            </a:r>
+            <a:r>
+              <a:rPr lang="pt-PT" dirty="0"/>
+              <a:t> da </a:t>
+            </a:r>
+            <a:r>
+              <a:rPr lang="pt-PT" i="1" dirty="0" err="1"/>
+              <a:t>edge</a:t>
+            </a:r>
+            <a:r>
+              <a:rPr lang="pt-PT" dirty="0"/>
+              <a:t>, sem sobrecarregar o sistema.</a:t>
+            </a:r>
+          </a:p>
+          <a:p>
+            <a:r>
+              <a:rPr lang="pt-PT" b="1" dirty="0"/>
+              <a:t>Segundo: Verificação.</a:t>
+            </a:r>
+            <a:r>
+              <a:rPr lang="pt-PT" dirty="0"/>
+              <a:t> Precisamos de mais do que apenas um "confie em mim" de um fornecedor. Precisamos de certificados e de </a:t>
+            </a:r>
+            <a:r>
+              <a:rPr lang="pt-PT" i="1" dirty="0"/>
+              <a:t>Zero-</a:t>
+            </a:r>
+            <a:r>
+              <a:rPr lang="pt-PT" i="1" dirty="0" err="1"/>
+              <a:t>Knowledge</a:t>
+            </a:r>
+            <a:r>
+              <a:rPr lang="pt-PT" i="1" dirty="0"/>
+              <a:t> </a:t>
+            </a:r>
+            <a:r>
+              <a:rPr lang="pt-PT" i="1" dirty="0" err="1"/>
+              <a:t>Proofs</a:t>
+            </a:r>
+            <a:r>
+              <a:rPr lang="pt-PT" i="1" dirty="0"/>
+              <a:t> </a:t>
+            </a:r>
+            <a:r>
+              <a:rPr lang="pt-PT" dirty="0"/>
+              <a:t>para certificar aos residentes e reguladores que a influência dos seus dados desapareceu verdadeiramente.</a:t>
+            </a:r>
+          </a:p>
+          <a:p>
+            <a:r>
+              <a:rPr lang="pt-PT" dirty="0"/>
+              <a:t>Para concluir, o </a:t>
+            </a:r>
+            <a:r>
+              <a:rPr lang="pt-PT" i="1" dirty="0" err="1"/>
+              <a:t>machine</a:t>
+            </a:r>
+            <a:r>
+              <a:rPr lang="pt-PT" i="1" dirty="0"/>
+              <a:t> </a:t>
+            </a:r>
+            <a:r>
+              <a:rPr lang="pt-PT" i="1" dirty="0" err="1"/>
               <a:t>unlearning</a:t>
             </a:r>
             <a:r>
-              <a:rPr lang="pt-PT" i="1" dirty="0">
-                <a:solidFill>
-                  <a:srgbClr val="1A2332"/>
-                </a:solidFill>
-                <a:latin typeface="Calibri"/>
-                <a:cs typeface="Calibri"/>
-              </a:rPr>
-              <a:t> surge como resposta técnica mas foi concebido para cenários centralizados e estáticos, não para o contexto distribuído dos edifícios inteligentes.</a:t>
-            </a:r>
-          </a:p>
-          <a:p>
-            <a:endParaRPr lang="pt-PT" dirty="0"/>
+              <a:rPr lang="pt-PT" dirty="0"/>
+              <a:t> em edifícios inteligentes não é apenas um problema académico — é uma necessidade regulatória. Precisamos de passar de métodos centrados na </a:t>
+            </a:r>
+            <a:r>
+              <a:rPr lang="pt-PT" i="1" dirty="0" err="1"/>
+              <a:t>cloud</a:t>
+            </a:r>
+            <a:r>
+              <a:rPr lang="pt-PT" dirty="0"/>
+              <a:t> para sistemas distribuídos e verificáveis. </a:t>
+            </a:r>
+          </a:p>
+          <a:p>
+            <a:r>
+              <a:rPr lang="pt-PT" dirty="0"/>
+              <a:t>Obrigado pela vossa atenção, estou agora disponível para qualquer questão.</a:t>
+            </a:r>
           </a:p>
         </p:txBody>
       </p:sp>
@@ -758,7 +1050,7 @@
           <a:p>
             <a:fld id="{4BEEEA3F-08CE-6043-AB76-D392B1207876}" type="slidenum">
               <a:rPr lang="pt-PT" smtClean="0"/>
-              <a:t>2</a:t>
+              <a:t>11</a:t>
             </a:fld>
             <a:endParaRPr lang="pt-PT"/>
           </a:p>
@@ -767,7 +1059,7 @@
     </p:spTree>
     <p:extLst>
       <p:ext uri="{BB962C8B-B14F-4D97-AF65-F5344CB8AC3E}">
-        <p14:creationId xmlns:p14="http://schemas.microsoft.com/office/powerpoint/2010/main" val="840767661"/>
+        <p14:creationId xmlns:p14="http://schemas.microsoft.com/office/powerpoint/2010/main" val="1854154032"/>
       </p:ext>
     </p:extLst>
   </p:cSld>
@@ -840,101 +1132,8 @@
             </a:pPr>
             <a:r>
               <a:rPr lang="pt-PT" dirty="0"/>
-              <a:t>EXACT: </a:t>
-            </a:r>
-            <a:r>
-              <a:rPr lang="pt-PT" sz="1200" dirty="0">
-                <a:solidFill>
-                  <a:srgbClr val="1A2332"/>
-                </a:solidFill>
-                <a:latin typeface="Calibri"/>
-                <a:cs typeface="Calibri"/>
-              </a:rPr>
-              <a:t>Reestrutura o treino para que cada eliminação seja resolvida por </a:t>
-            </a:r>
-            <a:r>
-              <a:rPr lang="pt-PT" sz="1200" dirty="0" err="1">
-                <a:solidFill>
-                  <a:srgbClr val="1A2332"/>
-                </a:solidFill>
-                <a:latin typeface="Calibri"/>
-                <a:cs typeface="Calibri"/>
-              </a:rPr>
-              <a:t>retreino</a:t>
-            </a:r>
-            <a:r>
-              <a:rPr lang="pt-PT" sz="1200" dirty="0">
-                <a:solidFill>
-                  <a:srgbClr val="1A2332"/>
-                </a:solidFill>
-                <a:latin typeface="Calibri"/>
-                <a:cs typeface="Calibri"/>
-              </a:rPr>
-              <a:t> parcial. SISA divide o </a:t>
-            </a:r>
-            <a:r>
-              <a:rPr lang="pt-PT" sz="1200" dirty="0" err="1">
-                <a:solidFill>
-                  <a:srgbClr val="1A2332"/>
-                </a:solidFill>
-                <a:latin typeface="Calibri"/>
-                <a:cs typeface="Calibri"/>
-              </a:rPr>
-              <a:t>dataset</a:t>
-            </a:r>
-            <a:r>
-              <a:rPr lang="pt-PT" sz="1200" dirty="0">
-                <a:solidFill>
-                  <a:srgbClr val="1A2332"/>
-                </a:solidFill>
-                <a:latin typeface="Calibri"/>
-                <a:cs typeface="Calibri"/>
-              </a:rPr>
-              <a:t> em </a:t>
-            </a:r>
-            <a:r>
-              <a:rPr lang="pt-PT" sz="1200" dirty="0" err="1">
-                <a:solidFill>
-                  <a:srgbClr val="1A2332"/>
-                </a:solidFill>
-                <a:latin typeface="Calibri"/>
-                <a:cs typeface="Calibri"/>
-              </a:rPr>
-              <a:t>shards</a:t>
-            </a:r>
-            <a:r>
-              <a:rPr lang="pt-PT" sz="1200" dirty="0">
-                <a:solidFill>
-                  <a:srgbClr val="1A2332"/>
-                </a:solidFill>
-                <a:latin typeface="Calibri"/>
-                <a:cs typeface="Calibri"/>
-              </a:rPr>
-              <a:t> isolados — só o </a:t>
-            </a:r>
-            <a:r>
-              <a:rPr lang="pt-PT" sz="1200" dirty="0" err="1">
-                <a:solidFill>
-                  <a:srgbClr val="1A2332"/>
-                </a:solidFill>
-                <a:latin typeface="Calibri"/>
-                <a:cs typeface="Calibri"/>
-              </a:rPr>
-              <a:t>shard</a:t>
-            </a:r>
-            <a:r>
-              <a:rPr lang="pt-PT" sz="1200" dirty="0">
-                <a:solidFill>
-                  <a:srgbClr val="1A2332"/>
-                </a:solidFill>
-                <a:latin typeface="Calibri"/>
-                <a:cs typeface="Calibri"/>
-              </a:rPr>
-              <a:t> afetado precisa de reestruturação.</a:t>
-            </a:r>
-          </a:p>
-          <a:p>
-            <a:endParaRPr lang="pt-PT" dirty="0"/>
+              <a:t>Os edifícios inteligentes são, essencialmente, ecossistemas de sensores. Estes dispositivos geram pegadas do nosso comportamento. Embora isto otimize o conforto e a energia, cria uma pegada digital massiva. Mesmo que eliminemos os dados em bruto, os modelos treinados com eles retêm vestígios que podem ser explorados.</a:t>
+            </a:r>
           </a:p>
           <a:p>
             <a:pPr marL="0" marR="0" lvl="0" indent="0" algn="l" defTabSz="914400" rtl="0" eaLnBrk="1" fontAlgn="auto" latinLnBrk="0" hangingPunct="1">
@@ -954,22 +1153,6 @@
               <a:tabLst/>
               <a:defRPr/>
             </a:pPr>
-            <a:r>
-              <a:rPr lang="pt-PT" dirty="0"/>
-              <a:t>APPROXIMATE: </a:t>
-            </a:r>
-            <a:r>
-              <a:rPr lang="pt-PT" sz="1200" dirty="0">
-                <a:solidFill>
-                  <a:srgbClr val="1A2332"/>
-                </a:solidFill>
-                <a:latin typeface="Calibri"/>
-                <a:cs typeface="Calibri"/>
-              </a:rPr>
-              <a:t>Atualiza pesos para minimizar o impacto dos dados-alvo, sem garantia de eliminação total. Inclui métodos baseados em gradiente, funções de influência, destilação e refinamento.</a:t>
-            </a:r>
-          </a:p>
-          <a:p>
             <a:endParaRPr lang="pt-PT" dirty="0"/>
           </a:p>
           <a:p>
@@ -991,24 +1174,395 @@
               <a:defRPr/>
             </a:pPr>
             <a:r>
-              <a:rPr lang="pt-PT" sz="1200" i="1" dirty="0" err="1">
-                <a:solidFill>
-                  <a:srgbClr val="1A2332"/>
-                </a:solidFill>
-                <a:latin typeface="Calibri"/>
-                <a:cs typeface="Calibri"/>
-              </a:rPr>
-              <a:t>Trade-off</a:t>
-            </a:r>
-            <a:r>
-              <a:rPr lang="pt-PT" sz="1200" i="1" dirty="0">
-                <a:solidFill>
-                  <a:srgbClr val="1A2332"/>
-                </a:solidFill>
-                <a:latin typeface="Calibri"/>
-                <a:cs typeface="Calibri"/>
-              </a:rPr>
-              <a:t> entre garantia, custo computacional e flexibilidade de implementação — crítico em hardware com recursos limitados.</a:t>
+              <a:rPr lang="pt-PT" dirty="0"/>
+              <a:t>O Artigo 17.º do RGPD, o "Direito ao Esquecimento", exige que as organizações não só eliminem os registos em bruto, mas também qualquer influência derivada.</a:t>
+            </a:r>
+          </a:p>
+          <a:p>
+            <a:pPr marL="0" marR="0" lvl="0" indent="0" algn="l" defTabSz="914400" rtl="0" eaLnBrk="1" fontAlgn="auto" latinLnBrk="0" hangingPunct="1">
+              <a:lnSpc>
+                <a:spcPct val="100000"/>
+              </a:lnSpc>
+              <a:spcBef>
+                <a:spcPts val="0"/>
+              </a:spcBef>
+              <a:spcAft>
+                <a:spcPts val="0"/>
+              </a:spcAft>
+              <a:buClrTx/>
+              <a:buSzTx/>
+              <a:buFontTx/>
+              <a:buNone/>
+              <a:tabLst/>
+              <a:defRPr/>
+            </a:pPr>
+            <a:endParaRPr lang="pt-PT" dirty="0"/>
+          </a:p>
+          <a:p>
+            <a:pPr marL="0" marR="0" lvl="0" indent="0" algn="l" defTabSz="914400" rtl="0" eaLnBrk="1" fontAlgn="auto" latinLnBrk="0" hangingPunct="1">
+              <a:lnSpc>
+                <a:spcPct val="100000"/>
+              </a:lnSpc>
+              <a:spcBef>
+                <a:spcPts val="0"/>
+              </a:spcBef>
+              <a:spcAft>
+                <a:spcPts val="0"/>
+              </a:spcAft>
+              <a:buClrTx/>
+              <a:buSzTx/>
+              <a:buFontTx/>
+              <a:buNone/>
+              <a:tabLst/>
+              <a:defRPr/>
+            </a:pPr>
+            <a:r>
+              <a:rPr lang="pt-PT" dirty="0"/>
+              <a:t>No entanto, a pura remoção de dados em bruto já não é suficiente. Os modelos de </a:t>
+            </a:r>
+            <a:r>
+              <a:rPr lang="pt-PT" i="1" dirty="0" err="1"/>
+              <a:t>machine</a:t>
+            </a:r>
+            <a:r>
+              <a:rPr lang="pt-PT" i="1" dirty="0"/>
+              <a:t> </a:t>
+            </a:r>
+            <a:r>
+              <a:rPr lang="pt-PT" i="1" dirty="0" err="1"/>
+              <a:t>learning</a:t>
+            </a:r>
+            <a:r>
+              <a:rPr lang="pt-PT" dirty="0"/>
+              <a:t> "memorizam" os seus conjuntos de treino. Através de ataques de </a:t>
+            </a:r>
+            <a:r>
+              <a:rPr lang="pt-PT" i="1" dirty="0" err="1"/>
+              <a:t>Membership</a:t>
+            </a:r>
+            <a:r>
+              <a:rPr lang="pt-PT" i="1" dirty="0"/>
+              <a:t> </a:t>
+            </a:r>
+            <a:r>
+              <a:rPr lang="pt-PT" i="1" dirty="0" err="1"/>
+              <a:t>Inference</a:t>
+            </a:r>
+            <a:r>
+              <a:rPr lang="pt-PT" i="1" dirty="0"/>
+              <a:t> ou</a:t>
+            </a:r>
+            <a:r>
+              <a:rPr lang="pt-PT" dirty="0"/>
+              <a:t> </a:t>
+            </a:r>
+            <a:r>
+              <a:rPr lang="pt-PT" i="1" dirty="0" err="1"/>
+              <a:t>Model</a:t>
+            </a:r>
+            <a:r>
+              <a:rPr lang="pt-PT" i="1" dirty="0"/>
+              <a:t> </a:t>
+            </a:r>
+            <a:r>
+              <a:rPr lang="pt-PT" i="1" dirty="0" err="1"/>
+              <a:t>Inversion</a:t>
+            </a:r>
+            <a:r>
+              <a:rPr lang="pt-PT" i="1" dirty="0"/>
+              <a:t>,</a:t>
+            </a:r>
+            <a:r>
+              <a:rPr lang="pt-PT" dirty="0"/>
+              <a:t> um adversário pode reconstruir informações privadas dos residentes. </a:t>
+            </a:r>
+            <a:r>
+              <a:rPr lang="pt-PT" i="1" dirty="0" err="1"/>
+              <a:t>Machine</a:t>
+            </a:r>
+            <a:r>
+              <a:rPr lang="pt-PT" i="1" dirty="0"/>
+              <a:t> </a:t>
+            </a:r>
+            <a:r>
+              <a:rPr lang="pt-PT" i="1" dirty="0" err="1"/>
+              <a:t>Unlearning</a:t>
+            </a:r>
+            <a:r>
+              <a:rPr lang="pt-PT" dirty="0"/>
+              <a:t> </a:t>
+            </a:r>
+            <a:r>
+              <a:rPr lang="pt-PT" dirty="0" err="1"/>
+              <a:t>surje</a:t>
+            </a:r>
+            <a:r>
+              <a:rPr lang="pt-PT" dirty="0"/>
+              <a:t> como a resposta isto — é o processo de remover seletivamente a influência dos dados.</a:t>
+            </a:r>
+          </a:p>
+          <a:p>
+            <a:pPr marL="0" marR="0" lvl="0" indent="0" algn="l" defTabSz="914400" rtl="0" eaLnBrk="1" fontAlgn="auto" latinLnBrk="0" hangingPunct="1">
+              <a:lnSpc>
+                <a:spcPct val="100000"/>
+              </a:lnSpc>
+              <a:spcBef>
+                <a:spcPts val="0"/>
+              </a:spcBef>
+              <a:spcAft>
+                <a:spcPts val="0"/>
+              </a:spcAft>
+              <a:buClrTx/>
+              <a:buSzTx/>
+              <a:buFontTx/>
+              <a:buNone/>
+              <a:tabLst/>
+              <a:defRPr/>
+            </a:pPr>
+            <a:endParaRPr lang="pt-PT" dirty="0"/>
+          </a:p>
+          <a:p>
+            <a:pPr marL="0" marR="0" lvl="0" indent="0" algn="l" defTabSz="914400" rtl="0" eaLnBrk="1" fontAlgn="auto" latinLnBrk="0" hangingPunct="1">
+              <a:lnSpc>
+                <a:spcPct val="100000"/>
+              </a:lnSpc>
+              <a:spcBef>
+                <a:spcPts val="0"/>
+              </a:spcBef>
+              <a:spcAft>
+                <a:spcPts val="0"/>
+              </a:spcAft>
+              <a:buClrTx/>
+              <a:buSzTx/>
+              <a:buFontTx/>
+              <a:buNone/>
+              <a:tabLst/>
+              <a:defRPr/>
+            </a:pPr>
+            <a:endParaRPr lang="pt-PT" sz="1200" dirty="0">
+              <a:solidFill>
+                <a:srgbClr val="1A2332"/>
+              </a:solidFill>
+              <a:latin typeface="Calibri"/>
+              <a:cs typeface="Calibri"/>
+            </a:endParaRPr>
+          </a:p>
+          <a:p>
+            <a:pPr marL="0" marR="0" lvl="0" indent="0" algn="l" defTabSz="914400" rtl="0" eaLnBrk="1" fontAlgn="auto" latinLnBrk="0" hangingPunct="1">
+              <a:lnSpc>
+                <a:spcPct val="100000"/>
+              </a:lnSpc>
+              <a:spcBef>
+                <a:spcPts val="0"/>
+              </a:spcBef>
+              <a:spcAft>
+                <a:spcPts val="0"/>
+              </a:spcAft>
+              <a:buClrTx/>
+              <a:buSzTx/>
+              <a:buFontTx/>
+              <a:buNone/>
+              <a:tabLst/>
+              <a:defRPr/>
+            </a:pPr>
+            <a:r>
+              <a:rPr lang="pt-PT" sz="1200" dirty="0">
+                <a:solidFill>
+                  <a:srgbClr val="1A2332"/>
+                </a:solidFill>
+                <a:latin typeface="Calibri"/>
+                <a:cs typeface="Calibri"/>
+              </a:rPr>
+              <a:t>Dispositivos </a:t>
+            </a:r>
+            <a:r>
+              <a:rPr lang="pt-PT" sz="1200" dirty="0" err="1">
+                <a:solidFill>
+                  <a:srgbClr val="1A2332"/>
+                </a:solidFill>
+                <a:latin typeface="Calibri"/>
+                <a:cs typeface="Calibri"/>
+              </a:rPr>
+              <a:t>IoT</a:t>
+            </a:r>
+            <a:r>
+              <a:rPr lang="pt-PT" sz="1200" dirty="0">
+                <a:solidFill>
+                  <a:srgbClr val="1A2332"/>
+                </a:solidFill>
+                <a:latin typeface="Calibri"/>
+                <a:cs typeface="Calibri"/>
+              </a:rPr>
+              <a:t> recolhem padrões de ocupação, consumo energético, sinais biométricos e movimento, criando um histórico longitudinal detalhado dos ocupantes.</a:t>
+            </a:r>
+          </a:p>
+          <a:p>
+            <a:endParaRPr lang="pt-PT" dirty="0"/>
+          </a:p>
+          <a:p>
+            <a:pPr marL="0" marR="0" lvl="0" indent="0" algn="l" defTabSz="914400" rtl="0" eaLnBrk="1" fontAlgn="auto" latinLnBrk="0" hangingPunct="1">
+              <a:lnSpc>
+                <a:spcPct val="100000"/>
+              </a:lnSpc>
+              <a:spcBef>
+                <a:spcPts val="0"/>
+              </a:spcBef>
+              <a:spcAft>
+                <a:spcPts val="0"/>
+              </a:spcAft>
+              <a:buClrTx/>
+              <a:buSzTx/>
+              <a:buFontTx/>
+              <a:buNone/>
+              <a:tabLst/>
+              <a:defRPr/>
+            </a:pPr>
+            <a:r>
+              <a:rPr lang="pt-PT" sz="1200" dirty="0">
+                <a:solidFill>
+                  <a:srgbClr val="1A2332"/>
+                </a:solidFill>
+                <a:latin typeface="Calibri"/>
+                <a:cs typeface="Calibri"/>
+              </a:rPr>
+              <a:t>Modelos treinados retêm traços estatísticos exploráveis por ataques de inferência de pertença e inversão de modelo, mesmo após eliminar os dados originais.</a:t>
+            </a:r>
+          </a:p>
+          <a:p>
+            <a:pPr marL="0" marR="0" lvl="0" indent="0" algn="l" defTabSz="914400" rtl="0" eaLnBrk="1" fontAlgn="auto" latinLnBrk="0" hangingPunct="1">
+              <a:lnSpc>
+                <a:spcPct val="100000"/>
+              </a:lnSpc>
+              <a:spcBef>
+                <a:spcPts val="0"/>
+              </a:spcBef>
+              <a:spcAft>
+                <a:spcPts val="0"/>
+              </a:spcAft>
+              <a:buClrTx/>
+              <a:buSzTx/>
+              <a:buFontTx/>
+              <a:buNone/>
+              <a:tabLst/>
+              <a:defRPr/>
+            </a:pPr>
+            <a:endParaRPr lang="pt-PT" sz="1200" dirty="0">
+              <a:solidFill>
+                <a:srgbClr val="1A2332"/>
+              </a:solidFill>
+              <a:latin typeface="Calibri"/>
+              <a:cs typeface="Calibri"/>
+            </a:endParaRPr>
+          </a:p>
+          <a:p>
+            <a:pPr marL="0" marR="0" lvl="0" indent="0" algn="l" defTabSz="914400" rtl="0" eaLnBrk="1" fontAlgn="auto" latinLnBrk="0" hangingPunct="1">
+              <a:lnSpc>
+                <a:spcPct val="100000"/>
+              </a:lnSpc>
+              <a:spcBef>
+                <a:spcPts val="0"/>
+              </a:spcBef>
+              <a:spcAft>
+                <a:spcPts val="0"/>
+              </a:spcAft>
+              <a:buClrTx/>
+              <a:buSzTx/>
+              <a:buFontTx/>
+              <a:buNone/>
+              <a:tabLst/>
+              <a:defRPr/>
+            </a:pPr>
+            <a:r>
+              <a:rPr lang="pt-PT" sz="1200" dirty="0">
+                <a:solidFill>
+                  <a:srgbClr val="1A2332"/>
+                </a:solidFill>
+                <a:latin typeface="Calibri"/>
+                <a:cs typeface="Calibri"/>
+              </a:rPr>
+              <a:t>RGPD </a:t>
+            </a:r>
+            <a:r>
+              <a:rPr lang="pt-PT" sz="1200" dirty="0" err="1">
+                <a:solidFill>
+                  <a:srgbClr val="1A2332"/>
+                </a:solidFill>
+                <a:latin typeface="Calibri"/>
+                <a:cs typeface="Calibri"/>
+              </a:rPr>
+              <a:t>Art</a:t>
+            </a:r>
+            <a:r>
+              <a:rPr lang="pt-PT" sz="1200" dirty="0">
+                <a:solidFill>
+                  <a:srgbClr val="1A2332"/>
+                </a:solidFill>
+                <a:latin typeface="Calibri"/>
+                <a:cs typeface="Calibri"/>
+              </a:rPr>
+              <a:t>. 17 (direito ao esquecimento) exige eliminar não só os dados, mas a sua influência nos modelos derivados — não basta apagar a fonte.</a:t>
+            </a:r>
+          </a:p>
+          <a:p>
+            <a:endParaRPr lang="pt-PT" dirty="0"/>
+          </a:p>
+          <a:p>
+            <a:pPr marL="0" marR="0" lvl="0" indent="0" algn="l" defTabSz="914400" rtl="0" eaLnBrk="1" fontAlgn="auto" latinLnBrk="0" hangingPunct="1">
+              <a:lnSpc>
+                <a:spcPct val="100000"/>
+              </a:lnSpc>
+              <a:spcBef>
+                <a:spcPts val="0"/>
+              </a:spcBef>
+              <a:spcAft>
+                <a:spcPts val="0"/>
+              </a:spcAft>
+              <a:buClrTx/>
+              <a:buSzTx/>
+              <a:buFontTx/>
+              <a:buNone/>
+              <a:tabLst/>
+              <a:defRPr/>
+            </a:pPr>
+            <a:r>
+              <a:rPr lang="pt-PT" i="1" dirty="0" err="1">
+                <a:solidFill>
+                  <a:srgbClr val="1A2332"/>
+                </a:solidFill>
+                <a:latin typeface="Calibri"/>
+                <a:cs typeface="Calibri"/>
+              </a:rPr>
+              <a:t>Machine</a:t>
+            </a:r>
+            <a:r>
+              <a:rPr lang="pt-PT" i="1" dirty="0">
+                <a:solidFill>
+                  <a:srgbClr val="1A2332"/>
+                </a:solidFill>
+                <a:latin typeface="Calibri"/>
+                <a:cs typeface="Calibri"/>
+              </a:rPr>
+              <a:t> </a:t>
+            </a:r>
+            <a:r>
+              <a:rPr lang="pt-PT" i="1" dirty="0" err="1">
+                <a:solidFill>
+                  <a:srgbClr val="1A2332"/>
+                </a:solidFill>
+                <a:latin typeface="Calibri"/>
+                <a:cs typeface="Calibri"/>
+              </a:rPr>
+              <a:t>unlearning</a:t>
+            </a:r>
+            <a:r>
+              <a:rPr lang="pt-PT" i="1" dirty="0">
+                <a:solidFill>
+                  <a:srgbClr val="1A2332"/>
+                </a:solidFill>
+                <a:latin typeface="Calibri"/>
+                <a:cs typeface="Calibri"/>
+              </a:rPr>
+              <a:t> surge como resposta técnica mas foi concebido para cenários centralizados e estáticos, não para o contexto distribuído dos edifícios inteligentes.</a:t>
             </a:r>
           </a:p>
           <a:p>
@@ -1033,7 +1587,7 @@
           <a:p>
             <a:fld id="{4BEEEA3F-08CE-6043-AB76-D392B1207876}" type="slidenum">
               <a:rPr lang="pt-PT" smtClean="0"/>
-              <a:t>3</a:t>
+              <a:t>2</a:t>
             </a:fld>
             <a:endParaRPr lang="pt-PT"/>
           </a:p>
@@ -1042,7 +1596,7 @@
     </p:spTree>
     <p:extLst>
       <p:ext uri="{BB962C8B-B14F-4D97-AF65-F5344CB8AC3E}">
-        <p14:creationId xmlns:p14="http://schemas.microsoft.com/office/powerpoint/2010/main" val="863320645"/>
+        <p14:creationId xmlns:p14="http://schemas.microsoft.com/office/powerpoint/2010/main" val="840767661"/>
       </p:ext>
     </p:extLst>
   </p:cSld>
@@ -1114,22 +1668,24 @@
               <a:defRPr/>
             </a:pPr>
             <a:r>
-              <a:rPr lang="pt-PT" sz="1200" dirty="0" err="1">
-                <a:solidFill>
-                  <a:srgbClr val="1A2332"/>
-                </a:solidFill>
-                <a:latin typeface="Calibri"/>
-              </a:rPr>
-              <a:t>Cloud</a:t>
-            </a:r>
-            <a:r>
-              <a:rPr lang="pt-PT" sz="1200" dirty="0">
-                <a:solidFill>
-                  <a:srgbClr val="1A2332"/>
-                </a:solidFill>
-                <a:latin typeface="Calibri"/>
-              </a:rPr>
-              <a:t>: Treino de modelos globais · armazenamento histórico · análise entre edifícios</a:t>
+              <a:rPr lang="pt-PT" dirty="0"/>
+              <a:t>Existem dois paradigmas principais: Exato e Aproximado. A </a:t>
+            </a:r>
+            <a:r>
+              <a:rPr lang="pt-PT" dirty="0" err="1"/>
+              <a:t>desaprendizagem</a:t>
+            </a:r>
+            <a:r>
+              <a:rPr lang="pt-PT" dirty="0"/>
+              <a:t> exata como o método SISA, garante a remoção voltando a treinar partes do modelo, mas é computacionalmente pesada. A </a:t>
+            </a:r>
+            <a:r>
+              <a:rPr lang="pt-PT" dirty="0" err="1"/>
+              <a:t>desaprendizagem</a:t>
+            </a:r>
+            <a:r>
+              <a:rPr lang="pt-PT" dirty="0"/>
+              <a:t> aproximada é mais rápida, mas apenas minimiza a influência até a um limite tolerável — o que a torna mais difícil de garantir esta remoção.</a:t>
             </a:r>
           </a:p>
           <a:p>
@@ -1150,23 +1706,7 @@
               <a:tabLst/>
               <a:defRPr/>
             </a:pPr>
-            <a:r>
-              <a:rPr lang="pt-PT" dirty="0" err="1"/>
-              <a:t>Edge</a:t>
-            </a:r>
-            <a:r>
-              <a:rPr lang="pt-PT" dirty="0"/>
-              <a:t>: </a:t>
-            </a:r>
-            <a:r>
-              <a:rPr lang="pt-PT" sz="1200" dirty="0">
-                <a:solidFill>
-                  <a:srgbClr val="1A2332"/>
-                </a:solidFill>
-                <a:latin typeface="Calibri"/>
-              </a:rPr>
-              <a:t>Agregação · pré-processamento · execução de modelos leves</a:t>
-            </a:r>
+            <a:endParaRPr lang="pt-PT" dirty="0"/>
           </a:p>
           <a:p>
             <a:pPr marL="0" marR="0" lvl="0" indent="0" algn="l" defTabSz="914400" rtl="0" eaLnBrk="1" fontAlgn="auto" latinLnBrk="0" hangingPunct="1">
@@ -1187,12 +1727,8 @@
               <a:defRPr/>
             </a:pPr>
             <a:r>
-              <a:rPr lang="pt-PT" dirty="0" err="1"/>
-              <a:t>Perception</a:t>
-            </a:r>
-            <a:r>
               <a:rPr lang="pt-PT" dirty="0"/>
-              <a:t>: </a:t>
+              <a:t>EXACT: </a:t>
             </a:r>
             <a:r>
               <a:rPr lang="pt-PT" sz="1200" dirty="0">
@@ -1200,8 +1736,9 @@
                   <a:srgbClr val="1A2332"/>
                 </a:solidFill>
                 <a:latin typeface="Calibri"/>
-              </a:rPr>
-              <a:t>Sensores e atuadores no terreno: ocupação, ambiente, contadores, </a:t>
+                <a:cs typeface="Calibri"/>
+              </a:rPr>
+              <a:t>Reestrutura o treino para que cada eliminação seja resolvida por </a:t>
             </a:r>
             <a:r>
               <a:rPr lang="pt-PT" sz="1200" dirty="0" err="1">
@@ -1209,15 +1746,80 @@
                   <a:srgbClr val="1A2332"/>
                 </a:solidFill>
                 <a:latin typeface="Calibri"/>
-              </a:rPr>
-              <a:t>wearables</a:t>
-            </a:r>
-            <a:endParaRPr lang="pt-PT" sz="1200" dirty="0">
-              <a:solidFill>
-                <a:srgbClr val="1A2332"/>
-              </a:solidFill>
-              <a:latin typeface="Calibri"/>
-            </a:endParaRPr>
+                <a:cs typeface="Calibri"/>
+              </a:rPr>
+              <a:t>retreino</a:t>
+            </a:r>
+            <a:r>
+              <a:rPr lang="pt-PT" sz="1200" dirty="0">
+                <a:solidFill>
+                  <a:srgbClr val="1A2332"/>
+                </a:solidFill>
+                <a:latin typeface="Calibri"/>
+                <a:cs typeface="Calibri"/>
+              </a:rPr>
+              <a:t> parcial. SISA divide o </a:t>
+            </a:r>
+            <a:r>
+              <a:rPr lang="pt-PT" sz="1200" dirty="0" err="1">
+                <a:solidFill>
+                  <a:srgbClr val="1A2332"/>
+                </a:solidFill>
+                <a:latin typeface="Calibri"/>
+                <a:cs typeface="Calibri"/>
+              </a:rPr>
+              <a:t>dataset</a:t>
+            </a:r>
+            <a:r>
+              <a:rPr lang="pt-PT" sz="1200" dirty="0">
+                <a:solidFill>
+                  <a:srgbClr val="1A2332"/>
+                </a:solidFill>
+                <a:latin typeface="Calibri"/>
+                <a:cs typeface="Calibri"/>
+              </a:rPr>
+              <a:t> em </a:t>
+            </a:r>
+            <a:r>
+              <a:rPr lang="pt-PT" sz="1200" dirty="0" err="1">
+                <a:solidFill>
+                  <a:srgbClr val="1A2332"/>
+                </a:solidFill>
+                <a:latin typeface="Calibri"/>
+                <a:cs typeface="Calibri"/>
+              </a:rPr>
+              <a:t>shards</a:t>
+            </a:r>
+            <a:r>
+              <a:rPr lang="pt-PT" sz="1200" dirty="0">
+                <a:solidFill>
+                  <a:srgbClr val="1A2332"/>
+                </a:solidFill>
+                <a:latin typeface="Calibri"/>
+                <a:cs typeface="Calibri"/>
+              </a:rPr>
+              <a:t> isolados — só o </a:t>
+            </a:r>
+            <a:r>
+              <a:rPr lang="pt-PT" sz="1200" dirty="0" err="1">
+                <a:solidFill>
+                  <a:srgbClr val="1A2332"/>
+                </a:solidFill>
+                <a:latin typeface="Calibri"/>
+                <a:cs typeface="Calibri"/>
+              </a:rPr>
+              <a:t>shard</a:t>
+            </a:r>
+            <a:r>
+              <a:rPr lang="pt-PT" sz="1200" dirty="0">
+                <a:solidFill>
+                  <a:srgbClr val="1A2332"/>
+                </a:solidFill>
+                <a:latin typeface="Calibri"/>
+                <a:cs typeface="Calibri"/>
+              </a:rPr>
+              <a:t> afetado precisa de reestruturação.</a:t>
+            </a:r>
           </a:p>
           <a:p>
             <a:endParaRPr lang="pt-PT" dirty="0"/>
@@ -1241,26 +1843,63 @@
               <a:defRPr/>
             </a:pPr>
             <a:r>
+              <a:rPr lang="pt-PT" dirty="0"/>
+              <a:t>APPROXIMATE: </a:t>
+            </a:r>
+            <a:r>
               <a:rPr lang="pt-PT" sz="1200" dirty="0">
                 <a:solidFill>
                   <a:srgbClr val="1A2332"/>
                 </a:solidFill>
                 <a:latin typeface="Calibri"/>
-              </a:rPr>
-              <a:t>Um pedido de eliminação tem de propagar-se pelas três camadas. </a:t>
-            </a:r>
+                <a:cs typeface="Calibri"/>
+              </a:rPr>
+              <a:t>Atualiza pesos para minimizar o impacto dos dados-alvo, sem garantia de eliminação total. Inclui métodos baseados em gradiente, funções de influência, destilação e refinamento.</a:t>
+            </a:r>
+          </a:p>
+          <a:p>
             <a:endParaRPr lang="pt-PT" dirty="0"/>
           </a:p>
           <a:p>
-            <a:r>
-              <a:rPr lang="pt-PT" sz="1200" dirty="0">
-                <a:solidFill>
-                  <a:srgbClr val="1A2332"/>
-                </a:solidFill>
-                <a:latin typeface="Calibri"/>
-              </a:rPr>
-              <a:t>Estados parciais — em que apenas uma camada “esquece” — violam o direito ao esquecimento e deixam superfícies para ataques de inferência.</a:t>
-            </a:r>
+            <a:pPr marL="0" marR="0" lvl="0" indent="0" algn="l" defTabSz="914400" rtl="0" eaLnBrk="1" fontAlgn="auto" latinLnBrk="0" hangingPunct="1">
+              <a:lnSpc>
+                <a:spcPct val="100000"/>
+              </a:lnSpc>
+              <a:spcBef>
+                <a:spcPts val="0"/>
+              </a:spcBef>
+              <a:spcAft>
+                <a:spcPts val="0"/>
+              </a:spcAft>
+              <a:buClrTx/>
+              <a:buSzTx/>
+              <a:buFontTx/>
+              <a:buNone/>
+              <a:tabLst/>
+              <a:defRPr/>
+            </a:pPr>
+            <a:r>
+              <a:rPr lang="pt-PT" sz="1200" i="1" dirty="0" err="1">
+                <a:solidFill>
+                  <a:srgbClr val="1A2332"/>
+                </a:solidFill>
+                <a:latin typeface="Calibri"/>
+                <a:cs typeface="Calibri"/>
+              </a:rPr>
+              <a:t>Trade-off</a:t>
+            </a:r>
+            <a:r>
+              <a:rPr lang="pt-PT" sz="1200" i="1" dirty="0">
+                <a:solidFill>
+                  <a:srgbClr val="1A2332"/>
+                </a:solidFill>
+                <a:latin typeface="Calibri"/>
+                <a:cs typeface="Calibri"/>
+              </a:rPr>
+              <a:t> entre garantia, custo computacional e flexibilidade de implementação — crítico em hardware com recursos limitados.</a:t>
+            </a:r>
+          </a:p>
+          <a:p>
             <a:endParaRPr lang="pt-PT" dirty="0"/>
           </a:p>
         </p:txBody>
@@ -1282,7 +1921,7 @@
           <a:p>
             <a:fld id="{4BEEEA3F-08CE-6043-AB76-D392B1207876}" type="slidenum">
               <a:rPr lang="pt-PT" smtClean="0"/>
-              <a:t>4</a:t>
+              <a:t>3</a:t>
             </a:fld>
             <a:endParaRPr lang="pt-PT"/>
           </a:p>
@@ -1291,7 +1930,7 @@
     </p:spTree>
     <p:extLst>
       <p:ext uri="{BB962C8B-B14F-4D97-AF65-F5344CB8AC3E}">
-        <p14:creationId xmlns:p14="http://schemas.microsoft.com/office/powerpoint/2010/main" val="582045854"/>
+        <p14:creationId xmlns:p14="http://schemas.microsoft.com/office/powerpoint/2010/main" val="863320645"/>
       </p:ext>
     </p:extLst>
   </p:cSld>
@@ -1363,61 +2002,65 @@
               <a:defRPr/>
             </a:pPr>
             <a:r>
-              <a:rPr lang="pt-PT" sz="1200" dirty="0">
-                <a:solidFill>
-                  <a:srgbClr val="1A2332"/>
-                </a:solidFill>
-                <a:latin typeface="Calibri"/>
-                <a:cs typeface="Calibri"/>
-              </a:rPr>
-              <a:t>Em edifícios </a:t>
-            </a:r>
-            <a:r>
-              <a:rPr lang="pt-PT" sz="1200" dirty="0" err="1">
-                <a:solidFill>
-                  <a:srgbClr val="1A2332"/>
-                </a:solidFill>
-                <a:latin typeface="Calibri"/>
-                <a:cs typeface="Calibri"/>
-              </a:rPr>
-              <a:t>multi-inquilino</a:t>
-            </a:r>
-            <a:r>
-              <a:rPr lang="pt-PT" sz="1200" dirty="0">
-                <a:solidFill>
-                  <a:srgbClr val="1A2332"/>
-                </a:solidFill>
-                <a:latin typeface="Calibri"/>
-                <a:cs typeface="Calibri"/>
-              </a:rPr>
-              <a:t>, cada ocupante concede consentimento separadamente. Um único pedido de eliminação não pode ser aplicado de forma global ao </a:t>
-            </a:r>
-            <a:r>
-              <a:rPr lang="pt-PT" sz="1200" dirty="0" err="1">
-                <a:solidFill>
-                  <a:srgbClr val="1A2332"/>
-                </a:solidFill>
-                <a:latin typeface="Calibri"/>
-                <a:cs typeface="Calibri"/>
-              </a:rPr>
-              <a:t>dataset</a:t>
-            </a:r>
-            <a:r>
-              <a:rPr lang="pt-PT" sz="1200" dirty="0">
-                <a:solidFill>
-                  <a:srgbClr val="1A2332"/>
-                </a:solidFill>
-                <a:latin typeface="Calibri"/>
-                <a:cs typeface="Calibri"/>
-              </a:rPr>
-              <a:t>.</a:t>
-            </a:r>
-          </a:p>
-          <a:p>
-            <a:endParaRPr lang="pt-PT" dirty="0"/>
-          </a:p>
-          <a:p>
-            <a:endParaRPr lang="pt-PT" dirty="0"/>
+              <a:rPr lang="pt-PT" dirty="0"/>
+              <a:t>Os edifícios inteligentes seguem uma hierarquia em camadas. Perceção para deteção, </a:t>
+            </a:r>
+            <a:r>
+              <a:rPr lang="pt-PT" i="1" dirty="0" err="1"/>
+              <a:t>Edge</a:t>
+            </a:r>
+            <a:r>
+              <a:rPr lang="pt-PT" dirty="0"/>
+              <a:t> para controlo local e </a:t>
+            </a:r>
+            <a:r>
+              <a:rPr lang="pt-PT" i="1" dirty="0" err="1"/>
+              <a:t>Cloud</a:t>
+            </a:r>
+            <a:r>
+              <a:rPr lang="pt-PT" dirty="0"/>
+              <a:t> para otimização global. O </a:t>
+            </a:r>
+            <a:r>
+              <a:rPr lang="pt-PT" i="1" dirty="0" err="1"/>
+              <a:t>machine</a:t>
+            </a:r>
+            <a:r>
+              <a:rPr lang="pt-PT" i="1" dirty="0"/>
+              <a:t> </a:t>
+            </a:r>
+            <a:r>
+              <a:rPr lang="pt-PT" i="1" dirty="0" err="1"/>
+              <a:t>unlearning</a:t>
+            </a:r>
+            <a:r>
+              <a:rPr lang="pt-PT" dirty="0"/>
+              <a:t> deve ocorrer em todas as camadas. Se a </a:t>
+            </a:r>
+            <a:r>
+              <a:rPr lang="pt-PT" i="1" dirty="0" err="1"/>
+              <a:t>cloud</a:t>
+            </a:r>
+            <a:r>
+              <a:rPr lang="pt-PT" dirty="0"/>
+              <a:t> esquecer, mas o </a:t>
+            </a:r>
+            <a:r>
+              <a:rPr lang="pt-PT" i="1" dirty="0" err="1"/>
+              <a:t>gateway</a:t>
+            </a:r>
+            <a:r>
+              <a:rPr lang="pt-PT" dirty="0"/>
+              <a:t> na </a:t>
+            </a:r>
+            <a:r>
+              <a:rPr lang="pt-PT" i="1" dirty="0" err="1"/>
+              <a:t>edge</a:t>
+            </a:r>
+            <a:r>
+              <a:rPr lang="pt-PT" dirty="0"/>
+              <a:t> retiver os pesos do utilizador, significa que o sistema não está em conformidade legal.</a:t>
+            </a:r>
           </a:p>
           <a:p>
             <a:pPr marL="0" marR="0" lvl="0" indent="0" algn="l" defTabSz="914400" rtl="0" eaLnBrk="1" fontAlgn="auto" latinLnBrk="0" hangingPunct="1">
@@ -1437,22 +2080,12 @@
               <a:tabLst/>
               <a:defRPr/>
             </a:pPr>
-            <a:r>
-              <a:rPr lang="pt-PT" sz="1200" dirty="0">
-                <a:solidFill>
-                  <a:srgbClr val="1A2332"/>
-                </a:solidFill>
-                <a:latin typeface="Calibri"/>
-                <a:cs typeface="Calibri"/>
-              </a:rPr>
-              <a:t>Sensores partilhados (corredores, AVAC, contadores comuns) recolhem dados que pertencem simultaneamente a vários inquilinos — o mesmo registo serve treino de múltiplos perfis.</a:t>
-            </a:r>
-          </a:p>
-          <a:p>
-            <a:endParaRPr lang="pt-PT" dirty="0"/>
-          </a:p>
-          <a:p>
-            <a:endParaRPr lang="pt-PT" dirty="0"/>
+            <a:endParaRPr lang="pt-PT" sz="1200" dirty="0">
+              <a:solidFill>
+                <a:srgbClr val="1A2332"/>
+              </a:solidFill>
+              <a:latin typeface="Calibri"/>
+            </a:endParaRPr>
           </a:p>
           <a:p>
             <a:pPr marL="0" marR="0" lvl="0" indent="0" algn="l" defTabSz="914400" rtl="0" eaLnBrk="1" fontAlgn="auto" latinLnBrk="0" hangingPunct="1">
@@ -1473,21 +2106,23 @@
               <a:defRPr/>
             </a:pPr>
             <a:r>
+              <a:rPr lang="pt-PT" sz="1200" dirty="0" err="1">
+                <a:solidFill>
+                  <a:srgbClr val="1A2332"/>
+                </a:solidFill>
+                <a:latin typeface="Calibri"/>
+              </a:rPr>
+              <a:t>Cloud</a:t>
+            </a:r>
+            <a:r>
               <a:rPr lang="pt-PT" sz="1200" dirty="0">
                 <a:solidFill>
                   <a:srgbClr val="1A2332"/>
                 </a:solidFill>
                 <a:latin typeface="Calibri"/>
-                <a:cs typeface="Calibri"/>
-              </a:rPr>
-              <a:t>Eliminar limpamente os dados de um utilizador sem afetar os restantes torna-se quase impossível — restrição operacional fundamental destacada na literatura.</a:t>
-            </a:r>
-          </a:p>
-          <a:p>
-            <a:endParaRPr lang="pt-PT" dirty="0"/>
-          </a:p>
-          <a:p>
-            <a:endParaRPr lang="pt-PT" dirty="0"/>
+              </a:rPr>
+              <a:t>: Treino de modelos globais · armazenamento histórico · análise entre edifícios</a:t>
+            </a:r>
           </a:p>
           <a:p>
             <a:pPr marL="0" marR="0" lvl="0" indent="0" algn="l" defTabSz="914400" rtl="0" eaLnBrk="1" fontAlgn="auto" latinLnBrk="0" hangingPunct="1">
@@ -1508,34 +2143,115 @@
               <a:defRPr/>
             </a:pPr>
             <a:r>
-              <a:rPr lang="pt-PT" sz="1200" i="1" dirty="0">
-                <a:solidFill>
-                  <a:srgbClr val="1A2332"/>
-                </a:solidFill>
-                <a:latin typeface="Calibri"/>
-                <a:cs typeface="Calibri"/>
-              </a:rPr>
-              <a:t>Restrição operacional fundamental: o consentimento não é uniforme nem isolável — define o limite prático de qualquer mecanismo de </a:t>
-            </a:r>
-            <a:r>
-              <a:rPr lang="pt-PT" sz="1200" i="1" dirty="0" err="1">
-                <a:solidFill>
-                  <a:srgbClr val="1A2332"/>
-                </a:solidFill>
-                <a:latin typeface="Calibri"/>
-                <a:cs typeface="Calibri"/>
-              </a:rPr>
-              <a:t>unlearning</a:t>
-            </a:r>
-            <a:r>
-              <a:rPr lang="pt-PT" sz="1200" i="1" dirty="0">
-                <a:solidFill>
-                  <a:srgbClr val="1A2332"/>
-                </a:solidFill>
-                <a:latin typeface="Calibri"/>
-                <a:cs typeface="Calibri"/>
-              </a:rPr>
-              <a:t> em edifícios partilhados.</a:t>
+              <a:rPr lang="pt-PT" dirty="0" err="1"/>
+              <a:t>Edge</a:t>
+            </a:r>
+            <a:r>
+              <a:rPr lang="pt-PT" dirty="0"/>
+              <a:t>: </a:t>
+            </a:r>
+            <a:r>
+              <a:rPr lang="pt-PT" sz="1200" dirty="0">
+                <a:solidFill>
+                  <a:srgbClr val="1A2332"/>
+                </a:solidFill>
+                <a:latin typeface="Calibri"/>
+              </a:rPr>
+              <a:t>Agregação · pré-processamento · execução de modelos leves</a:t>
+            </a:r>
+          </a:p>
+          <a:p>
+            <a:pPr marL="0" marR="0" lvl="0" indent="0" algn="l" defTabSz="914400" rtl="0" eaLnBrk="1" fontAlgn="auto" latinLnBrk="0" hangingPunct="1">
+              <a:lnSpc>
+                <a:spcPct val="100000"/>
+              </a:lnSpc>
+              <a:spcBef>
+                <a:spcPts val="0"/>
+              </a:spcBef>
+              <a:spcAft>
+                <a:spcPts val="0"/>
+              </a:spcAft>
+              <a:buClrTx/>
+              <a:buSzTx/>
+              <a:buFontTx/>
+              <a:buNone/>
+              <a:tabLst/>
+              <a:defRPr/>
+            </a:pPr>
+            <a:r>
+              <a:rPr lang="pt-PT" dirty="0" err="1"/>
+              <a:t>Perception</a:t>
+            </a:r>
+            <a:r>
+              <a:rPr lang="pt-PT" dirty="0"/>
+              <a:t>: </a:t>
+            </a:r>
+            <a:r>
+              <a:rPr lang="pt-PT" sz="1200" dirty="0">
+                <a:solidFill>
+                  <a:srgbClr val="1A2332"/>
+                </a:solidFill>
+                <a:latin typeface="Calibri"/>
+              </a:rPr>
+              <a:t>Sensores e atuadores no terreno: ocupação, ambiente, contadores, </a:t>
+            </a:r>
+            <a:r>
+              <a:rPr lang="pt-PT" sz="1200" dirty="0" err="1">
+                <a:solidFill>
+                  <a:srgbClr val="1A2332"/>
+                </a:solidFill>
+                <a:latin typeface="Calibri"/>
+              </a:rPr>
+              <a:t>wearables</a:t>
+            </a:r>
+            <a:endParaRPr lang="pt-PT" sz="1200" dirty="0">
+              <a:solidFill>
+                <a:srgbClr val="1A2332"/>
+              </a:solidFill>
+              <a:latin typeface="Calibri"/>
+            </a:endParaRPr>
+          </a:p>
+          <a:p>
+            <a:endParaRPr lang="pt-PT" dirty="0"/>
+          </a:p>
+          <a:p>
+            <a:pPr marL="0" marR="0" lvl="0" indent="0" algn="l" defTabSz="914400" rtl="0" eaLnBrk="1" fontAlgn="auto" latinLnBrk="0" hangingPunct="1">
+              <a:lnSpc>
+                <a:spcPct val="100000"/>
+              </a:lnSpc>
+              <a:spcBef>
+                <a:spcPts val="0"/>
+              </a:spcBef>
+              <a:spcAft>
+                <a:spcPts val="0"/>
+              </a:spcAft>
+              <a:buClrTx/>
+              <a:buSzTx/>
+              <a:buFontTx/>
+              <a:buNone/>
+              <a:tabLst/>
+              <a:defRPr/>
+            </a:pPr>
+            <a:r>
+              <a:rPr lang="pt-PT" sz="1200" dirty="0">
+                <a:solidFill>
+                  <a:srgbClr val="1A2332"/>
+                </a:solidFill>
+                <a:latin typeface="Calibri"/>
+              </a:rPr>
+              <a:t>Um pedido de eliminação tem de propagar-se pelas três camadas. </a:t>
+            </a:r>
+            <a:endParaRPr lang="pt-PT" dirty="0"/>
+          </a:p>
+          <a:p>
+            <a:r>
+              <a:rPr lang="pt-PT" sz="1200" dirty="0">
+                <a:solidFill>
+                  <a:srgbClr val="1A2332"/>
+                </a:solidFill>
+                <a:latin typeface="Calibri"/>
+              </a:rPr>
+              <a:t>Estados parciais — em que apenas uma camada “esquece” — violam o direito ao esquecimento e deixam superfícies para ataques de inferência.</a:t>
             </a:r>
             <a:endParaRPr lang="pt-PT" dirty="0"/>
           </a:p>
@@ -1558,7 +2274,7 @@
           <a:p>
             <a:fld id="{4BEEEA3F-08CE-6043-AB76-D392B1207876}" type="slidenum">
               <a:rPr lang="pt-PT" smtClean="0"/>
-              <a:t>5</a:t>
+              <a:t>4</a:t>
             </a:fld>
             <a:endParaRPr lang="pt-PT"/>
           </a:p>
@@ -1567,7 +2283,7 @@
     </p:spTree>
     <p:extLst>
       <p:ext uri="{BB962C8B-B14F-4D97-AF65-F5344CB8AC3E}">
-        <p14:creationId xmlns:p14="http://schemas.microsoft.com/office/powerpoint/2010/main" val="3370395725"/>
+        <p14:creationId xmlns:p14="http://schemas.microsoft.com/office/powerpoint/2010/main" val="582045854"/>
       </p:ext>
     </p:extLst>
   </p:cSld>
@@ -1639,6 +2355,410 @@
               <a:defRPr/>
             </a:pPr>
             <a:r>
+              <a:rPr lang="pt-PT" dirty="0"/>
+              <a:t>Ao contrário de, por exemplo, um telemóvel pessoal, os dados dos edifícios estão entrelaçados. Se um inquilino num escritório partilhado retirar o consentimento, os seus dados que estão misturados com os dos seus colegas nos mesmos sensores ambientais. Remover a influência de um utilizador sem degradar o desempenho do modelo para todos os outros é um grande obstáculo.</a:t>
+            </a:r>
+          </a:p>
+          <a:p>
+            <a:pPr marL="0" marR="0" lvl="0" indent="0" algn="l" defTabSz="914400" rtl="0" eaLnBrk="1" fontAlgn="auto" latinLnBrk="0" hangingPunct="1">
+              <a:lnSpc>
+                <a:spcPct val="100000"/>
+              </a:lnSpc>
+              <a:spcBef>
+                <a:spcPts val="0"/>
+              </a:spcBef>
+              <a:spcAft>
+                <a:spcPts val="0"/>
+              </a:spcAft>
+              <a:buClrTx/>
+              <a:buSzTx/>
+              <a:buFontTx/>
+              <a:buNone/>
+              <a:tabLst/>
+              <a:defRPr/>
+            </a:pPr>
+            <a:endParaRPr lang="pt-PT" sz="1200" dirty="0">
+              <a:solidFill>
+                <a:srgbClr val="1A2332"/>
+              </a:solidFill>
+              <a:latin typeface="Calibri"/>
+              <a:cs typeface="Calibri"/>
+            </a:endParaRPr>
+          </a:p>
+          <a:p>
+            <a:pPr marL="0" marR="0" lvl="0" indent="0" algn="l" defTabSz="914400" rtl="0" eaLnBrk="1" fontAlgn="auto" latinLnBrk="0" hangingPunct="1">
+              <a:lnSpc>
+                <a:spcPct val="100000"/>
+              </a:lnSpc>
+              <a:spcBef>
+                <a:spcPts val="0"/>
+              </a:spcBef>
+              <a:spcAft>
+                <a:spcPts val="0"/>
+              </a:spcAft>
+              <a:buClrTx/>
+              <a:buSzTx/>
+              <a:buFontTx/>
+              <a:buNone/>
+              <a:tabLst/>
+              <a:defRPr/>
+            </a:pPr>
+            <a:r>
+              <a:rPr lang="pt-PT" sz="1200" dirty="0">
+                <a:solidFill>
+                  <a:srgbClr val="1A2332"/>
+                </a:solidFill>
+                <a:latin typeface="Calibri"/>
+                <a:cs typeface="Calibri"/>
+              </a:rPr>
+              <a:t>Em edifícios </a:t>
+            </a:r>
+            <a:r>
+              <a:rPr lang="pt-PT" sz="1200" dirty="0" err="1">
+                <a:solidFill>
+                  <a:srgbClr val="1A2332"/>
+                </a:solidFill>
+                <a:latin typeface="Calibri"/>
+                <a:cs typeface="Calibri"/>
+              </a:rPr>
+              <a:t>multi-inquilino</a:t>
+            </a:r>
+            <a:r>
+              <a:rPr lang="pt-PT" sz="1200" dirty="0">
+                <a:solidFill>
+                  <a:srgbClr val="1A2332"/>
+                </a:solidFill>
+                <a:latin typeface="Calibri"/>
+                <a:cs typeface="Calibri"/>
+              </a:rPr>
+              <a:t>, cada ocupante concede consentimento separadamente. Um único pedido de eliminação não pode ser aplicado de forma global ao </a:t>
+            </a:r>
+            <a:r>
+              <a:rPr lang="pt-PT" sz="1200" dirty="0" err="1">
+                <a:solidFill>
+                  <a:srgbClr val="1A2332"/>
+                </a:solidFill>
+                <a:latin typeface="Calibri"/>
+                <a:cs typeface="Calibri"/>
+              </a:rPr>
+              <a:t>dataset</a:t>
+            </a:r>
+            <a:r>
+              <a:rPr lang="pt-PT" sz="1200" dirty="0">
+                <a:solidFill>
+                  <a:srgbClr val="1A2332"/>
+                </a:solidFill>
+                <a:latin typeface="Calibri"/>
+                <a:cs typeface="Calibri"/>
+              </a:rPr>
+              <a:t>.</a:t>
+            </a:r>
+          </a:p>
+          <a:p>
+            <a:endParaRPr lang="pt-PT" dirty="0"/>
+          </a:p>
+          <a:p>
+            <a:endParaRPr lang="pt-PT" dirty="0"/>
+          </a:p>
+          <a:p>
+            <a:pPr marL="0" marR="0" lvl="0" indent="0" algn="l" defTabSz="914400" rtl="0" eaLnBrk="1" fontAlgn="auto" latinLnBrk="0" hangingPunct="1">
+              <a:lnSpc>
+                <a:spcPct val="100000"/>
+              </a:lnSpc>
+              <a:spcBef>
+                <a:spcPts val="0"/>
+              </a:spcBef>
+              <a:spcAft>
+                <a:spcPts val="0"/>
+              </a:spcAft>
+              <a:buClrTx/>
+              <a:buSzTx/>
+              <a:buFontTx/>
+              <a:buNone/>
+              <a:tabLst/>
+              <a:defRPr/>
+            </a:pPr>
+            <a:r>
+              <a:rPr lang="pt-PT" sz="1200" dirty="0">
+                <a:solidFill>
+                  <a:srgbClr val="1A2332"/>
+                </a:solidFill>
+                <a:latin typeface="Calibri"/>
+                <a:cs typeface="Calibri"/>
+              </a:rPr>
+              <a:t>Sensores partilhados (corredores, AVAC, contadores comuns) recolhem dados que pertencem simultaneamente a vários inquilinos — o mesmo registo serve treino de múltiplos perfis.</a:t>
+            </a:r>
+          </a:p>
+          <a:p>
+            <a:endParaRPr lang="pt-PT" dirty="0"/>
+          </a:p>
+          <a:p>
+            <a:endParaRPr lang="pt-PT" dirty="0"/>
+          </a:p>
+          <a:p>
+            <a:pPr marL="0" marR="0" lvl="0" indent="0" algn="l" defTabSz="914400" rtl="0" eaLnBrk="1" fontAlgn="auto" latinLnBrk="0" hangingPunct="1">
+              <a:lnSpc>
+                <a:spcPct val="100000"/>
+              </a:lnSpc>
+              <a:spcBef>
+                <a:spcPts val="0"/>
+              </a:spcBef>
+              <a:spcAft>
+                <a:spcPts val="0"/>
+              </a:spcAft>
+              <a:buClrTx/>
+              <a:buSzTx/>
+              <a:buFontTx/>
+              <a:buNone/>
+              <a:tabLst/>
+              <a:defRPr/>
+            </a:pPr>
+            <a:r>
+              <a:rPr lang="pt-PT" sz="1200" dirty="0">
+                <a:solidFill>
+                  <a:srgbClr val="1A2332"/>
+                </a:solidFill>
+                <a:latin typeface="Calibri"/>
+                <a:cs typeface="Calibri"/>
+              </a:rPr>
+              <a:t>Eliminar limpamente os dados de um utilizador sem afetar os restantes torna-se quase impossível — restrição operacional fundamental destacada na literatura.</a:t>
+            </a:r>
+          </a:p>
+          <a:p>
+            <a:endParaRPr lang="pt-PT" dirty="0"/>
+          </a:p>
+          <a:p>
+            <a:endParaRPr lang="pt-PT" dirty="0"/>
+          </a:p>
+          <a:p>
+            <a:pPr marL="0" marR="0" lvl="0" indent="0" algn="l" defTabSz="914400" rtl="0" eaLnBrk="1" fontAlgn="auto" latinLnBrk="0" hangingPunct="1">
+              <a:lnSpc>
+                <a:spcPct val="100000"/>
+              </a:lnSpc>
+              <a:spcBef>
+                <a:spcPts val="0"/>
+              </a:spcBef>
+              <a:spcAft>
+                <a:spcPts val="0"/>
+              </a:spcAft>
+              <a:buClrTx/>
+              <a:buSzTx/>
+              <a:buFontTx/>
+              <a:buNone/>
+              <a:tabLst/>
+              <a:defRPr/>
+            </a:pPr>
+            <a:r>
+              <a:rPr lang="pt-PT" sz="1200" i="1" dirty="0">
+                <a:solidFill>
+                  <a:srgbClr val="1A2332"/>
+                </a:solidFill>
+                <a:latin typeface="Calibri"/>
+                <a:cs typeface="Calibri"/>
+              </a:rPr>
+              <a:t>Restrição operacional fundamental: o consentimento não é uniforme nem isolável — define o limite prático de qualquer mecanismo de </a:t>
+            </a:r>
+            <a:r>
+              <a:rPr lang="pt-PT" sz="1200" i="1" dirty="0" err="1">
+                <a:solidFill>
+                  <a:srgbClr val="1A2332"/>
+                </a:solidFill>
+                <a:latin typeface="Calibri"/>
+                <a:cs typeface="Calibri"/>
+              </a:rPr>
+              <a:t>unlearning</a:t>
+            </a:r>
+            <a:r>
+              <a:rPr lang="pt-PT" sz="1200" i="1" dirty="0">
+                <a:solidFill>
+                  <a:srgbClr val="1A2332"/>
+                </a:solidFill>
+                <a:latin typeface="Calibri"/>
+                <a:cs typeface="Calibri"/>
+              </a:rPr>
+              <a:t> em edifícios partilhados.</a:t>
+            </a:r>
+            <a:endParaRPr lang="pt-PT" dirty="0"/>
+          </a:p>
+        </p:txBody>
+      </p:sp>
+      <p:sp>
+        <p:nvSpPr>
+          <p:cNvPr id="4" name="Marcador de Posição do Número do Diapositivo 3"/>
+          <p:cNvSpPr>
+            <a:spLocks noGrp="1"/>
+          </p:cNvSpPr>
+          <p:nvPr>
+            <p:ph type="sldNum" sz="quarter" idx="5"/>
+          </p:nvPr>
+        </p:nvSpPr>
+        <p:spPr/>
+        <p:txBody>
+          <a:bodyPr/>
+          <a:lstStyle/>
+          <a:p>
+            <a:fld id="{4BEEEA3F-08CE-6043-AB76-D392B1207876}" type="slidenum">
+              <a:rPr lang="pt-PT" smtClean="0"/>
+              <a:t>5</a:t>
+            </a:fld>
+            <a:endParaRPr lang="pt-PT"/>
+          </a:p>
+        </p:txBody>
+      </p:sp>
+    </p:spTree>
+    <p:extLst>
+      <p:ext uri="{BB962C8B-B14F-4D97-AF65-F5344CB8AC3E}">
+        <p14:creationId xmlns:p14="http://schemas.microsoft.com/office/powerpoint/2010/main" val="3370395725"/>
+      </p:ext>
+    </p:extLst>
+  </p:cSld>
+  <p:clrMapOvr>
+    <a:masterClrMapping/>
+  </p:clrMapOvr>
+</p:notes>
+</file>
+
+<file path=ppt/notesSlides/notesSlide6.xml><?xml version="1.0" encoding="utf-8"?>
+<p:notes xmlns:a="http://schemas.openxmlformats.org/drawingml/2006/main" xmlns:r="http://schemas.openxmlformats.org/officeDocument/2006/relationships" xmlns:p="http://schemas.openxmlformats.org/presentationml/2006/main">
+  <p:cSld>
+    <p:spTree>
+      <p:nvGrpSpPr>
+        <p:cNvPr id="1" name=""/>
+        <p:cNvGrpSpPr/>
+        <p:nvPr/>
+      </p:nvGrpSpPr>
+      <p:grpSpPr>
+        <a:xfrm>
+          <a:off x="0" y="0"/>
+          <a:ext cx="0" cy="0"/>
+          <a:chOff x="0" y="0"/>
+          <a:chExt cx="0" cy="0"/>
+        </a:xfrm>
+      </p:grpSpPr>
+      <p:sp>
+        <p:nvSpPr>
+          <p:cNvPr id="2" name="Marcador de Posição da Imagem do Diapositivo 1"/>
+          <p:cNvSpPr>
+            <a:spLocks noGrp="1" noRot="1" noChangeAspect="1"/>
+          </p:cNvSpPr>
+          <p:nvPr>
+            <p:ph type="sldImg"/>
+          </p:nvPr>
+        </p:nvSpPr>
+        <p:spPr/>
+      </p:sp>
+      <p:sp>
+        <p:nvSpPr>
+          <p:cNvPr id="3" name="Marcador de Posição de Notas 2"/>
+          <p:cNvSpPr>
+            <a:spLocks noGrp="1"/>
+          </p:cNvSpPr>
+          <p:nvPr>
+            <p:ph type="body" idx="1"/>
+          </p:nvPr>
+        </p:nvSpPr>
+        <p:spPr/>
+        <p:txBody>
+          <a:bodyPr/>
+          <a:lstStyle/>
+          <a:p>
+            <a:pPr marL="0" marR="0" lvl="0" indent="0" algn="l" defTabSz="914400" rtl="0" eaLnBrk="1" fontAlgn="auto" latinLnBrk="0" hangingPunct="1">
+              <a:lnSpc>
+                <a:spcPct val="100000"/>
+              </a:lnSpc>
+              <a:spcBef>
+                <a:spcPts val="0"/>
+              </a:spcBef>
+              <a:spcAft>
+                <a:spcPts val="0"/>
+              </a:spcAft>
+              <a:buClrTx/>
+              <a:buSzTx/>
+              <a:buFontTx/>
+              <a:buNone/>
+              <a:tabLst/>
+              <a:defRPr/>
+            </a:pPr>
+            <a:r>
+              <a:rPr lang="pt-PT" dirty="0"/>
+              <a:t>Quando olhamos para os métodos atuais, vemos lacunas claras. Os métodos na </a:t>
+            </a:r>
+            <a:r>
+              <a:rPr lang="pt-PT" i="1" dirty="0" err="1"/>
+              <a:t>cloud</a:t>
+            </a:r>
+            <a:r>
+              <a:rPr lang="pt-PT" dirty="0"/>
+              <a:t>, ignoram as limitações da </a:t>
+            </a:r>
+            <a:r>
+              <a:rPr lang="pt-PT" i="1" dirty="0" err="1"/>
+              <a:t>edge</a:t>
+            </a:r>
+            <a:r>
+              <a:rPr lang="pt-PT" i="1" dirty="0"/>
+              <a:t>.</a:t>
+            </a:r>
+            <a:r>
+              <a:rPr lang="pt-PT" dirty="0"/>
+              <a:t> No lado da </a:t>
+            </a:r>
+            <a:r>
+              <a:rPr lang="pt-PT" i="1" dirty="0" err="1"/>
+              <a:t>edge</a:t>
+            </a:r>
+            <a:r>
+              <a:rPr lang="pt-PT" dirty="0"/>
+              <a:t> a solução é rápida, mas ignora a hierarquia de múltiplos inquilinos. A </a:t>
+            </a:r>
+            <a:r>
+              <a:rPr lang="pt-PT" dirty="0" err="1"/>
+              <a:t>desaprendizagem</a:t>
+            </a:r>
+            <a:r>
+              <a:rPr lang="pt-PT" dirty="0"/>
+              <a:t> federada existe, mas enfraquece a própria garantia de "apagamento", baseando-se frequentemente em provas estatísticas em vez de certezas.</a:t>
+            </a:r>
+          </a:p>
+          <a:p>
+            <a:pPr marL="0" marR="0" lvl="0" indent="0" algn="l" defTabSz="914400" rtl="0" eaLnBrk="1" fontAlgn="auto" latinLnBrk="0" hangingPunct="1">
+              <a:lnSpc>
+                <a:spcPct val="100000"/>
+              </a:lnSpc>
+              <a:spcBef>
+                <a:spcPts val="0"/>
+              </a:spcBef>
+              <a:spcAft>
+                <a:spcPts val="0"/>
+              </a:spcAft>
+              <a:buClrTx/>
+              <a:buSzTx/>
+              <a:buFontTx/>
+              <a:buNone/>
+              <a:tabLst/>
+              <a:defRPr/>
+            </a:pPr>
+            <a:endParaRPr lang="pt-PT" dirty="0"/>
+          </a:p>
+          <a:p>
+            <a:pPr marL="0" marR="0" lvl="0" indent="0" algn="l" defTabSz="914400" rtl="0" eaLnBrk="1" fontAlgn="auto" latinLnBrk="0" hangingPunct="1">
+              <a:lnSpc>
+                <a:spcPct val="100000"/>
+              </a:lnSpc>
+              <a:spcBef>
+                <a:spcPts val="0"/>
+              </a:spcBef>
+              <a:spcAft>
+                <a:spcPts val="0"/>
+              </a:spcAft>
+              <a:buClrTx/>
+              <a:buSzTx/>
+              <a:buFontTx/>
+              <a:buNone/>
+              <a:tabLst/>
+              <a:defRPr/>
+            </a:pPr>
+            <a:r>
               <a:rPr lang="pt-PT" sz="1200" i="1" dirty="0">
                 <a:solidFill>
                   <a:srgbClr val="1A2332"/>
@@ -1730,7 +2850,7 @@
 </p:notes>
 </file>
 
-<file path=ppt/notesSlides/notesSlide6.xml><?xml version="1.0" encoding="utf-8"?>
+<file path=ppt/notesSlides/notesSlide7.xml><?xml version="1.0" encoding="utf-8"?>
 <p:notes xmlns:a="http://schemas.openxmlformats.org/drawingml/2006/main" xmlns:r="http://schemas.openxmlformats.org/officeDocument/2006/relationships" xmlns:p="http://schemas.openxmlformats.org/presentationml/2006/main">
   <p:cSld>
     <p:spTree>
@@ -1810,6 +2930,91 @@
               <a:defRPr/>
             </a:pPr>
             <a:r>
+              <a:rPr lang="pt-PT" dirty="0"/>
+              <a:t>Quando olhamos para os métodos atuais, vemos lacunas claras. Os métodos na </a:t>
+            </a:r>
+            <a:r>
+              <a:rPr lang="pt-PT" i="1" dirty="0" err="1"/>
+              <a:t>cloud</a:t>
+            </a:r>
+            <a:r>
+              <a:rPr lang="pt-PT" dirty="0"/>
+              <a:t>, ignoram as limitações da </a:t>
+            </a:r>
+            <a:r>
+              <a:rPr lang="pt-PT" i="1" dirty="0" err="1"/>
+              <a:t>edge</a:t>
+            </a:r>
+            <a:r>
+              <a:rPr lang="pt-PT" i="1" dirty="0"/>
+              <a:t>.</a:t>
+            </a:r>
+            <a:r>
+              <a:rPr lang="pt-PT" dirty="0"/>
+              <a:t> No lado da </a:t>
+            </a:r>
+            <a:r>
+              <a:rPr lang="pt-PT" i="1" dirty="0" err="1"/>
+              <a:t>edge</a:t>
+            </a:r>
+            <a:r>
+              <a:rPr lang="pt-PT" dirty="0"/>
+              <a:t> a solução é rápida, mas ignora a hierarquia de múltiplos inquilinos. A </a:t>
+            </a:r>
+            <a:r>
+              <a:rPr lang="pt-PT" dirty="0" err="1"/>
+              <a:t>desaprendizagem</a:t>
+            </a:r>
+            <a:r>
+              <a:rPr lang="pt-PT" dirty="0"/>
+              <a:t> federada existe, mas enfraquece a própria garantia de remoção, baseando-se frequentemente em provas estatísticas em vez de certezas.</a:t>
+            </a:r>
+          </a:p>
+          <a:p>
+            <a:pPr marL="0" marR="0" lvl="0" indent="0" algn="l" defTabSz="914400" rtl="0" eaLnBrk="1" fontAlgn="auto" latinLnBrk="0" hangingPunct="1">
+              <a:lnSpc>
+                <a:spcPct val="100000"/>
+              </a:lnSpc>
+              <a:spcBef>
+                <a:spcPts val="0"/>
+              </a:spcBef>
+              <a:spcAft>
+                <a:spcPts val="0"/>
+              </a:spcAft>
+              <a:buClrTx/>
+              <a:buSzTx/>
+              <a:buFontTx/>
+              <a:buNone/>
+              <a:tabLst/>
+              <a:defRPr/>
+            </a:pPr>
+            <a:endParaRPr lang="pt-PT" sz="1200" i="1" dirty="0">
+              <a:solidFill>
+                <a:srgbClr val="1A2332"/>
+              </a:solidFill>
+              <a:latin typeface="Calibri"/>
+              <a:cs typeface="Calibri"/>
+            </a:endParaRPr>
+          </a:p>
+          <a:p>
+            <a:pPr marL="0" marR="0" lvl="0" indent="0" algn="l" defTabSz="914400" rtl="0" eaLnBrk="1" fontAlgn="auto" latinLnBrk="0" hangingPunct="1">
+              <a:lnSpc>
+                <a:spcPct val="100000"/>
+              </a:lnSpc>
+              <a:spcBef>
+                <a:spcPts val="0"/>
+              </a:spcBef>
+              <a:spcAft>
+                <a:spcPts val="0"/>
+              </a:spcAft>
+              <a:buClrTx/>
+              <a:buSzTx/>
+              <a:buFontTx/>
+              <a:buNone/>
+              <a:tabLst/>
+              <a:defRPr/>
+            </a:pPr>
+            <a:r>
               <a:rPr lang="pt-PT" sz="1200" i="1" dirty="0">
                 <a:solidFill>
                   <a:srgbClr val="1A2332"/>
@@ -1907,7 +3112,7 @@
 </p:notes>
 </file>
 
-<file path=ppt/notesSlides/notesSlide7.xml><?xml version="1.0" encoding="utf-8"?>
+<file path=ppt/notesSlides/notesSlide8.xml><?xml version="1.0" encoding="utf-8"?>
 <p:notes xmlns:a="http://schemas.openxmlformats.org/drawingml/2006/main" xmlns:r="http://schemas.openxmlformats.org/officeDocument/2006/relationships" xmlns:p="http://schemas.openxmlformats.org/presentationml/2006/main">
   <p:cSld>
     <p:spTree>
@@ -1987,6 +3192,97 @@
               <a:defRPr/>
             </a:pPr>
             <a:r>
+              <a:rPr lang="pt-PT" dirty="0"/>
+              <a:t>A lacuna é significativa. A maior parte da investigação sobre </a:t>
+            </a:r>
+            <a:r>
+              <a:rPr lang="pt-PT" i="1" dirty="0" err="1"/>
+              <a:t>unlearning</a:t>
+            </a:r>
+            <a:r>
+              <a:rPr lang="pt-PT" dirty="0"/>
+              <a:t> é desenvolvida em silos. Descobrimos que apenas uma pequena fração dos métodos considera os limites de recursos da </a:t>
+            </a:r>
+            <a:r>
+              <a:rPr lang="pt-PT" i="1" dirty="0" err="1"/>
+              <a:t>edge</a:t>
+            </a:r>
+            <a:r>
+              <a:rPr lang="pt-PT" dirty="0"/>
+              <a:t>, e ainda menos fornecem o tipo de verificação que um regulador aceitaria como um verdadeiro esquecimento.</a:t>
+            </a:r>
+          </a:p>
+          <a:p>
+            <a:pPr marL="0" marR="0" lvl="0" indent="0" algn="l" defTabSz="914400" rtl="0" eaLnBrk="1" fontAlgn="auto" latinLnBrk="0" hangingPunct="1">
+              <a:lnSpc>
+                <a:spcPct val="100000"/>
+              </a:lnSpc>
+              <a:spcBef>
+                <a:spcPts val="0"/>
+              </a:spcBef>
+              <a:spcAft>
+                <a:spcPts val="0"/>
+              </a:spcAft>
+              <a:buClrTx/>
+              <a:buSzTx/>
+              <a:buFontTx/>
+              <a:buNone/>
+              <a:tabLst/>
+              <a:defRPr/>
+            </a:pPr>
+            <a:endParaRPr lang="pt-PT" sz="1200" i="1" dirty="0">
+              <a:solidFill>
+                <a:srgbClr val="1A2332"/>
+              </a:solidFill>
+              <a:latin typeface="Calibri"/>
+              <a:cs typeface="Calibri"/>
+            </a:endParaRPr>
+          </a:p>
+          <a:p>
+            <a:pPr marL="0" marR="0" lvl="0" indent="0" algn="l" defTabSz="914400" rtl="0" eaLnBrk="1" fontAlgn="auto" latinLnBrk="0" hangingPunct="1">
+              <a:lnSpc>
+                <a:spcPct val="100000"/>
+              </a:lnSpc>
+              <a:spcBef>
+                <a:spcPts val="0"/>
+              </a:spcBef>
+              <a:spcAft>
+                <a:spcPts val="0"/>
+              </a:spcAft>
+              <a:buClrTx/>
+              <a:buSzTx/>
+              <a:buFontTx/>
+              <a:buNone/>
+              <a:tabLst/>
+              <a:defRPr/>
+            </a:pPr>
+            <a:endParaRPr lang="pt-PT" sz="1200" i="1" dirty="0">
+              <a:solidFill>
+                <a:srgbClr val="1A2332"/>
+              </a:solidFill>
+              <a:latin typeface="Calibri"/>
+              <a:cs typeface="Calibri"/>
+            </a:endParaRPr>
+          </a:p>
+          <a:p>
+            <a:pPr marL="0" marR="0" lvl="0" indent="0" algn="l" defTabSz="914400" rtl="0" eaLnBrk="1" fontAlgn="auto" latinLnBrk="0" hangingPunct="1">
+              <a:lnSpc>
+                <a:spcPct val="100000"/>
+              </a:lnSpc>
+              <a:spcBef>
+                <a:spcPts val="0"/>
+              </a:spcBef>
+              <a:spcAft>
+                <a:spcPts val="0"/>
+              </a:spcAft>
+              <a:buClrTx/>
+              <a:buSzTx/>
+              <a:buFontTx/>
+              <a:buNone/>
+              <a:tabLst/>
+              <a:defRPr/>
+            </a:pPr>
+            <a:r>
               <a:rPr lang="pt-PT" sz="1200" i="1" dirty="0">
                 <a:solidFill>
                   <a:srgbClr val="1A2332"/>
@@ -2084,7 +3380,7 @@
 </p:notes>
 </file>
 
-<file path=ppt/notesSlides/notesSlide8.xml><?xml version="1.0" encoding="utf-8"?>
+<file path=ppt/notesSlides/notesSlide9.xml><?xml version="1.0" encoding="utf-8"?>
 <p:notes xmlns:a="http://schemas.openxmlformats.org/drawingml/2006/main" xmlns:r="http://schemas.openxmlformats.org/officeDocument/2006/relationships" xmlns:p="http://schemas.openxmlformats.org/presentationml/2006/main">
   <p:cSld>
     <p:spTree>
@@ -2164,164 +3460,26 @@
               <a:defRPr/>
             </a:pPr>
             <a:r>
-              <a:rPr lang="pt-PT" sz="1200" i="1" dirty="0">
-                <a:solidFill>
-                  <a:srgbClr val="1A2332"/>
-                </a:solidFill>
-                <a:latin typeface="Calibri"/>
-                <a:cs typeface="Calibri"/>
-              </a:rPr>
-              <a:t>Sem </a:t>
-            </a:r>
-            <a:r>
-              <a:rPr lang="pt-PT" sz="1200" i="1" dirty="0" err="1">
-                <a:solidFill>
-                  <a:srgbClr val="1A2332"/>
-                </a:solidFill>
-                <a:latin typeface="Calibri"/>
-                <a:cs typeface="Calibri"/>
-              </a:rPr>
-              <a:t>benchmark</a:t>
-            </a:r>
-            <a:r>
-              <a:rPr lang="pt-PT" sz="1200" i="1" dirty="0">
-                <a:solidFill>
-                  <a:srgbClr val="1A2332"/>
-                </a:solidFill>
-                <a:latin typeface="Calibri"/>
-                <a:cs typeface="Calibri"/>
-              </a:rPr>
-              <a:t> partilhado: cada estudo usa as suas próprias métricas, </a:t>
-            </a:r>
-            <a:r>
-              <a:rPr lang="pt-PT" sz="1200" i="1" dirty="0" err="1">
-                <a:solidFill>
-                  <a:srgbClr val="1A2332"/>
-                </a:solidFill>
-                <a:latin typeface="Calibri"/>
-                <a:cs typeface="Calibri"/>
-              </a:rPr>
-              <a:t>datasets</a:t>
-            </a:r>
-            <a:r>
-              <a:rPr lang="pt-PT" sz="1200" i="1" dirty="0">
-                <a:solidFill>
-                  <a:srgbClr val="1A2332"/>
-                </a:solidFill>
-                <a:latin typeface="Calibri"/>
-                <a:cs typeface="Calibri"/>
-              </a:rPr>
-              <a:t> e modelos de ameaça — impossível comparar soluções parciais.</a:t>
-            </a:r>
-          </a:p>
-          <a:p>
-            <a:endParaRPr lang="pt-PT" dirty="0"/>
-          </a:p>
-        </p:txBody>
-      </p:sp>
-      <p:sp>
-        <p:nvSpPr>
-          <p:cNvPr id="4" name="Marcador de Posição do Número do Diapositivo 3">
-            <a:extLst>
-              <a:ext uri="{FF2B5EF4-FFF2-40B4-BE49-F238E27FC236}">
-                <a16:creationId xmlns:a16="http://schemas.microsoft.com/office/drawing/2014/main" id="{68CD6910-FC17-5FCD-3A29-54D5911C2C5F}"/>
-              </a:ext>
-            </a:extLst>
-          </p:cNvPr>
-          <p:cNvSpPr>
-            <a:spLocks noGrp="1"/>
-          </p:cNvSpPr>
-          <p:nvPr>
-            <p:ph type="sldNum" sz="quarter" idx="5"/>
-          </p:nvPr>
-        </p:nvSpPr>
-        <p:spPr/>
-        <p:txBody>
-          <a:bodyPr/>
-          <a:lstStyle/>
-          <a:p>
-            <a:fld id="{4BEEEA3F-08CE-6043-AB76-D392B1207876}" type="slidenum">
-              <a:rPr lang="pt-PT" smtClean="0"/>
-              <a:t>9</a:t>
-            </a:fld>
-            <a:endParaRPr lang="pt-PT"/>
-          </a:p>
-        </p:txBody>
-      </p:sp>
-    </p:spTree>
-    <p:extLst>
-      <p:ext uri="{BB962C8B-B14F-4D97-AF65-F5344CB8AC3E}">
-        <p14:creationId xmlns:p14="http://schemas.microsoft.com/office/powerpoint/2010/main" val="3891899684"/>
-      </p:ext>
-    </p:extLst>
-  </p:cSld>
-  <p:clrMapOvr>
-    <a:masterClrMapping/>
-  </p:clrMapOvr>
-</p:notes>
-</file>
-
-<file path=ppt/notesSlides/notesSlide9.xml><?xml version="1.0" encoding="utf-8"?>
-<p:notes xmlns:a="http://schemas.openxmlformats.org/drawingml/2006/main" xmlns:r="http://schemas.openxmlformats.org/officeDocument/2006/relationships" xmlns:p="http://schemas.openxmlformats.org/presentationml/2006/main">
-  <p:cSld>
-    <p:spTree>
-      <p:nvGrpSpPr>
-        <p:cNvPr id="1" name="">
-          <a:extLst>
-            <a:ext uri="{FF2B5EF4-FFF2-40B4-BE49-F238E27FC236}">
-              <a16:creationId xmlns:a16="http://schemas.microsoft.com/office/drawing/2014/main" id="{1F8B1AD9-2478-B77F-D2D6-4338A5314A25}"/>
-            </a:ext>
-          </a:extLst>
-        </p:cNvPr>
-        <p:cNvGrpSpPr/>
-        <p:nvPr/>
-      </p:nvGrpSpPr>
-      <p:grpSpPr>
-        <a:xfrm>
-          <a:off x="0" y="0"/>
-          <a:ext cx="0" cy="0"/>
-          <a:chOff x="0" y="0"/>
-          <a:chExt cx="0" cy="0"/>
-        </a:xfrm>
-      </p:grpSpPr>
-      <p:sp>
-        <p:nvSpPr>
-          <p:cNvPr id="2" name="Marcador de Posição da Imagem do Diapositivo 1">
-            <a:extLst>
-              <a:ext uri="{FF2B5EF4-FFF2-40B4-BE49-F238E27FC236}">
-                <a16:creationId xmlns:a16="http://schemas.microsoft.com/office/drawing/2014/main" id="{16F87413-56CC-DEE7-3553-988D37435D19}"/>
-              </a:ext>
-            </a:extLst>
-          </p:cNvPr>
-          <p:cNvSpPr>
-            <a:spLocks noGrp="1" noRot="1" noChangeAspect="1"/>
-          </p:cNvSpPr>
-          <p:nvPr>
-            <p:ph type="sldImg"/>
-          </p:nvPr>
-        </p:nvSpPr>
-        <p:spPr/>
-      </p:sp>
-      <p:sp>
-        <p:nvSpPr>
-          <p:cNvPr id="3" name="Marcador de Posição de Notas 2">
-            <a:extLst>
-              <a:ext uri="{FF2B5EF4-FFF2-40B4-BE49-F238E27FC236}">
-                <a16:creationId xmlns:a16="http://schemas.microsoft.com/office/drawing/2014/main" id="{F8B268EE-26D4-B3A7-8374-D6C283F192F2}"/>
-              </a:ext>
-            </a:extLst>
-          </p:cNvPr>
-          <p:cNvSpPr>
-            <a:spLocks noGrp="1"/>
-          </p:cNvSpPr>
-          <p:nvPr>
-            <p:ph type="body" idx="1"/>
-          </p:nvPr>
-        </p:nvSpPr>
-        <p:spPr/>
-        <p:txBody>
-          <a:bodyPr/>
-          <a:lstStyle/>
+              <a:rPr lang="pt-PT" dirty="0"/>
+              <a:t>A lacuna é significativa. A maior parte da investigação sobre </a:t>
+            </a:r>
+            <a:r>
+              <a:rPr lang="pt-PT" i="1" dirty="0" err="1"/>
+              <a:t>unlearning</a:t>
+            </a:r>
+            <a:r>
+              <a:rPr lang="pt-PT" dirty="0"/>
+              <a:t> é desenvolvida em silos. Descobrimos que apenas uma pequena fração dos métodos considera os limites de recursos da </a:t>
+            </a:r>
+            <a:r>
+              <a:rPr lang="pt-PT" i="1" dirty="0" err="1"/>
+              <a:t>edge</a:t>
+            </a:r>
+            <a:r>
+              <a:rPr lang="pt-PT" dirty="0"/>
+              <a:t>, e ainda menos fornecem o tipo de verificação que um regulador aceitaria como um verdadeiro esquecimento.</a:t>
+            </a:r>
+          </a:p>
           <a:p>
             <a:pPr marL="0" marR="0" lvl="0" indent="0" algn="l" defTabSz="914400" rtl="0" eaLnBrk="1" fontAlgn="auto" latinLnBrk="0" hangingPunct="1">
               <a:lnSpc>
@@ -2340,6 +3498,58 @@
               <a:tabLst/>
               <a:defRPr/>
             </a:pPr>
+            <a:endParaRPr lang="pt-PT" sz="1200" i="1" dirty="0">
+              <a:solidFill>
+                <a:srgbClr val="1A2332"/>
+              </a:solidFill>
+              <a:latin typeface="Calibri"/>
+              <a:cs typeface="Calibri"/>
+            </a:endParaRPr>
+          </a:p>
+          <a:p>
+            <a:pPr marL="0" marR="0" lvl="0" indent="0" algn="l" defTabSz="914400" rtl="0" eaLnBrk="1" fontAlgn="auto" latinLnBrk="0" hangingPunct="1">
+              <a:lnSpc>
+                <a:spcPct val="100000"/>
+              </a:lnSpc>
+              <a:spcBef>
+                <a:spcPts val="0"/>
+              </a:spcBef>
+              <a:spcAft>
+                <a:spcPts val="0"/>
+              </a:spcAft>
+              <a:buClrTx/>
+              <a:buSzTx/>
+              <a:buFontTx/>
+              <a:buNone/>
+              <a:tabLst/>
+              <a:defRPr/>
+            </a:pPr>
+            <a:endParaRPr lang="pt-PT" sz="1200" i="1" dirty="0">
+              <a:solidFill>
+                <a:srgbClr val="1A2332"/>
+              </a:solidFill>
+              <a:latin typeface="Calibri"/>
+              <a:cs typeface="Calibri"/>
+            </a:endParaRPr>
+          </a:p>
+          <a:p>
+            <a:pPr marL="0" marR="0" lvl="0" indent="0" algn="l" defTabSz="914400" rtl="0" eaLnBrk="1" fontAlgn="auto" latinLnBrk="0" hangingPunct="1">
+              <a:lnSpc>
+                <a:spcPct val="100000"/>
+              </a:lnSpc>
+              <a:spcBef>
+                <a:spcPts val="0"/>
+              </a:spcBef>
+              <a:spcAft>
+                <a:spcPts val="0"/>
+              </a:spcAft>
+              <a:buClrTx/>
+              <a:buSzTx/>
+              <a:buFontTx/>
+              <a:buNone/>
+              <a:tabLst/>
+              <a:defRPr/>
+            </a:pPr>
             <a:r>
               <a:rPr lang="pt-PT" sz="1200" i="1" dirty="0">
                 <a:solidFill>
@@ -2401,7 +3611,7 @@
           <p:cNvPr id="4" name="Marcador de Posição do Número do Diapositivo 3">
             <a:extLst>
               <a:ext uri="{FF2B5EF4-FFF2-40B4-BE49-F238E27FC236}">
-                <a16:creationId xmlns:a16="http://schemas.microsoft.com/office/drawing/2014/main" id="{1F1BE4FF-EEA4-2EC9-BDAC-87370AA99461}"/>
+                <a16:creationId xmlns:a16="http://schemas.microsoft.com/office/drawing/2014/main" id="{68CD6910-FC17-5FCD-3A29-54D5911C2C5F}"/>
               </a:ext>
             </a:extLst>
           </p:cNvPr>
@@ -2419,7 +3629,7 @@
           <a:p>
             <a:fld id="{4BEEEA3F-08CE-6043-AB76-D392B1207876}" type="slidenum">
               <a:rPr lang="pt-PT" smtClean="0"/>
-              <a:t>10</a:t>
+              <a:t>9</a:t>
             </a:fld>
             <a:endParaRPr lang="pt-PT"/>
           </a:p>
@@ -2428,7 +3638,7 @@
     </p:spTree>
     <p:extLst>
       <p:ext uri="{BB962C8B-B14F-4D97-AF65-F5344CB8AC3E}">
-        <p14:creationId xmlns:p14="http://schemas.microsoft.com/office/powerpoint/2010/main" val="3361521210"/>
+        <p14:creationId xmlns:p14="http://schemas.microsoft.com/office/powerpoint/2010/main" val="3891899684"/>
       </p:ext>
     </p:extLst>
   </p:cSld>
@@ -2585,7 +3795,7 @@
           <a:p>
             <a:fld id="{A8FD5399-E005-4D46-A3BC-4F04C5B9BCCE}" type="datetimeFigureOut">
               <a:rPr lang="pt-PT" smtClean="0"/>
-              <a:t>25/05/26</a:t>
+              <a:t>29/05/26</a:t>
             </a:fld>
             <a:endParaRPr lang="pt-PT"/>
           </a:p>
@@ -2783,7 +3993,7 @@
           <a:p>
             <a:fld id="{A8FD5399-E005-4D46-A3BC-4F04C5B9BCCE}" type="datetimeFigureOut">
               <a:rPr lang="pt-PT" smtClean="0"/>
-              <a:t>25/05/26</a:t>
+              <a:t>29/05/26</a:t>
             </a:fld>
             <a:endParaRPr lang="pt-PT"/>
           </a:p>
@@ -2991,7 +4201,7 @@
           <a:p>
             <a:fld id="{A8FD5399-E005-4D46-A3BC-4F04C5B9BCCE}" type="datetimeFigureOut">
               <a:rPr lang="pt-PT" smtClean="0"/>
-              <a:t>25/05/26</a:t>
+              <a:t>29/05/26</a:t>
             </a:fld>
             <a:endParaRPr lang="pt-PT"/>
           </a:p>
@@ -3189,7 +4399,7 @@
           <a:p>
             <a:fld id="{A8FD5399-E005-4D46-A3BC-4F04C5B9BCCE}" type="datetimeFigureOut">
               <a:rPr lang="pt-PT" smtClean="0"/>
-              <a:t>25/05/26</a:t>
+              <a:t>29/05/26</a:t>
             </a:fld>
             <a:endParaRPr lang="pt-PT"/>
           </a:p>
@@ -3464,7 +4674,7 @@
           <a:p>
             <a:fld id="{A8FD5399-E005-4D46-A3BC-4F04C5B9BCCE}" type="datetimeFigureOut">
               <a:rPr lang="pt-PT" smtClean="0"/>
-              <a:t>25/05/26</a:t>
+              <a:t>29/05/26</a:t>
             </a:fld>
             <a:endParaRPr lang="pt-PT"/>
           </a:p>
@@ -3729,7 +4939,7 @@
           <a:p>
             <a:fld id="{A8FD5399-E005-4D46-A3BC-4F04C5B9BCCE}" type="datetimeFigureOut">
               <a:rPr lang="pt-PT" smtClean="0"/>
-              <a:t>25/05/26</a:t>
+              <a:t>29/05/26</a:t>
             </a:fld>
             <a:endParaRPr lang="pt-PT"/>
           </a:p>
@@ -4141,7 +5351,7 @@
           <a:p>
             <a:fld id="{A8FD5399-E005-4D46-A3BC-4F04C5B9BCCE}" type="datetimeFigureOut">
               <a:rPr lang="pt-PT" smtClean="0"/>
-              <a:t>25/05/26</a:t>
+              <a:t>29/05/26</a:t>
             </a:fld>
             <a:endParaRPr lang="pt-PT"/>
           </a:p>
@@ -4282,7 +5492,7 @@
           <a:p>
             <a:fld id="{A8FD5399-E005-4D46-A3BC-4F04C5B9BCCE}" type="datetimeFigureOut">
               <a:rPr lang="pt-PT" smtClean="0"/>
-              <a:t>25/05/26</a:t>
+              <a:t>29/05/26</a:t>
             </a:fld>
             <a:endParaRPr lang="pt-PT"/>
           </a:p>
@@ -4395,7 +5605,7 @@
           <a:p>
             <a:fld id="{A8FD5399-E005-4D46-A3BC-4F04C5B9BCCE}" type="datetimeFigureOut">
               <a:rPr lang="pt-PT" smtClean="0"/>
-              <a:t>25/05/26</a:t>
+              <a:t>29/05/26</a:t>
             </a:fld>
             <a:endParaRPr lang="pt-PT"/>
           </a:p>
@@ -4706,7 +5916,7 @@
           <a:p>
             <a:fld id="{A8FD5399-E005-4D46-A3BC-4F04C5B9BCCE}" type="datetimeFigureOut">
               <a:rPr lang="pt-PT" smtClean="0"/>
-              <a:t>25/05/26</a:t>
+              <a:t>29/05/26</a:t>
             </a:fld>
             <a:endParaRPr lang="pt-PT"/>
           </a:p>
@@ -4994,7 +6204,7 @@
           <a:p>
             <a:fld id="{A8FD5399-E005-4D46-A3BC-4F04C5B9BCCE}" type="datetimeFigureOut">
               <a:rPr lang="pt-PT" smtClean="0"/>
-              <a:t>25/05/26</a:t>
+              <a:t>29/05/26</a:t>
             </a:fld>
             <a:endParaRPr lang="pt-PT"/>
           </a:p>
@@ -5238,7 +6448,7 @@
           <a:p>
             <a:fld id="{A8FD5399-E005-4D46-A3BC-4F04C5B9BCCE}" type="datetimeFigureOut">
               <a:rPr lang="pt-PT" smtClean="0"/>
-              <a:t>25/05/26</a:t>
+              <a:t>29/05/26</a:t>
             </a:fld>
             <a:endParaRPr lang="pt-PT"/>
           </a:p>
@@ -14306,7 +15516,7 @@
               <a:rPr lang="pt-PT" sz="1600" b="0" dirty="0">
                 <a:latin typeface="+mn-lt"/>
               </a:rPr>
-              <a:t>Nenhum método atual satisfaz o envelope completo de restrições</a:t>
+              <a:t>Nenhum método atual satisfaz o leque completo de restrições</a:t>
             </a:r>
           </a:p>
         </p:txBody>

--- a/Entregas PhD/machine-unlearning.pptx
+++ b/Entregas PhD/machine-unlearning.pptx
@@ -910,7 +910,7 @@
             </a:r>
             <a:r>
               <a:rPr lang="pt-PT" dirty="0"/>
-              <a:t> Precisamos de "</a:t>
+              <a:t> Tem de ser avançar para "</a:t>
             </a:r>
             <a:r>
               <a:rPr lang="pt-PT" i="1" dirty="0" err="1"/>
@@ -942,15 +942,11 @@
             </a:r>
             <a:r>
               <a:rPr lang="pt-PT" dirty="0"/>
-              <a:t> para realizar o apagamento diretamente no </a:t>
+              <a:t> para realizar o esquecimento diretamente </a:t>
             </a:r>
             <a:r>
               <a:rPr lang="pt-PT" i="1" dirty="0"/>
-              <a:t>hardware</a:t>
-            </a:r>
-            <a:r>
-              <a:rPr lang="pt-PT" dirty="0"/>
-              <a:t> da </a:t>
+              <a:t>na </a:t>
             </a:r>
             <a:r>
               <a:rPr lang="pt-PT" i="1" dirty="0" err="1"/>
@@ -968,15 +964,25 @@
             </a:r>
             <a:r>
               <a:rPr lang="pt-PT" dirty="0"/>
-              <a:t> Precisamos de mais do que apenas um "confie em mim" de um fornecedor. Precisamos de certificados e de </a:t>
+              <a:t> É necessário mais do que apenas um "confie em mim" de um fornecedor. Precisamos de certificados e de </a:t>
             </a:r>
             <a:r>
               <a:rPr lang="pt-PT" i="1" dirty="0"/>
-              <a:t>Zero-</a:t>
+              <a:t>provas de esquecimento </a:t>
+            </a:r>
+            <a:r>
+              <a:rPr lang="pt-PT" dirty="0"/>
+              <a:t>para certificar aos residentes e reguladores que a influência dos seus dados desapareceu verdadeiramente.</a:t>
+            </a:r>
+          </a:p>
+          <a:p>
+            <a:r>
+              <a:rPr lang="pt-PT" dirty="0"/>
+              <a:t>Para concluir, o </a:t>
             </a:r>
             <a:r>
               <a:rPr lang="pt-PT" i="1" dirty="0" err="1"/>
-              <a:t>Knowledge</a:t>
+              <a:t>machine</a:t>
             </a:r>
             <a:r>
               <a:rPr lang="pt-PT" i="1" dirty="0"/>
@@ -984,37 +990,11 @@
             </a:r>
             <a:r>
               <a:rPr lang="pt-PT" i="1" dirty="0" err="1"/>
-              <a:t>Proofs</a:t>
-            </a:r>
-            <a:r>
-              <a:rPr lang="pt-PT" i="1" dirty="0"/>
-              <a:t> </a:t>
+              <a:t>unlearning</a:t>
             </a:r>
             <a:r>
               <a:rPr lang="pt-PT" dirty="0"/>
-              <a:t>para certificar aos residentes e reguladores que a influência dos seus dados desapareceu verdadeiramente.</a:t>
-            </a:r>
-          </a:p>
-          <a:p>
-            <a:r>
-              <a:rPr lang="pt-PT" dirty="0"/>
-              <a:t>Para concluir, o </a:t>
-            </a:r>
-            <a:r>
-              <a:rPr lang="pt-PT" i="1" dirty="0" err="1"/>
-              <a:t>machine</a:t>
-            </a:r>
-            <a:r>
-              <a:rPr lang="pt-PT" i="1" dirty="0"/>
-              <a:t> </a:t>
-            </a:r>
-            <a:r>
-              <a:rPr lang="pt-PT" i="1" dirty="0" err="1"/>
-              <a:t>unlearning</a:t>
-            </a:r>
-            <a:r>
-              <a:rPr lang="pt-PT" dirty="0"/>
-              <a:t> em edifícios inteligentes não é apenas um problema académico — é uma necessidade regulatória. Precisamos de passar de métodos centrados na </a:t>
+              <a:t> em edifícios inteligentes não é apenas um problema académico — é uma necessidade regulatória, ou seja, é necessário que as entidades de ambas as matérias se alinhe. Precisamos de passar de métodos centrados na </a:t>
             </a:r>
             <a:r>
               <a:rPr lang="pt-PT" i="1" dirty="0" err="1"/>
@@ -1023,6 +1003,57 @@
             <a:r>
               <a:rPr lang="pt-PT" dirty="0"/>
               <a:t> para sistemas distribuídos e verificáveis. </a:t>
+            </a:r>
+          </a:p>
+          <a:p>
+            <a:endParaRPr lang="pt-PT" dirty="0"/>
+          </a:p>
+          <a:p>
+            <a:r>
+              <a:rPr lang="pt-PT" dirty="0"/>
+              <a:t>Para a minha tese, tendo em consideração estes problemas, o que planeei foi passar pela minimização da partilha de dados. Os modelos que correm num </a:t>
+            </a:r>
+            <a:r>
+              <a:rPr lang="pt-PT" dirty="0" err="1"/>
+              <a:t>edíficio</a:t>
+            </a:r>
+            <a:r>
+              <a:rPr lang="pt-PT" dirty="0"/>
+              <a:t> são treinados apenas pelos dados dos residentes nesses </a:t>
+            </a:r>
+            <a:r>
+              <a:rPr lang="pt-PT" dirty="0" err="1"/>
+              <a:t>edíficios</a:t>
+            </a:r>
+            <a:r>
+              <a:rPr lang="pt-PT" dirty="0"/>
+              <a:t>. O problema real acontece na partilha dos dados, que como vimos não temos garantias de depois os esquecer, no entanto essa partilha tem de ser explicita.</a:t>
+            </a:r>
+            <a:br>
+              <a:rPr lang="pt-PT" dirty="0"/>
+            </a:br>
+            <a:br>
+              <a:rPr lang="pt-PT" dirty="0"/>
+            </a:br>
+            <a:r>
+              <a:rPr lang="pt-PT" dirty="0"/>
+              <a:t>É importante também referir que a maneira como resolvemos o problema do esquecimento, depende muito de como o </a:t>
+            </a:r>
+            <a:r>
+              <a:rPr lang="pt-PT" dirty="0" err="1"/>
+              <a:t>machine</a:t>
+            </a:r>
+            <a:r>
+              <a:rPr lang="pt-PT" dirty="0"/>
+              <a:t> </a:t>
+            </a:r>
+            <a:r>
+              <a:rPr lang="pt-PT" dirty="0" err="1"/>
+              <a:t>unlearning</a:t>
+            </a:r>
+            <a:r>
+              <a:rPr lang="pt-PT" dirty="0"/>
+              <a:t> evoluir. Este campo não é o mesmo que era há 10 anos e, com grande probabilidade não vai ser o mesmo nos próximos.</a:t>
             </a:r>
           </a:p>
           <a:p>
@@ -1132,7 +1163,7 @@
             </a:pPr>
             <a:r>
               <a:rPr lang="pt-PT" dirty="0"/>
-              <a:t>Os edifícios inteligentes são, essencialmente, ecossistemas de sensores. Estes dispositivos geram pegadas do nosso comportamento. Embora isto otimize o conforto e a energia, cria uma pegada digital massiva. Mesmo que eliminemos os dados em bruto, os modelos treinados com eles retêm vestígios que podem ser explorados.</a:t>
+              <a:t>Os edifícios inteligentes são, essencialmente, ecossistemas de sensores. Estes dispositivos geram pegadas do nosso comportamento. Embora isto otimize o conforto e a energia, cria uma grande pegada digital. Mesmo que eliminemos os dados em bruto, os modelos treinados retêm na mesma vestígios que podem ser explorados.</a:t>
             </a:r>
           </a:p>
           <a:p>
@@ -1175,7 +1206,7 @@
             </a:pPr>
             <a:r>
               <a:rPr lang="pt-PT" dirty="0"/>
-              <a:t>O Artigo 17.º do RGPD, o "Direito ao Esquecimento", exige que as organizações não só eliminem os registos em bruto, mas também qualquer influência derivada.</a:t>
+              <a:t>O Artigo 17.º do RGPD, o "Direito ao Esquecimento", exige que as organizações não só eliminem os registos em bruto, mas também qualquer influência derivada destes dados.</a:t>
             </a:r>
           </a:p>
           <a:p>
@@ -1298,7 +1329,7 @@
             </a:r>
             <a:r>
               <a:rPr lang="pt-PT" dirty="0"/>
-              <a:t> como a resposta isto — é o processo de remover seletivamente a influência dos dados.</a:t>
+              <a:t> como a resposta isto, ou seja o processo de remover seletivamente a influência dos dados.</a:t>
             </a:r>
           </a:p>
           <a:p>
@@ -2043,15 +2074,7 @@
             </a:r>
             <a:r>
               <a:rPr lang="pt-PT" dirty="0"/>
-              <a:t> esquecer, mas o </a:t>
-            </a:r>
-            <a:r>
-              <a:rPr lang="pt-PT" i="1" dirty="0" err="1"/>
-              <a:t>gateway</a:t>
-            </a:r>
-            <a:r>
-              <a:rPr lang="pt-PT" dirty="0"/>
-              <a:t> na </a:t>
+              <a:t> esquecer, mas a </a:t>
             </a:r>
             <a:r>
               <a:rPr lang="pt-PT" i="1" dirty="0" err="1"/>
@@ -2709,7 +2732,7 @@
             </a:r>
             <a:r>
               <a:rPr lang="pt-PT" dirty="0"/>
-              <a:t> a solução é rápida, mas ignora a hierarquia de múltiplos inquilinos. A </a:t>
+              <a:t> a solução é rápida, mas ignora a hierarquia de múltiplos residentes. A </a:t>
             </a:r>
             <a:r>
               <a:rPr lang="pt-PT" dirty="0" err="1"/>
@@ -2717,7 +2740,7 @@
             </a:r>
             <a:r>
               <a:rPr lang="pt-PT" dirty="0"/>
-              <a:t> federada existe, mas enfraquece a própria garantia de "apagamento", baseando-se frequentemente em provas estatísticas em vez de certezas.</a:t>
+              <a:t> federada existe, mas enfraquece a própria garantia de "esquecimento", baseando-se frequentemente em provas estatísticas em vez de certezas.</a:t>
             </a:r>
           </a:p>
           <a:p>
@@ -2911,6 +2934,29 @@
         <p:txBody>
           <a:bodyPr/>
           <a:lstStyle/>
+          <a:p>
+            <a:pPr marL="0" marR="0" lvl="0" indent="0" algn="l" defTabSz="914400" rtl="0" eaLnBrk="1" fontAlgn="auto" latinLnBrk="0" hangingPunct="1">
+              <a:lnSpc>
+                <a:spcPct val="100000"/>
+              </a:lnSpc>
+              <a:spcBef>
+                <a:spcPts val="0"/>
+              </a:spcBef>
+              <a:spcAft>
+                <a:spcPts val="0"/>
+              </a:spcAft>
+              <a:buClrTx/>
+              <a:buSzTx/>
+              <a:buFontTx/>
+              <a:buNone/>
+              <a:tabLst/>
+              <a:defRPr/>
+            </a:pPr>
+            <a:r>
+              <a:rPr lang="pt-PT" dirty="0"/>
+              <a:t>NAO ESQUCER DE PASSAR PARA A FRENTE</a:t>
+            </a:r>
+          </a:p>
           <a:p>
             <a:pPr marL="0" marR="0" lvl="0" indent="0" algn="l" defTabSz="914400" rtl="0" eaLnBrk="1" fontAlgn="auto" latinLnBrk="0" hangingPunct="1">
               <a:lnSpc>
@@ -7112,7 +7158,7 @@
                 <a:latin typeface="Calibri"/>
                 <a:cs typeface="Calibri"/>
               </a:rPr>
-              <a:t>Restrições operacionais, lacunas dos métodos atuais e oportunidades de investigação</a:t>
+              <a:t>Restrições operacionais, lacunas dos métodos atuais e oportunidades/direções de investigação</a:t>
             </a:r>
           </a:p>
         </p:txBody>
